--- a/artifacts/speaking-portfolio-expanded/decks/free-tier-15min-handout.pptx
+++ b/artifacts/speaking-portfolio-expanded/decks/free-tier-15min-handout.pptx
@@ -148,7 +148,7 @@
                 <a:ea typeface="Arial"/>
                 <a:cs typeface="Arial"/>
               </a:rPr>
-              <a:t xml:space="preserve">Rewritten 2026-09-06. 40 minutes, 15 slides, four audience moments, no Q&amp;A. Nobody outside a provider knows its margins and this talk never estimates one; the fixture arithmetic is synthetic. Say that once, on slide 1, then argue.</a:t>
+              <a:t xml:space="preserve">Rewritten and retitled 2026-09-06 (was "Cry Me a Free Tier"). 40 minutes, 15 slides, four audience moments, no Q&amp;A. Nobody outside a provider knows its margins and this talk never estimates one; the fixture arithmetic is synthetic. Say that once, on slide 1, then argue.</a:t>
             </a:r>
             <a:endParaRPr lang="en-US" sz="1200"/>
           </a:p>
@@ -604,7 +604,7 @@
                 <a:ea typeface="Arial"/>
                 <a:cs typeface="Arial"/>
               </a:rPr>
-              <a:t xml:space="preserve">Cry Me a Free Tier</a:t>
+              <a:t xml:space="preserve">Buy Me a Free Tier</a:t>
             </a:r>
             <a:endParaRPr lang="en-US" sz="1200"/>
           </a:p>
@@ -650,7 +650,7 @@
                 <a:ea typeface="Arial"/>
                 <a:cs typeface="Arial"/>
               </a:rPr>
-              <a:t xml:space="preserve">Source slide 1. 00:00 to 01:30</a:t>
+              <a:t xml:space="preserve">Source slide 1. 00:00 to 01:45</a:t>
             </a:r>
             <a:endParaRPr lang="en-US" sz="1200"/>
           </a:p>
@@ -880,6 +880,52 @@
                 <a:ea typeface="Arial"/>
                 <a:cs typeface="Arial"/>
               </a:rPr>
+              <a:t xml:space="preserve">That is what you are getting today. Eight words. Engineers lose this argument in budget meetings because the best we can say is "it feels wasteful," and finance says "the bill looks fine." These eight words are how you say it so it lands.</a:t>
+            </a:r>
+            <a:endParaRPr lang="en-US" sz="1200"/>
+          </a:p>
+          <a:p>
+            <a:pPr marL="0" indent="0">
+              <a:lnSpc>
+                <a:spcPts val="1560"/>
+              </a:lnSpc>
+              <a:spcAft>
+                <a:spcPts val="0"/>
+              </a:spcAft>
+              <a:buNone/>
+            </a:pPr>
+            <a:r>
+              <a:rPr lang="en-US" sz="1200" b="0">
+                <a:solidFill>
+                  <a:srgbClr val="202b33"/>
+                </a:solidFill>
+                <a:latin typeface="Arial"/>
+                <a:ea typeface="Arial"/>
+                <a:cs typeface="Arial"/>
+              </a:rPr>
+              <a:t xml:space="preserve"/>
+            </a:r>
+            <a:endParaRPr lang="en-US" sz="1200"/>
+          </a:p>
+          <a:p>
+            <a:pPr marL="0" indent="0">
+              <a:lnSpc>
+                <a:spcPts val="1560"/>
+              </a:lnSpc>
+              <a:spcAft>
+                <a:spcPts val="0"/>
+              </a:spcAft>
+              <a:buNone/>
+            </a:pPr>
+            <a:r>
+              <a:rPr lang="en-US" sz="1200" b="0">
+                <a:solidFill>
+                  <a:srgbClr val="202b33"/>
+                </a:solidFill>
+                <a:latin typeface="Arial"/>
+                <a:ea typeface="Arial"/>
+                <a:cs typeface="Arial"/>
+              </a:rPr>
               <a:t xml:space="preserve">The first time a bill, a quota, or a rate change broke an assumption in something you built.</a:t>
             </a:r>
             <a:endParaRPr lang="en-US" sz="1200"/>
@@ -972,7 +1018,7 @@
                 <a:ea typeface="Arial"/>
                 <a:cs typeface="Arial"/>
               </a:rPr>
-              <a:t xml:space="preserve">Bridge: price, cost and value are three different numbers, and the gap between what you pay and what it is worth to you is why nobody is measuring.</a:t>
+              <a:t xml:space="preserve">Bridge: four boxes on one invoice - price paid, resources consumed, cost allocated, value delivered - and the gap between the last two is why nobody is measuring.</a:t>
             </a:r>
             <a:endParaRPr lang="en-US" sz="1200"/>
           </a:p>
@@ -1039,7 +1085,7 @@
                 <a:ea typeface="Arial"/>
                 <a:cs typeface="Arial"/>
               </a:rPr>
-              <a:t xml:space="preserve">Cry Me a Free Tier</a:t>
+              <a:t xml:space="preserve">Buy Me a Free Tier</a:t>
             </a:r>
             <a:endParaRPr lang="en-US" sz="1200"/>
           </a:p>
@@ -1085,7 +1131,7 @@
                 <a:ea typeface="Arial"/>
                 <a:cs typeface="Arial"/>
               </a:rPr>
-              <a:t xml:space="preserve">Source slide 3. 01:30 to 03:30</a:t>
+              <a:t xml:space="preserve">Source slide 3. 01:45 to 03:45</a:t>
             </a:r>
             <a:endParaRPr lang="en-US" sz="1200"/>
           </a:p>
@@ -1223,7 +1269,7 @@
                 <a:ea typeface="Arial"/>
                 <a:cs typeface="Arial"/>
               </a:rPr>
-              <a:t xml:space="preserve">There are four respectable explanations for a low price, and an engineer arguing about this in a meeting should be able to name all four.</a:t>
+              <a:t xml:space="preserve">Penetration pricing: buy the market now, raise later. Standard, legal, taught in every business school. Loss leader in a bundle: the cheap thing funds the expensive thing next to it, which is what a two-sided market does for a living. Predation: below cost specifically to remove rivals. In US law that is not a vibe, it is a test. Brooke Group, 1993: you need below-cost pricing and a dangerous probability of recoupment. And the fourth explanation, the one that keeps me honest: it is genuinely cheap, and getting cheaper, because the engineering is real.</a:t>
             </a:r>
             <a:endParaRPr lang="en-US" sz="1200"/>
           </a:p>
@@ -1566,7 +1612,7 @@
                 <a:ea typeface="Arial"/>
                 <a:cs typeface="Arial"/>
               </a:rPr>
-              <a:t xml:space="preserve">Cry Me a Free Tier</a:t>
+              <a:t xml:space="preserve">Buy Me a Free Tier</a:t>
             </a:r>
             <a:endParaRPr lang="en-US" sz="1200"/>
           </a:p>
@@ -1612,7 +1658,7 @@
                 <a:ea typeface="Arial"/>
                 <a:cs typeface="Arial"/>
               </a:rPr>
-              <a:t xml:space="preserve">Source slide 5. 03:30 to 05:00</a:t>
+              <a:t xml:space="preserve">Source slide 5. 03:45 to 05:15</a:t>
             </a:r>
             <a:endParaRPr lang="en-US" sz="1200"/>
           </a:p>
@@ -2093,7 +2139,7 @@
                 <a:ea typeface="Arial"/>
                 <a:cs typeface="Arial"/>
               </a:rPr>
-              <a:t xml:space="preserve">Cry Me a Free Tier</a:t>
+              <a:t xml:space="preserve">Buy Me a Free Tier</a:t>
             </a:r>
             <a:endParaRPr lang="en-US" sz="1200"/>
           </a:p>
@@ -2139,7 +2185,7 @@
                 <a:ea typeface="Arial"/>
                 <a:cs typeface="Arial"/>
               </a:rPr>
-              <a:t xml:space="preserve">Source slide 6. 05:00 to 07:00</a:t>
+              <a:t xml:space="preserve">Source slide 6. 05:15 to 07:15</a:t>
             </a:r>
             <a:endParaRPr lang="en-US" sz="1200"/>
           </a:p>
@@ -2415,7 +2461,7 @@
                 <a:ea typeface="Arial"/>
                 <a:cs typeface="Arial"/>
               </a:rPr>
-              <a:t xml:space="preserve">Both things can be fine. A falling price and a growing bill coexist comfortably as long as customer value grows faster. That is the relationship to measure, and almost nobody measures it.</a:t>
+              <a:t xml:space="preserve">So: your per-token price has fallen off a cliff over the last few years, and your bill went up. Everyone in this room has had that conversation with a CFO and lost it. You are not being gouged and you did not do anything wrong. Spend is price times consumption, and consumption is jobs times calls per job times tokens per call. Cheapness moved every term on the right. Epoch's data through 2025 shows the price of a fixed capability falling fast and very unevenly by task, which is real and worth knowing, and is also exactly the condition under which total spend rises.</a:t>
             </a:r>
             <a:endParaRPr lang="en-US" sz="1200"/>
           </a:p>
@@ -2712,7 +2758,7 @@
                 <a:ea typeface="Arial"/>
                 <a:cs typeface="Arial"/>
               </a:rPr>
-              <a:t xml:space="preserve">Cry Me a Free Tier</a:t>
+              <a:t xml:space="preserve">Buy Me a Free Tier</a:t>
             </a:r>
             <a:endParaRPr lang="en-US" sz="1200"/>
           </a:p>
@@ -2758,7 +2804,7 @@
                 <a:ea typeface="Arial"/>
                 <a:cs typeface="Arial"/>
               </a:rPr>
-              <a:t xml:space="preserve">Source slide 7. 07:00 to 09:30</a:t>
+              <a:t xml:space="preserve">Source slide 7. 07:15 to 09:30</a:t>
             </a:r>
             <a:endParaRPr lang="en-US" sz="1200"/>
           </a:p>
@@ -3239,7 +3285,7 @@
                 <a:ea typeface="Arial"/>
                 <a:cs typeface="Arial"/>
               </a:rPr>
-              <a:t xml:space="preserve">Cry Me a Free Tier</a:t>
+              <a:t xml:space="preserve">Buy Me a Free Tier</a:t>
             </a:r>
             <a:endParaRPr lang="en-US" sz="1200"/>
           </a:p>
@@ -3720,7 +3766,7 @@
                 <a:ea typeface="Arial"/>
                 <a:cs typeface="Arial"/>
               </a:rPr>
-              <a:t xml:space="preserve">Cry Me a Free Tier</a:t>
+              <a:t xml:space="preserve">Buy Me a Free Tier</a:t>
             </a:r>
             <a:endParaRPr lang="en-US" sz="1200"/>
           </a:p>
@@ -4042,7 +4088,7 @@
                 <a:ea typeface="Arial"/>
                 <a:cs typeface="Arial"/>
               </a:rPr>
-              <a:t xml:space="preserve">So stop thinking of this as shopping, where the customer holds the power because they can leave. You are contracting, with a much better capitalized counterparty, and your architecture is the collateral. That reframe is the whole talk, and everything on the next three slides is just a way of reducing specificity or pricing the exposure.</a:t>
+              <a:t xml:space="preserve">So stop thinking of this as shopping, where the customer holds the power because they can leave. You are contracting, with a much better capitalized counterparty, and your architecture is the collateral. That reframe is the whole talk, and everything after this is just a way of reducing specificity or pricing the exposure.</a:t>
             </a:r>
             <a:endParaRPr lang="en-US" sz="1200"/>
           </a:p>
@@ -4247,7 +4293,7 @@
                 <a:ea typeface="Arial"/>
                 <a:cs typeface="Arial"/>
               </a:rPr>
-              <a:t xml:space="preserve">Cry Me a Free Tier</a:t>
+              <a:t xml:space="preserve">Buy Me a Free Tier</a:t>
             </a:r>
             <a:endParaRPr lang="en-US" sz="1200"/>
           </a:p>
@@ -4615,7 +4661,7 @@
                 <a:ea typeface="Arial"/>
                 <a:cs typeface="Arial"/>
               </a:rPr>
-              <a:t xml:space="preserve">Cheap intelligence changes incentives before it changes organizations. Leave the table up.</a:t>
+              <a:t xml:space="preserve">Cheap intelligence changes incentives before it changes organizations.</a:t>
             </a:r>
             <a:endParaRPr lang="en-US" sz="1200"/>
           </a:p>
@@ -4707,7 +4753,7 @@
                 <a:ea typeface="Arial"/>
                 <a:cs typeface="Arial"/>
               </a:rPr>
-              <a:t xml:space="preserve">Say the last line slowly. Leave the sweep table on screen for questions.</a:t>
+              <a:t xml:space="preserve">Say the last line slowly, then stop talking. For questions, jump back to the sweep table if this route kept slide 11.</a:t>
             </a:r>
             <a:endParaRPr lang="en-US" sz="1200"/>
           </a:p>
@@ -4940,7 +4986,7 @@
                 <a:ea typeface="Arial"/>
                 <a:cs typeface="Arial"/>
               </a:rPr>
-              <a:t xml:space="preserve">Cry Me a Free Tier</a:t>
+              <a:t xml:space="preserve">Buy Me a Free Tier</a:t>
             </a:r>
             <a:endParaRPr lang="en-US" sz="3750"/>
           </a:p>
@@ -5110,7 +5156,7 @@
                 <a:ea typeface="Arial"/>
                 <a:cs typeface="Arial"/>
               </a:rPr>
-              <a:t xml:space="preserve">Cry Me a Free Tier</a:t>
+              <a:t xml:space="preserve">Buy Me a Free Tier</a:t>
             </a:r>
             <a:endParaRPr lang="en-US" sz="975"/>
           </a:p>
@@ -6035,7 +6081,7 @@
                 <a:ea typeface="Arial"/>
                 <a:cs typeface="Arial"/>
               </a:rPr>
-              <a:t xml:space="preserve">Cry Me a Free Tier</a:t>
+              <a:t xml:space="preserve">Buy Me a Free Tier</a:t>
             </a:r>
             <a:endParaRPr lang="en-US" sz="975"/>
           </a:p>
@@ -6498,6 +6544,98 @@
             </a:r>
             <a:endParaRPr lang="en-US" sz="1500"/>
           </a:p>
+          <a:p>
+            <a:pPr marL="0" indent="0">
+              <a:lnSpc>
+                <a:spcPts val="1950"/>
+              </a:lnSpc>
+              <a:spcAft>
+                <a:spcPts val="0"/>
+              </a:spcAft>
+              <a:buNone/>
+            </a:pPr>
+            <a:r>
+              <a:rPr lang="en-US" sz="1500" b="0">
+                <a:solidFill>
+                  <a:srgbClr val="202B33"/>
+                </a:solidFill>
+                <a:latin typeface="Arial"/>
+                <a:ea typeface="Arial"/>
+                <a:cs typeface="Arial"/>
+              </a:rPr>
+              <a:t xml:space="preserve"/>
+            </a:r>
+            <a:endParaRPr lang="en-US" sz="1500"/>
+          </a:p>
+          <a:p>
+            <a:pPr marL="0" indent="0">
+              <a:lnSpc>
+                <a:spcPts val="1950"/>
+              </a:lnSpc>
+              <a:spcAft>
+                <a:spcPts val="0"/>
+              </a:spcAft>
+              <a:buNone/>
+            </a:pPr>
+            <a:r>
+              <a:rPr lang="en-US" sz="1500" b="0">
+                <a:solidFill>
+                  <a:srgbClr val="202B33"/>
+                </a:solidFill>
+                <a:latin typeface="Arial"/>
+                <a:ea typeface="Arial"/>
+                <a:cs typeface="Arial"/>
+              </a:rPr>
+              <a:t xml:space="preserve">Swap electricity for inference and that is</a:t>
+            </a:r>
+            <a:endParaRPr lang="en-US" sz="1500"/>
+          </a:p>
+          <a:p>
+            <a:pPr marL="0" indent="0">
+              <a:lnSpc>
+                <a:spcPts val="1950"/>
+              </a:lnSpc>
+              <a:spcAft>
+                <a:spcPts val="0"/>
+              </a:spcAft>
+              <a:buNone/>
+            </a:pPr>
+            <a:r>
+              <a:rPr lang="en-US" sz="1500" b="0">
+                <a:solidFill>
+                  <a:srgbClr val="202B33"/>
+                </a:solidFill>
+                <a:latin typeface="Arial"/>
+                <a:ea typeface="Arial"/>
+                <a:cs typeface="Arial"/>
+              </a:rPr>
+              <a:t xml:space="preserve">the whole talk. Here is my one disclaimer,</a:t>
+            </a:r>
+            <a:endParaRPr lang="en-US" sz="1500"/>
+          </a:p>
+          <a:p>
+            <a:pPr marL="0" indent="0">
+              <a:lnSpc>
+                <a:spcPts val="1950"/>
+              </a:lnSpc>
+              <a:spcAft>
+                <a:spcPts val="0"/>
+              </a:spcAft>
+              <a:buNone/>
+            </a:pPr>
+            <a:r>
+              <a:rPr lang="en-US" sz="1500" b="0">
+                <a:solidFill>
+                  <a:srgbClr val="202B33"/>
+                </a:solidFill>
+                <a:latin typeface="Arial"/>
+                <a:ea typeface="Arial"/>
+                <a:cs typeface="Arial"/>
+              </a:rPr>
+              <a:t xml:space="preserve">and then I am done qualifying: nobody</a:t>
+            </a:r>
+            <a:endParaRPr lang="en-US" sz="1500"/>
+          </a:p>
         </p:txBody>
       </p:sp>
       <p:sp>
@@ -6543,6 +6681,167 @@
                 <a:ea typeface="Arial"/>
                 <a:cs typeface="Arial"/>
               </a:rPr>
+              <a:t xml:space="preserve">outside a provider knows its margins, I am</a:t>
+            </a:r>
+            <a:endParaRPr lang="en-US" sz="1500"/>
+          </a:p>
+          <a:p>
+            <a:pPr marL="0" indent="0">
+              <a:lnSpc>
+                <a:spcPts val="1950"/>
+              </a:lnSpc>
+              <a:spcAft>
+                <a:spcPts val="0"/>
+              </a:spcAft>
+              <a:buNone/>
+            </a:pPr>
+            <a:r>
+              <a:rPr lang="en-US" sz="1500" b="0">
+                <a:solidFill>
+                  <a:srgbClr val="202B33"/>
+                </a:solidFill>
+                <a:latin typeface="Arial"/>
+                <a:ea typeface="Arial"/>
+                <a:cs typeface="Arial"/>
+              </a:rPr>
+              <a:t xml:space="preserve">not going to guess at one, and every dollar</a:t>
+            </a:r>
+            <a:endParaRPr lang="en-US" sz="1500"/>
+          </a:p>
+          <a:p>
+            <a:pPr marL="0" indent="0">
+              <a:lnSpc>
+                <a:spcPts val="1950"/>
+              </a:lnSpc>
+              <a:spcAft>
+                <a:spcPts val="0"/>
+              </a:spcAft>
+              <a:buNone/>
+            </a:pPr>
+            <a:r>
+              <a:rPr lang="en-US" sz="1500" b="0">
+                <a:solidFill>
+                  <a:srgbClr val="202B33"/>
+                </a:solidFill>
+                <a:latin typeface="Arial"/>
+                <a:ea typeface="Arial"/>
+                <a:cs typeface="Arial"/>
+              </a:rPr>
+              <a:t xml:space="preserve">figure in my arithmetic is invented. What I</a:t>
+            </a:r>
+            <a:endParaRPr lang="en-US" sz="1500"/>
+          </a:p>
+          <a:p>
+            <a:pPr marL="0" indent="0">
+              <a:lnSpc>
+                <a:spcPts val="1950"/>
+              </a:lnSpc>
+              <a:spcAft>
+                <a:spcPts val="0"/>
+              </a:spcAft>
+              <a:buNone/>
+            </a:pPr>
+            <a:r>
+              <a:rPr lang="en-US" sz="1500" b="0">
+                <a:solidFill>
+                  <a:srgbClr val="202B33"/>
+                </a:solidFill>
+                <a:latin typeface="Arial"/>
+                <a:ea typeface="Arial"/>
+                <a:cs typeface="Arial"/>
+              </a:rPr>
+              <a:t xml:space="preserve">do have is a hundred and fifty years of</a:t>
+            </a:r>
+            <a:endParaRPr lang="en-US" sz="1500"/>
+          </a:p>
+          <a:p>
+            <a:pPr marL="0" indent="0">
+              <a:lnSpc>
+                <a:spcPts val="1950"/>
+              </a:lnSpc>
+              <a:spcAft>
+                <a:spcPts val="0"/>
+              </a:spcAft>
+              <a:buNone/>
+            </a:pPr>
+            <a:r>
+              <a:rPr lang="en-US" sz="1500" b="0">
+                <a:solidFill>
+                  <a:srgbClr val="202B33"/>
+                </a:solidFill>
+                <a:latin typeface="Arial"/>
+                <a:ea typeface="Arial"/>
+                <a:cs typeface="Arial"/>
+              </a:rPr>
+              <a:t xml:space="preserve">economists working on exactly this problem</a:t>
+            </a:r>
+            <a:endParaRPr lang="en-US" sz="1500"/>
+          </a:p>
+          <a:p>
+            <a:pPr marL="0" indent="0">
+              <a:lnSpc>
+                <a:spcPts val="1950"/>
+              </a:lnSpc>
+              <a:spcAft>
+                <a:spcPts val="0"/>
+              </a:spcAft>
+              <a:buNone/>
+            </a:pPr>
+            <a:r>
+              <a:rPr lang="en-US" sz="1500" b="0">
+                <a:solidFill>
+                  <a:srgbClr val="202B33"/>
+                </a:solidFill>
+                <a:latin typeface="Arial"/>
+                <a:ea typeface="Arial"/>
+                <a:cs typeface="Arial"/>
+              </a:rPr>
+              <a:t xml:space="preserve">in coal, parking, highways and car</a:t>
+            </a:r>
+            <a:endParaRPr lang="en-US" sz="1500"/>
+          </a:p>
+          <a:p>
+            <a:pPr marL="0" indent="0">
+              <a:lnSpc>
+                <a:spcPts val="1950"/>
+              </a:lnSpc>
+              <a:spcAft>
+                <a:spcPts val="0"/>
+              </a:spcAft>
+              <a:buNone/>
+            </a:pPr>
+            <a:r>
+              <a:rPr lang="en-US" sz="1500" b="0">
+                <a:solidFill>
+                  <a:srgbClr val="202B33"/>
+                </a:solidFill>
+                <a:latin typeface="Arial"/>
+                <a:ea typeface="Arial"/>
+                <a:cs typeface="Arial"/>
+              </a:rPr>
+              <a:t xml:space="preserve">factories, and they gave it names.</a:t>
+            </a:r>
+            <a:endParaRPr lang="en-US" sz="1500"/>
+          </a:p>
+          <a:p>
+            <a:pPr marL="0" indent="0">
+              <a:lnSpc>
+                <a:spcPts val="1950"/>
+              </a:lnSpc>
+              <a:spcAft>
+                <a:spcPts val="0"/>
+              </a:spcAft>
+              <a:buNone/>
+            </a:pPr>
+            <a:r>
+              <a:rPr lang="en-US" sz="1500" b="0">
+                <a:solidFill>
+                  <a:srgbClr val="202B33"/>
+                </a:solidFill>
+                <a:latin typeface="Arial"/>
+                <a:ea typeface="Arial"/>
+                <a:cs typeface="Arial"/>
+              </a:rPr>
               <a:t xml:space="preserve"/>
             </a:r>
             <a:endParaRPr lang="en-US" sz="1500"/>
@@ -6566,214 +6865,122 @@
                 <a:ea typeface="Arial"/>
                 <a:cs typeface="Arial"/>
               </a:rPr>
-              <a:t xml:space="preserve">Swap electricity for inference and that is</a:t>
-            </a:r>
-            <a:endParaRPr lang="en-US" sz="1500"/>
-          </a:p>
-          <a:p>
-            <a:pPr marL="0" indent="0">
-              <a:lnSpc>
-                <a:spcPts val="1950"/>
-              </a:lnSpc>
-              <a:spcAft>
-                <a:spcPts val="0"/>
-              </a:spcAft>
-              <a:buNone/>
-            </a:pPr>
-            <a:r>
-              <a:rPr lang="en-US" sz="1500" b="0">
-                <a:solidFill>
-                  <a:srgbClr val="202B33"/>
-                </a:solidFill>
-                <a:latin typeface="Arial"/>
-                <a:ea typeface="Arial"/>
-                <a:cs typeface="Arial"/>
-              </a:rPr>
-              <a:t xml:space="preserve">the whole talk. Here is my one disclaimer,</a:t>
-            </a:r>
-            <a:endParaRPr lang="en-US" sz="1500"/>
-          </a:p>
-          <a:p>
-            <a:pPr marL="0" indent="0">
-              <a:lnSpc>
-                <a:spcPts val="1950"/>
-              </a:lnSpc>
-              <a:spcAft>
-                <a:spcPts val="0"/>
-              </a:spcAft>
-              <a:buNone/>
-            </a:pPr>
-            <a:r>
-              <a:rPr lang="en-US" sz="1500" b="0">
-                <a:solidFill>
-                  <a:srgbClr val="202B33"/>
-                </a:solidFill>
-                <a:latin typeface="Arial"/>
-                <a:ea typeface="Arial"/>
-                <a:cs typeface="Arial"/>
-              </a:rPr>
-              <a:t xml:space="preserve">and then I am done qualifying: nobody</a:t>
-            </a:r>
-            <a:endParaRPr lang="en-US" sz="1500"/>
-          </a:p>
-          <a:p>
-            <a:pPr marL="0" indent="0">
-              <a:lnSpc>
-                <a:spcPts val="1950"/>
-              </a:lnSpc>
-              <a:spcAft>
-                <a:spcPts val="0"/>
-              </a:spcAft>
-              <a:buNone/>
-            </a:pPr>
-            <a:r>
-              <a:rPr lang="en-US" sz="1500" b="0">
-                <a:solidFill>
-                  <a:srgbClr val="202B33"/>
-                </a:solidFill>
-                <a:latin typeface="Arial"/>
-                <a:ea typeface="Arial"/>
-                <a:cs typeface="Arial"/>
-              </a:rPr>
-              <a:t xml:space="preserve">outside a provider knows its margins, I am</a:t>
-            </a:r>
-            <a:endParaRPr lang="en-US" sz="1500"/>
-          </a:p>
-          <a:p>
-            <a:pPr marL="0" indent="0">
-              <a:lnSpc>
-                <a:spcPts val="1950"/>
-              </a:lnSpc>
-              <a:spcAft>
-                <a:spcPts val="0"/>
-              </a:spcAft>
-              <a:buNone/>
-            </a:pPr>
-            <a:r>
-              <a:rPr lang="en-US" sz="1500" b="0">
-                <a:solidFill>
-                  <a:srgbClr val="202B33"/>
-                </a:solidFill>
-                <a:latin typeface="Arial"/>
-                <a:ea typeface="Arial"/>
-                <a:cs typeface="Arial"/>
-              </a:rPr>
-              <a:t xml:space="preserve">not going to guess at one, and every dollar</a:t>
-            </a:r>
-            <a:endParaRPr lang="en-US" sz="1500"/>
-          </a:p>
-          <a:p>
-            <a:pPr marL="0" indent="0">
-              <a:lnSpc>
-                <a:spcPts val="1950"/>
-              </a:lnSpc>
-              <a:spcAft>
-                <a:spcPts val="0"/>
-              </a:spcAft>
-              <a:buNone/>
-            </a:pPr>
-            <a:r>
-              <a:rPr lang="en-US" sz="1500" b="0">
-                <a:solidFill>
-                  <a:srgbClr val="202B33"/>
-                </a:solidFill>
-                <a:latin typeface="Arial"/>
-                <a:ea typeface="Arial"/>
-                <a:cs typeface="Arial"/>
-              </a:rPr>
-              <a:t xml:space="preserve">figure in my arithmetic is invented. What I</a:t>
-            </a:r>
-            <a:endParaRPr lang="en-US" sz="1500"/>
-          </a:p>
-          <a:p>
-            <a:pPr marL="0" indent="0">
-              <a:lnSpc>
-                <a:spcPts val="1950"/>
-              </a:lnSpc>
-              <a:spcAft>
-                <a:spcPts val="0"/>
-              </a:spcAft>
-              <a:buNone/>
-            </a:pPr>
-            <a:r>
-              <a:rPr lang="en-US" sz="1500" b="0">
-                <a:solidFill>
-                  <a:srgbClr val="202B33"/>
-                </a:solidFill>
-                <a:latin typeface="Arial"/>
-                <a:ea typeface="Arial"/>
-                <a:cs typeface="Arial"/>
-              </a:rPr>
-              <a:t xml:space="preserve">do have is a hundred and fifty years of</a:t>
-            </a:r>
-            <a:endParaRPr lang="en-US" sz="1500"/>
-          </a:p>
-          <a:p>
-            <a:pPr marL="0" indent="0">
-              <a:lnSpc>
-                <a:spcPts val="1950"/>
-              </a:lnSpc>
-              <a:spcAft>
-                <a:spcPts val="0"/>
-              </a:spcAft>
-              <a:buNone/>
-            </a:pPr>
-            <a:r>
-              <a:rPr lang="en-US" sz="1500" b="0">
-                <a:solidFill>
-                  <a:srgbClr val="202B33"/>
-                </a:solidFill>
-                <a:latin typeface="Arial"/>
-                <a:ea typeface="Arial"/>
-                <a:cs typeface="Arial"/>
-              </a:rPr>
-              <a:t xml:space="preserve">economists working on exactly this problem</a:t>
-            </a:r>
-            <a:endParaRPr lang="en-US" sz="1500"/>
-          </a:p>
-          <a:p>
-            <a:pPr marL="0" indent="0">
-              <a:lnSpc>
-                <a:spcPts val="1950"/>
-              </a:lnSpc>
-              <a:spcAft>
-                <a:spcPts val="0"/>
-              </a:spcAft>
-              <a:buNone/>
-            </a:pPr>
-            <a:r>
-              <a:rPr lang="en-US" sz="1500" b="0">
-                <a:solidFill>
-                  <a:srgbClr val="202B33"/>
-                </a:solidFill>
-                <a:latin typeface="Arial"/>
-                <a:ea typeface="Arial"/>
-                <a:cs typeface="Arial"/>
-              </a:rPr>
-              <a:t xml:space="preserve">in coal, parking, highways and car</a:t>
-            </a:r>
-            <a:endParaRPr lang="en-US" sz="1500"/>
-          </a:p>
-          <a:p>
-            <a:pPr marL="0" indent="0">
-              <a:lnSpc>
-                <a:spcPts val="1950"/>
-              </a:lnSpc>
-              <a:spcAft>
-                <a:spcPts val="0"/>
-              </a:spcAft>
-              <a:buNone/>
-            </a:pPr>
-            <a:r>
-              <a:rPr lang="en-US" sz="1500" b="0">
-                <a:solidFill>
-                  <a:srgbClr val="202B33"/>
-                </a:solidFill>
-                <a:latin typeface="Arial"/>
-                <a:ea typeface="Arial"/>
-                <a:cs typeface="Arial"/>
-              </a:rPr>
-              <a:t xml:space="preserve">factories, and they gave it names.</a:t>
+              <a:t xml:space="preserve">That is what you are getting today. Eight</a:t>
+            </a:r>
+            <a:endParaRPr lang="en-US" sz="1500"/>
+          </a:p>
+          <a:p>
+            <a:pPr marL="0" indent="0">
+              <a:lnSpc>
+                <a:spcPts val="1950"/>
+              </a:lnSpc>
+              <a:spcAft>
+                <a:spcPts val="0"/>
+              </a:spcAft>
+              <a:buNone/>
+            </a:pPr>
+            <a:r>
+              <a:rPr lang="en-US" sz="1500" b="0">
+                <a:solidFill>
+                  <a:srgbClr val="202B33"/>
+                </a:solidFill>
+                <a:latin typeface="Arial"/>
+                <a:ea typeface="Arial"/>
+                <a:cs typeface="Arial"/>
+              </a:rPr>
+              <a:t xml:space="preserve">words. Engineers lose this argument in</a:t>
+            </a:r>
+            <a:endParaRPr lang="en-US" sz="1500"/>
+          </a:p>
+          <a:p>
+            <a:pPr marL="0" indent="0">
+              <a:lnSpc>
+                <a:spcPts val="1950"/>
+              </a:lnSpc>
+              <a:spcAft>
+                <a:spcPts val="0"/>
+              </a:spcAft>
+              <a:buNone/>
+            </a:pPr>
+            <a:r>
+              <a:rPr lang="en-US" sz="1500" b="0">
+                <a:solidFill>
+                  <a:srgbClr val="202B33"/>
+                </a:solidFill>
+                <a:latin typeface="Arial"/>
+                <a:ea typeface="Arial"/>
+                <a:cs typeface="Arial"/>
+              </a:rPr>
+              <a:t xml:space="preserve">budget meetings because the best we can say</a:t>
+            </a:r>
+            <a:endParaRPr lang="en-US" sz="1500"/>
+          </a:p>
+          <a:p>
+            <a:pPr marL="0" indent="0">
+              <a:lnSpc>
+                <a:spcPts val="1950"/>
+              </a:lnSpc>
+              <a:spcAft>
+                <a:spcPts val="0"/>
+              </a:spcAft>
+              <a:buNone/>
+            </a:pPr>
+            <a:r>
+              <a:rPr lang="en-US" sz="1500" b="0">
+                <a:solidFill>
+                  <a:srgbClr val="202B33"/>
+                </a:solidFill>
+                <a:latin typeface="Arial"/>
+                <a:ea typeface="Arial"/>
+                <a:cs typeface="Arial"/>
+              </a:rPr>
+              <a:t xml:space="preserve">is "it feels wasteful," and finance says</a:t>
+            </a:r>
+            <a:endParaRPr lang="en-US" sz="1500"/>
+          </a:p>
+          <a:p>
+            <a:pPr marL="0" indent="0">
+              <a:lnSpc>
+                <a:spcPts val="1950"/>
+              </a:lnSpc>
+              <a:spcAft>
+                <a:spcPts val="0"/>
+              </a:spcAft>
+              <a:buNone/>
+            </a:pPr>
+            <a:r>
+              <a:rPr lang="en-US" sz="1500" b="0">
+                <a:solidFill>
+                  <a:srgbClr val="202B33"/>
+                </a:solidFill>
+                <a:latin typeface="Arial"/>
+                <a:ea typeface="Arial"/>
+                <a:cs typeface="Arial"/>
+              </a:rPr>
+              <a:t xml:space="preserve">"the bill looks fine." These eight words</a:t>
+            </a:r>
+            <a:endParaRPr lang="en-US" sz="1500"/>
+          </a:p>
+          <a:p>
+            <a:pPr marL="0" indent="0">
+              <a:lnSpc>
+                <a:spcPts val="1950"/>
+              </a:lnSpc>
+              <a:spcAft>
+                <a:spcPts val="0"/>
+              </a:spcAft>
+              <a:buNone/>
+            </a:pPr>
+            <a:r>
+              <a:rPr lang="en-US" sz="1500" b="0">
+                <a:solidFill>
+                  <a:srgbClr val="202B33"/>
+                </a:solidFill>
+                <a:latin typeface="Arial"/>
+                <a:ea typeface="Arial"/>
+                <a:cs typeface="Arial"/>
+              </a:rPr>
+              <a:t xml:space="preserve">are how you say it so it lands.</a:t>
             </a:r>
             <a:endParaRPr lang="en-US" sz="1500"/>
           </a:p>
@@ -6822,7 +7029,7 @@
                 <a:ea typeface="Arial"/>
                 <a:cs typeface="Arial"/>
               </a:rPr>
-              <a:t xml:space="preserve">Cry Me a Free Tier</a:t>
+              <a:t xml:space="preserve">Buy Me a Free Tier</a:t>
             </a:r>
             <a:endParaRPr lang="en-US" sz="975"/>
           </a:p>
@@ -7189,122 +7396,237 @@
                 <a:ea typeface="Arial"/>
                 <a:cs typeface="Arial"/>
               </a:rPr>
-              <a:t xml:space="preserve">There are four respectable explanations for</a:t>
-            </a:r>
-            <a:endParaRPr lang="en-US" sz="1500"/>
-          </a:p>
-          <a:p>
-            <a:pPr marL="0" indent="0">
-              <a:lnSpc>
-                <a:spcPts val="1950"/>
-              </a:lnSpc>
-              <a:spcAft>
-                <a:spcPts val="0"/>
-              </a:spcAft>
-              <a:buNone/>
-            </a:pPr>
-            <a:r>
-              <a:rPr lang="en-US" sz="1500" b="0">
-                <a:solidFill>
-                  <a:srgbClr val="202B33"/>
-                </a:solidFill>
-                <a:latin typeface="Arial"/>
-                <a:ea typeface="Arial"/>
-                <a:cs typeface="Arial"/>
-              </a:rPr>
-              <a:t xml:space="preserve">a low price, and an engineer arguing about</a:t>
-            </a:r>
-            <a:endParaRPr lang="en-US" sz="1500"/>
-          </a:p>
-          <a:p>
-            <a:pPr marL="0" indent="0">
-              <a:lnSpc>
-                <a:spcPts val="1950"/>
-              </a:lnSpc>
-              <a:spcAft>
-                <a:spcPts val="0"/>
-              </a:spcAft>
-              <a:buNone/>
-            </a:pPr>
-            <a:r>
-              <a:rPr lang="en-US" sz="1500" b="0">
-                <a:solidFill>
-                  <a:srgbClr val="202B33"/>
-                </a:solidFill>
-                <a:latin typeface="Arial"/>
-                <a:ea typeface="Arial"/>
-                <a:cs typeface="Arial"/>
-              </a:rPr>
-              <a:t xml:space="preserve">this in a meeting should be able to name</a:t>
-            </a:r>
-            <a:endParaRPr lang="en-US" sz="1500"/>
-          </a:p>
-          <a:p>
-            <a:pPr marL="0" indent="0">
-              <a:lnSpc>
-                <a:spcPts val="1950"/>
-              </a:lnSpc>
-              <a:spcAft>
-                <a:spcPts val="0"/>
-              </a:spcAft>
-              <a:buNone/>
-            </a:pPr>
-            <a:r>
-              <a:rPr lang="en-US" sz="1500" b="0">
-                <a:solidFill>
-                  <a:srgbClr val="202B33"/>
-                </a:solidFill>
-                <a:latin typeface="Arial"/>
-                <a:ea typeface="Arial"/>
-                <a:cs typeface="Arial"/>
-              </a:rPr>
-              <a:t xml:space="preserve">all four.</a:t>
-            </a:r>
-            <a:endParaRPr lang="en-US" sz="1500"/>
-          </a:p>
-          <a:p>
-            <a:pPr marL="0" indent="0">
-              <a:lnSpc>
-                <a:spcPts val="1950"/>
-              </a:lnSpc>
-              <a:spcAft>
-                <a:spcPts val="0"/>
-              </a:spcAft>
-              <a:buNone/>
-            </a:pPr>
-            <a:r>
-              <a:rPr lang="en-US" sz="1500" b="0">
-                <a:solidFill>
-                  <a:srgbClr val="202B33"/>
-                </a:solidFill>
-                <a:latin typeface="Arial"/>
-                <a:ea typeface="Arial"/>
-                <a:cs typeface="Arial"/>
-              </a:rPr>
-              <a:t xml:space="preserve"/>
-            </a:r>
-            <a:endParaRPr lang="en-US" sz="1500"/>
-          </a:p>
-          <a:p>
-            <a:pPr marL="0" indent="0">
-              <a:lnSpc>
-                <a:spcPts val="1950"/>
-              </a:lnSpc>
-              <a:spcAft>
-                <a:spcPts val="0"/>
-              </a:spcAft>
-              <a:buNone/>
-            </a:pPr>
-            <a:r>
-              <a:rPr lang="en-US" sz="1500" b="0">
-                <a:solidFill>
-                  <a:srgbClr val="202B33"/>
-                </a:solidFill>
-                <a:latin typeface="Arial"/>
-                <a:ea typeface="Arial"/>
-                <a:cs typeface="Arial"/>
-              </a:rPr>
-              <a:t xml:space="preserve">Here is the useful part. You cannot</a:t>
+              <a:t xml:space="preserve">Penetration pricing: buy the market now,</a:t>
+            </a:r>
+            <a:endParaRPr lang="en-US" sz="1500"/>
+          </a:p>
+          <a:p>
+            <a:pPr marL="0" indent="0">
+              <a:lnSpc>
+                <a:spcPts val="1950"/>
+              </a:lnSpc>
+              <a:spcAft>
+                <a:spcPts val="0"/>
+              </a:spcAft>
+              <a:buNone/>
+            </a:pPr>
+            <a:r>
+              <a:rPr lang="en-US" sz="1500" b="0">
+                <a:solidFill>
+                  <a:srgbClr val="202B33"/>
+                </a:solidFill>
+                <a:latin typeface="Arial"/>
+                <a:ea typeface="Arial"/>
+                <a:cs typeface="Arial"/>
+              </a:rPr>
+              <a:t xml:space="preserve">raise later. Standard, legal, taught in</a:t>
+            </a:r>
+            <a:endParaRPr lang="en-US" sz="1500"/>
+          </a:p>
+          <a:p>
+            <a:pPr marL="0" indent="0">
+              <a:lnSpc>
+                <a:spcPts val="1950"/>
+              </a:lnSpc>
+              <a:spcAft>
+                <a:spcPts val="0"/>
+              </a:spcAft>
+              <a:buNone/>
+            </a:pPr>
+            <a:r>
+              <a:rPr lang="en-US" sz="1500" b="0">
+                <a:solidFill>
+                  <a:srgbClr val="202B33"/>
+                </a:solidFill>
+                <a:latin typeface="Arial"/>
+                <a:ea typeface="Arial"/>
+                <a:cs typeface="Arial"/>
+              </a:rPr>
+              <a:t xml:space="preserve">every business school. Loss leader in a</a:t>
+            </a:r>
+            <a:endParaRPr lang="en-US" sz="1500"/>
+          </a:p>
+          <a:p>
+            <a:pPr marL="0" indent="0">
+              <a:lnSpc>
+                <a:spcPts val="1950"/>
+              </a:lnSpc>
+              <a:spcAft>
+                <a:spcPts val="0"/>
+              </a:spcAft>
+              <a:buNone/>
+            </a:pPr>
+            <a:r>
+              <a:rPr lang="en-US" sz="1500" b="0">
+                <a:solidFill>
+                  <a:srgbClr val="202B33"/>
+                </a:solidFill>
+                <a:latin typeface="Arial"/>
+                <a:ea typeface="Arial"/>
+                <a:cs typeface="Arial"/>
+              </a:rPr>
+              <a:t xml:space="preserve">bundle: the cheap thing funds the expensive</a:t>
+            </a:r>
+            <a:endParaRPr lang="en-US" sz="1500"/>
+          </a:p>
+          <a:p>
+            <a:pPr marL="0" indent="0">
+              <a:lnSpc>
+                <a:spcPts val="1950"/>
+              </a:lnSpc>
+              <a:spcAft>
+                <a:spcPts val="0"/>
+              </a:spcAft>
+              <a:buNone/>
+            </a:pPr>
+            <a:r>
+              <a:rPr lang="en-US" sz="1500" b="0">
+                <a:solidFill>
+                  <a:srgbClr val="202B33"/>
+                </a:solidFill>
+                <a:latin typeface="Arial"/>
+                <a:ea typeface="Arial"/>
+                <a:cs typeface="Arial"/>
+              </a:rPr>
+              <a:t xml:space="preserve">thing next to it, which is what a two-sided</a:t>
+            </a:r>
+            <a:endParaRPr lang="en-US" sz="1500"/>
+          </a:p>
+          <a:p>
+            <a:pPr marL="0" indent="0">
+              <a:lnSpc>
+                <a:spcPts val="1950"/>
+              </a:lnSpc>
+              <a:spcAft>
+                <a:spcPts val="0"/>
+              </a:spcAft>
+              <a:buNone/>
+            </a:pPr>
+            <a:r>
+              <a:rPr lang="en-US" sz="1500" b="0">
+                <a:solidFill>
+                  <a:srgbClr val="202B33"/>
+                </a:solidFill>
+                <a:latin typeface="Arial"/>
+                <a:ea typeface="Arial"/>
+                <a:cs typeface="Arial"/>
+              </a:rPr>
+              <a:t xml:space="preserve">market does for a living. Predation: below</a:t>
+            </a:r>
+            <a:endParaRPr lang="en-US" sz="1500"/>
+          </a:p>
+          <a:p>
+            <a:pPr marL="0" indent="0">
+              <a:lnSpc>
+                <a:spcPts val="1950"/>
+              </a:lnSpc>
+              <a:spcAft>
+                <a:spcPts val="0"/>
+              </a:spcAft>
+              <a:buNone/>
+            </a:pPr>
+            <a:r>
+              <a:rPr lang="en-US" sz="1500" b="0">
+                <a:solidFill>
+                  <a:srgbClr val="202B33"/>
+                </a:solidFill>
+                <a:latin typeface="Arial"/>
+                <a:ea typeface="Arial"/>
+                <a:cs typeface="Arial"/>
+              </a:rPr>
+              <a:t xml:space="preserve">cost specifically to remove rivals. In US</a:t>
+            </a:r>
+            <a:endParaRPr lang="en-US" sz="1500"/>
+          </a:p>
+          <a:p>
+            <a:pPr marL="0" indent="0">
+              <a:lnSpc>
+                <a:spcPts val="1950"/>
+              </a:lnSpc>
+              <a:spcAft>
+                <a:spcPts val="0"/>
+              </a:spcAft>
+              <a:buNone/>
+            </a:pPr>
+            <a:r>
+              <a:rPr lang="en-US" sz="1500" b="0">
+                <a:solidFill>
+                  <a:srgbClr val="202B33"/>
+                </a:solidFill>
+                <a:latin typeface="Arial"/>
+                <a:ea typeface="Arial"/>
+                <a:cs typeface="Arial"/>
+              </a:rPr>
+              <a:t xml:space="preserve">law that is not a vibe, it is a test.</a:t>
+            </a:r>
+            <a:endParaRPr lang="en-US" sz="1500"/>
+          </a:p>
+          <a:p>
+            <a:pPr marL="0" indent="0">
+              <a:lnSpc>
+                <a:spcPts val="1950"/>
+              </a:lnSpc>
+              <a:spcAft>
+                <a:spcPts val="0"/>
+              </a:spcAft>
+              <a:buNone/>
+            </a:pPr>
+            <a:r>
+              <a:rPr lang="en-US" sz="1500" b="0">
+                <a:solidFill>
+                  <a:srgbClr val="202B33"/>
+                </a:solidFill>
+                <a:latin typeface="Arial"/>
+                <a:ea typeface="Arial"/>
+                <a:cs typeface="Arial"/>
+              </a:rPr>
+              <a:t xml:space="preserve">Brooke Group, 1993: you need below-cost</a:t>
+            </a:r>
+            <a:endParaRPr lang="en-US" sz="1500"/>
+          </a:p>
+          <a:p>
+            <a:pPr marL="0" indent="0">
+              <a:lnSpc>
+                <a:spcPts val="1950"/>
+              </a:lnSpc>
+              <a:spcAft>
+                <a:spcPts val="0"/>
+              </a:spcAft>
+              <a:buNone/>
+            </a:pPr>
+            <a:r>
+              <a:rPr lang="en-US" sz="1500" b="0">
+                <a:solidFill>
+                  <a:srgbClr val="202B33"/>
+                </a:solidFill>
+                <a:latin typeface="Arial"/>
+                <a:ea typeface="Arial"/>
+                <a:cs typeface="Arial"/>
+              </a:rPr>
+              <a:t xml:space="preserve">pricing and a dangerous probability of</a:t>
+            </a:r>
+            <a:endParaRPr lang="en-US" sz="1500"/>
+          </a:p>
+          <a:p>
+            <a:pPr marL="0" indent="0">
+              <a:lnSpc>
+                <a:spcPts val="1950"/>
+              </a:lnSpc>
+              <a:spcAft>
+                <a:spcPts val="0"/>
+              </a:spcAft>
+              <a:buNone/>
+            </a:pPr>
+            <a:r>
+              <a:rPr lang="en-US" sz="1500" b="0">
+                <a:solidFill>
+                  <a:srgbClr val="202B33"/>
+                </a:solidFill>
+                <a:latin typeface="Arial"/>
+                <a:ea typeface="Arial"/>
+                <a:cs typeface="Arial"/>
+              </a:rPr>
+              <a:t xml:space="preserve">recoupment. And the fourth explanation, the</a:t>
             </a:r>
             <a:endParaRPr lang="en-US" sz="1500"/>
           </a:p>
@@ -7353,6 +7675,121 @@
                 <a:ea typeface="Arial"/>
                 <a:cs typeface="Arial"/>
               </a:rPr>
+              <a:t xml:space="preserve">one that keeps me honest: it is genuinely</a:t>
+            </a:r>
+            <a:endParaRPr lang="en-US" sz="1500"/>
+          </a:p>
+          <a:p>
+            <a:pPr marL="0" indent="0">
+              <a:lnSpc>
+                <a:spcPts val="1950"/>
+              </a:lnSpc>
+              <a:spcAft>
+                <a:spcPts val="0"/>
+              </a:spcAft>
+              <a:buNone/>
+            </a:pPr>
+            <a:r>
+              <a:rPr lang="en-US" sz="1500" b="0">
+                <a:solidFill>
+                  <a:srgbClr val="202B33"/>
+                </a:solidFill>
+                <a:latin typeface="Arial"/>
+                <a:ea typeface="Arial"/>
+                <a:cs typeface="Arial"/>
+              </a:rPr>
+              <a:t xml:space="preserve">cheap, and getting cheaper, because the</a:t>
+            </a:r>
+            <a:endParaRPr lang="en-US" sz="1500"/>
+          </a:p>
+          <a:p>
+            <a:pPr marL="0" indent="0">
+              <a:lnSpc>
+                <a:spcPts val="1950"/>
+              </a:lnSpc>
+              <a:spcAft>
+                <a:spcPts val="0"/>
+              </a:spcAft>
+              <a:buNone/>
+            </a:pPr>
+            <a:r>
+              <a:rPr lang="en-US" sz="1500" b="0">
+                <a:solidFill>
+                  <a:srgbClr val="202B33"/>
+                </a:solidFill>
+                <a:latin typeface="Arial"/>
+                <a:ea typeface="Arial"/>
+                <a:cs typeface="Arial"/>
+              </a:rPr>
+              <a:t xml:space="preserve">engineering is real.</a:t>
+            </a:r>
+            <a:endParaRPr lang="en-US" sz="1500"/>
+          </a:p>
+          <a:p>
+            <a:pPr marL="0" indent="0">
+              <a:lnSpc>
+                <a:spcPts val="1950"/>
+              </a:lnSpc>
+              <a:spcAft>
+                <a:spcPts val="0"/>
+              </a:spcAft>
+              <a:buNone/>
+            </a:pPr>
+            <a:r>
+              <a:rPr lang="en-US" sz="1500" b="0">
+                <a:solidFill>
+                  <a:srgbClr val="202B33"/>
+                </a:solidFill>
+                <a:latin typeface="Arial"/>
+                <a:ea typeface="Arial"/>
+                <a:cs typeface="Arial"/>
+              </a:rPr>
+              <a:t xml:space="preserve"/>
+            </a:r>
+            <a:endParaRPr lang="en-US" sz="1500"/>
+          </a:p>
+          <a:p>
+            <a:pPr marL="0" indent="0">
+              <a:lnSpc>
+                <a:spcPts val="1950"/>
+              </a:lnSpc>
+              <a:spcAft>
+                <a:spcPts val="0"/>
+              </a:spcAft>
+              <a:buNone/>
+            </a:pPr>
+            <a:r>
+              <a:rPr lang="en-US" sz="1500" b="0">
+                <a:solidFill>
+                  <a:srgbClr val="202B33"/>
+                </a:solidFill>
+                <a:latin typeface="Arial"/>
+                <a:ea typeface="Arial"/>
+                <a:cs typeface="Arial"/>
+              </a:rPr>
+              <a:t xml:space="preserve">Here is the useful part. You cannot</a:t>
+            </a:r>
+            <a:endParaRPr lang="en-US" sz="1500"/>
+          </a:p>
+          <a:p>
+            <a:pPr marL="0" indent="0">
+              <a:lnSpc>
+                <a:spcPts val="1950"/>
+              </a:lnSpc>
+              <a:spcAft>
+                <a:spcPts val="0"/>
+              </a:spcAft>
+              <a:buNone/>
+            </a:pPr>
+            <a:r>
+              <a:rPr lang="en-US" sz="1500" b="0">
+                <a:solidFill>
+                  <a:srgbClr val="202B33"/>
+                </a:solidFill>
+                <a:latin typeface="Arial"/>
+                <a:ea typeface="Arial"/>
+                <a:cs typeface="Arial"/>
+              </a:rPr>
               <a:t xml:space="preserve">distinguish these from the price. You can</a:t>
             </a:r>
             <a:endParaRPr lang="en-US" sz="1500"/>
@@ -7632,7 +8069,7 @@
                 <a:ea typeface="Arial"/>
                 <a:cs typeface="Arial"/>
               </a:rPr>
-              <a:t xml:space="preserve">Cry Me a Free Tier</a:t>
+              <a:t xml:space="preserve">Buy Me a Free Tier</a:t>
             </a:r>
             <a:endParaRPr lang="en-US" sz="975"/>
           </a:p>
@@ -8419,7 +8856,7 @@
                 <a:ea typeface="Arial"/>
                 <a:cs typeface="Arial"/>
               </a:rPr>
-              <a:t xml:space="preserve">Cry Me a Free Tier</a:t>
+              <a:t xml:space="preserve">Buy Me a Free Tier</a:t>
             </a:r>
             <a:endParaRPr lang="en-US" sz="975"/>
           </a:p>
@@ -9020,6 +9457,98 @@
             </a:r>
             <a:endParaRPr lang="en-US" sz="1500"/>
           </a:p>
+          <a:p>
+            <a:pPr marL="0" indent="0">
+              <a:lnSpc>
+                <a:spcPts val="1950"/>
+              </a:lnSpc>
+              <a:spcAft>
+                <a:spcPts val="0"/>
+              </a:spcAft>
+              <a:buNone/>
+            </a:pPr>
+            <a:r>
+              <a:rPr lang="en-US" sz="1500" b="0">
+                <a:solidFill>
+                  <a:srgbClr val="202B33"/>
+                </a:solidFill>
+                <a:latin typeface="Arial"/>
+                <a:ea typeface="Arial"/>
+                <a:cs typeface="Arial"/>
+              </a:rPr>
+              <a:t xml:space="preserve"/>
+            </a:r>
+            <a:endParaRPr lang="en-US" sz="1500"/>
+          </a:p>
+          <a:p>
+            <a:pPr marL="0" indent="0">
+              <a:lnSpc>
+                <a:spcPts val="1950"/>
+              </a:lnSpc>
+              <a:spcAft>
+                <a:spcPts val="0"/>
+              </a:spcAft>
+              <a:buNone/>
+            </a:pPr>
+            <a:r>
+              <a:rPr lang="en-US" sz="1500" b="0">
+                <a:solidFill>
+                  <a:srgbClr val="202B33"/>
+                </a:solidFill>
+                <a:latin typeface="Arial"/>
+                <a:ea typeface="Arial"/>
+                <a:cs typeface="Arial"/>
+              </a:rPr>
+              <a:t xml:space="preserve">The transport version is word three,</a:t>
+            </a:r>
+            <a:endParaRPr lang="en-US" sz="1500"/>
+          </a:p>
+          <a:p>
+            <a:pPr marL="0" indent="0">
+              <a:lnSpc>
+                <a:spcPts val="1950"/>
+              </a:lnSpc>
+              <a:spcAft>
+                <a:spcPts val="0"/>
+              </a:spcAft>
+              <a:buNone/>
+            </a:pPr>
+            <a:r>
+              <a:rPr lang="en-US" sz="1500" b="0">
+                <a:solidFill>
+                  <a:srgbClr val="202B33"/>
+                </a:solidFill>
+                <a:latin typeface="Arial"/>
+                <a:ea typeface="Arial"/>
+                <a:cs typeface="Arial"/>
+              </a:rPr>
+              <a:t xml:space="preserve">induced demand. Add a lane to a congested</a:t>
+            </a:r>
+            <a:endParaRPr lang="en-US" sz="1500"/>
+          </a:p>
+          <a:p>
+            <a:pPr marL="0" indent="0">
+              <a:lnSpc>
+                <a:spcPts val="1950"/>
+              </a:lnSpc>
+              <a:spcAft>
+                <a:spcPts val="0"/>
+              </a:spcAft>
+              <a:buNone/>
+            </a:pPr>
+            <a:r>
+              <a:rPr lang="en-US" sz="1500" b="0">
+                <a:solidFill>
+                  <a:srgbClr val="202B33"/>
+                </a:solidFill>
+                <a:latin typeface="Arial"/>
+                <a:ea typeface="Arial"/>
+                <a:cs typeface="Arial"/>
+              </a:rPr>
+              <a:t xml:space="preserve">highway and you get more traffic. Duranton</a:t>
+            </a:r>
+            <a:endParaRPr lang="en-US" sz="1500"/>
+          </a:p>
         </p:txBody>
       </p:sp>
       <p:sp>
@@ -9065,6 +9594,144 @@
                 <a:ea typeface="Arial"/>
                 <a:cs typeface="Arial"/>
               </a:rPr>
+              <a:t xml:space="preserve">and Turner measured it across US cities in</a:t>
+            </a:r>
+            <a:endParaRPr lang="en-US" sz="1500"/>
+          </a:p>
+          <a:p>
+            <a:pPr marL="0" indent="0">
+              <a:lnSpc>
+                <a:spcPts val="1950"/>
+              </a:lnSpc>
+              <a:spcAft>
+                <a:spcPts val="0"/>
+              </a:spcAft>
+              <a:buNone/>
+            </a:pPr>
+            <a:r>
+              <a:rPr lang="en-US" sz="1500" b="0">
+                <a:solidFill>
+                  <a:srgbClr val="202B33"/>
+                </a:solidFill>
+                <a:latin typeface="Arial"/>
+                <a:ea typeface="Arial"/>
+                <a:cs typeface="Arial"/>
+              </a:rPr>
+              <a:t xml:space="preserve">2011 and found the elasticity of driving</a:t>
+            </a:r>
+            <a:endParaRPr lang="en-US" sz="1500"/>
+          </a:p>
+          <a:p>
+            <a:pPr marL="0" indent="0">
+              <a:lnSpc>
+                <a:spcPts val="1950"/>
+              </a:lnSpc>
+              <a:spcAft>
+                <a:spcPts val="0"/>
+              </a:spcAft>
+              <a:buNone/>
+            </a:pPr>
+            <a:r>
+              <a:rPr lang="en-US" sz="1500" b="0">
+                <a:solidFill>
+                  <a:srgbClr val="202B33"/>
+                </a:solidFill>
+                <a:latin typeface="Arial"/>
+                <a:ea typeface="Arial"/>
+                <a:cs typeface="Arial"/>
+              </a:rPr>
+              <a:t xml:space="preserve">with respect to lane-kilometres is roughly</a:t>
+            </a:r>
+            <a:endParaRPr lang="en-US" sz="1500"/>
+          </a:p>
+          <a:p>
+            <a:pPr marL="0" indent="0">
+              <a:lnSpc>
+                <a:spcPts val="1950"/>
+              </a:lnSpc>
+              <a:spcAft>
+                <a:spcPts val="0"/>
+              </a:spcAft>
+              <a:buNone/>
+            </a:pPr>
+            <a:r>
+              <a:rPr lang="en-US" sz="1500" b="0">
+                <a:solidFill>
+                  <a:srgbClr val="202B33"/>
+                </a:solidFill>
+                <a:latin typeface="Arial"/>
+                <a:ea typeface="Arial"/>
+                <a:cs typeface="Arial"/>
+              </a:rPr>
+              <a:t xml:space="preserve">one. Build ten percent more road, get ten</a:t>
+            </a:r>
+            <a:endParaRPr lang="en-US" sz="1500"/>
+          </a:p>
+          <a:p>
+            <a:pPr marL="0" indent="0">
+              <a:lnSpc>
+                <a:spcPts val="1950"/>
+              </a:lnSpc>
+              <a:spcAft>
+                <a:spcPts val="0"/>
+              </a:spcAft>
+              <a:buNone/>
+            </a:pPr>
+            <a:r>
+              <a:rPr lang="en-US" sz="1500" b="0">
+                <a:solidFill>
+                  <a:srgbClr val="202B33"/>
+                </a:solidFill>
+                <a:latin typeface="Arial"/>
+                <a:ea typeface="Arial"/>
+                <a:cs typeface="Arial"/>
+              </a:rPr>
+              <a:t xml:space="preserve">percent more driving. The congestion comes</a:t>
+            </a:r>
+            <a:endParaRPr lang="en-US" sz="1500"/>
+          </a:p>
+          <a:p>
+            <a:pPr marL="0" indent="0">
+              <a:lnSpc>
+                <a:spcPts val="1950"/>
+              </a:lnSpc>
+              <a:spcAft>
+                <a:spcPts val="0"/>
+              </a:spcAft>
+              <a:buNone/>
+            </a:pPr>
+            <a:r>
+              <a:rPr lang="en-US" sz="1500" b="0">
+                <a:solidFill>
+                  <a:srgbClr val="202B33"/>
+                </a:solidFill>
+                <a:latin typeface="Arial"/>
+                <a:ea typeface="Arial"/>
+                <a:cs typeface="Arial"/>
+              </a:rPr>
+              <a:t xml:space="preserve">back.</a:t>
+            </a:r>
+            <a:endParaRPr lang="en-US" sz="1500"/>
+          </a:p>
+          <a:p>
+            <a:pPr marL="0" indent="0">
+              <a:lnSpc>
+                <a:spcPts val="1950"/>
+              </a:lnSpc>
+              <a:spcAft>
+                <a:spcPts val="0"/>
+              </a:spcAft>
+              <a:buNone/>
+            </a:pPr>
+            <a:r>
+              <a:rPr lang="en-US" sz="1500" b="0">
+                <a:solidFill>
+                  <a:srgbClr val="202B33"/>
+                </a:solidFill>
+                <a:latin typeface="Arial"/>
+                <a:ea typeface="Arial"/>
+                <a:cs typeface="Arial"/>
+              </a:rPr>
               <a:t xml:space="preserve"/>
             </a:r>
             <a:endParaRPr lang="en-US" sz="1500"/>
@@ -9088,329 +9755,306 @@
                 <a:ea typeface="Arial"/>
                 <a:cs typeface="Arial"/>
               </a:rPr>
-              <a:t xml:space="preserve">The transport version is word three,</a:t>
-            </a:r>
-            <a:endParaRPr lang="en-US" sz="1500"/>
-          </a:p>
-          <a:p>
-            <a:pPr marL="0" indent="0">
-              <a:lnSpc>
-                <a:spcPts val="1950"/>
-              </a:lnSpc>
-              <a:spcAft>
-                <a:spcPts val="0"/>
-              </a:spcAft>
-              <a:buNone/>
-            </a:pPr>
-            <a:r>
-              <a:rPr lang="en-US" sz="1500" b="0">
-                <a:solidFill>
-                  <a:srgbClr val="202B33"/>
-                </a:solidFill>
-                <a:latin typeface="Arial"/>
-                <a:ea typeface="Arial"/>
-                <a:cs typeface="Arial"/>
-              </a:rPr>
-              <a:t xml:space="preserve">induced demand. Add a lane to a congested</a:t>
-            </a:r>
-            <a:endParaRPr lang="en-US" sz="1500"/>
-          </a:p>
-          <a:p>
-            <a:pPr marL="0" indent="0">
-              <a:lnSpc>
-                <a:spcPts val="1950"/>
-              </a:lnSpc>
-              <a:spcAft>
-                <a:spcPts val="0"/>
-              </a:spcAft>
-              <a:buNone/>
-            </a:pPr>
-            <a:r>
-              <a:rPr lang="en-US" sz="1500" b="0">
-                <a:solidFill>
-                  <a:srgbClr val="202B33"/>
-                </a:solidFill>
-                <a:latin typeface="Arial"/>
-                <a:ea typeface="Arial"/>
-                <a:cs typeface="Arial"/>
-              </a:rPr>
-              <a:t xml:space="preserve">highway and you get more traffic. Duranton</a:t>
-            </a:r>
-            <a:endParaRPr lang="en-US" sz="1500"/>
-          </a:p>
-          <a:p>
-            <a:pPr marL="0" indent="0">
-              <a:lnSpc>
-                <a:spcPts val="1950"/>
-              </a:lnSpc>
-              <a:spcAft>
-                <a:spcPts val="0"/>
-              </a:spcAft>
-              <a:buNone/>
-            </a:pPr>
-            <a:r>
-              <a:rPr lang="en-US" sz="1500" b="0">
-                <a:solidFill>
-                  <a:srgbClr val="202B33"/>
-                </a:solidFill>
-                <a:latin typeface="Arial"/>
-                <a:ea typeface="Arial"/>
-                <a:cs typeface="Arial"/>
-              </a:rPr>
-              <a:t xml:space="preserve">and Turner measured it across US cities in</a:t>
-            </a:r>
-            <a:endParaRPr lang="en-US" sz="1500"/>
-          </a:p>
-          <a:p>
-            <a:pPr marL="0" indent="0">
-              <a:lnSpc>
-                <a:spcPts val="1950"/>
-              </a:lnSpc>
-              <a:spcAft>
-                <a:spcPts val="0"/>
-              </a:spcAft>
-              <a:buNone/>
-            </a:pPr>
-            <a:r>
-              <a:rPr lang="en-US" sz="1500" b="0">
-                <a:solidFill>
-                  <a:srgbClr val="202B33"/>
-                </a:solidFill>
-                <a:latin typeface="Arial"/>
-                <a:ea typeface="Arial"/>
-                <a:cs typeface="Arial"/>
-              </a:rPr>
-              <a:t xml:space="preserve">2011 and found the elasticity of driving</a:t>
-            </a:r>
-            <a:endParaRPr lang="en-US" sz="1500"/>
-          </a:p>
-          <a:p>
-            <a:pPr marL="0" indent="0">
-              <a:lnSpc>
-                <a:spcPts val="1950"/>
-              </a:lnSpc>
-              <a:spcAft>
-                <a:spcPts val="0"/>
-              </a:spcAft>
-              <a:buNone/>
-            </a:pPr>
-            <a:r>
-              <a:rPr lang="en-US" sz="1500" b="0">
-                <a:solidFill>
-                  <a:srgbClr val="202B33"/>
-                </a:solidFill>
-                <a:latin typeface="Arial"/>
-                <a:ea typeface="Arial"/>
-                <a:cs typeface="Arial"/>
-              </a:rPr>
-              <a:t xml:space="preserve">with respect to lane-kilometres is roughly</a:t>
-            </a:r>
-            <a:endParaRPr lang="en-US" sz="1500"/>
-          </a:p>
-          <a:p>
-            <a:pPr marL="0" indent="0">
-              <a:lnSpc>
-                <a:spcPts val="1950"/>
-              </a:lnSpc>
-              <a:spcAft>
-                <a:spcPts val="0"/>
-              </a:spcAft>
-              <a:buNone/>
-            </a:pPr>
-            <a:r>
-              <a:rPr lang="en-US" sz="1500" b="0">
-                <a:solidFill>
-                  <a:srgbClr val="202B33"/>
-                </a:solidFill>
-                <a:latin typeface="Arial"/>
-                <a:ea typeface="Arial"/>
-                <a:cs typeface="Arial"/>
-              </a:rPr>
-              <a:t xml:space="preserve">one. Build ten percent more road, get ten</a:t>
-            </a:r>
-            <a:endParaRPr lang="en-US" sz="1500"/>
-          </a:p>
-          <a:p>
-            <a:pPr marL="0" indent="0">
-              <a:lnSpc>
-                <a:spcPts val="1950"/>
-              </a:lnSpc>
-              <a:spcAft>
-                <a:spcPts val="0"/>
-              </a:spcAft>
-              <a:buNone/>
-            </a:pPr>
-            <a:r>
-              <a:rPr lang="en-US" sz="1500" b="0">
-                <a:solidFill>
-                  <a:srgbClr val="202B33"/>
-                </a:solidFill>
-                <a:latin typeface="Arial"/>
-                <a:ea typeface="Arial"/>
-                <a:cs typeface="Arial"/>
-              </a:rPr>
-              <a:t xml:space="preserve">percent more driving. The congestion comes</a:t>
-            </a:r>
-            <a:endParaRPr lang="en-US" sz="1500"/>
-          </a:p>
-          <a:p>
-            <a:pPr marL="0" indent="0">
-              <a:lnSpc>
-                <a:spcPts val="1950"/>
-              </a:lnSpc>
-              <a:spcAft>
-                <a:spcPts val="0"/>
-              </a:spcAft>
-              <a:buNone/>
-            </a:pPr>
-            <a:r>
-              <a:rPr lang="en-US" sz="1500" b="0">
-                <a:solidFill>
-                  <a:srgbClr val="202B33"/>
-                </a:solidFill>
-                <a:latin typeface="Arial"/>
-                <a:ea typeface="Arial"/>
-                <a:cs typeface="Arial"/>
-              </a:rPr>
-              <a:t xml:space="preserve">back.</a:t>
-            </a:r>
-            <a:endParaRPr lang="en-US" sz="1500"/>
-          </a:p>
-          <a:p>
-            <a:pPr marL="0" indent="0">
-              <a:lnSpc>
-                <a:spcPts val="1950"/>
-              </a:lnSpc>
-              <a:spcAft>
-                <a:spcPts val="0"/>
-              </a:spcAft>
-              <a:buNone/>
-            </a:pPr>
-            <a:r>
-              <a:rPr lang="en-US" sz="1500" b="0">
-                <a:solidFill>
-                  <a:srgbClr val="202B33"/>
-                </a:solidFill>
-                <a:latin typeface="Arial"/>
-                <a:ea typeface="Arial"/>
-                <a:cs typeface="Arial"/>
-              </a:rPr>
-              <a:t xml:space="preserve"/>
-            </a:r>
-            <a:endParaRPr lang="en-US" sz="1500"/>
-          </a:p>
-          <a:p>
-            <a:pPr marL="0" indent="0">
-              <a:lnSpc>
-                <a:spcPts val="1950"/>
-              </a:lnSpc>
-              <a:spcAft>
-                <a:spcPts val="0"/>
-              </a:spcAft>
-              <a:buNone/>
-            </a:pPr>
-            <a:r>
-              <a:rPr lang="en-US" sz="1500" b="0">
-                <a:solidFill>
-                  <a:srgbClr val="202B33"/>
-                </a:solidFill>
-                <a:latin typeface="Arial"/>
-                <a:ea typeface="Arial"/>
-                <a:cs typeface="Arial"/>
-              </a:rPr>
-              <a:t xml:space="preserve">Both things can be fine. A falling price</a:t>
-            </a:r>
-            <a:endParaRPr lang="en-US" sz="1500"/>
-          </a:p>
-          <a:p>
-            <a:pPr marL="0" indent="0">
-              <a:lnSpc>
-                <a:spcPts val="1950"/>
-              </a:lnSpc>
-              <a:spcAft>
-                <a:spcPts val="0"/>
-              </a:spcAft>
-              <a:buNone/>
-            </a:pPr>
-            <a:r>
-              <a:rPr lang="en-US" sz="1500" b="0">
-                <a:solidFill>
-                  <a:srgbClr val="202B33"/>
-                </a:solidFill>
-                <a:latin typeface="Arial"/>
-                <a:ea typeface="Arial"/>
-                <a:cs typeface="Arial"/>
-              </a:rPr>
-              <a:t xml:space="preserve">and a growing bill coexist comfortably as</a:t>
-            </a:r>
-            <a:endParaRPr lang="en-US" sz="1500"/>
-          </a:p>
-          <a:p>
-            <a:pPr marL="0" indent="0">
-              <a:lnSpc>
-                <a:spcPts val="1950"/>
-              </a:lnSpc>
-              <a:spcAft>
-                <a:spcPts val="0"/>
-              </a:spcAft>
-              <a:buNone/>
-            </a:pPr>
-            <a:r>
-              <a:rPr lang="en-US" sz="1500" b="0">
-                <a:solidFill>
-                  <a:srgbClr val="202B33"/>
-                </a:solidFill>
-                <a:latin typeface="Arial"/>
-                <a:ea typeface="Arial"/>
-                <a:cs typeface="Arial"/>
-              </a:rPr>
-              <a:t xml:space="preserve">long as customer value grows faster. That</a:t>
-            </a:r>
-            <a:endParaRPr lang="en-US" sz="1500"/>
-          </a:p>
-          <a:p>
-            <a:pPr marL="0" indent="0">
-              <a:lnSpc>
-                <a:spcPts val="1950"/>
-              </a:lnSpc>
-              <a:spcAft>
-                <a:spcPts val="0"/>
-              </a:spcAft>
-              <a:buNone/>
-            </a:pPr>
-            <a:r>
-              <a:rPr lang="en-US" sz="1500" b="0">
-                <a:solidFill>
-                  <a:srgbClr val="202B33"/>
-                </a:solidFill>
-                <a:latin typeface="Arial"/>
-                <a:ea typeface="Arial"/>
-                <a:cs typeface="Arial"/>
-              </a:rPr>
-              <a:t xml:space="preserve">is the relationship to measure, and almost</a:t>
-            </a:r>
-            <a:endParaRPr lang="en-US" sz="1500"/>
-          </a:p>
-          <a:p>
-            <a:pPr marL="0" indent="0">
-              <a:lnSpc>
-                <a:spcPts val="1950"/>
-              </a:lnSpc>
-              <a:spcAft>
-                <a:spcPts val="0"/>
-              </a:spcAft>
-              <a:buNone/>
-            </a:pPr>
-            <a:r>
-              <a:rPr lang="en-US" sz="1500" b="0">
-                <a:solidFill>
-                  <a:srgbClr val="202B33"/>
-                </a:solidFill>
-                <a:latin typeface="Arial"/>
-                <a:ea typeface="Arial"/>
-                <a:cs typeface="Arial"/>
-              </a:rPr>
-              <a:t xml:space="preserve">nobody measures it.</a:t>
+              <a:t xml:space="preserve">So: your per-token price has fallen off a</a:t>
+            </a:r>
+            <a:endParaRPr lang="en-US" sz="1500"/>
+          </a:p>
+          <a:p>
+            <a:pPr marL="0" indent="0">
+              <a:lnSpc>
+                <a:spcPts val="1950"/>
+              </a:lnSpc>
+              <a:spcAft>
+                <a:spcPts val="0"/>
+              </a:spcAft>
+              <a:buNone/>
+            </a:pPr>
+            <a:r>
+              <a:rPr lang="en-US" sz="1500" b="0">
+                <a:solidFill>
+                  <a:srgbClr val="202B33"/>
+                </a:solidFill>
+                <a:latin typeface="Arial"/>
+                <a:ea typeface="Arial"/>
+                <a:cs typeface="Arial"/>
+              </a:rPr>
+              <a:t xml:space="preserve">cliff over the last few years, and your</a:t>
+            </a:r>
+            <a:endParaRPr lang="en-US" sz="1500"/>
+          </a:p>
+          <a:p>
+            <a:pPr marL="0" indent="0">
+              <a:lnSpc>
+                <a:spcPts val="1950"/>
+              </a:lnSpc>
+              <a:spcAft>
+                <a:spcPts val="0"/>
+              </a:spcAft>
+              <a:buNone/>
+            </a:pPr>
+            <a:r>
+              <a:rPr lang="en-US" sz="1500" b="0">
+                <a:solidFill>
+                  <a:srgbClr val="202B33"/>
+                </a:solidFill>
+                <a:latin typeface="Arial"/>
+                <a:ea typeface="Arial"/>
+                <a:cs typeface="Arial"/>
+              </a:rPr>
+              <a:t xml:space="preserve">bill went up. Everyone in this room has had</a:t>
+            </a:r>
+            <a:endParaRPr lang="en-US" sz="1500"/>
+          </a:p>
+          <a:p>
+            <a:pPr marL="0" indent="0">
+              <a:lnSpc>
+                <a:spcPts val="1950"/>
+              </a:lnSpc>
+              <a:spcAft>
+                <a:spcPts val="0"/>
+              </a:spcAft>
+              <a:buNone/>
+            </a:pPr>
+            <a:r>
+              <a:rPr lang="en-US" sz="1500" b="0">
+                <a:solidFill>
+                  <a:srgbClr val="202B33"/>
+                </a:solidFill>
+                <a:latin typeface="Arial"/>
+                <a:ea typeface="Arial"/>
+                <a:cs typeface="Arial"/>
+              </a:rPr>
+              <a:t xml:space="preserve">that conversation with a CFO and lost it.</a:t>
+            </a:r>
+            <a:endParaRPr lang="en-US" sz="1500"/>
+          </a:p>
+          <a:p>
+            <a:pPr marL="0" indent="0">
+              <a:lnSpc>
+                <a:spcPts val="1950"/>
+              </a:lnSpc>
+              <a:spcAft>
+                <a:spcPts val="0"/>
+              </a:spcAft>
+              <a:buNone/>
+            </a:pPr>
+            <a:r>
+              <a:rPr lang="en-US" sz="1500" b="0">
+                <a:solidFill>
+                  <a:srgbClr val="202B33"/>
+                </a:solidFill>
+                <a:latin typeface="Arial"/>
+                <a:ea typeface="Arial"/>
+                <a:cs typeface="Arial"/>
+              </a:rPr>
+              <a:t xml:space="preserve">You are not being gouged and you did not do</a:t>
+            </a:r>
+            <a:endParaRPr lang="en-US" sz="1500"/>
+          </a:p>
+          <a:p>
+            <a:pPr marL="0" indent="0">
+              <a:lnSpc>
+                <a:spcPts val="1950"/>
+              </a:lnSpc>
+              <a:spcAft>
+                <a:spcPts val="0"/>
+              </a:spcAft>
+              <a:buNone/>
+            </a:pPr>
+            <a:r>
+              <a:rPr lang="en-US" sz="1500" b="0">
+                <a:solidFill>
+                  <a:srgbClr val="202B33"/>
+                </a:solidFill>
+                <a:latin typeface="Arial"/>
+                <a:ea typeface="Arial"/>
+                <a:cs typeface="Arial"/>
+              </a:rPr>
+              <a:t xml:space="preserve">anything wrong. Spend is price times</a:t>
+            </a:r>
+            <a:endParaRPr lang="en-US" sz="1500"/>
+          </a:p>
+          <a:p>
+            <a:pPr marL="0" indent="0">
+              <a:lnSpc>
+                <a:spcPts val="1950"/>
+              </a:lnSpc>
+              <a:spcAft>
+                <a:spcPts val="0"/>
+              </a:spcAft>
+              <a:buNone/>
+            </a:pPr>
+            <a:r>
+              <a:rPr lang="en-US" sz="1500" b="0">
+                <a:solidFill>
+                  <a:srgbClr val="202B33"/>
+                </a:solidFill>
+                <a:latin typeface="Arial"/>
+                <a:ea typeface="Arial"/>
+                <a:cs typeface="Arial"/>
+              </a:rPr>
+              <a:t xml:space="preserve">consumption, and consumption is jobs times</a:t>
+            </a:r>
+            <a:endParaRPr lang="en-US" sz="1500"/>
+          </a:p>
+          <a:p>
+            <a:pPr marL="0" indent="0">
+              <a:lnSpc>
+                <a:spcPts val="1950"/>
+              </a:lnSpc>
+              <a:spcAft>
+                <a:spcPts val="0"/>
+              </a:spcAft>
+              <a:buNone/>
+            </a:pPr>
+            <a:r>
+              <a:rPr lang="en-US" sz="1500" b="0">
+                <a:solidFill>
+                  <a:srgbClr val="202B33"/>
+                </a:solidFill>
+                <a:latin typeface="Arial"/>
+                <a:ea typeface="Arial"/>
+                <a:cs typeface="Arial"/>
+              </a:rPr>
+              <a:t xml:space="preserve">calls per job times tokens per call.</a:t>
+            </a:r>
+            <a:endParaRPr lang="en-US" sz="1500"/>
+          </a:p>
+          <a:p>
+            <a:pPr marL="0" indent="0">
+              <a:lnSpc>
+                <a:spcPts val="1950"/>
+              </a:lnSpc>
+              <a:spcAft>
+                <a:spcPts val="0"/>
+              </a:spcAft>
+              <a:buNone/>
+            </a:pPr>
+            <a:r>
+              <a:rPr lang="en-US" sz="1500" b="0">
+                <a:solidFill>
+                  <a:srgbClr val="202B33"/>
+                </a:solidFill>
+                <a:latin typeface="Arial"/>
+                <a:ea typeface="Arial"/>
+                <a:cs typeface="Arial"/>
+              </a:rPr>
+              <a:t xml:space="preserve">Cheapness moved every term on the right.</a:t>
+            </a:r>
+            <a:endParaRPr lang="en-US" sz="1500"/>
+          </a:p>
+          <a:p>
+            <a:pPr marL="0" indent="0">
+              <a:lnSpc>
+                <a:spcPts val="1950"/>
+              </a:lnSpc>
+              <a:spcAft>
+                <a:spcPts val="0"/>
+              </a:spcAft>
+              <a:buNone/>
+            </a:pPr>
+            <a:r>
+              <a:rPr lang="en-US" sz="1500" b="0">
+                <a:solidFill>
+                  <a:srgbClr val="202B33"/>
+                </a:solidFill>
+                <a:latin typeface="Arial"/>
+                <a:ea typeface="Arial"/>
+                <a:cs typeface="Arial"/>
+              </a:rPr>
+              <a:t xml:space="preserve">Epoch's data through 2025 shows the price</a:t>
+            </a:r>
+            <a:endParaRPr lang="en-US" sz="1500"/>
+          </a:p>
+          <a:p>
+            <a:pPr marL="0" indent="0">
+              <a:lnSpc>
+                <a:spcPts val="1950"/>
+              </a:lnSpc>
+              <a:spcAft>
+                <a:spcPts val="0"/>
+              </a:spcAft>
+              <a:buNone/>
+            </a:pPr>
+            <a:r>
+              <a:rPr lang="en-US" sz="1500" b="0">
+                <a:solidFill>
+                  <a:srgbClr val="202B33"/>
+                </a:solidFill>
+                <a:latin typeface="Arial"/>
+                <a:ea typeface="Arial"/>
+                <a:cs typeface="Arial"/>
+              </a:rPr>
+              <a:t xml:space="preserve">of a fixed capability falling fast and very</a:t>
+            </a:r>
+            <a:endParaRPr lang="en-US" sz="1500"/>
+          </a:p>
+          <a:p>
+            <a:pPr marL="0" indent="0">
+              <a:lnSpc>
+                <a:spcPts val="1950"/>
+              </a:lnSpc>
+              <a:spcAft>
+                <a:spcPts val="0"/>
+              </a:spcAft>
+              <a:buNone/>
+            </a:pPr>
+            <a:r>
+              <a:rPr lang="en-US" sz="1500" b="0">
+                <a:solidFill>
+                  <a:srgbClr val="202B33"/>
+                </a:solidFill>
+                <a:latin typeface="Arial"/>
+                <a:ea typeface="Arial"/>
+                <a:cs typeface="Arial"/>
+              </a:rPr>
+              <a:t xml:space="preserve">unevenly by task, which is real and worth</a:t>
+            </a:r>
+            <a:endParaRPr lang="en-US" sz="1500"/>
+          </a:p>
+          <a:p>
+            <a:pPr marL="0" indent="0">
+              <a:lnSpc>
+                <a:spcPts val="1950"/>
+              </a:lnSpc>
+              <a:spcAft>
+                <a:spcPts val="0"/>
+              </a:spcAft>
+              <a:buNone/>
+            </a:pPr>
+            <a:r>
+              <a:rPr lang="en-US" sz="1500" b="0">
+                <a:solidFill>
+                  <a:srgbClr val="202B33"/>
+                </a:solidFill>
+                <a:latin typeface="Arial"/>
+                <a:ea typeface="Arial"/>
+                <a:cs typeface="Arial"/>
+              </a:rPr>
+              <a:t xml:space="preserve">knowing, and is also exactly the condition</a:t>
+            </a:r>
+            <a:endParaRPr lang="en-US" sz="1500"/>
+          </a:p>
+          <a:p>
+            <a:pPr marL="0" indent="0">
+              <a:lnSpc>
+                <a:spcPts val="1950"/>
+              </a:lnSpc>
+              <a:spcAft>
+                <a:spcPts val="0"/>
+              </a:spcAft>
+              <a:buNone/>
+            </a:pPr>
+            <a:r>
+              <a:rPr lang="en-US" sz="1500" b="0">
+                <a:solidFill>
+                  <a:srgbClr val="202B33"/>
+                </a:solidFill>
+                <a:latin typeface="Arial"/>
+                <a:ea typeface="Arial"/>
+                <a:cs typeface="Arial"/>
+              </a:rPr>
+              <a:t xml:space="preserve">under which total spend rises.</a:t>
             </a:r>
             <a:endParaRPr lang="en-US" sz="1500"/>
           </a:p>
@@ -9459,7 +10103,7 @@
                 <a:ea typeface="Arial"/>
                 <a:cs typeface="Arial"/>
               </a:rPr>
-              <a:t xml:space="preserve">Cry Me a Free Tier</a:t>
+              <a:t xml:space="preserve">Buy Me a Free Tier</a:t>
             </a:r>
             <a:endParaRPr lang="en-US" sz="975"/>
           </a:p>
@@ -10568,7 +11212,7 @@
                 <a:ea typeface="Arial"/>
                 <a:cs typeface="Arial"/>
               </a:rPr>
-              <a:t xml:space="preserve">Cry Me a Free Tier</a:t>
+              <a:t xml:space="preserve">Buy Me a Free Tier</a:t>
             </a:r>
             <a:endParaRPr lang="en-US" sz="975"/>
           </a:p>
@@ -10748,7 +11392,7 @@
                 <a:ea typeface="Arial"/>
                 <a:cs typeface="Arial"/>
               </a:rPr>
-              <a:t xml:space="preserve">Your acceptance rate is a price multiplier</a:t>
+              <a:t xml:space="preserve">Doubling on a Tuesday</a:t>
             </a:r>
             <a:endParaRPr lang="en-US" sz="2550"/>
           </a:p>
@@ -11562,7 +12206,7 @@
                 <a:ea typeface="Arial"/>
                 <a:cs typeface="Arial"/>
               </a:rPr>
-              <a:t xml:space="preserve">Cry Me a Free Tier</a:t>
+              <a:t xml:space="preserve">Buy Me a Free Tier</a:t>
             </a:r>
             <a:endParaRPr lang="en-US" sz="975"/>
           </a:p>
@@ -12576,53 +13220,30 @@
                 <a:ea typeface="Arial"/>
                 <a:cs typeface="Arial"/>
               </a:rPr>
-              <a:t xml:space="preserve">on the next three slides is just a way of</a:t>
-            </a:r>
-            <a:endParaRPr lang="en-US" sz="1500"/>
-          </a:p>
-          <a:p>
-            <a:pPr marL="0" indent="0">
-              <a:lnSpc>
-                <a:spcPts val="1950"/>
-              </a:lnSpc>
-              <a:spcAft>
-                <a:spcPts val="0"/>
-              </a:spcAft>
-              <a:buNone/>
-            </a:pPr>
-            <a:r>
-              <a:rPr lang="en-US" sz="1500" b="0">
-                <a:solidFill>
-                  <a:srgbClr val="202B33"/>
-                </a:solidFill>
-                <a:latin typeface="Arial"/>
-                <a:ea typeface="Arial"/>
-                <a:cs typeface="Arial"/>
-              </a:rPr>
-              <a:t xml:space="preserve">reducing specificity or pricing the</a:t>
-            </a:r>
-            <a:endParaRPr lang="en-US" sz="1500"/>
-          </a:p>
-          <a:p>
-            <a:pPr marL="0" indent="0">
-              <a:lnSpc>
-                <a:spcPts val="1950"/>
-              </a:lnSpc>
-              <a:spcAft>
-                <a:spcPts val="0"/>
-              </a:spcAft>
-              <a:buNone/>
-            </a:pPr>
-            <a:r>
-              <a:rPr lang="en-US" sz="1500" b="0">
-                <a:solidFill>
-                  <a:srgbClr val="202B33"/>
-                </a:solidFill>
-                <a:latin typeface="Arial"/>
-                <a:ea typeface="Arial"/>
-                <a:cs typeface="Arial"/>
-              </a:rPr>
-              <a:t xml:space="preserve">exposure.</a:t>
+              <a:t xml:space="preserve">after this is just a way of reducing</a:t>
+            </a:r>
+            <a:endParaRPr lang="en-US" sz="1500"/>
+          </a:p>
+          <a:p>
+            <a:pPr marL="0" indent="0">
+              <a:lnSpc>
+                <a:spcPts val="1950"/>
+              </a:lnSpc>
+              <a:spcAft>
+                <a:spcPts val="0"/>
+              </a:spcAft>
+              <a:buNone/>
+            </a:pPr>
+            <a:r>
+              <a:rPr lang="en-US" sz="1500" b="0">
+                <a:solidFill>
+                  <a:srgbClr val="202B33"/>
+                </a:solidFill>
+                <a:latin typeface="Arial"/>
+                <a:ea typeface="Arial"/>
+                <a:cs typeface="Arial"/>
+              </a:rPr>
+              <a:t xml:space="preserve">specificity or pricing the exposure.</a:t>
             </a:r>
             <a:endParaRPr lang="en-US" sz="1500"/>
           </a:p>
@@ -12671,7 +13292,7 @@
                 <a:ea typeface="Arial"/>
                 <a:cs typeface="Arial"/>
               </a:rPr>
-              <a:t xml:space="preserve">Cry Me a Free Tier</a:t>
+              <a:t xml:space="preserve">Buy Me a Free Tier</a:t>
             </a:r>
             <a:endParaRPr lang="en-US" sz="975"/>
           </a:p>
@@ -13318,29 +13939,6 @@
             </a:r>
             <a:endParaRPr lang="en-US" sz="1500"/>
           </a:p>
-          <a:p>
-            <a:pPr marL="0" indent="0">
-              <a:lnSpc>
-                <a:spcPts val="1950"/>
-              </a:lnSpc>
-              <a:spcAft>
-                <a:spcPts val="0"/>
-              </a:spcAft>
-              <a:buNone/>
-            </a:pPr>
-            <a:r>
-              <a:rPr lang="en-US" sz="1500" b="0">
-                <a:solidFill>
-                  <a:srgbClr val="202B33"/>
-                </a:solidFill>
-                <a:latin typeface="Arial"/>
-                <a:ea typeface="Arial"/>
-                <a:cs typeface="Arial"/>
-              </a:rPr>
-              <a:t xml:space="preserve">less. Path dependence, because the lots</a:t>
-            </a:r>
-            <a:endParaRPr lang="en-US" sz="1500"/>
-          </a:p>
         </p:txBody>
       </p:sp>
       <p:sp>
@@ -13386,6 +13984,29 @@
                 <a:ea typeface="Arial"/>
                 <a:cs typeface="Arial"/>
               </a:rPr>
+              <a:t xml:space="preserve">less. Path dependence, because the lots</a:t>
+            </a:r>
+            <a:endParaRPr lang="en-US" sz="1500"/>
+          </a:p>
+          <a:p>
+            <a:pPr marL="0" indent="0">
+              <a:lnSpc>
+                <a:spcPts val="1950"/>
+              </a:lnSpc>
+              <a:spcAft>
+                <a:spcPts val="0"/>
+              </a:spcAft>
+              <a:buNone/>
+            </a:pPr>
+            <a:r>
+              <a:rPr lang="en-US" sz="1500" b="0">
+                <a:solidFill>
+                  <a:srgbClr val="202B33"/>
+                </a:solidFill>
+                <a:latin typeface="Arial"/>
+                <a:ea typeface="Arial"/>
+                <a:cs typeface="Arial"/>
+              </a:rPr>
               <a:t xml:space="preserve">stay built. Moral hazard, because whoever</a:t>
             </a:r>
             <a:endParaRPr lang="en-US" sz="1500"/>
@@ -13777,30 +14398,7 @@
                 <a:ea typeface="Arial"/>
                 <a:cs typeface="Arial"/>
               </a:rPr>
-              <a:t xml:space="preserve">before it changes organizations. Leave the</a:t>
-            </a:r>
-            <a:endParaRPr lang="en-US" sz="1500"/>
-          </a:p>
-          <a:p>
-            <a:pPr marL="0" indent="0">
-              <a:lnSpc>
-                <a:spcPts val="1950"/>
-              </a:lnSpc>
-              <a:spcAft>
-                <a:spcPts val="0"/>
-              </a:spcAft>
-              <a:buNone/>
-            </a:pPr>
-            <a:r>
-              <a:rPr lang="en-US" sz="1500" b="0">
-                <a:solidFill>
-                  <a:srgbClr val="202B33"/>
-                </a:solidFill>
-                <a:latin typeface="Arial"/>
-                <a:ea typeface="Arial"/>
-                <a:cs typeface="Arial"/>
-              </a:rPr>
-              <a:t xml:space="preserve">table up.</a:t>
+              <a:t xml:space="preserve">before it changes organizations.</a:t>
             </a:r>
             <a:endParaRPr lang="en-US" sz="1500"/>
           </a:p>
@@ -13849,7 +14447,7 @@
                 <a:ea typeface="Arial"/>
                 <a:cs typeface="Arial"/>
               </a:rPr>
-              <a:t xml:space="preserve">Cry Me a Free Tier</a:t>
+              <a:t xml:space="preserve">Buy Me a Free Tier</a:t>
             </a:r>
             <a:endParaRPr lang="en-US" sz="975"/>
           </a:p>

--- a/artifacts/speaking-portfolio-expanded/decks/free-tier-15min-handout.pptx
+++ b/artifacts/speaking-portfolio-expanded/decks/free-tier-15min-handout.pptx
@@ -17,7 +17,6 @@
     <p:sldId id="262" r:id="rIdSlide7"/>
     <p:sldId id="263" r:id="rIdSlide8"/>
     <p:sldId id="264" r:id="rIdSlide9"/>
-    <p:sldId id="265" r:id="rIdSlide10"/>
   </p:sldIdLst>
   <p:sldSz cx="10058400" cy="7772400" type="custom"/>
   <p:notesSz cx="6858000" cy="9144000"/>
@@ -300,257 +299,6 @@
 </p:notes>
 </file>
 
-<file path=ppt/notesSlides/notesSlide10.xml><?xml version="1.0" encoding="utf-8"?>
-<p:notes xmlns:a="http://schemas.openxmlformats.org/drawingml/2006/main" xmlns:r="http://schemas.openxmlformats.org/officeDocument/2006/relationships" xmlns:p="http://schemas.openxmlformats.org/presentationml/2006/main">
-  <p:cSld>
-    <p:spTree>
-      <p:nvGrpSpPr>
-        <p:cNvPr id="1" name=""/>
-        <p:cNvGrpSpPr/>
-        <p:nvPr/>
-      </p:nvGrpSpPr>
-      <p:grpSpPr>
-        <a:xfrm>
-          <a:off x="0" y="0"/>
-          <a:ext cx="0" cy="0"/>
-          <a:chOff x="0" y="0"/>
-          <a:chExt cx="0" cy="0"/>
-        </a:xfrm>
-      </p:grpSpPr>
-      <p:sp>
-        <p:nvSpPr>
-          <p:cNvPr id="2" name="Presenter notes"/>
-          <p:cNvSpPr txBox="1"/>
-          <p:nvPr>
-            <p:ph type="body" idx="1"/>
-          </p:nvPr>
-        </p:nvSpPr>
-        <p:spPr>
-          <a:xfrm>
-            <a:off x="457200" y="1428750"/>
-            <a:ext cx="5715000" cy="6667500"/>
-          </a:xfrm>
-        </p:spPr>
-        <p:txBody>
-          <a:bodyPr/>
-          <a:lstStyle/>
-          <a:p>
-            <a:pPr marL="0" indent="0">
-              <a:lnSpc>
-                <a:spcPts val="1560"/>
-              </a:lnSpc>
-              <a:spcAft>
-                <a:spcPts val="0"/>
-              </a:spcAft>
-              <a:buNone/>
-            </a:pPr>
-            <a:r>
-              <a:rPr lang="en-US" sz="1200" b="0">
-                <a:solidFill>
-                  <a:srgbClr val="202b33"/>
-                </a:solidFill>
-                <a:latin typeface="Arial"/>
-                <a:ea typeface="Arial"/>
-                <a:cs typeface="Arial"/>
-              </a:rPr>
-              <a:t xml:space="preserve">Brooke Group Ltd. v. Brown &amp; Williamson Tobacco Corp., 509 U.S. 209 (1993), on the recoupment requirement in predatory-pricing claims.</a:t>
-            </a:r>
-            <a:endParaRPr lang="en-US" sz="1200"/>
-          </a:p>
-          <a:p>
-            <a:pPr marL="0" indent="0">
-              <a:lnSpc>
-                <a:spcPts val="1560"/>
-              </a:lnSpc>
-              <a:spcAft>
-                <a:spcPts val="0"/>
-              </a:spcAft>
-              <a:buNone/>
-            </a:pPr>
-            <a:r>
-              <a:rPr lang="en-US" sz="1200" b="0">
-                <a:solidFill>
-                  <a:srgbClr val="202b33"/>
-                </a:solidFill>
-                <a:latin typeface="Arial"/>
-                <a:ea typeface="Arial"/>
-                <a:cs typeface="Arial"/>
-              </a:rPr>
-              <a:t xml:space="preserve"/>
-            </a:r>
-            <a:endParaRPr lang="en-US" sz="1200"/>
-          </a:p>
-          <a:p>
-            <a:pPr marL="0" indent="0">
-              <a:lnSpc>
-                <a:spcPts val="1560"/>
-              </a:lnSpc>
-              <a:spcAft>
-                <a:spcPts val="0"/>
-              </a:spcAft>
-              <a:buNone/>
-            </a:pPr>
-            <a:r>
-              <a:rPr lang="en-US" sz="1200" b="0">
-                <a:solidFill>
-                  <a:srgbClr val="202b33"/>
-                </a:solidFill>
-                <a:latin typeface="Arial"/>
-                <a:ea typeface="Arial"/>
-                <a:cs typeface="Arial"/>
-              </a:rPr>
-              <a:t xml:space="preserve">Rochet and Tirole (2003), Platform Competition in Two-Sided Markets, Journal of the European Economic Association, on cross-subsidy between sides of a market.</a:t>
-            </a:r>
-            <a:endParaRPr lang="en-US" sz="1200"/>
-          </a:p>
-          <a:p>
-            <a:pPr marL="0" indent="0">
-              <a:lnSpc>
-                <a:spcPts val="1560"/>
-              </a:lnSpc>
-              <a:spcAft>
-                <a:spcPts val="0"/>
-              </a:spcAft>
-              <a:buNone/>
-            </a:pPr>
-            <a:r>
-              <a:rPr lang="en-US" sz="1200" b="0">
-                <a:solidFill>
-                  <a:srgbClr val="202b33"/>
-                </a:solidFill>
-                <a:latin typeface="Arial"/>
-                <a:ea typeface="Arial"/>
-                <a:cs typeface="Arial"/>
-              </a:rPr>
-              <a:t xml:space="preserve"/>
-            </a:r>
-            <a:endParaRPr lang="en-US" sz="1200"/>
-          </a:p>
-          <a:p>
-            <a:pPr marL="0" indent="0">
-              <a:lnSpc>
-                <a:spcPts val="1560"/>
-              </a:lnSpc>
-              <a:spcAft>
-                <a:spcPts val="0"/>
-              </a:spcAft>
-              <a:buNone/>
-            </a:pPr>
-            <a:r>
-              <a:rPr lang="en-US" sz="1200" b="0">
-                <a:solidFill>
-                  <a:srgbClr val="202b33"/>
-                </a:solidFill>
-                <a:latin typeface="Arial"/>
-                <a:ea typeface="Arial"/>
-                <a:cs typeface="Arial"/>
-              </a:rPr>
-              <a:t xml:space="preserve">Shoup (2005, updated 2011), The High Cost of Free Parking, American Planning Association. Also Shoup (2011), [Free parking or free markets](https://www.accessmagazine.org/spring-2011/free-parking-free-markets/), ACCESS Magazine.</a:t>
-            </a:r>
-            <a:endParaRPr lang="en-US" sz="1200"/>
-          </a:p>
-          <a:p>
-            <a:pPr marL="0" indent="0">
-              <a:lnSpc>
-                <a:spcPts val="1560"/>
-              </a:lnSpc>
-              <a:spcAft>
-                <a:spcPts val="0"/>
-              </a:spcAft>
-              <a:buNone/>
-            </a:pPr>
-            <a:r>
-              <a:rPr lang="en-US" sz="1200" b="0">
-                <a:solidFill>
-                  <a:srgbClr val="202b33"/>
-                </a:solidFill>
-                <a:latin typeface="Arial"/>
-                <a:ea typeface="Arial"/>
-                <a:cs typeface="Arial"/>
-              </a:rPr>
-              <a:t xml:space="preserve"/>
-            </a:r>
-            <a:endParaRPr lang="en-US" sz="1200"/>
-          </a:p>
-          <a:p>
-            <a:pPr marL="0" indent="0">
-              <a:lnSpc>
-                <a:spcPts val="1560"/>
-              </a:lnSpc>
-              <a:spcAft>
-                <a:spcPts val="0"/>
-              </a:spcAft>
-              <a:buNone/>
-            </a:pPr>
-            <a:r>
-              <a:rPr lang="en-US" sz="1200" b="0">
-                <a:solidFill>
-                  <a:srgbClr val="202b33"/>
-                </a:solidFill>
-                <a:latin typeface="Arial"/>
-                <a:ea typeface="Arial"/>
-                <a:cs typeface="Arial"/>
-              </a:rPr>
-              <a:t xml:space="preserve">Jevons (1865), The Coal Question, chapter VII. Duranton and Turner (2011), The Fundamental Law of Road Congestion, American Economic Review 101(6).</a:t>
-            </a:r>
-            <a:endParaRPr lang="en-US" sz="1200"/>
-          </a:p>
-          <a:p>
-            <a:pPr marL="0" indent="0">
-              <a:lnSpc>
-                <a:spcPts val="1560"/>
-              </a:lnSpc>
-              <a:spcAft>
-                <a:spcPts val="0"/>
-              </a:spcAft>
-              <a:buNone/>
-            </a:pPr>
-            <a:r>
-              <a:rPr lang="en-US" sz="1200" b="0">
-                <a:solidFill>
-                  <a:srgbClr val="202b33"/>
-                </a:solidFill>
-                <a:latin typeface="Arial"/>
-                <a:ea typeface="Arial"/>
-                <a:cs typeface="Arial"/>
-              </a:rPr>
-              <a:t xml:space="preserve"/>
-            </a:r>
-            <a:endParaRPr lang="en-US" sz="1200"/>
-          </a:p>
-          <a:p>
-            <a:pPr marL="0" indent="0">
-              <a:lnSpc>
-                <a:spcPts val="1560"/>
-              </a:lnSpc>
-              <a:spcAft>
-                <a:spcPts val="0"/>
-              </a:spcAft>
-              <a:buNone/>
-            </a:pPr>
-            <a:r>
-              <a:rPr lang="en-US" sz="1200" b="0">
-                <a:solidFill>
-                  <a:srgbClr val="202b33"/>
-                </a:solidFill>
-                <a:latin typeface="Arial"/>
-                <a:ea typeface="Arial"/>
-                <a:cs typeface="Arial"/>
-              </a:rPr>
-              <a:t xml:space="preserve">Cottier, Snodin, Owen, Adamczewski (Epoch AI, March 2025), [LLM inference prices have fallen rapidly but unequally across tasks](https://epoch.ai/data-insights/llm-inference-price-trends). Check for a newer edition before each delivery.</a:t>
-            </a:r>
-            <a:endParaRPr lang="en-US" sz="1200"/>
-          </a:p>
-        </p:txBody>
-      </p:sp>
-    </p:spTree>
-  </p:cSld>
-  <p:clrMapOvr>
-    <a:masterClrMapping/>
-  </p:clrMapOvr>
-</p:notes>
-</file>
-
 <file path=ppt/notesSlides/notesSlide2.xml><?xml version="1.0" encoding="utf-8"?>
 <p:notes xmlns:a="http://schemas.openxmlformats.org/drawingml/2006/main" xmlns:r="http://schemas.openxmlformats.org/officeDocument/2006/relationships" xmlns:p="http://schemas.openxmlformats.org/presentationml/2006/main">
   <p:cSld>
@@ -650,7 +398,7 @@
                 <a:ea typeface="Arial"/>
                 <a:cs typeface="Arial"/>
               </a:rPr>
-              <a:t xml:space="preserve">Source slide 1. 00:00 to 01:45</a:t>
+              <a:t xml:space="preserve">Source slide 1. 00:00 to 02:30</a:t>
             </a:r>
             <a:endParaRPr lang="en-US" sz="1200"/>
           </a:p>
@@ -1131,7 +879,7 @@
                 <a:ea typeface="Arial"/>
                 <a:cs typeface="Arial"/>
               </a:rPr>
-              <a:t xml:space="preserve">Source slide 3. 01:45 to 03:45</a:t>
+              <a:t xml:space="preserve">Source slide 3. 02:30 to 05:15</a:t>
             </a:r>
             <a:endParaRPr lang="en-US" sz="1200"/>
           </a:p>
@@ -1545,7 +1293,7 @@
                 <a:ea typeface="Arial"/>
                 <a:cs typeface="Arial"/>
               </a:rPr>
-              <a:t xml:space="preserve"/>
+              <a:t xml:space="preserve">Bridge: those commitments are credible commitments in Schelling's sense, moves in a war of attrition. Note who is not a player. Somebody is buying your free tier, and it is not you. You are not a combatant, you are the terrain. And the terrain keeps its asphalt: repealing a parking minimum does not remove a lot, which is path dependence.</a:t>
             </a:r>
             <a:endParaRPr lang="en-US" sz="1200"/>
           </a:p>
@@ -1658,7 +1406,7 @@
                 <a:ea typeface="Arial"/>
                 <a:cs typeface="Arial"/>
               </a:rPr>
-              <a:t xml:space="preserve">Source slide 5. 03:45 to 05:15</a:t>
+              <a:t xml:space="preserve">Source slide 6. 05:15 to 07:15</a:t>
             </a:r>
             <a:endParaRPr lang="en-US" sz="1200"/>
           </a:p>
@@ -1704,7 +1452,7 @@
                 <a:ea typeface="Arial"/>
                 <a:cs typeface="Arial"/>
               </a:rPr>
-              <a:t xml:space="preserve">The driver sees no meter, so demand looks infinite</a:t>
+              <a:t xml:space="preserve">1865: better engines burned more coal, not less</a:t>
             </a:r>
             <a:endParaRPr lang="en-US" sz="1200"/>
           </a:p>
@@ -1750,7 +1498,7 @@
                 <a:ea typeface="Arial"/>
                 <a:cs typeface="Arial"/>
               </a:rPr>
-              <a:t xml:space="preserve">The cost moves into rents, prices, and land</a:t>
+              <a:t xml:space="preserve">Add a lane, get traffic. Elasticity near one.</a:t>
             </a:r>
             <a:endParaRPr lang="en-US" sz="1200"/>
           </a:p>
@@ -1796,7 +1544,7 @@
                 <a:ea typeface="Arial"/>
                 <a:cs typeface="Arial"/>
               </a:rPr>
-              <a:t xml:space="preserve">Word one: externality</a:t>
+              <a:t xml:space="preserve">Spend = price × jobs × calls per job × tokens per call</a:t>
             </a:r>
             <a:endParaRPr lang="en-US" sz="1200"/>
           </a:p>
@@ -1842,7 +1590,7 @@
                 <a:ea typeface="Arial"/>
                 <a:cs typeface="Arial"/>
               </a:rPr>
-              <a:t xml:space="preserve">Donald Shoup spent a career on the least glamorous subject in urban economics and was right about all of it. Cities required developers to build minimum parking. Nobody paid at the meter, so the cost went somewhere else: into rents, into retail prices, into land that became asphalt. And because drivers saw no price, demand looked infinite, so the minimums grew to match.</a:t>
+              <a:t xml:space="preserve">In 1865 William Stanley Jevons noticed something that annoyed everyone. Steam engines had gotten dramatically more efficient, and Britain was burning far more coal than before, not less. Efficiency made coal useful for more things, so people used it for more things. That is the Jevons paradox, and it is word two.</a:t>
             </a:r>
             <a:endParaRPr lang="en-US" sz="1200"/>
           </a:p>
@@ -1888,7 +1636,7 @@
                 <a:ea typeface="Arial"/>
                 <a:cs typeface="Arial"/>
               </a:rPr>
-              <a:t xml:space="preserve">That is your first word: externality. A cost that is real, and paid, but not by the person making the decision. It does not vanish. It relocates, and it usually relocates somewhere you are not looking.</a:t>
+              <a:t xml:space="preserve">The transport version is word three, induced demand. Add a lane to a congested highway and you get more traffic. Duranton and Turner measured it across US cities in 2011 and found the elasticity of driving with respect to lane-kilometres is roughly one. Build ten percent more road, get ten percent more driving. The congestion comes back.</a:t>
             </a:r>
             <a:endParaRPr lang="en-US" sz="1200"/>
           </a:p>
@@ -1934,7 +1682,7 @@
                 <a:ea typeface="Arial"/>
                 <a:cs typeface="Arial"/>
               </a:rPr>
-              <a:t xml:space="preserve">Shoup (2005, updated 2011), The High Cost of Free Parking, American Planning Association. Also Shoup (2011), [Free parking or free markets](https://www.accessmagazine.org/spring-2011/free-parking-free-markets/), ACCESS Magazine.</a:t>
+              <a:t xml:space="preserve">Jevons (1865), The Coal Question, chapter VII. Duranton and Turner (2011), The Fundamental Law of Road Congestion, American Economic Review 101(6).</a:t>
             </a:r>
             <a:endParaRPr lang="en-US" sz="1200"/>
           </a:p>
@@ -1980,6 +1728,29 @@
                 <a:ea typeface="Arial"/>
                 <a:cs typeface="Arial"/>
               </a:rPr>
+              <a:t xml:space="preserve">Cottier, Snodin, Owen, Adamczewski (Epoch AI, March 2025), [LLM inference prices have fallen rapidly but unequally across tasks](https://epoch.ai/data-insights/llm-inference-price-trends). Check for a newer edition before each delivery.</a:t>
+            </a:r>
+            <a:endParaRPr lang="en-US" sz="1200"/>
+          </a:p>
+          <a:p>
+            <a:pPr marL="0" indent="0">
+              <a:lnSpc>
+                <a:spcPts val="1560"/>
+              </a:lnSpc>
+              <a:spcAft>
+                <a:spcPts val="0"/>
+              </a:spcAft>
+              <a:buNone/>
+            </a:pPr>
+            <a:r>
+              <a:rPr lang="en-US" sz="1200" b="0">
+                <a:solidFill>
+                  <a:srgbClr val="202b33"/>
+                </a:solidFill>
+                <a:latin typeface="Arial"/>
+                <a:ea typeface="Arial"/>
+                <a:cs typeface="Arial"/>
+              </a:rPr>
               <a:t xml:space="preserve"/>
             </a:r>
             <a:endParaRPr lang="en-US" sz="1200"/>
@@ -2073,6 +1844,29 @@
                 <a:cs typeface="Arial"/>
               </a:rPr>
               <a:t xml:space="preserve"/>
+            </a:r>
+            <a:endParaRPr lang="en-US" sz="1200"/>
+          </a:p>
+          <a:p>
+            <a:pPr marL="0" indent="0">
+              <a:lnSpc>
+                <a:spcPts val="1560"/>
+              </a:lnSpc>
+              <a:spcAft>
+                <a:spcPts val="0"/>
+              </a:spcAft>
+              <a:buNone/>
+            </a:pPr>
+            <a:r>
+              <a:rPr lang="en-US" sz="1200" b="0">
+                <a:solidFill>
+                  <a:srgbClr val="202b33"/>
+                </a:solidFill>
+                <a:latin typeface="Arial"/>
+                <a:ea typeface="Arial"/>
+                <a:cs typeface="Arial"/>
+              </a:rPr>
+              <a:t xml:space="preserve">Bridge: your per-token price fell off a cliff and your bill went up, because spend is price times jobs times calls times tokens and cheapness moved every term on the right.</a:t>
             </a:r>
             <a:endParaRPr lang="en-US" sz="1200"/>
           </a:p>
@@ -2185,7 +1979,7 @@
                 <a:ea typeface="Arial"/>
                 <a:cs typeface="Arial"/>
               </a:rPr>
-              <a:t xml:space="preserve">Source slide 6. 05:15 to 07:15</a:t>
+              <a:t xml:space="preserve">Source slide 7. 07:15 to 09:30</a:t>
             </a:r>
             <a:endParaRPr lang="en-US" sz="1200"/>
           </a:p>
@@ -2231,7 +2025,7 @@
                 <a:ea typeface="Arial"/>
                 <a:cs typeface="Arial"/>
               </a:rPr>
-              <a:t xml:space="preserve">1865: better engines burned more coal, not less</a:t>
+              <a:t xml:space="preserve">Density: a frontier call where a lookup would do</a:t>
             </a:r>
             <a:endParaRPr lang="en-US" sz="1200"/>
           </a:p>
@@ -2277,7 +2071,7 @@
                 <a:ea typeface="Arial"/>
                 <a:cs typeface="Arial"/>
               </a:rPr>
-              <a:t xml:space="preserve">Add a lane, get traffic. Elasticity near one.</a:t>
+              <a:t xml:space="preserve">Business mix: products viable only at today's rate</a:t>
             </a:r>
             <a:endParaRPr lang="en-US" sz="1200"/>
           </a:p>
@@ -2323,7 +2117,7 @@
                 <a:ea typeface="Arial"/>
                 <a:cs typeface="Arial"/>
               </a:rPr>
-              <a:t xml:space="preserve">Spend = price × jobs × calls per job × tokens per call</a:t>
+              <a:t xml:space="preserve">Bundled rent: unlimited usage promised in a contract</a:t>
             </a:r>
             <a:endParaRPr lang="en-US" sz="1200"/>
           </a:p>
@@ -2369,7 +2163,7 @@
                 <a:ea typeface="Arial"/>
                 <a:cs typeface="Arial"/>
               </a:rPr>
-              <a:t xml:space="preserve">In 1865 William Stanley Jevons noticed something that annoyed everyone. Steam engines had gotten dramatically more efficient, and Britain was burning far more coal than before, not less. Efficiency made coal useful for more things, so people used it for more things. That is the Jevons paradox, and it is word two.</a:t>
+              <a:t xml:space="preserve">Small format: deterministic code loses the design review</a:t>
             </a:r>
             <a:endParaRPr lang="en-US" sz="1200"/>
           </a:p>
@@ -2415,7 +2209,7 @@
                 <a:ea typeface="Arial"/>
                 <a:cs typeface="Arial"/>
               </a:rPr>
-              <a:t xml:space="preserve">The transport version is word three, induced demand. Add a lane to a congested highway and you get more traffic. Duranton and Turner measured it across US cities in 2011 and found the elasticity of driving with respect to lane-kilometres is roughly one. Build ten percent more road, get ten percent more driving. The congestion comes back.</a:t>
+              <a:t xml:space="preserve">Walk the same chain through your stack. Density: a frontier call where a cache, a regex, or a dictionary lookup would have done, because the call looked free. Longer context, more retries, more competing branches, frontier by default. Business mix: products whose unit economics only work at promotional rates, crowding out products that would have worked at any price. Bundled rent: unlimited-usage promises to customers, baked into a contract, priced against an input you do not control. And the small format: boring deterministic code losing the design review to "just ask the model."</a:t>
             </a:r>
             <a:endParaRPr lang="en-US" sz="1200"/>
           </a:p>
@@ -2461,7 +2255,7 @@
                 <a:ea typeface="Arial"/>
                 <a:cs typeface="Arial"/>
               </a:rPr>
-              <a:t xml:space="preserve">So: your per-token price has fallen off a cliff over the last few years, and your bill went up. Everyone in this room has had that conversation with a CFO and lost it. You are not being gouged and you did not do anything wrong. Spend is price times consumption, and consumption is jobs times calls per job times tokens per call. Cheapness moved every term on the right. Epoch's data through 2025 shows the price of a fixed capability falling fast and very unevenly by task, which is real and worth knowing, and is also exactly the condition under which total spend rises.</a:t>
+              <a:t xml:space="preserve">I call it architectural obesity. It is not that any one of those calls is wrong. Redundancy is worth paying for, big context is worth paying for, three parallel attempts are sometimes exactly right. The failure is that nobody measured what the extra call bought, because at these prices nobody had to.</a:t>
             </a:r>
             <a:endParaRPr lang="en-US" sz="1200"/>
           </a:p>
@@ -2507,7 +2301,7 @@
                 <a:ea typeface="Arial"/>
                 <a:cs typeface="Arial"/>
               </a:rPr>
-              <a:t xml:space="preserve">Jevons (1865), The Coal Question, chapter VII. Duranton and Turner (2011), The Fundamental Law of Road Congestion, American Economic Review 101(6).</a:t>
+              <a:t xml:space="preserve">A design review where "inference is basically free" ended the discussion.</a:t>
             </a:r>
             <a:endParaRPr lang="en-US" sz="1200"/>
           </a:p>
@@ -2553,7 +2347,7 @@
                 <a:ea typeface="Arial"/>
                 <a:cs typeface="Arial"/>
               </a:rPr>
-              <a:t xml:space="preserve">Cottier, Snodin, Owen, Adamczewski (Epoch AI, March 2025), [LLM inference prices have fallen rapidly but unequally across tasks](https://epoch.ai/data-insights/llm-inference-price-trends). Check for a newer edition before each delivery.</a:t>
+              <a:t xml:space="preserve">Ask for one show of hands: who has shipped a frontier call where a lookup would do? Then admit you have too.</a:t>
             </a:r>
             <a:endParaRPr lang="en-US" sz="1200"/>
           </a:p>
@@ -2599,99 +2393,7 @@
                 <a:ea typeface="Arial"/>
                 <a:cs typeface="Arial"/>
               </a:rPr>
-              <a:t xml:space="preserve"/>
-            </a:r>
-            <a:endParaRPr lang="en-US" sz="1200"/>
-          </a:p>
-          <a:p>
-            <a:pPr marL="0" indent="0">
-              <a:lnSpc>
-                <a:spcPts val="1560"/>
-              </a:lnSpc>
-              <a:spcAft>
-                <a:spcPts val="0"/>
-              </a:spcAft>
-              <a:buNone/>
-            </a:pPr>
-            <a:r>
-              <a:rPr lang="en-US" sz="1200" b="0">
-                <a:solidFill>
-                  <a:srgbClr val="202b33"/>
-                </a:solidFill>
-                <a:latin typeface="Arial"/>
-                <a:ea typeface="Arial"/>
-                <a:cs typeface="Arial"/>
-              </a:rPr>
-              <a:t xml:space="preserve"/>
-            </a:r>
-            <a:endParaRPr lang="en-US" sz="1200"/>
-          </a:p>
-          <a:p>
-            <a:pPr marL="0" indent="0">
-              <a:lnSpc>
-                <a:spcPts val="1560"/>
-              </a:lnSpc>
-              <a:spcAft>
-                <a:spcPts val="0"/>
-              </a:spcAft>
-              <a:buNone/>
-            </a:pPr>
-            <a:r>
-              <a:rPr lang="en-US" sz="1200" b="0">
-                <a:solidFill>
-                  <a:srgbClr val="202b33"/>
-                </a:solidFill>
-                <a:latin typeface="Arial"/>
-                <a:ea typeface="Arial"/>
-                <a:cs typeface="Arial"/>
-              </a:rPr>
-              <a:t xml:space="preserve"/>
-            </a:r>
-            <a:endParaRPr lang="en-US" sz="1200"/>
-          </a:p>
-          <a:p>
-            <a:pPr marL="0" indent="0">
-              <a:lnSpc>
-                <a:spcPts val="1560"/>
-              </a:lnSpc>
-              <a:spcAft>
-                <a:spcPts val="0"/>
-              </a:spcAft>
-              <a:buNone/>
-            </a:pPr>
-            <a:r>
-              <a:rPr lang="en-US" sz="1200" b="0">
-                <a:solidFill>
-                  <a:srgbClr val="202b33"/>
-                </a:solidFill>
-                <a:latin typeface="Arial"/>
-                <a:ea typeface="Arial"/>
-                <a:cs typeface="Arial"/>
-              </a:rPr>
-              <a:t xml:space="preserve"/>
-            </a:r>
-            <a:endParaRPr lang="en-US" sz="1200"/>
-          </a:p>
-          <a:p>
-            <a:pPr marL="0" indent="0">
-              <a:lnSpc>
-                <a:spcPts val="1560"/>
-              </a:lnSpc>
-              <a:spcAft>
-                <a:spcPts val="0"/>
-              </a:spcAft>
-              <a:buNone/>
-            </a:pPr>
-            <a:r>
-              <a:rPr lang="en-US" sz="1200" b="0">
-                <a:solidFill>
-                  <a:srgbClr val="202b33"/>
-                </a:solidFill>
-                <a:latin typeface="Arial"/>
-                <a:ea typeface="Arial"/>
-                <a:cs typeface="Arial"/>
-              </a:rPr>
-              <a:t xml:space="preserve"/>
+              <a:t xml:space="preserve">Bridge: the lots stay built, and whoever chooses the architecture is not whoever pays the bill sixty days later.</a:t>
             </a:r>
             <a:endParaRPr lang="en-US" sz="1200"/>
           </a:p>
@@ -2804,7 +2506,7 @@
                 <a:ea typeface="Arial"/>
                 <a:cs typeface="Arial"/>
               </a:rPr>
-              <a:t xml:space="preserve">Source slide 7. 07:15 to 09:30</a:t>
+              <a:t xml:space="preserve">Source slide 10. 09:30 to 11:30</a:t>
             </a:r>
             <a:endParaRPr lang="en-US" sz="1200"/>
           </a:p>
@@ -2850,7 +2552,7 @@
                 <a:ea typeface="Arial"/>
                 <a:cs typeface="Arial"/>
               </a:rPr>
-              <a:t xml:space="preserve">Density: a frontier call where a lookup would do</a:t>
+              <a:t xml:space="preserve">Cost per accepted outcome = total spend ÷ accepted jobs</a:t>
             </a:r>
             <a:endParaRPr lang="en-US" sz="1200"/>
           </a:p>
@@ -2896,7 +2598,7 @@
                 <a:ea typeface="Arial"/>
                 <a:cs typeface="Arial"/>
               </a:rPr>
-              <a:t xml:space="preserve">Business mix: products viable only at today's rate</a:t>
+              <a:t xml:space="preserve">75% accepted means you pay 1.33× sticker. 45% means 2.22×.</a:t>
             </a:r>
             <a:endParaRPr lang="en-US" sz="1200"/>
           </a:p>
@@ -2942,7 +2644,7 @@
                 <a:ea typeface="Arial"/>
                 <a:cs typeface="Arial"/>
               </a:rPr>
-              <a:t xml:space="preserve">Bundled rent: unlimited usage promised in a contract</a:t>
+              <a:t xml:space="preserve">A 30-point acceptance drop costs exactly what doubling every token price costs.</a:t>
             </a:r>
             <a:endParaRPr lang="en-US" sz="1200"/>
           </a:p>
@@ -2988,7 +2690,7 @@
                 <a:ea typeface="Arial"/>
                 <a:cs typeface="Arial"/>
               </a:rPr>
-              <a:t xml:space="preserve">Small format: deterministic code loses the design review</a:t>
+              <a:t xml:space="preserve">Before any dollar figure, define the denominator. An accepted outcome meets a rule you wrote down. An impressive answer that a human quietly repairs afterwards is not a success, it is a success plus a hidden salary. Count inference, tools, infrastructure and recovery. A blended token rate is not a unit economics model.</a:t>
             </a:r>
             <a:endParaRPr lang="en-US" sz="1200"/>
           </a:p>
@@ -3034,7 +2736,7 @@
                 <a:ea typeface="Arial"/>
                 <a:cs typeface="Arial"/>
               </a:rPr>
-              <a:t xml:space="preserve">Walk the same chain through your stack. Density: a frontier call where a cache, a regex, or a dictionary lookup would have done, because the call looked free. Longer context, more retries, more competing branches, frontier by default. Business mix: products whose unit economics only work at promotional rates, crowding out products that would have worked at any price. Bundled rent: unlimited-usage promises to customers, baked into a contract, priced against an input you do not control. And the small format: boring deterministic code losing the design review to "just ask the model."</a:t>
+              <a:t xml:space="preserve">Now the part worth remembering. Divide by the acceptance rate and you get a multiplier on your sticker price. Seventy-five percent acceptance means you are paying one and a third times the list price for every result you keep. Forty-five percent means two point two. Run those two numbers together: dropping from seventy-five to forty-five percent acceptance costs you exactly the same as every token in your stack doubling in price overnight. One of those is on the front page. The other one is a Tuesday.</a:t>
             </a:r>
             <a:endParaRPr lang="en-US" sz="1200"/>
           </a:p>
@@ -3080,29 +2782,6 @@
                 <a:ea typeface="Arial"/>
                 <a:cs typeface="Arial"/>
               </a:rPr>
-              <a:t xml:space="preserve">I call it architectural obesity. It is not that any one of those calls is wrong. Redundancy is worth paying for, big context is worth paying for, three parallel attempts are sometimes exactly right. The failure is that nobody measured what the extra call bought, because at these prices nobody had to.</a:t>
-            </a:r>
-            <a:endParaRPr lang="en-US" sz="1200"/>
-          </a:p>
-          <a:p>
-            <a:pPr marL="0" indent="0">
-              <a:lnSpc>
-                <a:spcPts val="1560"/>
-              </a:lnSpc>
-              <a:spcAft>
-                <a:spcPts val="0"/>
-              </a:spcAft>
-              <a:buNone/>
-            </a:pPr>
-            <a:r>
-              <a:rPr lang="en-US" sz="1200" b="0">
-                <a:solidFill>
-                  <a:srgbClr val="202b33"/>
-                </a:solidFill>
-                <a:latin typeface="Arial"/>
-                <a:ea typeface="Arial"/>
-                <a:cs typeface="Arial"/>
-              </a:rPr>
               <a:t xml:space="preserve"/>
             </a:r>
             <a:endParaRPr lang="en-US" sz="1200"/>
@@ -3126,29 +2805,6 @@
                 <a:ea typeface="Arial"/>
                 <a:cs typeface="Arial"/>
               </a:rPr>
-              <a:t xml:space="preserve">A design review where "inference is basically free" ended the discussion.</a:t>
-            </a:r>
-            <a:endParaRPr lang="en-US" sz="1200"/>
-          </a:p>
-          <a:p>
-            <a:pPr marL="0" indent="0">
-              <a:lnSpc>
-                <a:spcPts val="1560"/>
-              </a:lnSpc>
-              <a:spcAft>
-                <a:spcPts val="0"/>
-              </a:spcAft>
-              <a:buNone/>
-            </a:pPr>
-            <a:r>
-              <a:rPr lang="en-US" sz="1200" b="0">
-                <a:solidFill>
-                  <a:srgbClr val="202b33"/>
-                </a:solidFill>
-                <a:latin typeface="Arial"/>
-                <a:ea typeface="Arial"/>
-                <a:cs typeface="Arial"/>
-              </a:rPr>
               <a:t xml:space="preserve"/>
             </a:r>
             <a:endParaRPr lang="en-US" sz="1200"/>
@@ -3172,7 +2828,7 @@
                 <a:ea typeface="Arial"/>
                 <a:cs typeface="Arial"/>
               </a:rPr>
-              <a:t xml:space="preserve">Ask for one show of hands: who has shipped a frontier call where a lookup would do? Then admit you have too.</a:t>
+              <a:t xml:space="preserve">Do the division on stage. Thirty seconds: name your product's accepted outcome in one sentence. If that is hard, the economics conversation just found a product problem.</a:t>
             </a:r>
             <a:endParaRPr lang="en-US" sz="1200"/>
           </a:p>
@@ -3218,7 +2874,7 @@
                 <a:ea typeface="Arial"/>
                 <a:cs typeface="Arial"/>
               </a:rPr>
-              <a:t xml:space="preserve">Bridge: the lots stay built, and whoever chooses the architecture is not whoever pays the bill sixty days later.</a:t>
+              <a:t xml:space="preserve">Bridge: run the sweep at one, two, five and ten times price, then multiply by your own volume before you feel anything about it.</a:t>
             </a:r>
             <a:endParaRPr lang="en-US" sz="1200"/>
           </a:p>
@@ -3331,7 +2987,7 @@
                 <a:ea typeface="Arial"/>
                 <a:cs typeface="Arial"/>
               </a:rPr>
-              <a:t xml:space="preserve">Source slide 10. 09:30 to 11:30</a:t>
+              <a:t xml:space="preserve">Source slide 12. 11:30 to 13:15</a:t>
             </a:r>
             <a:endParaRPr lang="en-US" sz="1200"/>
           </a:p>
@@ -3377,7 +3033,7 @@
                 <a:ea typeface="Arial"/>
                 <a:cs typeface="Arial"/>
               </a:rPr>
-              <a:t xml:space="preserve">Cost per accepted outcome = total spend ÷ accepted jobs</a:t>
+              <a:t xml:space="preserve">Word six: asset specificity. Word seven: hold-up.</a:t>
             </a:r>
             <a:endParaRPr lang="en-US" sz="1200"/>
           </a:p>
@@ -3423,7 +3079,7 @@
                 <a:ea typeface="Arial"/>
                 <a:cs typeface="Arial"/>
               </a:rPr>
-              <a:t xml:space="preserve">75% accepted means you pay 1.33× sticker. 45% means 2.22×.</a:t>
+              <a:t xml:space="preserve">An investment worth a lot inside this relationship and little outside it</a:t>
             </a:r>
             <a:endParaRPr lang="en-US" sz="1200"/>
           </a:p>
@@ -3469,7 +3125,7 @@
                 <a:ea typeface="Arial"/>
                 <a:cs typeface="Arial"/>
               </a:rPr>
-              <a:t xml:space="preserve">A 30-point acceptance drop costs exactly what doubling every token price costs.</a:t>
+              <a:t xml:space="preserve">Your prompts, evals, fine-tunes, and that unlimited-usage clause</a:t>
             </a:r>
             <a:endParaRPr lang="en-US" sz="1200"/>
           </a:p>
@@ -3515,7 +3171,7 @@
                 <a:ea typeface="Arial"/>
                 <a:cs typeface="Arial"/>
               </a:rPr>
-              <a:t xml:space="preserve">Before any dollar figure, define the denominator. An accepted outcome meets a rule you wrote down. An impressive answer that a human quietly repairs afterwards is not a success, it is a success plus a hidden salary. Count inference, tools, infrastructure and recovery. A blended token rate is not a unit economics model.</a:t>
+              <a:t xml:space="preserve">This is the slide I would keep if you cut every other one. Oliver Williamson won a Nobel in 2009 for working out what happens when two parties make investments that only pay off inside their relationship. He called it asset specificity, and the trouble it produces is called hold-up.</a:t>
             </a:r>
             <a:endParaRPr lang="en-US" sz="1200"/>
           </a:p>
@@ -3561,7 +3217,7 @@
                 <a:ea typeface="Arial"/>
                 <a:cs typeface="Arial"/>
               </a:rPr>
-              <a:t xml:space="preserve">Now the part worth remembering. Divide by the acceptance rate and you get a multiplier on your sticker price. Seventy-five percent acceptance means you are paying one and a third times the list price for every result you keep. Forty-five percent means two point two. Run those two numbers together: dropping from seventy-five to forty-five percent acceptance costs you exactly the same as every token in your stack doubling in price overnight. One of those is on the front page. The other one is a Tuesday.</a:t>
+              <a:t xml:space="preserve">So stop thinking of this as shopping, where the customer holds the power because they can leave. You are contracting, with a much better capitalized counterparty, and your architecture is the collateral. That reframe is the whole talk, and everything after this is just a way of reducing specificity or pricing the exposure.</a:t>
             </a:r>
             <a:endParaRPr lang="en-US" sz="1200"/>
           </a:p>
@@ -3653,29 +3309,6 @@
                 <a:ea typeface="Arial"/>
                 <a:cs typeface="Arial"/>
               </a:rPr>
-              <a:t xml:space="preserve">Do the division on stage. Thirty seconds: name your product's accepted outcome in one sentence. If that is hard, the economics conversation just found a product problem.</a:t>
-            </a:r>
-            <a:endParaRPr lang="en-US" sz="1200"/>
-          </a:p>
-          <a:p>
-            <a:pPr marL="0" indent="0">
-              <a:lnSpc>
-                <a:spcPts val="1560"/>
-              </a:lnSpc>
-              <a:spcAft>
-                <a:spcPts val="0"/>
-              </a:spcAft>
-              <a:buNone/>
-            </a:pPr>
-            <a:r>
-              <a:rPr lang="en-US" sz="1200" b="0">
-                <a:solidFill>
-                  <a:srgbClr val="202b33"/>
-                </a:solidFill>
-                <a:latin typeface="Arial"/>
-                <a:ea typeface="Arial"/>
-                <a:cs typeface="Arial"/>
-              </a:rPr>
               <a:t xml:space="preserve"/>
             </a:r>
             <a:endParaRPr lang="en-US" sz="1200"/>
@@ -3699,7 +3332,30 @@
                 <a:ea typeface="Arial"/>
                 <a:cs typeface="Arial"/>
               </a:rPr>
-              <a:t xml:space="preserve">Bridge: run the sweep at one, two, five and ten times price, then multiply by your own volume before you feel anything about it.</a:t>
+              <a:t xml:space="preserve"/>
+            </a:r>
+            <a:endParaRPr lang="en-US" sz="1200"/>
+          </a:p>
+          <a:p>
+            <a:pPr marL="0" indent="0">
+              <a:lnSpc>
+                <a:spcPts val="1560"/>
+              </a:lnSpc>
+              <a:spcAft>
+                <a:spcPts val="0"/>
+              </a:spcAft>
+              <a:buNone/>
+            </a:pPr>
+            <a:r>
+              <a:rPr lang="en-US" sz="1200" b="0">
+                <a:solidFill>
+                  <a:srgbClr val="202b33"/>
+                </a:solidFill>
+                <a:latin typeface="Arial"/>
+                <a:ea typeface="Arial"/>
+                <a:cs typeface="Arial"/>
+              </a:rPr>
+              <a:t xml:space="preserve">Bridge: so price reversibility as the option it is, and bring three prices to the design review: today, without the offer, and the most you could survive.</a:t>
             </a:r>
             <a:endParaRPr lang="en-US" sz="1200"/>
           </a:p>
@@ -3812,7 +3468,7 @@
                 <a:ea typeface="Arial"/>
                 <a:cs typeface="Arial"/>
               </a:rPr>
-              <a:t xml:space="preserve">Source slide 12. 11:30 to 13:30</a:t>
+              <a:t xml:space="preserve">Source slide 15. 13:15 to 15:00</a:t>
             </a:r>
             <a:endParaRPr lang="en-US" sz="1200"/>
           </a:p>
@@ -3858,7 +3514,7 @@
                 <a:ea typeface="Arial"/>
                 <a:cs typeface="Arial"/>
               </a:rPr>
-              <a:t xml:space="preserve">Word six: asset specificity. Word seven: hold-up.</a:t>
+              <a:t xml:space="preserve">Externality · Induced demand · Jevons paradox · Path dependence</a:t>
             </a:r>
             <a:endParaRPr lang="en-US" sz="1200"/>
           </a:p>
@@ -3904,7 +3560,7 @@
                 <a:ea typeface="Arial"/>
                 <a:cs typeface="Arial"/>
               </a:rPr>
-              <a:t xml:space="preserve">An investment worth a lot inside this relationship and little outside it</a:t>
+              <a:t xml:space="preserve">Moral hazard · Credible commitment · Asset specificity · Real option</a:t>
             </a:r>
             <a:endParaRPr lang="en-US" sz="1200"/>
           </a:p>
@@ -3950,7 +3606,7 @@
                 <a:ea typeface="Arial"/>
                 <a:cs typeface="Arial"/>
               </a:rPr>
-              <a:t xml:space="preserve">Your prompts, evals, fine-tunes, and that unlimited-usage clause</a:t>
+              <a:t xml:space="preserve">Build for more than one price.</a:t>
             </a:r>
             <a:endParaRPr lang="en-US" sz="1200"/>
           </a:p>
@@ -3996,7 +3652,7 @@
                 <a:ea typeface="Arial"/>
                 <a:cs typeface="Arial"/>
               </a:rPr>
-              <a:t xml:space="preserve">This is the slide I would keep if you cut every other one. Oliver Williamson won a Nobel in 2009 for working out what happens when two parties make investments that only pay off inside their relationship. He called it asset specificity, and the trouble it produces is called hold-up.</a:t>
+              <a:t xml:space="preserve">Back to the electricity. Use the cheap input. It is genuinely great and I am not asking anyone to be miserable about it. Just understand what it encouraged you to build, and keep the expensive decisions reversible while you find out.</a:t>
             </a:r>
             <a:endParaRPr lang="en-US" sz="1200"/>
           </a:p>
@@ -4042,7 +3698,7 @@
                 <a:ea typeface="Arial"/>
                 <a:cs typeface="Arial"/>
               </a:rPr>
-              <a:t xml:space="preserve">The shape is always the same. You make an investment that is worth a great deal here and very little anywhere else. That surplus, the part that exists only because you are locked in, is a prize, and at renewal your counterparty can reach for it. Nobody has to be a villain. It is simply what the structure permits, and rational parties do it.</a:t>
+              <a:t xml:space="preserve">There are your eight words. Externality, because the cost moved rather than vanished. Induced demand and Jevons, because cheaper made you use more, not less. Path dependence, because the lots stay built. Moral hazard, because whoever chooses is not whoever pays. Credible commitment, because those contracts are moves in a game and not disclosures about it. Asset specificity, because your architecture is worth more here than anywhere else. And real option, because reversibility is something you buy, not something you feel.</a:t>
             </a:r>
             <a:endParaRPr lang="en-US" sz="1200"/>
           </a:p>
@@ -4088,7 +3744,7 @@
                 <a:ea typeface="Arial"/>
                 <a:cs typeface="Arial"/>
               </a:rPr>
-              <a:t xml:space="preserve">So stop thinking of this as shopping, where the customer holds the power because they can leave. You are contracting, with a much better capitalized counterparty, and your architecture is the collateral. That reframe is the whole talk, and everything after this is just a way of reducing specificity or pricing the exposure.</a:t>
+              <a:t xml:space="preserve">Cheap intelligence changes incentives before it changes organizations.</a:t>
             </a:r>
             <a:endParaRPr lang="en-US" sz="1200"/>
           </a:p>
@@ -4180,6 +3836,29 @@
                 <a:ea typeface="Arial"/>
                 <a:cs typeface="Arial"/>
               </a:rPr>
+              <a:t xml:space="preserve">Say the last line slowly, then stop talking. For questions, jump back to the sweep table if this route kept slide 11.</a:t>
+            </a:r>
+            <a:endParaRPr lang="en-US" sz="1200"/>
+          </a:p>
+          <a:p>
+            <a:pPr marL="0" indent="0">
+              <a:lnSpc>
+                <a:spcPts val="1560"/>
+              </a:lnSpc>
+              <a:spcAft>
+                <a:spcPts val="0"/>
+              </a:spcAft>
+              <a:buNone/>
+            </a:pPr>
+            <a:r>
+              <a:rPr lang="en-US" sz="1200" b="0">
+                <a:solidFill>
+                  <a:srgbClr val="202b33"/>
+                </a:solidFill>
+                <a:latin typeface="Arial"/>
+                <a:ea typeface="Arial"/>
+                <a:cs typeface="Arial"/>
+              </a:rPr>
               <a:t xml:space="preserve"/>
             </a:r>
             <a:endParaRPr lang="en-US" sz="1200"/>
@@ -4204,29 +3883,6 @@
                 <a:cs typeface="Arial"/>
               </a:rPr>
               <a:t xml:space="preserve"/>
-            </a:r>
-            <a:endParaRPr lang="en-US" sz="1200"/>
-          </a:p>
-          <a:p>
-            <a:pPr marL="0" indent="0">
-              <a:lnSpc>
-                <a:spcPts val="1560"/>
-              </a:lnSpc>
-              <a:spcAft>
-                <a:spcPts val="0"/>
-              </a:spcAft>
-              <a:buNone/>
-            </a:pPr>
-            <a:r>
-              <a:rPr lang="en-US" sz="1200" b="0">
-                <a:solidFill>
-                  <a:srgbClr val="202b33"/>
-                </a:solidFill>
-                <a:latin typeface="Arial"/>
-                <a:ea typeface="Arial"/>
-                <a:cs typeface="Arial"/>
-              </a:rPr>
-              <a:t xml:space="preserve">Bridge: so price reversibility as the option it is, and bring three prices to the design review: today, without the offer, and the most you could survive.</a:t>
             </a:r>
             <a:endParaRPr lang="en-US" sz="1200"/>
           </a:p>
@@ -4293,7 +3949,7 @@
                 <a:ea typeface="Arial"/>
                 <a:cs typeface="Arial"/>
               </a:rPr>
-              <a:t xml:space="preserve">Buy Me a Free Tier</a:t>
+              <a:t xml:space="preserve">Brooke Group Ltd. v. Brown &amp; Williamson Tobacco Corp., 509 U.S. 209 (1993), on the recoupment requirement in predatory-pricing claims.</a:t>
             </a:r>
             <a:endParaRPr lang="en-US" sz="1200"/>
           </a:p>
@@ -4339,7 +3995,7 @@
                 <a:ea typeface="Arial"/>
                 <a:cs typeface="Arial"/>
               </a:rPr>
-              <a:t xml:space="preserve">Source slide 15. 13:30 to 15:00</a:t>
+              <a:t xml:space="preserve">Rochet and Tirole (2003), Platform Competition in Two-Sided Markets, Journal of the European Economic Association, on cross-subsidy between sides of a market.</a:t>
             </a:r>
             <a:endParaRPr lang="en-US" sz="1200"/>
           </a:p>
@@ -4385,7 +4041,7 @@
                 <a:ea typeface="Arial"/>
                 <a:cs typeface="Arial"/>
               </a:rPr>
-              <a:t xml:space="preserve">Externality · Induced demand · Jevons paradox · Path dependence</a:t>
+              <a:t xml:space="preserve">Jevons (1865), The Coal Question, chapter VII. Duranton and Turner (2011), The Fundamental Law of Road Congestion, American Economic Review 101(6).</a:t>
             </a:r>
             <a:endParaRPr lang="en-US" sz="1200"/>
           </a:p>
@@ -4431,375 +4087,7 @@
                 <a:ea typeface="Arial"/>
                 <a:cs typeface="Arial"/>
               </a:rPr>
-              <a:t xml:space="preserve">Moral hazard · Credible commitment · Asset specificity · Real option</a:t>
-            </a:r>
-            <a:endParaRPr lang="en-US" sz="1200"/>
-          </a:p>
-          <a:p>
-            <a:pPr marL="0" indent="0">
-              <a:lnSpc>
-                <a:spcPts val="1560"/>
-              </a:lnSpc>
-              <a:spcAft>
-                <a:spcPts val="0"/>
-              </a:spcAft>
-              <a:buNone/>
-            </a:pPr>
-            <a:r>
-              <a:rPr lang="en-US" sz="1200" b="0">
-                <a:solidFill>
-                  <a:srgbClr val="202b33"/>
-                </a:solidFill>
-                <a:latin typeface="Arial"/>
-                <a:ea typeface="Arial"/>
-                <a:cs typeface="Arial"/>
-              </a:rPr>
-              <a:t xml:space="preserve"/>
-            </a:r>
-            <a:endParaRPr lang="en-US" sz="1200"/>
-          </a:p>
-          <a:p>
-            <a:pPr marL="0" indent="0">
-              <a:lnSpc>
-                <a:spcPts val="1560"/>
-              </a:lnSpc>
-              <a:spcAft>
-                <a:spcPts val="0"/>
-              </a:spcAft>
-              <a:buNone/>
-            </a:pPr>
-            <a:r>
-              <a:rPr lang="en-US" sz="1200" b="0">
-                <a:solidFill>
-                  <a:srgbClr val="202b33"/>
-                </a:solidFill>
-                <a:latin typeface="Arial"/>
-                <a:ea typeface="Arial"/>
-                <a:cs typeface="Arial"/>
-              </a:rPr>
-              <a:t xml:space="preserve">Build for more than one price.</a:t>
-            </a:r>
-            <a:endParaRPr lang="en-US" sz="1200"/>
-          </a:p>
-          <a:p>
-            <a:pPr marL="0" indent="0">
-              <a:lnSpc>
-                <a:spcPts val="1560"/>
-              </a:lnSpc>
-              <a:spcAft>
-                <a:spcPts val="0"/>
-              </a:spcAft>
-              <a:buNone/>
-            </a:pPr>
-            <a:r>
-              <a:rPr lang="en-US" sz="1200" b="0">
-                <a:solidFill>
-                  <a:srgbClr val="202b33"/>
-                </a:solidFill>
-                <a:latin typeface="Arial"/>
-                <a:ea typeface="Arial"/>
-                <a:cs typeface="Arial"/>
-              </a:rPr>
-              <a:t xml:space="preserve"/>
-            </a:r>
-            <a:endParaRPr lang="en-US" sz="1200"/>
-          </a:p>
-          <a:p>
-            <a:pPr marL="0" indent="0">
-              <a:lnSpc>
-                <a:spcPts val="1560"/>
-              </a:lnSpc>
-              <a:spcAft>
-                <a:spcPts val="0"/>
-              </a:spcAft>
-              <a:buNone/>
-            </a:pPr>
-            <a:r>
-              <a:rPr lang="en-US" sz="1200" b="0">
-                <a:solidFill>
-                  <a:srgbClr val="202b33"/>
-                </a:solidFill>
-                <a:latin typeface="Arial"/>
-                <a:ea typeface="Arial"/>
-                <a:cs typeface="Arial"/>
-              </a:rPr>
-              <a:t xml:space="preserve">Back to the electricity. Use the cheap input. It is genuinely great and I am not asking anyone to be miserable about it. Just understand what it encouraged you to build, and keep the expensive decisions reversible while you find out.</a:t>
-            </a:r>
-            <a:endParaRPr lang="en-US" sz="1200"/>
-          </a:p>
-          <a:p>
-            <a:pPr marL="0" indent="0">
-              <a:lnSpc>
-                <a:spcPts val="1560"/>
-              </a:lnSpc>
-              <a:spcAft>
-                <a:spcPts val="0"/>
-              </a:spcAft>
-              <a:buNone/>
-            </a:pPr>
-            <a:r>
-              <a:rPr lang="en-US" sz="1200" b="0">
-                <a:solidFill>
-                  <a:srgbClr val="202b33"/>
-                </a:solidFill>
-                <a:latin typeface="Arial"/>
-                <a:ea typeface="Arial"/>
-                <a:cs typeface="Arial"/>
-              </a:rPr>
-              <a:t xml:space="preserve"/>
-            </a:r>
-            <a:endParaRPr lang="en-US" sz="1200"/>
-          </a:p>
-          <a:p>
-            <a:pPr marL="0" indent="0">
-              <a:lnSpc>
-                <a:spcPts val="1560"/>
-              </a:lnSpc>
-              <a:spcAft>
-                <a:spcPts val="0"/>
-              </a:spcAft>
-              <a:buNone/>
-            </a:pPr>
-            <a:r>
-              <a:rPr lang="en-US" sz="1200" b="0">
-                <a:solidFill>
-                  <a:srgbClr val="202b33"/>
-                </a:solidFill>
-                <a:latin typeface="Arial"/>
-                <a:ea typeface="Arial"/>
-                <a:cs typeface="Arial"/>
-              </a:rPr>
-              <a:t xml:space="preserve">There are your eight words. Externality, because the cost moved rather than vanished. Induced demand and Jevons, because cheaper made you use more, not less. Path dependence, because the lots stay built. Moral hazard, because whoever chooses is not whoever pays. Credible commitment, because those contracts are moves in a game and not disclosures about it. Asset specificity, because your architecture is worth more here than anywhere else. And real option, because reversibility is something you buy, not something you feel.</a:t>
-            </a:r>
-            <a:endParaRPr lang="en-US" sz="1200"/>
-          </a:p>
-          <a:p>
-            <a:pPr marL="0" indent="0">
-              <a:lnSpc>
-                <a:spcPts val="1560"/>
-              </a:lnSpc>
-              <a:spcAft>
-                <a:spcPts val="0"/>
-              </a:spcAft>
-              <a:buNone/>
-            </a:pPr>
-            <a:r>
-              <a:rPr lang="en-US" sz="1200" b="0">
-                <a:solidFill>
-                  <a:srgbClr val="202b33"/>
-                </a:solidFill>
-                <a:latin typeface="Arial"/>
-                <a:ea typeface="Arial"/>
-                <a:cs typeface="Arial"/>
-              </a:rPr>
-              <a:t xml:space="preserve"/>
-            </a:r>
-            <a:endParaRPr lang="en-US" sz="1200"/>
-          </a:p>
-          <a:p>
-            <a:pPr marL="0" indent="0">
-              <a:lnSpc>
-                <a:spcPts val="1560"/>
-              </a:lnSpc>
-              <a:spcAft>
-                <a:spcPts val="0"/>
-              </a:spcAft>
-              <a:buNone/>
-            </a:pPr>
-            <a:r>
-              <a:rPr lang="en-US" sz="1200" b="0">
-                <a:solidFill>
-                  <a:srgbClr val="202b33"/>
-                </a:solidFill>
-                <a:latin typeface="Arial"/>
-                <a:ea typeface="Arial"/>
-                <a:cs typeface="Arial"/>
-              </a:rPr>
-              <a:t xml:space="preserve">Some low prices are temporary. Some are a preview of genuinely cheaper production. You do not have to know which. You have to measure outcomes and keep the big choices reversible either way.</a:t>
-            </a:r>
-            <a:endParaRPr lang="en-US" sz="1200"/>
-          </a:p>
-          <a:p>
-            <a:pPr marL="0" indent="0">
-              <a:lnSpc>
-                <a:spcPts val="1560"/>
-              </a:lnSpc>
-              <a:spcAft>
-                <a:spcPts val="0"/>
-              </a:spcAft>
-              <a:buNone/>
-            </a:pPr>
-            <a:r>
-              <a:rPr lang="en-US" sz="1200" b="0">
-                <a:solidFill>
-                  <a:srgbClr val="202b33"/>
-                </a:solidFill>
-                <a:latin typeface="Arial"/>
-                <a:ea typeface="Arial"/>
-                <a:cs typeface="Arial"/>
-              </a:rPr>
-              <a:t xml:space="preserve"/>
-            </a:r>
-            <a:endParaRPr lang="en-US" sz="1200"/>
-          </a:p>
-          <a:p>
-            <a:pPr marL="0" indent="0">
-              <a:lnSpc>
-                <a:spcPts val="1560"/>
-              </a:lnSpc>
-              <a:spcAft>
-                <a:spcPts val="0"/>
-              </a:spcAft>
-              <a:buNone/>
-            </a:pPr>
-            <a:r>
-              <a:rPr lang="en-US" sz="1200" b="0">
-                <a:solidFill>
-                  <a:srgbClr val="202b33"/>
-                </a:solidFill>
-                <a:latin typeface="Arial"/>
-                <a:ea typeface="Arial"/>
-                <a:cs typeface="Arial"/>
-              </a:rPr>
-              <a:t xml:space="preserve">Cheap intelligence changes incentives before it changes organizations.</a:t>
-            </a:r>
-            <a:endParaRPr lang="en-US" sz="1200"/>
-          </a:p>
-          <a:p>
-            <a:pPr marL="0" indent="0">
-              <a:lnSpc>
-                <a:spcPts val="1560"/>
-              </a:lnSpc>
-              <a:spcAft>
-                <a:spcPts val="0"/>
-              </a:spcAft>
-              <a:buNone/>
-            </a:pPr>
-            <a:r>
-              <a:rPr lang="en-US" sz="1200" b="0">
-                <a:solidFill>
-                  <a:srgbClr val="202b33"/>
-                </a:solidFill>
-                <a:latin typeface="Arial"/>
-                <a:ea typeface="Arial"/>
-                <a:cs typeface="Arial"/>
-              </a:rPr>
-              <a:t xml:space="preserve"/>
-            </a:r>
-            <a:endParaRPr lang="en-US" sz="1200"/>
-          </a:p>
-          <a:p>
-            <a:pPr marL="0" indent="0">
-              <a:lnSpc>
-                <a:spcPts val="1560"/>
-              </a:lnSpc>
-              <a:spcAft>
-                <a:spcPts val="0"/>
-              </a:spcAft>
-              <a:buNone/>
-            </a:pPr>
-            <a:r>
-              <a:rPr lang="en-US" sz="1200" b="0">
-                <a:solidFill>
-                  <a:srgbClr val="202b33"/>
-                </a:solidFill>
-                <a:latin typeface="Arial"/>
-                <a:ea typeface="Arial"/>
-                <a:cs typeface="Arial"/>
-              </a:rPr>
-              <a:t xml:space="preserve"/>
-            </a:r>
-            <a:endParaRPr lang="en-US" sz="1200"/>
-          </a:p>
-          <a:p>
-            <a:pPr marL="0" indent="0">
-              <a:lnSpc>
-                <a:spcPts val="1560"/>
-              </a:lnSpc>
-              <a:spcAft>
-                <a:spcPts val="0"/>
-              </a:spcAft>
-              <a:buNone/>
-            </a:pPr>
-            <a:r>
-              <a:rPr lang="en-US" sz="1200" b="0">
-                <a:solidFill>
-                  <a:srgbClr val="202b33"/>
-                </a:solidFill>
-                <a:latin typeface="Arial"/>
-                <a:ea typeface="Arial"/>
-                <a:cs typeface="Arial"/>
-              </a:rPr>
-              <a:t xml:space="preserve"/>
-            </a:r>
-            <a:endParaRPr lang="en-US" sz="1200"/>
-          </a:p>
-          <a:p>
-            <a:pPr marL="0" indent="0">
-              <a:lnSpc>
-                <a:spcPts val="1560"/>
-              </a:lnSpc>
-              <a:spcAft>
-                <a:spcPts val="0"/>
-              </a:spcAft>
-              <a:buNone/>
-            </a:pPr>
-            <a:r>
-              <a:rPr lang="en-US" sz="1200" b="0">
-                <a:solidFill>
-                  <a:srgbClr val="202b33"/>
-                </a:solidFill>
-                <a:latin typeface="Arial"/>
-                <a:ea typeface="Arial"/>
-                <a:cs typeface="Arial"/>
-              </a:rPr>
-              <a:t xml:space="preserve">Say the last line slowly, then stop talking. For questions, jump back to the sweep table if this route kept slide 11.</a:t>
-            </a:r>
-            <a:endParaRPr lang="en-US" sz="1200"/>
-          </a:p>
-          <a:p>
-            <a:pPr marL="0" indent="0">
-              <a:lnSpc>
-                <a:spcPts val="1560"/>
-              </a:lnSpc>
-              <a:spcAft>
-                <a:spcPts val="0"/>
-              </a:spcAft>
-              <a:buNone/>
-            </a:pPr>
-            <a:r>
-              <a:rPr lang="en-US" sz="1200" b="0">
-                <a:solidFill>
-                  <a:srgbClr val="202b33"/>
-                </a:solidFill>
-                <a:latin typeface="Arial"/>
-                <a:ea typeface="Arial"/>
-                <a:cs typeface="Arial"/>
-              </a:rPr>
-              <a:t xml:space="preserve"/>
-            </a:r>
-            <a:endParaRPr lang="en-US" sz="1200"/>
-          </a:p>
-          <a:p>
-            <a:pPr marL="0" indent="0">
-              <a:lnSpc>
-                <a:spcPts val="1560"/>
-              </a:lnSpc>
-              <a:spcAft>
-                <a:spcPts val="0"/>
-              </a:spcAft>
-              <a:buNone/>
-            </a:pPr>
-            <a:r>
-              <a:rPr lang="en-US" sz="1200" b="0">
-                <a:solidFill>
-                  <a:srgbClr val="202b33"/>
-                </a:solidFill>
-                <a:latin typeface="Arial"/>
-                <a:ea typeface="Arial"/>
-                <a:cs typeface="Arial"/>
-              </a:rPr>
-              <a:t xml:space="preserve"/>
+              <a:t xml:space="preserve">Cottier, Snodin, Owen, Adamczewski (Epoch AI, March 2025), [LLM inference prices have fallen rapidly but unequally across tasks](https://epoch.ai/data-insights/llm-inference-price-trends). Check for a newer edition before each delivery.</a:t>
             </a:r>
             <a:endParaRPr lang="en-US" sz="1200"/>
           </a:p>
@@ -5084,7 +4372,7 @@
                 <a:ea typeface="Arial"/>
                 <a:cs typeface="Arial"/>
               </a:rPr>
-              <a:t xml:space="preserve">8 source sections</a:t>
+              <a:t xml:space="preserve">7 source sections</a:t>
             </a:r>
             <a:endParaRPr lang="en-US" sz="1575"/>
           </a:p>
@@ -5206,931 +4494,6 @@
                 <a:cs typeface="Arial"/>
               </a:rPr>
               <a:t xml:space="preserve">1</a:t>
-            </a:r>
-            <a:endParaRPr lang="en-US" sz="975"/>
-          </a:p>
-        </p:txBody>
-      </p:sp>
-    </p:spTree>
-  </p:cSld>
-  <p:clrMapOvr>
-    <a:masterClrMapping/>
-  </p:clrMapOvr>
-</p:sld>
-</file>
-
-<file path=ppt/slides/slide10.xml><?xml version="1.0" encoding="utf-8"?>
-<p:sld xmlns:a="http://schemas.openxmlformats.org/drawingml/2006/main" xmlns:r="http://schemas.openxmlformats.org/officeDocument/2006/relationships" xmlns:p="http://schemas.openxmlformats.org/presentationml/2006/main">
-  <p:cSld name="Slide 10">
-    <p:bg>
-      <p:bgPr>
-        <a:solidFill>
-          <a:srgbClr val="FAFAF7"/>
-        </a:solidFill>
-        <a:effectLst/>
-      </p:bgPr>
-    </p:bg>
-    <p:spTree>
-      <p:nvGrpSpPr>
-        <p:cNvPr id="1" name=""/>
-        <p:cNvGrpSpPr/>
-        <p:nvPr/>
-      </p:nvGrpSpPr>
-      <p:grpSpPr>
-        <a:xfrm>
-          <a:off x="0" y="0"/>
-          <a:ext cx="0" cy="0"/>
-          <a:chOff x="0" y="0"/>
-          <a:chExt cx="0" cy="0"/>
-        </a:xfrm>
-      </p:grpSpPr>
-      <p:sp>
-        <p:nvSpPr>
-          <p:cNvPr id="2" name="Text 2"/>
-          <p:cNvSpPr txBox="1"/>
-          <p:nvPr/>
-        </p:nvSpPr>
-        <p:spPr>
-          <a:xfrm>
-            <a:off x="457200" y="266700"/>
-            <a:ext cx="9144000" cy="228600"/>
-          </a:xfrm>
-          <a:prstGeom prst="rect">
-            <a:avLst/>
-          </a:prstGeom>
-          <a:noFill/>
-          <a:ln>
-            <a:noFill/>
-          </a:ln>
-        </p:spPr>
-        <p:txBody>
-          <a:bodyPr wrap="none" lIns="0" tIns="0" rIns="0" bIns="0" anchor="t">
-            <a:noAutofit/>
-          </a:bodyPr>
-          <a:lstStyle/>
-          <a:p>
-            <a:pPr marL="0" indent="0">
-              <a:lnSpc>
-                <a:spcPts val="1365"/>
-              </a:lnSpc>
-              <a:spcAft>
-                <a:spcPts val="0"/>
-              </a:spcAft>
-              <a:buNone/>
-            </a:pPr>
-            <a:r>
-              <a:rPr lang="en-US" sz="1050" b="1">
-                <a:solidFill>
-                  <a:srgbClr val="246957"/>
-                </a:solidFill>
-                <a:latin typeface="Arial"/>
-                <a:ea typeface="Arial"/>
-                <a:cs typeface="Arial"/>
-              </a:rPr>
-              <a:t xml:space="preserve">SOURCE REFERENCES</a:t>
-            </a:r>
-            <a:endParaRPr lang="en-US" sz="1050"/>
-          </a:p>
-        </p:txBody>
-      </p:sp>
-      <p:sp>
-        <p:nvSpPr>
-          <p:cNvPr id="3" name="Text 3"/>
-          <p:cNvSpPr txBox="1"/>
-          <p:nvPr/>
-        </p:nvSpPr>
-        <p:spPr>
-          <a:xfrm>
-            <a:off x="457200" y="657225"/>
-            <a:ext cx="9144000" cy="1104900"/>
-          </a:xfrm>
-          <a:prstGeom prst="rect">
-            <a:avLst/>
-          </a:prstGeom>
-          <a:noFill/>
-          <a:ln>
-            <a:noFill/>
-          </a:ln>
-        </p:spPr>
-        <p:txBody>
-          <a:bodyPr wrap="none" lIns="0" tIns="0" rIns="0" bIns="0" anchor="t">
-            <a:noAutofit/>
-          </a:bodyPr>
-          <a:lstStyle/>
-          <a:p>
-            <a:pPr marL="0" indent="0">
-              <a:lnSpc>
-                <a:spcPts val="3060"/>
-              </a:lnSpc>
-              <a:spcAft>
-                <a:spcPts val="0"/>
-              </a:spcAft>
-              <a:buNone/>
-            </a:pPr>
-            <a:r>
-              <a:rPr lang="en-US" sz="2550" b="1">
-                <a:solidFill>
-                  <a:srgbClr val="202B33"/>
-                </a:solidFill>
-                <a:latin typeface="Arial"/>
-                <a:ea typeface="Arial"/>
-                <a:cs typeface="Arial"/>
-              </a:rPr>
-              <a:t xml:space="preserve">References</a:t>
-            </a:r>
-            <a:endParaRPr lang="en-US" sz="2550"/>
-          </a:p>
-        </p:txBody>
-      </p:sp>
-      <p:sp>
-        <p:nvSpPr>
-          <p:cNvPr id="4" name="Text 4"/>
-          <p:cNvSpPr txBox="1"/>
-          <p:nvPr/>
-        </p:nvSpPr>
-        <p:spPr>
-          <a:xfrm>
-            <a:off x="457200" y="1971675"/>
-            <a:ext cx="4352925" cy="5314950"/>
-          </a:xfrm>
-          <a:prstGeom prst="rect">
-            <a:avLst/>
-          </a:prstGeom>
-          <a:noFill/>
-          <a:ln>
-            <a:noFill/>
-          </a:ln>
-        </p:spPr>
-        <p:txBody>
-          <a:bodyPr wrap="none" lIns="0" tIns="0" rIns="0" bIns="0" anchor="t">
-            <a:noAutofit/>
-          </a:bodyPr>
-          <a:lstStyle/>
-          <a:p>
-            <a:pPr marL="0" indent="0">
-              <a:lnSpc>
-                <a:spcPts val="1950"/>
-              </a:lnSpc>
-              <a:spcAft>
-                <a:spcPts val="0"/>
-              </a:spcAft>
-              <a:buNone/>
-            </a:pPr>
-            <a:r>
-              <a:rPr lang="en-US" sz="1500" b="0">
-                <a:solidFill>
-                  <a:srgbClr val="202B33"/>
-                </a:solidFill>
-                <a:latin typeface="Arial"/>
-                <a:ea typeface="Arial"/>
-                <a:cs typeface="Arial"/>
-              </a:rPr>
-              <a:t xml:space="preserve">Brooke Group Ltd. v. Brown &amp; Williamson</a:t>
-            </a:r>
-            <a:endParaRPr lang="en-US" sz="1500"/>
-          </a:p>
-          <a:p>
-            <a:pPr marL="0" indent="0">
-              <a:lnSpc>
-                <a:spcPts val="1950"/>
-              </a:lnSpc>
-              <a:spcAft>
-                <a:spcPts val="0"/>
-              </a:spcAft>
-              <a:buNone/>
-            </a:pPr>
-            <a:r>
-              <a:rPr lang="en-US" sz="1500" b="0">
-                <a:solidFill>
-                  <a:srgbClr val="202B33"/>
-                </a:solidFill>
-                <a:latin typeface="Arial"/>
-                <a:ea typeface="Arial"/>
-                <a:cs typeface="Arial"/>
-              </a:rPr>
-              <a:t xml:space="preserve">Tobacco Corp., 509 U.S. 209 (1993), on the</a:t>
-            </a:r>
-            <a:endParaRPr lang="en-US" sz="1500"/>
-          </a:p>
-          <a:p>
-            <a:pPr marL="0" indent="0">
-              <a:lnSpc>
-                <a:spcPts val="1950"/>
-              </a:lnSpc>
-              <a:spcAft>
-                <a:spcPts val="0"/>
-              </a:spcAft>
-              <a:buNone/>
-            </a:pPr>
-            <a:r>
-              <a:rPr lang="en-US" sz="1500" b="0">
-                <a:solidFill>
-                  <a:srgbClr val="202B33"/>
-                </a:solidFill>
-                <a:latin typeface="Arial"/>
-                <a:ea typeface="Arial"/>
-                <a:cs typeface="Arial"/>
-              </a:rPr>
-              <a:t xml:space="preserve">recoupment requirement in predatory-pricing</a:t>
-            </a:r>
-            <a:endParaRPr lang="en-US" sz="1500"/>
-          </a:p>
-          <a:p>
-            <a:pPr marL="0" indent="0">
-              <a:lnSpc>
-                <a:spcPts val="1950"/>
-              </a:lnSpc>
-              <a:spcAft>
-                <a:spcPts val="0"/>
-              </a:spcAft>
-              <a:buNone/>
-            </a:pPr>
-            <a:r>
-              <a:rPr lang="en-US" sz="1500" b="0">
-                <a:solidFill>
-                  <a:srgbClr val="202B33"/>
-                </a:solidFill>
-                <a:latin typeface="Arial"/>
-                <a:ea typeface="Arial"/>
-                <a:cs typeface="Arial"/>
-              </a:rPr>
-              <a:t xml:space="preserve">claims.</a:t>
-            </a:r>
-            <a:endParaRPr lang="en-US" sz="1500"/>
-          </a:p>
-          <a:p>
-            <a:pPr marL="0" indent="0">
-              <a:lnSpc>
-                <a:spcPts val="1950"/>
-              </a:lnSpc>
-              <a:spcAft>
-                <a:spcPts val="0"/>
-              </a:spcAft>
-              <a:buNone/>
-            </a:pPr>
-            <a:r>
-              <a:rPr lang="en-US" sz="1500" b="0">
-                <a:solidFill>
-                  <a:srgbClr val="202B33"/>
-                </a:solidFill>
-                <a:latin typeface="Arial"/>
-                <a:ea typeface="Arial"/>
-                <a:cs typeface="Arial"/>
-              </a:rPr>
-              <a:t xml:space="preserve"/>
-            </a:r>
-            <a:endParaRPr lang="en-US" sz="1500"/>
-          </a:p>
-          <a:p>
-            <a:pPr marL="0" indent="0">
-              <a:lnSpc>
-                <a:spcPts val="1950"/>
-              </a:lnSpc>
-              <a:spcAft>
-                <a:spcPts val="0"/>
-              </a:spcAft>
-              <a:buNone/>
-            </a:pPr>
-            <a:r>
-              <a:rPr lang="en-US" sz="1500" b="0">
-                <a:solidFill>
-                  <a:srgbClr val="202B33"/>
-                </a:solidFill>
-                <a:latin typeface="Arial"/>
-                <a:ea typeface="Arial"/>
-                <a:cs typeface="Arial"/>
-              </a:rPr>
-              <a:t xml:space="preserve">Rochet and Tirole (2003), Platform</a:t>
-            </a:r>
-            <a:endParaRPr lang="en-US" sz="1500"/>
-          </a:p>
-          <a:p>
-            <a:pPr marL="0" indent="0">
-              <a:lnSpc>
-                <a:spcPts val="1950"/>
-              </a:lnSpc>
-              <a:spcAft>
-                <a:spcPts val="0"/>
-              </a:spcAft>
-              <a:buNone/>
-            </a:pPr>
-            <a:r>
-              <a:rPr lang="en-US" sz="1500" b="0">
-                <a:solidFill>
-                  <a:srgbClr val="202B33"/>
-                </a:solidFill>
-                <a:latin typeface="Arial"/>
-                <a:ea typeface="Arial"/>
-                <a:cs typeface="Arial"/>
-              </a:rPr>
-              <a:t xml:space="preserve">Competition in Two-Sided Markets, Journal</a:t>
-            </a:r>
-            <a:endParaRPr lang="en-US" sz="1500"/>
-          </a:p>
-          <a:p>
-            <a:pPr marL="0" indent="0">
-              <a:lnSpc>
-                <a:spcPts val="1950"/>
-              </a:lnSpc>
-              <a:spcAft>
-                <a:spcPts val="0"/>
-              </a:spcAft>
-              <a:buNone/>
-            </a:pPr>
-            <a:r>
-              <a:rPr lang="en-US" sz="1500" b="0">
-                <a:solidFill>
-                  <a:srgbClr val="202B33"/>
-                </a:solidFill>
-                <a:latin typeface="Arial"/>
-                <a:ea typeface="Arial"/>
-                <a:cs typeface="Arial"/>
-              </a:rPr>
-              <a:t xml:space="preserve">of the European Economic Association, on</a:t>
-            </a:r>
-            <a:endParaRPr lang="en-US" sz="1500"/>
-          </a:p>
-          <a:p>
-            <a:pPr marL="0" indent="0">
-              <a:lnSpc>
-                <a:spcPts val="1950"/>
-              </a:lnSpc>
-              <a:spcAft>
-                <a:spcPts val="0"/>
-              </a:spcAft>
-              <a:buNone/>
-            </a:pPr>
-            <a:r>
-              <a:rPr lang="en-US" sz="1500" b="0">
-                <a:solidFill>
-                  <a:srgbClr val="202B33"/>
-                </a:solidFill>
-                <a:latin typeface="Arial"/>
-                <a:ea typeface="Arial"/>
-                <a:cs typeface="Arial"/>
-              </a:rPr>
-              <a:t xml:space="preserve">cross-subsidy between sides of a market.</a:t>
-            </a:r>
-            <a:endParaRPr lang="en-US" sz="1500"/>
-          </a:p>
-          <a:p>
-            <a:pPr marL="0" indent="0">
-              <a:lnSpc>
-                <a:spcPts val="1950"/>
-              </a:lnSpc>
-              <a:spcAft>
-                <a:spcPts val="0"/>
-              </a:spcAft>
-              <a:buNone/>
-            </a:pPr>
-            <a:r>
-              <a:rPr lang="en-US" sz="1500" b="0">
-                <a:solidFill>
-                  <a:srgbClr val="202B33"/>
-                </a:solidFill>
-                <a:latin typeface="Arial"/>
-                <a:ea typeface="Arial"/>
-                <a:cs typeface="Arial"/>
-              </a:rPr>
-              <a:t xml:space="preserve"/>
-            </a:r>
-            <a:endParaRPr lang="en-US" sz="1500"/>
-          </a:p>
-          <a:p>
-            <a:pPr marL="0" indent="0">
-              <a:lnSpc>
-                <a:spcPts val="1950"/>
-              </a:lnSpc>
-              <a:spcAft>
-                <a:spcPts val="0"/>
-              </a:spcAft>
-              <a:buNone/>
-            </a:pPr>
-            <a:r>
-              <a:rPr lang="en-US" sz="1500" b="0">
-                <a:solidFill>
-                  <a:srgbClr val="202B33"/>
-                </a:solidFill>
-                <a:latin typeface="Arial"/>
-                <a:ea typeface="Arial"/>
-                <a:cs typeface="Arial"/>
-              </a:rPr>
-              <a:t xml:space="preserve">Shoup (2005, updated 2011), The High Cost</a:t>
-            </a:r>
-            <a:endParaRPr lang="en-US" sz="1500"/>
-          </a:p>
-          <a:p>
-            <a:pPr marL="0" indent="0">
-              <a:lnSpc>
-                <a:spcPts val="1950"/>
-              </a:lnSpc>
-              <a:spcAft>
-                <a:spcPts val="0"/>
-              </a:spcAft>
-              <a:buNone/>
-            </a:pPr>
-            <a:r>
-              <a:rPr lang="en-US" sz="1500" b="0">
-                <a:solidFill>
-                  <a:srgbClr val="202B33"/>
-                </a:solidFill>
-                <a:latin typeface="Arial"/>
-                <a:ea typeface="Arial"/>
-                <a:cs typeface="Arial"/>
-              </a:rPr>
-              <a:t xml:space="preserve">of Free Parking, American Planning</a:t>
-            </a:r>
-            <a:endParaRPr lang="en-US" sz="1500"/>
-          </a:p>
-          <a:p>
-            <a:pPr marL="0" indent="0">
-              <a:lnSpc>
-                <a:spcPts val="1950"/>
-              </a:lnSpc>
-              <a:spcAft>
-                <a:spcPts val="0"/>
-              </a:spcAft>
-              <a:buNone/>
-            </a:pPr>
-            <a:r>
-              <a:rPr lang="en-US" sz="1500" b="0">
-                <a:solidFill>
-                  <a:srgbClr val="202B33"/>
-                </a:solidFill>
-                <a:latin typeface="Arial"/>
-                <a:ea typeface="Arial"/>
-                <a:cs typeface="Arial"/>
-              </a:rPr>
-              <a:t xml:space="preserve">Association. Also Shoup (2011), Free</a:t>
-            </a:r>
-            <a:endParaRPr lang="en-US" sz="1500"/>
-          </a:p>
-          <a:p>
-            <a:pPr marL="0" indent="0">
-              <a:lnSpc>
-                <a:spcPts val="1950"/>
-              </a:lnSpc>
-              <a:spcAft>
-                <a:spcPts val="0"/>
-              </a:spcAft>
-              <a:buNone/>
-            </a:pPr>
-            <a:r>
-              <a:rPr lang="en-US" sz="1500" b="0">
-                <a:solidFill>
-                  <a:srgbClr val="202B33"/>
-                </a:solidFill>
-                <a:latin typeface="Arial"/>
-                <a:ea typeface="Arial"/>
-                <a:cs typeface="Arial"/>
-              </a:rPr>
-              <a:t xml:space="preserve">parking or free markets —</a:t>
-            </a:r>
-            <a:endParaRPr lang="en-US" sz="1500"/>
-          </a:p>
-        </p:txBody>
-      </p:sp>
-      <p:sp>
-        <p:nvSpPr>
-          <p:cNvPr id="5" name="Text 5"/>
-          <p:cNvSpPr txBox="1"/>
-          <p:nvPr/>
-        </p:nvSpPr>
-        <p:spPr>
-          <a:xfrm>
-            <a:off x="5238750" y="1971675"/>
-            <a:ext cx="4362450" cy="5314950"/>
-          </a:xfrm>
-          <a:prstGeom prst="rect">
-            <a:avLst/>
-          </a:prstGeom>
-          <a:noFill/>
-          <a:ln>
-            <a:noFill/>
-          </a:ln>
-        </p:spPr>
-        <p:txBody>
-          <a:bodyPr wrap="none" lIns="0" tIns="0" rIns="0" bIns="0" anchor="t">
-            <a:noAutofit/>
-          </a:bodyPr>
-          <a:lstStyle/>
-          <a:p>
-            <a:pPr marL="0" indent="0">
-              <a:lnSpc>
-                <a:spcPts val="1950"/>
-              </a:lnSpc>
-              <a:spcAft>
-                <a:spcPts val="0"/>
-              </a:spcAft>
-              <a:buNone/>
-            </a:pPr>
-            <a:r>
-              <a:rPr lang="en-US" sz="1500" b="0">
-                <a:solidFill>
-                  <a:srgbClr val="202B33"/>
-                </a:solidFill>
-                <a:latin typeface="Arial"/>
-                <a:ea typeface="Arial"/>
-                <a:cs typeface="Arial"/>
-              </a:rPr>
-              <a:t xml:space="preserve">https://www.accessmagazine.org/spring-2011/free-parking-free-markets/,</a:t>
-            </a:r>
-            <a:endParaRPr lang="en-US" sz="1500"/>
-          </a:p>
-          <a:p>
-            <a:pPr marL="0" indent="0">
-              <a:lnSpc>
-                <a:spcPts val="1950"/>
-              </a:lnSpc>
-              <a:spcAft>
-                <a:spcPts val="0"/>
-              </a:spcAft>
-              <a:buNone/>
-            </a:pPr>
-            <a:r>
-              <a:rPr lang="en-US" sz="1500" b="0">
-                <a:solidFill>
-                  <a:srgbClr val="202B33"/>
-                </a:solidFill>
-                <a:latin typeface="Arial"/>
-                <a:ea typeface="Arial"/>
-                <a:cs typeface="Arial"/>
-              </a:rPr>
-              <a:t xml:space="preserve">ACCESS Magazine.</a:t>
-            </a:r>
-            <a:endParaRPr lang="en-US" sz="1500"/>
-          </a:p>
-          <a:p>
-            <a:pPr marL="0" indent="0">
-              <a:lnSpc>
-                <a:spcPts val="1950"/>
-              </a:lnSpc>
-              <a:spcAft>
-                <a:spcPts val="0"/>
-              </a:spcAft>
-              <a:buNone/>
-            </a:pPr>
-            <a:r>
-              <a:rPr lang="en-US" sz="1500" b="0">
-                <a:solidFill>
-                  <a:srgbClr val="202B33"/>
-                </a:solidFill>
-                <a:latin typeface="Arial"/>
-                <a:ea typeface="Arial"/>
-                <a:cs typeface="Arial"/>
-              </a:rPr>
-              <a:t xml:space="preserve"/>
-            </a:r>
-            <a:endParaRPr lang="en-US" sz="1500"/>
-          </a:p>
-          <a:p>
-            <a:pPr marL="0" indent="0">
-              <a:lnSpc>
-                <a:spcPts val="1950"/>
-              </a:lnSpc>
-              <a:spcAft>
-                <a:spcPts val="0"/>
-              </a:spcAft>
-              <a:buNone/>
-            </a:pPr>
-            <a:r>
-              <a:rPr lang="en-US" sz="1500" b="0">
-                <a:solidFill>
-                  <a:srgbClr val="202B33"/>
-                </a:solidFill>
-                <a:latin typeface="Arial"/>
-                <a:ea typeface="Arial"/>
-                <a:cs typeface="Arial"/>
-              </a:rPr>
-              <a:t xml:space="preserve">Jevons (1865), The Coal Question, chapter</a:t>
-            </a:r>
-            <a:endParaRPr lang="en-US" sz="1500"/>
-          </a:p>
-          <a:p>
-            <a:pPr marL="0" indent="0">
-              <a:lnSpc>
-                <a:spcPts val="1950"/>
-              </a:lnSpc>
-              <a:spcAft>
-                <a:spcPts val="0"/>
-              </a:spcAft>
-              <a:buNone/>
-            </a:pPr>
-            <a:r>
-              <a:rPr lang="en-US" sz="1500" b="0">
-                <a:solidFill>
-                  <a:srgbClr val="202B33"/>
-                </a:solidFill>
-                <a:latin typeface="Arial"/>
-                <a:ea typeface="Arial"/>
-                <a:cs typeface="Arial"/>
-              </a:rPr>
-              <a:t xml:space="preserve">VII. Duranton and Turner (2011), The</a:t>
-            </a:r>
-            <a:endParaRPr lang="en-US" sz="1500"/>
-          </a:p>
-          <a:p>
-            <a:pPr marL="0" indent="0">
-              <a:lnSpc>
-                <a:spcPts val="1950"/>
-              </a:lnSpc>
-              <a:spcAft>
-                <a:spcPts val="0"/>
-              </a:spcAft>
-              <a:buNone/>
-            </a:pPr>
-            <a:r>
-              <a:rPr lang="en-US" sz="1500" b="0">
-                <a:solidFill>
-                  <a:srgbClr val="202B33"/>
-                </a:solidFill>
-                <a:latin typeface="Arial"/>
-                <a:ea typeface="Arial"/>
-                <a:cs typeface="Arial"/>
-              </a:rPr>
-              <a:t xml:space="preserve">Fundamental Law of Road Congestion,</a:t>
-            </a:r>
-            <a:endParaRPr lang="en-US" sz="1500"/>
-          </a:p>
-          <a:p>
-            <a:pPr marL="0" indent="0">
-              <a:lnSpc>
-                <a:spcPts val="1950"/>
-              </a:lnSpc>
-              <a:spcAft>
-                <a:spcPts val="0"/>
-              </a:spcAft>
-              <a:buNone/>
-            </a:pPr>
-            <a:r>
-              <a:rPr lang="en-US" sz="1500" b="0">
-                <a:solidFill>
-                  <a:srgbClr val="202B33"/>
-                </a:solidFill>
-                <a:latin typeface="Arial"/>
-                <a:ea typeface="Arial"/>
-                <a:cs typeface="Arial"/>
-              </a:rPr>
-              <a:t xml:space="preserve">American Economic Review 101(6).</a:t>
-            </a:r>
-            <a:endParaRPr lang="en-US" sz="1500"/>
-          </a:p>
-          <a:p>
-            <a:pPr marL="0" indent="0">
-              <a:lnSpc>
-                <a:spcPts val="1950"/>
-              </a:lnSpc>
-              <a:spcAft>
-                <a:spcPts val="0"/>
-              </a:spcAft>
-              <a:buNone/>
-            </a:pPr>
-            <a:r>
-              <a:rPr lang="en-US" sz="1500" b="0">
-                <a:solidFill>
-                  <a:srgbClr val="202B33"/>
-                </a:solidFill>
-                <a:latin typeface="Arial"/>
-                <a:ea typeface="Arial"/>
-                <a:cs typeface="Arial"/>
-              </a:rPr>
-              <a:t xml:space="preserve"/>
-            </a:r>
-            <a:endParaRPr lang="en-US" sz="1500"/>
-          </a:p>
-          <a:p>
-            <a:pPr marL="0" indent="0">
-              <a:lnSpc>
-                <a:spcPts val="1950"/>
-              </a:lnSpc>
-              <a:spcAft>
-                <a:spcPts val="0"/>
-              </a:spcAft>
-              <a:buNone/>
-            </a:pPr>
-            <a:r>
-              <a:rPr lang="en-US" sz="1500" b="0">
-                <a:solidFill>
-                  <a:srgbClr val="202B33"/>
-                </a:solidFill>
-                <a:latin typeface="Arial"/>
-                <a:ea typeface="Arial"/>
-                <a:cs typeface="Arial"/>
-              </a:rPr>
-              <a:t xml:space="preserve">Cottier, Snodin, Owen, Adamczewski (Epoch</a:t>
-            </a:r>
-            <a:endParaRPr lang="en-US" sz="1500"/>
-          </a:p>
-          <a:p>
-            <a:pPr marL="0" indent="0">
-              <a:lnSpc>
-                <a:spcPts val="1950"/>
-              </a:lnSpc>
-              <a:spcAft>
-                <a:spcPts val="0"/>
-              </a:spcAft>
-              <a:buNone/>
-            </a:pPr>
-            <a:r>
-              <a:rPr lang="en-US" sz="1500" b="0">
-                <a:solidFill>
-                  <a:srgbClr val="202B33"/>
-                </a:solidFill>
-                <a:latin typeface="Arial"/>
-                <a:ea typeface="Arial"/>
-                <a:cs typeface="Arial"/>
-              </a:rPr>
-              <a:t xml:space="preserve">AI, March 2025), LLM inference prices have</a:t>
-            </a:r>
-            <a:endParaRPr lang="en-US" sz="1500"/>
-          </a:p>
-          <a:p>
-            <a:pPr marL="0" indent="0">
-              <a:lnSpc>
-                <a:spcPts val="1950"/>
-              </a:lnSpc>
-              <a:spcAft>
-                <a:spcPts val="0"/>
-              </a:spcAft>
-              <a:buNone/>
-            </a:pPr>
-            <a:r>
-              <a:rPr lang="en-US" sz="1500" b="0">
-                <a:solidFill>
-                  <a:srgbClr val="202B33"/>
-                </a:solidFill>
-                <a:latin typeface="Arial"/>
-                <a:ea typeface="Arial"/>
-                <a:cs typeface="Arial"/>
-              </a:rPr>
-              <a:t xml:space="preserve">fallen rapidly but unequally across tasks —</a:t>
-            </a:r>
-            <a:endParaRPr lang="en-US" sz="1500"/>
-          </a:p>
-          <a:p>
-            <a:pPr marL="0" indent="0">
-              <a:lnSpc>
-                <a:spcPts val="1950"/>
-              </a:lnSpc>
-              <a:spcAft>
-                <a:spcPts val="0"/>
-              </a:spcAft>
-              <a:buNone/>
-            </a:pPr>
-            <a:r>
-              <a:rPr lang="en-US" sz="1500" b="0">
-                <a:solidFill>
-                  <a:srgbClr val="202B33"/>
-                </a:solidFill>
-                <a:latin typeface="Arial"/>
-                <a:ea typeface="Arial"/>
-                <a:cs typeface="Arial"/>
-              </a:rPr>
-              <a:t xml:space="preserve">https://epoch.ai/data-insights/llm-inference-price-trends.</a:t>
-            </a:r>
-            <a:endParaRPr lang="en-US" sz="1500"/>
-          </a:p>
-          <a:p>
-            <a:pPr marL="0" indent="0">
-              <a:lnSpc>
-                <a:spcPts val="1950"/>
-              </a:lnSpc>
-              <a:spcAft>
-                <a:spcPts val="0"/>
-              </a:spcAft>
-              <a:buNone/>
-            </a:pPr>
-            <a:r>
-              <a:rPr lang="en-US" sz="1500" b="0">
-                <a:solidFill>
-                  <a:srgbClr val="202B33"/>
-                </a:solidFill>
-                <a:latin typeface="Arial"/>
-                <a:ea typeface="Arial"/>
-                <a:cs typeface="Arial"/>
-              </a:rPr>
-              <a:t xml:space="preserve">Check for a newer edition before each</a:t>
-            </a:r>
-            <a:endParaRPr lang="en-US" sz="1500"/>
-          </a:p>
-          <a:p>
-            <a:pPr marL="0" indent="0">
-              <a:lnSpc>
-                <a:spcPts val="1950"/>
-              </a:lnSpc>
-              <a:spcAft>
-                <a:spcPts val="0"/>
-              </a:spcAft>
-              <a:buNone/>
-            </a:pPr>
-            <a:r>
-              <a:rPr lang="en-US" sz="1500" b="0">
-                <a:solidFill>
-                  <a:srgbClr val="202B33"/>
-                </a:solidFill>
-                <a:latin typeface="Arial"/>
-                <a:ea typeface="Arial"/>
-                <a:cs typeface="Arial"/>
-              </a:rPr>
-              <a:t xml:space="preserve">delivery.</a:t>
-            </a:r>
-            <a:endParaRPr lang="en-US" sz="1500"/>
-          </a:p>
-        </p:txBody>
-      </p:sp>
-      <p:sp>
-        <p:nvSpPr>
-          <p:cNvPr id="6" name="Text 6"/>
-          <p:cNvSpPr txBox="1"/>
-          <p:nvPr/>
-        </p:nvSpPr>
-        <p:spPr>
-          <a:xfrm>
-            <a:off x="457200" y="7486650"/>
-            <a:ext cx="8820150" cy="190500"/>
-          </a:xfrm>
-          <a:prstGeom prst="rect">
-            <a:avLst/>
-          </a:prstGeom>
-          <a:noFill/>
-          <a:ln>
-            <a:noFill/>
-          </a:ln>
-        </p:spPr>
-        <p:txBody>
-          <a:bodyPr wrap="none" lIns="0" tIns="0" rIns="0" bIns="0" anchor="t">
-            <a:noAutofit/>
-          </a:bodyPr>
-          <a:lstStyle/>
-          <a:p>
-            <a:pPr marL="0" indent="0">
-              <a:lnSpc>
-                <a:spcPts val="1268"/>
-              </a:lnSpc>
-              <a:spcAft>
-                <a:spcPts val="0"/>
-              </a:spcAft>
-              <a:buNone/>
-            </a:pPr>
-            <a:r>
-              <a:rPr lang="en-US" sz="975" b="0">
-                <a:solidFill>
-                  <a:srgbClr val="48555B"/>
-                </a:solidFill>
-                <a:latin typeface="Arial"/>
-                <a:ea typeface="Arial"/>
-                <a:cs typeface="Arial"/>
-              </a:rPr>
-              <a:t xml:space="preserve">Buy Me a Free Tier</a:t>
-            </a:r>
-            <a:endParaRPr lang="en-US" sz="975"/>
-          </a:p>
-        </p:txBody>
-      </p:sp>
-      <p:sp>
-        <p:nvSpPr>
-          <p:cNvPr id="7" name="Text 7"/>
-          <p:cNvSpPr txBox="1"/>
-          <p:nvPr/>
-        </p:nvSpPr>
-        <p:spPr>
-          <a:xfrm>
-            <a:off x="9391650" y="7486650"/>
-            <a:ext cx="238125" cy="190500"/>
-          </a:xfrm>
-          <a:prstGeom prst="rect">
-            <a:avLst/>
-          </a:prstGeom>
-          <a:noFill/>
-          <a:ln>
-            <a:noFill/>
-          </a:ln>
-        </p:spPr>
-        <p:txBody>
-          <a:bodyPr wrap="none" lIns="0" tIns="0" rIns="0" bIns="0" anchor="t">
-            <a:noAutofit/>
-          </a:bodyPr>
-          <a:lstStyle/>
-          <a:p>
-            <a:pPr marL="0" indent="0">
-              <a:lnSpc>
-                <a:spcPts val="1268"/>
-              </a:lnSpc>
-              <a:spcAft>
-                <a:spcPts val="0"/>
-              </a:spcAft>
-              <a:buNone/>
-            </a:pPr>
-            <a:r>
-              <a:rPr lang="en-US" sz="975" b="0">
-                <a:solidFill>
-                  <a:srgbClr val="48555B"/>
-                </a:solidFill>
-                <a:latin typeface="Arial"/>
-                <a:ea typeface="Arial"/>
-                <a:cs typeface="Arial"/>
-              </a:rPr>
-              <a:t xml:space="preserve">10</a:t>
             </a:r>
             <a:endParaRPr lang="en-US" sz="975"/>
           </a:p>
@@ -6212,7 +4575,7 @@
                 <a:ea typeface="Arial"/>
                 <a:cs typeface="Arial"/>
               </a:rPr>
-              <a:t xml:space="preserve">01 / 08    SOURCE SLIDE 1</a:t>
+              <a:t xml:space="preserve">01 / 07    SOURCE SLIDE 1</a:t>
             </a:r>
             <a:endParaRPr lang="en-US" sz="1050"/>
           </a:p>
@@ -7160,7 +5523,7 @@
                 <a:ea typeface="Arial"/>
                 <a:cs typeface="Arial"/>
               </a:rPr>
-              <a:t xml:space="preserve">02 / 08    SOURCE SLIDE 3</a:t>
+              <a:t xml:space="preserve">02 / 07    SOURCE SLIDE 3</a:t>
             </a:r>
             <a:endParaRPr lang="en-US" sz="1050"/>
           </a:p>
@@ -8200,7 +6563,7 @@
                 <a:ea typeface="Arial"/>
                 <a:cs typeface="Arial"/>
               </a:rPr>
-              <a:t xml:space="preserve">03 / 08    SOURCE SLIDE 5</a:t>
+              <a:t xml:space="preserve">03 / 07    SOURCE SLIDE 6</a:t>
             </a:r>
             <a:endParaRPr lang="en-US" sz="1050"/>
           </a:p>
@@ -8249,7 +6612,7 @@
                 <a:ea typeface="Arial"/>
                 <a:cs typeface="Arial"/>
               </a:rPr>
-              <a:t xml:space="preserve">Free parking was never free</a:t>
+              <a:t xml:space="preserve">Jevons, coal, and the extra lane</a:t>
             </a:r>
             <a:endParaRPr lang="en-US" sz="2550"/>
           </a:p>
@@ -8298,30 +6661,30 @@
                 <a:ea typeface="Arial"/>
                 <a:cs typeface="Arial"/>
               </a:rPr>
-              <a:t xml:space="preserve">The driver sees no meter, so demand looks</a:t>
-            </a:r>
-            <a:endParaRPr lang="en-US" sz="1500"/>
-          </a:p>
-          <a:p>
-            <a:pPr marL="0" indent="0">
-              <a:lnSpc>
-                <a:spcPts val="1950"/>
-              </a:lnSpc>
-              <a:spcAft>
-                <a:spcPts val="0"/>
-              </a:spcAft>
-              <a:buNone/>
-            </a:pPr>
-            <a:r>
-              <a:rPr lang="en-US" sz="1500" b="0">
-                <a:solidFill>
-                  <a:srgbClr val="202B33"/>
-                </a:solidFill>
-                <a:latin typeface="Arial"/>
-                <a:ea typeface="Arial"/>
-                <a:cs typeface="Arial"/>
-              </a:rPr>
-              <a:t xml:space="preserve">infinite</a:t>
+              <a:t xml:space="preserve">1865: better engines burned more coal, not</a:t>
+            </a:r>
+            <a:endParaRPr lang="en-US" sz="1500"/>
+          </a:p>
+          <a:p>
+            <a:pPr marL="0" indent="0">
+              <a:lnSpc>
+                <a:spcPts val="1950"/>
+              </a:lnSpc>
+              <a:spcAft>
+                <a:spcPts val="0"/>
+              </a:spcAft>
+              <a:buNone/>
+            </a:pPr>
+            <a:r>
+              <a:rPr lang="en-US" sz="1500" b="0">
+                <a:solidFill>
+                  <a:srgbClr val="202B33"/>
+                </a:solidFill>
+                <a:latin typeface="Arial"/>
+                <a:ea typeface="Arial"/>
+                <a:cs typeface="Arial"/>
+              </a:rPr>
+              <a:t xml:space="preserve">less</a:t>
             </a:r>
             <a:endParaRPr lang="en-US" sz="1500"/>
           </a:p>
@@ -8367,7 +6730,30 @@
                 <a:ea typeface="Arial"/>
                 <a:cs typeface="Arial"/>
               </a:rPr>
-              <a:t xml:space="preserve">The cost moves into rents, prices, and land</a:t>
+              <a:t xml:space="preserve">Add a lane, get traffic. Elasticity near</a:t>
+            </a:r>
+            <a:endParaRPr lang="en-US" sz="1500"/>
+          </a:p>
+          <a:p>
+            <a:pPr marL="0" indent="0">
+              <a:lnSpc>
+                <a:spcPts val="1950"/>
+              </a:lnSpc>
+              <a:spcAft>
+                <a:spcPts val="0"/>
+              </a:spcAft>
+              <a:buNone/>
+            </a:pPr>
+            <a:r>
+              <a:rPr lang="en-US" sz="1500" b="0">
+                <a:solidFill>
+                  <a:srgbClr val="202B33"/>
+                </a:solidFill>
+                <a:latin typeface="Arial"/>
+                <a:ea typeface="Arial"/>
+                <a:cs typeface="Arial"/>
+              </a:rPr>
+              <a:t xml:space="preserve">one.</a:t>
             </a:r>
             <a:endParaRPr lang="en-US" sz="1500"/>
           </a:p>
@@ -8413,7 +6799,30 @@
                 <a:ea typeface="Arial"/>
                 <a:cs typeface="Arial"/>
               </a:rPr>
-              <a:t xml:space="preserve">Word one: externality</a:t>
+              <a:t xml:space="preserve">Spend = price × jobs × calls per job ×</a:t>
+            </a:r>
+            <a:endParaRPr lang="en-US" sz="1500"/>
+          </a:p>
+          <a:p>
+            <a:pPr marL="0" indent="0">
+              <a:lnSpc>
+                <a:spcPts val="1950"/>
+              </a:lnSpc>
+              <a:spcAft>
+                <a:spcPts val="0"/>
+              </a:spcAft>
+              <a:buNone/>
+            </a:pPr>
+            <a:r>
+              <a:rPr lang="en-US" sz="1500" b="0">
+                <a:solidFill>
+                  <a:srgbClr val="202B33"/>
+                </a:solidFill>
+                <a:latin typeface="Arial"/>
+                <a:ea typeface="Arial"/>
+                <a:cs typeface="Arial"/>
+              </a:rPr>
+              <a:t xml:space="preserve">tokens per call</a:t>
             </a:r>
             <a:endParaRPr lang="en-US" sz="1500"/>
           </a:p>
@@ -8459,76 +6868,99 @@
                 <a:ea typeface="Arial"/>
                 <a:cs typeface="Arial"/>
               </a:rPr>
-              <a:t xml:space="preserve">Donald Shoup spent a career on the least</a:t>
-            </a:r>
-            <a:endParaRPr lang="en-US" sz="1500"/>
-          </a:p>
-          <a:p>
-            <a:pPr marL="0" indent="0">
-              <a:lnSpc>
-                <a:spcPts val="1950"/>
-              </a:lnSpc>
-              <a:spcAft>
-                <a:spcPts val="0"/>
-              </a:spcAft>
-              <a:buNone/>
-            </a:pPr>
-            <a:r>
-              <a:rPr lang="en-US" sz="1500" b="0">
-                <a:solidFill>
-                  <a:srgbClr val="202B33"/>
-                </a:solidFill>
-                <a:latin typeface="Arial"/>
-                <a:ea typeface="Arial"/>
-                <a:cs typeface="Arial"/>
-              </a:rPr>
-              <a:t xml:space="preserve">glamorous subject in urban economics and</a:t>
-            </a:r>
-            <a:endParaRPr lang="en-US" sz="1500"/>
-          </a:p>
-          <a:p>
-            <a:pPr marL="0" indent="0">
-              <a:lnSpc>
-                <a:spcPts val="1950"/>
-              </a:lnSpc>
-              <a:spcAft>
-                <a:spcPts val="0"/>
-              </a:spcAft>
-              <a:buNone/>
-            </a:pPr>
-            <a:r>
-              <a:rPr lang="en-US" sz="1500" b="0">
-                <a:solidFill>
-                  <a:srgbClr val="202B33"/>
-                </a:solidFill>
-                <a:latin typeface="Arial"/>
-                <a:ea typeface="Arial"/>
-                <a:cs typeface="Arial"/>
-              </a:rPr>
-              <a:t xml:space="preserve">was right about all of it. Cities required</a:t>
-            </a:r>
-            <a:endParaRPr lang="en-US" sz="1500"/>
-          </a:p>
-          <a:p>
-            <a:pPr marL="0" indent="0">
-              <a:lnSpc>
-                <a:spcPts val="1950"/>
-              </a:lnSpc>
-              <a:spcAft>
-                <a:spcPts val="0"/>
-              </a:spcAft>
-              <a:buNone/>
-            </a:pPr>
-            <a:r>
-              <a:rPr lang="en-US" sz="1500" b="0">
-                <a:solidFill>
-                  <a:srgbClr val="202B33"/>
-                </a:solidFill>
-                <a:latin typeface="Arial"/>
-                <a:ea typeface="Arial"/>
-                <a:cs typeface="Arial"/>
-              </a:rPr>
-              <a:t xml:space="preserve">developers to build minimum parking. Nobody</a:t>
+              <a:t xml:space="preserve">In 1865 William Stanley Jevons noticed</a:t>
+            </a:r>
+            <a:endParaRPr lang="en-US" sz="1500"/>
+          </a:p>
+          <a:p>
+            <a:pPr marL="0" indent="0">
+              <a:lnSpc>
+                <a:spcPts val="1950"/>
+              </a:lnSpc>
+              <a:spcAft>
+                <a:spcPts val="0"/>
+              </a:spcAft>
+              <a:buNone/>
+            </a:pPr>
+            <a:r>
+              <a:rPr lang="en-US" sz="1500" b="0">
+                <a:solidFill>
+                  <a:srgbClr val="202B33"/>
+                </a:solidFill>
+                <a:latin typeface="Arial"/>
+                <a:ea typeface="Arial"/>
+                <a:cs typeface="Arial"/>
+              </a:rPr>
+              <a:t xml:space="preserve">something that annoyed everyone. Steam</a:t>
+            </a:r>
+            <a:endParaRPr lang="en-US" sz="1500"/>
+          </a:p>
+          <a:p>
+            <a:pPr marL="0" indent="0">
+              <a:lnSpc>
+                <a:spcPts val="1950"/>
+              </a:lnSpc>
+              <a:spcAft>
+                <a:spcPts val="0"/>
+              </a:spcAft>
+              <a:buNone/>
+            </a:pPr>
+            <a:r>
+              <a:rPr lang="en-US" sz="1500" b="0">
+                <a:solidFill>
+                  <a:srgbClr val="202B33"/>
+                </a:solidFill>
+                <a:latin typeface="Arial"/>
+                <a:ea typeface="Arial"/>
+                <a:cs typeface="Arial"/>
+              </a:rPr>
+              <a:t xml:space="preserve">engines had gotten dramatically more</a:t>
+            </a:r>
+            <a:endParaRPr lang="en-US" sz="1500"/>
+          </a:p>
+          <a:p>
+            <a:pPr marL="0" indent="0">
+              <a:lnSpc>
+                <a:spcPts val="1950"/>
+              </a:lnSpc>
+              <a:spcAft>
+                <a:spcPts val="0"/>
+              </a:spcAft>
+              <a:buNone/>
+            </a:pPr>
+            <a:r>
+              <a:rPr lang="en-US" sz="1500" b="0">
+                <a:solidFill>
+                  <a:srgbClr val="202B33"/>
+                </a:solidFill>
+                <a:latin typeface="Arial"/>
+                <a:ea typeface="Arial"/>
+                <a:cs typeface="Arial"/>
+              </a:rPr>
+              <a:t xml:space="preserve">efficient, and Britain was burning far more</a:t>
+            </a:r>
+            <a:endParaRPr lang="en-US" sz="1500"/>
+          </a:p>
+          <a:p>
+            <a:pPr marL="0" indent="0">
+              <a:lnSpc>
+                <a:spcPts val="1950"/>
+              </a:lnSpc>
+              <a:spcAft>
+                <a:spcPts val="0"/>
+              </a:spcAft>
+              <a:buNone/>
+            </a:pPr>
+            <a:r>
+              <a:rPr lang="en-US" sz="1500" b="0">
+                <a:solidFill>
+                  <a:srgbClr val="202B33"/>
+                </a:solidFill>
+                <a:latin typeface="Arial"/>
+                <a:ea typeface="Arial"/>
+                <a:cs typeface="Arial"/>
+              </a:rPr>
+              <a:t xml:space="preserve">coal than before, not less. Efficiency made</a:t>
             </a:r>
             <a:endParaRPr lang="en-US" sz="1500"/>
           </a:p>
@@ -8577,99 +7009,53 @@
                 <a:ea typeface="Arial"/>
                 <a:cs typeface="Arial"/>
               </a:rPr>
-              <a:t xml:space="preserve">paid at the meter, so the cost went</a:t>
-            </a:r>
-            <a:endParaRPr lang="en-US" sz="1500"/>
-          </a:p>
-          <a:p>
-            <a:pPr marL="0" indent="0">
-              <a:lnSpc>
-                <a:spcPts val="1950"/>
-              </a:lnSpc>
-              <a:spcAft>
-                <a:spcPts val="0"/>
-              </a:spcAft>
-              <a:buNone/>
-            </a:pPr>
-            <a:r>
-              <a:rPr lang="en-US" sz="1500" b="0">
-                <a:solidFill>
-                  <a:srgbClr val="202B33"/>
-                </a:solidFill>
-                <a:latin typeface="Arial"/>
-                <a:ea typeface="Arial"/>
-                <a:cs typeface="Arial"/>
-              </a:rPr>
-              <a:t xml:space="preserve">somewhere else: into rents, into retail</a:t>
-            </a:r>
-            <a:endParaRPr lang="en-US" sz="1500"/>
-          </a:p>
-          <a:p>
-            <a:pPr marL="0" indent="0">
-              <a:lnSpc>
-                <a:spcPts val="1950"/>
-              </a:lnSpc>
-              <a:spcAft>
-                <a:spcPts val="0"/>
-              </a:spcAft>
-              <a:buNone/>
-            </a:pPr>
-            <a:r>
-              <a:rPr lang="en-US" sz="1500" b="0">
-                <a:solidFill>
-                  <a:srgbClr val="202B33"/>
-                </a:solidFill>
-                <a:latin typeface="Arial"/>
-                <a:ea typeface="Arial"/>
-                <a:cs typeface="Arial"/>
-              </a:rPr>
-              <a:t xml:space="preserve">prices, into land that became asphalt. And</a:t>
-            </a:r>
-            <a:endParaRPr lang="en-US" sz="1500"/>
-          </a:p>
-          <a:p>
-            <a:pPr marL="0" indent="0">
-              <a:lnSpc>
-                <a:spcPts val="1950"/>
-              </a:lnSpc>
-              <a:spcAft>
-                <a:spcPts val="0"/>
-              </a:spcAft>
-              <a:buNone/>
-            </a:pPr>
-            <a:r>
-              <a:rPr lang="en-US" sz="1500" b="0">
-                <a:solidFill>
-                  <a:srgbClr val="202B33"/>
-                </a:solidFill>
-                <a:latin typeface="Arial"/>
-                <a:ea typeface="Arial"/>
-                <a:cs typeface="Arial"/>
-              </a:rPr>
-              <a:t xml:space="preserve">because drivers saw no price, demand looked</a:t>
-            </a:r>
-            <a:endParaRPr lang="en-US" sz="1500"/>
-          </a:p>
-          <a:p>
-            <a:pPr marL="0" indent="0">
-              <a:lnSpc>
-                <a:spcPts val="1950"/>
-              </a:lnSpc>
-              <a:spcAft>
-                <a:spcPts val="0"/>
-              </a:spcAft>
-              <a:buNone/>
-            </a:pPr>
-            <a:r>
-              <a:rPr lang="en-US" sz="1500" b="0">
-                <a:solidFill>
-                  <a:srgbClr val="202B33"/>
-                </a:solidFill>
-                <a:latin typeface="Arial"/>
-                <a:ea typeface="Arial"/>
-                <a:cs typeface="Arial"/>
-              </a:rPr>
-              <a:t xml:space="preserve">infinite, so the minimums grew to match.</a:t>
+              <a:t xml:space="preserve">coal useful for more things, so people used</a:t>
+            </a:r>
+            <a:endParaRPr lang="en-US" sz="1500"/>
+          </a:p>
+          <a:p>
+            <a:pPr marL="0" indent="0">
+              <a:lnSpc>
+                <a:spcPts val="1950"/>
+              </a:lnSpc>
+              <a:spcAft>
+                <a:spcPts val="0"/>
+              </a:spcAft>
+              <a:buNone/>
+            </a:pPr>
+            <a:r>
+              <a:rPr lang="en-US" sz="1500" b="0">
+                <a:solidFill>
+                  <a:srgbClr val="202B33"/>
+                </a:solidFill>
+                <a:latin typeface="Arial"/>
+                <a:ea typeface="Arial"/>
+                <a:cs typeface="Arial"/>
+              </a:rPr>
+              <a:t xml:space="preserve">it for more things. That is the Jevons</a:t>
+            </a:r>
+            <a:endParaRPr lang="en-US" sz="1500"/>
+          </a:p>
+          <a:p>
+            <a:pPr marL="0" indent="0">
+              <a:lnSpc>
+                <a:spcPts val="1950"/>
+              </a:lnSpc>
+              <a:spcAft>
+                <a:spcPts val="0"/>
+              </a:spcAft>
+              <a:buNone/>
+            </a:pPr>
+            <a:r>
+              <a:rPr lang="en-US" sz="1500" b="0">
+                <a:solidFill>
+                  <a:srgbClr val="202B33"/>
+                </a:solidFill>
+                <a:latin typeface="Arial"/>
+                <a:ea typeface="Arial"/>
+                <a:cs typeface="Arial"/>
+              </a:rPr>
+              <a:t xml:space="preserve">paradox, and it is word two.</a:t>
             </a:r>
             <a:endParaRPr lang="en-US" sz="1500"/>
           </a:p>
@@ -8715,99 +7101,191 @@
                 <a:ea typeface="Arial"/>
                 <a:cs typeface="Arial"/>
               </a:rPr>
-              <a:t xml:space="preserve">That is your first word: externality. A</a:t>
-            </a:r>
-            <a:endParaRPr lang="en-US" sz="1500"/>
-          </a:p>
-          <a:p>
-            <a:pPr marL="0" indent="0">
-              <a:lnSpc>
-                <a:spcPts val="1950"/>
-              </a:lnSpc>
-              <a:spcAft>
-                <a:spcPts val="0"/>
-              </a:spcAft>
-              <a:buNone/>
-            </a:pPr>
-            <a:r>
-              <a:rPr lang="en-US" sz="1500" b="0">
-                <a:solidFill>
-                  <a:srgbClr val="202B33"/>
-                </a:solidFill>
-                <a:latin typeface="Arial"/>
-                <a:ea typeface="Arial"/>
-                <a:cs typeface="Arial"/>
-              </a:rPr>
-              <a:t xml:space="preserve">cost that is real, and paid, but not by the</a:t>
-            </a:r>
-            <a:endParaRPr lang="en-US" sz="1500"/>
-          </a:p>
-          <a:p>
-            <a:pPr marL="0" indent="0">
-              <a:lnSpc>
-                <a:spcPts val="1950"/>
-              </a:lnSpc>
-              <a:spcAft>
-                <a:spcPts val="0"/>
-              </a:spcAft>
-              <a:buNone/>
-            </a:pPr>
-            <a:r>
-              <a:rPr lang="en-US" sz="1500" b="0">
-                <a:solidFill>
-                  <a:srgbClr val="202B33"/>
-                </a:solidFill>
-                <a:latin typeface="Arial"/>
-                <a:ea typeface="Arial"/>
-                <a:cs typeface="Arial"/>
-              </a:rPr>
-              <a:t xml:space="preserve">person making the decision. It does not</a:t>
-            </a:r>
-            <a:endParaRPr lang="en-US" sz="1500"/>
-          </a:p>
-          <a:p>
-            <a:pPr marL="0" indent="0">
-              <a:lnSpc>
-                <a:spcPts val="1950"/>
-              </a:lnSpc>
-              <a:spcAft>
-                <a:spcPts val="0"/>
-              </a:spcAft>
-              <a:buNone/>
-            </a:pPr>
-            <a:r>
-              <a:rPr lang="en-US" sz="1500" b="0">
-                <a:solidFill>
-                  <a:srgbClr val="202B33"/>
-                </a:solidFill>
-                <a:latin typeface="Arial"/>
-                <a:ea typeface="Arial"/>
-                <a:cs typeface="Arial"/>
-              </a:rPr>
-              <a:t xml:space="preserve">vanish. It relocates, and it usually</a:t>
-            </a:r>
-            <a:endParaRPr lang="en-US" sz="1500"/>
-          </a:p>
-          <a:p>
-            <a:pPr marL="0" indent="0">
-              <a:lnSpc>
-                <a:spcPts val="1950"/>
-              </a:lnSpc>
-              <a:spcAft>
-                <a:spcPts val="0"/>
-              </a:spcAft>
-              <a:buNone/>
-            </a:pPr>
-            <a:r>
-              <a:rPr lang="en-US" sz="1500" b="0">
-                <a:solidFill>
-                  <a:srgbClr val="202B33"/>
-                </a:solidFill>
-                <a:latin typeface="Arial"/>
-                <a:ea typeface="Arial"/>
-                <a:cs typeface="Arial"/>
-              </a:rPr>
-              <a:t xml:space="preserve">relocates somewhere you are not looking.</a:t>
+              <a:t xml:space="preserve">The transport version is word three,</a:t>
+            </a:r>
+            <a:endParaRPr lang="en-US" sz="1500"/>
+          </a:p>
+          <a:p>
+            <a:pPr marL="0" indent="0">
+              <a:lnSpc>
+                <a:spcPts val="1950"/>
+              </a:lnSpc>
+              <a:spcAft>
+                <a:spcPts val="0"/>
+              </a:spcAft>
+              <a:buNone/>
+            </a:pPr>
+            <a:r>
+              <a:rPr lang="en-US" sz="1500" b="0">
+                <a:solidFill>
+                  <a:srgbClr val="202B33"/>
+                </a:solidFill>
+                <a:latin typeface="Arial"/>
+                <a:ea typeface="Arial"/>
+                <a:cs typeface="Arial"/>
+              </a:rPr>
+              <a:t xml:space="preserve">induced demand. Add a lane to a congested</a:t>
+            </a:r>
+            <a:endParaRPr lang="en-US" sz="1500"/>
+          </a:p>
+          <a:p>
+            <a:pPr marL="0" indent="0">
+              <a:lnSpc>
+                <a:spcPts val="1950"/>
+              </a:lnSpc>
+              <a:spcAft>
+                <a:spcPts val="0"/>
+              </a:spcAft>
+              <a:buNone/>
+            </a:pPr>
+            <a:r>
+              <a:rPr lang="en-US" sz="1500" b="0">
+                <a:solidFill>
+                  <a:srgbClr val="202B33"/>
+                </a:solidFill>
+                <a:latin typeface="Arial"/>
+                <a:ea typeface="Arial"/>
+                <a:cs typeface="Arial"/>
+              </a:rPr>
+              <a:t xml:space="preserve">highway and you get more traffic. Duranton</a:t>
+            </a:r>
+            <a:endParaRPr lang="en-US" sz="1500"/>
+          </a:p>
+          <a:p>
+            <a:pPr marL="0" indent="0">
+              <a:lnSpc>
+                <a:spcPts val="1950"/>
+              </a:lnSpc>
+              <a:spcAft>
+                <a:spcPts val="0"/>
+              </a:spcAft>
+              <a:buNone/>
+            </a:pPr>
+            <a:r>
+              <a:rPr lang="en-US" sz="1500" b="0">
+                <a:solidFill>
+                  <a:srgbClr val="202B33"/>
+                </a:solidFill>
+                <a:latin typeface="Arial"/>
+                <a:ea typeface="Arial"/>
+                <a:cs typeface="Arial"/>
+              </a:rPr>
+              <a:t xml:space="preserve">and Turner measured it across US cities in</a:t>
+            </a:r>
+            <a:endParaRPr lang="en-US" sz="1500"/>
+          </a:p>
+          <a:p>
+            <a:pPr marL="0" indent="0">
+              <a:lnSpc>
+                <a:spcPts val="1950"/>
+              </a:lnSpc>
+              <a:spcAft>
+                <a:spcPts val="0"/>
+              </a:spcAft>
+              <a:buNone/>
+            </a:pPr>
+            <a:r>
+              <a:rPr lang="en-US" sz="1500" b="0">
+                <a:solidFill>
+                  <a:srgbClr val="202B33"/>
+                </a:solidFill>
+                <a:latin typeface="Arial"/>
+                <a:ea typeface="Arial"/>
+                <a:cs typeface="Arial"/>
+              </a:rPr>
+              <a:t xml:space="preserve">2011 and found the elasticity of driving</a:t>
+            </a:r>
+            <a:endParaRPr lang="en-US" sz="1500"/>
+          </a:p>
+          <a:p>
+            <a:pPr marL="0" indent="0">
+              <a:lnSpc>
+                <a:spcPts val="1950"/>
+              </a:lnSpc>
+              <a:spcAft>
+                <a:spcPts val="0"/>
+              </a:spcAft>
+              <a:buNone/>
+            </a:pPr>
+            <a:r>
+              <a:rPr lang="en-US" sz="1500" b="0">
+                <a:solidFill>
+                  <a:srgbClr val="202B33"/>
+                </a:solidFill>
+                <a:latin typeface="Arial"/>
+                <a:ea typeface="Arial"/>
+                <a:cs typeface="Arial"/>
+              </a:rPr>
+              <a:t xml:space="preserve">with respect to lane-kilometres is roughly</a:t>
+            </a:r>
+            <a:endParaRPr lang="en-US" sz="1500"/>
+          </a:p>
+          <a:p>
+            <a:pPr marL="0" indent="0">
+              <a:lnSpc>
+                <a:spcPts val="1950"/>
+              </a:lnSpc>
+              <a:spcAft>
+                <a:spcPts val="0"/>
+              </a:spcAft>
+              <a:buNone/>
+            </a:pPr>
+            <a:r>
+              <a:rPr lang="en-US" sz="1500" b="0">
+                <a:solidFill>
+                  <a:srgbClr val="202B33"/>
+                </a:solidFill>
+                <a:latin typeface="Arial"/>
+                <a:ea typeface="Arial"/>
+                <a:cs typeface="Arial"/>
+              </a:rPr>
+              <a:t xml:space="preserve">one. Build ten percent more road, get ten</a:t>
+            </a:r>
+            <a:endParaRPr lang="en-US" sz="1500"/>
+          </a:p>
+          <a:p>
+            <a:pPr marL="0" indent="0">
+              <a:lnSpc>
+                <a:spcPts val="1950"/>
+              </a:lnSpc>
+              <a:spcAft>
+                <a:spcPts val="0"/>
+              </a:spcAft>
+              <a:buNone/>
+            </a:pPr>
+            <a:r>
+              <a:rPr lang="en-US" sz="1500" b="0">
+                <a:solidFill>
+                  <a:srgbClr val="202B33"/>
+                </a:solidFill>
+                <a:latin typeface="Arial"/>
+                <a:ea typeface="Arial"/>
+                <a:cs typeface="Arial"/>
+              </a:rPr>
+              <a:t xml:space="preserve">percent more driving. The congestion comes</a:t>
+            </a:r>
+            <a:endParaRPr lang="en-US" sz="1500"/>
+          </a:p>
+          <a:p>
+            <a:pPr marL="0" indent="0">
+              <a:lnSpc>
+                <a:spcPts val="1950"/>
+              </a:lnSpc>
+              <a:spcAft>
+                <a:spcPts val="0"/>
+              </a:spcAft>
+              <a:buNone/>
+            </a:pPr>
+            <a:r>
+              <a:rPr lang="en-US" sz="1500" b="0">
+                <a:solidFill>
+                  <a:srgbClr val="202B33"/>
+                </a:solidFill>
+                <a:latin typeface="Arial"/>
+                <a:ea typeface="Arial"/>
+                <a:cs typeface="Arial"/>
+              </a:rPr>
+              <a:t xml:space="preserve">back.</a:t>
             </a:r>
             <a:endParaRPr lang="en-US" sz="1500"/>
           </a:p>
@@ -8987,7 +7465,7 @@
                 <a:ea typeface="Arial"/>
                 <a:cs typeface="Arial"/>
               </a:rPr>
-              <a:t xml:space="preserve">04 / 08    SOURCE SLIDE 6</a:t>
+              <a:t xml:space="preserve">04 / 07    SOURCE SLIDE 7</a:t>
             </a:r>
             <a:endParaRPr lang="en-US" sz="1050"/>
           </a:p>
@@ -9036,7 +7514,7 @@
                 <a:ea typeface="Arial"/>
                 <a:cs typeface="Arial"/>
               </a:rPr>
-              <a:t xml:space="preserve">Jevons, coal, and the extra lane</a:t>
+              <a:t xml:space="preserve">Now do it to software</a:t>
             </a:r>
             <a:endParaRPr lang="en-US" sz="2550"/>
           </a:p>
@@ -9085,30 +7563,30 @@
                 <a:ea typeface="Arial"/>
                 <a:cs typeface="Arial"/>
               </a:rPr>
-              <a:t xml:space="preserve">1865: better engines burned more coal, not</a:t>
-            </a:r>
-            <a:endParaRPr lang="en-US" sz="1500"/>
-          </a:p>
-          <a:p>
-            <a:pPr marL="0" indent="0">
-              <a:lnSpc>
-                <a:spcPts val="1950"/>
-              </a:lnSpc>
-              <a:spcAft>
-                <a:spcPts val="0"/>
-              </a:spcAft>
-              <a:buNone/>
-            </a:pPr>
-            <a:r>
-              <a:rPr lang="en-US" sz="1500" b="0">
-                <a:solidFill>
-                  <a:srgbClr val="202B33"/>
-                </a:solidFill>
-                <a:latin typeface="Arial"/>
-                <a:ea typeface="Arial"/>
-                <a:cs typeface="Arial"/>
-              </a:rPr>
-              <a:t xml:space="preserve">less</a:t>
+              <a:t xml:space="preserve">Density: a frontier call where a lookup</a:t>
+            </a:r>
+            <a:endParaRPr lang="en-US" sz="1500"/>
+          </a:p>
+          <a:p>
+            <a:pPr marL="0" indent="0">
+              <a:lnSpc>
+                <a:spcPts val="1950"/>
+              </a:lnSpc>
+              <a:spcAft>
+                <a:spcPts val="0"/>
+              </a:spcAft>
+              <a:buNone/>
+            </a:pPr>
+            <a:r>
+              <a:rPr lang="en-US" sz="1500" b="0">
+                <a:solidFill>
+                  <a:srgbClr val="202B33"/>
+                </a:solidFill>
+                <a:latin typeface="Arial"/>
+                <a:ea typeface="Arial"/>
+                <a:cs typeface="Arial"/>
+              </a:rPr>
+              <a:t xml:space="preserve">would do</a:t>
             </a:r>
             <a:endParaRPr lang="en-US" sz="1500"/>
           </a:p>
@@ -9154,30 +7632,30 @@
                 <a:ea typeface="Arial"/>
                 <a:cs typeface="Arial"/>
               </a:rPr>
-              <a:t xml:space="preserve">Add a lane, get traffic. Elasticity near</a:t>
-            </a:r>
-            <a:endParaRPr lang="en-US" sz="1500"/>
-          </a:p>
-          <a:p>
-            <a:pPr marL="0" indent="0">
-              <a:lnSpc>
-                <a:spcPts val="1950"/>
-              </a:lnSpc>
-              <a:spcAft>
-                <a:spcPts val="0"/>
-              </a:spcAft>
-              <a:buNone/>
-            </a:pPr>
-            <a:r>
-              <a:rPr lang="en-US" sz="1500" b="0">
-                <a:solidFill>
-                  <a:srgbClr val="202B33"/>
-                </a:solidFill>
-                <a:latin typeface="Arial"/>
-                <a:ea typeface="Arial"/>
-                <a:cs typeface="Arial"/>
-              </a:rPr>
-              <a:t xml:space="preserve">one.</a:t>
+              <a:t xml:space="preserve">Business mix: products viable only at</a:t>
+            </a:r>
+            <a:endParaRPr lang="en-US" sz="1500"/>
+          </a:p>
+          <a:p>
+            <a:pPr marL="0" indent="0">
+              <a:lnSpc>
+                <a:spcPts val="1950"/>
+              </a:lnSpc>
+              <a:spcAft>
+                <a:spcPts val="0"/>
+              </a:spcAft>
+              <a:buNone/>
+            </a:pPr>
+            <a:r>
+              <a:rPr lang="en-US" sz="1500" b="0">
+                <a:solidFill>
+                  <a:srgbClr val="202B33"/>
+                </a:solidFill>
+                <a:latin typeface="Arial"/>
+                <a:ea typeface="Arial"/>
+                <a:cs typeface="Arial"/>
+              </a:rPr>
+              <a:t xml:space="preserve">today's rate</a:t>
             </a:r>
             <a:endParaRPr lang="en-US" sz="1500"/>
           </a:p>
@@ -9223,30 +7701,30 @@
                 <a:ea typeface="Arial"/>
                 <a:cs typeface="Arial"/>
               </a:rPr>
-              <a:t xml:space="preserve">Spend = price × jobs × calls per job ×</a:t>
-            </a:r>
-            <a:endParaRPr lang="en-US" sz="1500"/>
-          </a:p>
-          <a:p>
-            <a:pPr marL="0" indent="0">
-              <a:lnSpc>
-                <a:spcPts val="1950"/>
-              </a:lnSpc>
-              <a:spcAft>
-                <a:spcPts val="0"/>
-              </a:spcAft>
-              <a:buNone/>
-            </a:pPr>
-            <a:r>
-              <a:rPr lang="en-US" sz="1500" b="0">
-                <a:solidFill>
-                  <a:srgbClr val="202B33"/>
-                </a:solidFill>
-                <a:latin typeface="Arial"/>
-                <a:ea typeface="Arial"/>
-                <a:cs typeface="Arial"/>
-              </a:rPr>
-              <a:t xml:space="preserve">tokens per call</a:t>
+              <a:t xml:space="preserve">Bundled rent: unlimited usage promised in a</a:t>
+            </a:r>
+            <a:endParaRPr lang="en-US" sz="1500"/>
+          </a:p>
+          <a:p>
+            <a:pPr marL="0" indent="0">
+              <a:lnSpc>
+                <a:spcPts val="1950"/>
+              </a:lnSpc>
+              <a:spcAft>
+                <a:spcPts val="0"/>
+              </a:spcAft>
+              <a:buNone/>
+            </a:pPr>
+            <a:r>
+              <a:rPr lang="en-US" sz="1500" b="0">
+                <a:solidFill>
+                  <a:srgbClr val="202B33"/>
+                </a:solidFill>
+                <a:latin typeface="Arial"/>
+                <a:ea typeface="Arial"/>
+                <a:cs typeface="Arial"/>
+              </a:rPr>
+              <a:t xml:space="preserve">contract</a:t>
             </a:r>
             <a:endParaRPr lang="en-US" sz="1500"/>
           </a:p>
@@ -9292,168 +7770,30 @@
                 <a:ea typeface="Arial"/>
                 <a:cs typeface="Arial"/>
               </a:rPr>
-              <a:t xml:space="preserve">In 1865 William Stanley Jevons noticed</a:t>
-            </a:r>
-            <a:endParaRPr lang="en-US" sz="1500"/>
-          </a:p>
-          <a:p>
-            <a:pPr marL="0" indent="0">
-              <a:lnSpc>
-                <a:spcPts val="1950"/>
-              </a:lnSpc>
-              <a:spcAft>
-                <a:spcPts val="0"/>
-              </a:spcAft>
-              <a:buNone/>
-            </a:pPr>
-            <a:r>
-              <a:rPr lang="en-US" sz="1500" b="0">
-                <a:solidFill>
-                  <a:srgbClr val="202B33"/>
-                </a:solidFill>
-                <a:latin typeface="Arial"/>
-                <a:ea typeface="Arial"/>
-                <a:cs typeface="Arial"/>
-              </a:rPr>
-              <a:t xml:space="preserve">something that annoyed everyone. Steam</a:t>
-            </a:r>
-            <a:endParaRPr lang="en-US" sz="1500"/>
-          </a:p>
-          <a:p>
-            <a:pPr marL="0" indent="0">
-              <a:lnSpc>
-                <a:spcPts val="1950"/>
-              </a:lnSpc>
-              <a:spcAft>
-                <a:spcPts val="0"/>
-              </a:spcAft>
-              <a:buNone/>
-            </a:pPr>
-            <a:r>
-              <a:rPr lang="en-US" sz="1500" b="0">
-                <a:solidFill>
-                  <a:srgbClr val="202B33"/>
-                </a:solidFill>
-                <a:latin typeface="Arial"/>
-                <a:ea typeface="Arial"/>
-                <a:cs typeface="Arial"/>
-              </a:rPr>
-              <a:t xml:space="preserve">engines had gotten dramatically more</a:t>
-            </a:r>
-            <a:endParaRPr lang="en-US" sz="1500"/>
-          </a:p>
-          <a:p>
-            <a:pPr marL="0" indent="0">
-              <a:lnSpc>
-                <a:spcPts val="1950"/>
-              </a:lnSpc>
-              <a:spcAft>
-                <a:spcPts val="0"/>
-              </a:spcAft>
-              <a:buNone/>
-            </a:pPr>
-            <a:r>
-              <a:rPr lang="en-US" sz="1500" b="0">
-                <a:solidFill>
-                  <a:srgbClr val="202B33"/>
-                </a:solidFill>
-                <a:latin typeface="Arial"/>
-                <a:ea typeface="Arial"/>
-                <a:cs typeface="Arial"/>
-              </a:rPr>
-              <a:t xml:space="preserve">efficient, and Britain was burning far more</a:t>
-            </a:r>
-            <a:endParaRPr lang="en-US" sz="1500"/>
-          </a:p>
-          <a:p>
-            <a:pPr marL="0" indent="0">
-              <a:lnSpc>
-                <a:spcPts val="1950"/>
-              </a:lnSpc>
-              <a:spcAft>
-                <a:spcPts val="0"/>
-              </a:spcAft>
-              <a:buNone/>
-            </a:pPr>
-            <a:r>
-              <a:rPr lang="en-US" sz="1500" b="0">
-                <a:solidFill>
-                  <a:srgbClr val="202B33"/>
-                </a:solidFill>
-                <a:latin typeface="Arial"/>
-                <a:ea typeface="Arial"/>
-                <a:cs typeface="Arial"/>
-              </a:rPr>
-              <a:t xml:space="preserve">coal than before, not less. Efficiency made</a:t>
-            </a:r>
-            <a:endParaRPr lang="en-US" sz="1500"/>
-          </a:p>
-          <a:p>
-            <a:pPr marL="0" indent="0">
-              <a:lnSpc>
-                <a:spcPts val="1950"/>
-              </a:lnSpc>
-              <a:spcAft>
-                <a:spcPts val="0"/>
-              </a:spcAft>
-              <a:buNone/>
-            </a:pPr>
-            <a:r>
-              <a:rPr lang="en-US" sz="1500" b="0">
-                <a:solidFill>
-                  <a:srgbClr val="202B33"/>
-                </a:solidFill>
-                <a:latin typeface="Arial"/>
-                <a:ea typeface="Arial"/>
-                <a:cs typeface="Arial"/>
-              </a:rPr>
-              <a:t xml:space="preserve">coal useful for more things, so people used</a:t>
-            </a:r>
-            <a:endParaRPr lang="en-US" sz="1500"/>
-          </a:p>
-          <a:p>
-            <a:pPr marL="0" indent="0">
-              <a:lnSpc>
-                <a:spcPts val="1950"/>
-              </a:lnSpc>
-              <a:spcAft>
-                <a:spcPts val="0"/>
-              </a:spcAft>
-              <a:buNone/>
-            </a:pPr>
-            <a:r>
-              <a:rPr lang="en-US" sz="1500" b="0">
-                <a:solidFill>
-                  <a:srgbClr val="202B33"/>
-                </a:solidFill>
-                <a:latin typeface="Arial"/>
-                <a:ea typeface="Arial"/>
-                <a:cs typeface="Arial"/>
-              </a:rPr>
-              <a:t xml:space="preserve">it for more things. That is the Jevons</a:t>
-            </a:r>
-            <a:endParaRPr lang="en-US" sz="1500"/>
-          </a:p>
-          <a:p>
-            <a:pPr marL="0" indent="0">
-              <a:lnSpc>
-                <a:spcPts val="1950"/>
-              </a:lnSpc>
-              <a:spcAft>
-                <a:spcPts val="0"/>
-              </a:spcAft>
-              <a:buNone/>
-            </a:pPr>
-            <a:r>
-              <a:rPr lang="en-US" sz="1500" b="0">
-                <a:solidFill>
-                  <a:srgbClr val="202B33"/>
-                </a:solidFill>
-                <a:latin typeface="Arial"/>
-                <a:ea typeface="Arial"/>
-                <a:cs typeface="Arial"/>
-              </a:rPr>
-              <a:t xml:space="preserve">paradox, and it is word two.</a:t>
+              <a:t xml:space="preserve">Small format: deterministic code loses the</a:t>
+            </a:r>
+            <a:endParaRPr lang="en-US" sz="1500"/>
+          </a:p>
+          <a:p>
+            <a:pPr marL="0" indent="0">
+              <a:lnSpc>
+                <a:spcPts val="1950"/>
+              </a:lnSpc>
+              <a:spcAft>
+                <a:spcPts val="0"/>
+              </a:spcAft>
+              <a:buNone/>
+            </a:pPr>
+            <a:r>
+              <a:rPr lang="en-US" sz="1500" b="0">
+                <a:solidFill>
+                  <a:srgbClr val="202B33"/>
+                </a:solidFill>
+                <a:latin typeface="Arial"/>
+                <a:ea typeface="Arial"/>
+                <a:cs typeface="Arial"/>
+              </a:rPr>
+              <a:t xml:space="preserve">design review</a:t>
             </a:r>
             <a:endParaRPr lang="en-US" sz="1500"/>
           </a:p>
@@ -9499,53 +7839,122 @@
                 <a:ea typeface="Arial"/>
                 <a:cs typeface="Arial"/>
               </a:rPr>
-              <a:t xml:space="preserve">The transport version is word three,</a:t>
-            </a:r>
-            <a:endParaRPr lang="en-US" sz="1500"/>
-          </a:p>
-          <a:p>
-            <a:pPr marL="0" indent="0">
-              <a:lnSpc>
-                <a:spcPts val="1950"/>
-              </a:lnSpc>
-              <a:spcAft>
-                <a:spcPts val="0"/>
-              </a:spcAft>
-              <a:buNone/>
-            </a:pPr>
-            <a:r>
-              <a:rPr lang="en-US" sz="1500" b="0">
-                <a:solidFill>
-                  <a:srgbClr val="202B33"/>
-                </a:solidFill>
-                <a:latin typeface="Arial"/>
-                <a:ea typeface="Arial"/>
-                <a:cs typeface="Arial"/>
-              </a:rPr>
-              <a:t xml:space="preserve">induced demand. Add a lane to a congested</a:t>
-            </a:r>
-            <a:endParaRPr lang="en-US" sz="1500"/>
-          </a:p>
-          <a:p>
-            <a:pPr marL="0" indent="0">
-              <a:lnSpc>
-                <a:spcPts val="1950"/>
-              </a:lnSpc>
-              <a:spcAft>
-                <a:spcPts val="0"/>
-              </a:spcAft>
-              <a:buNone/>
-            </a:pPr>
-            <a:r>
-              <a:rPr lang="en-US" sz="1500" b="0">
-                <a:solidFill>
-                  <a:srgbClr val="202B33"/>
-                </a:solidFill>
-                <a:latin typeface="Arial"/>
-                <a:ea typeface="Arial"/>
-                <a:cs typeface="Arial"/>
-              </a:rPr>
-              <a:t xml:space="preserve">highway and you get more traffic. Duranton</a:t>
+              <a:t xml:space="preserve">Walk the same chain through your stack.</a:t>
+            </a:r>
+            <a:endParaRPr lang="en-US" sz="1500"/>
+          </a:p>
+          <a:p>
+            <a:pPr marL="0" indent="0">
+              <a:lnSpc>
+                <a:spcPts val="1950"/>
+              </a:lnSpc>
+              <a:spcAft>
+                <a:spcPts val="0"/>
+              </a:spcAft>
+              <a:buNone/>
+            </a:pPr>
+            <a:r>
+              <a:rPr lang="en-US" sz="1500" b="0">
+                <a:solidFill>
+                  <a:srgbClr val="202B33"/>
+                </a:solidFill>
+                <a:latin typeface="Arial"/>
+                <a:ea typeface="Arial"/>
+                <a:cs typeface="Arial"/>
+              </a:rPr>
+              <a:t xml:space="preserve">Density: a frontier call where a cache, a</a:t>
+            </a:r>
+            <a:endParaRPr lang="en-US" sz="1500"/>
+          </a:p>
+          <a:p>
+            <a:pPr marL="0" indent="0">
+              <a:lnSpc>
+                <a:spcPts val="1950"/>
+              </a:lnSpc>
+              <a:spcAft>
+                <a:spcPts val="0"/>
+              </a:spcAft>
+              <a:buNone/>
+            </a:pPr>
+            <a:r>
+              <a:rPr lang="en-US" sz="1500" b="0">
+                <a:solidFill>
+                  <a:srgbClr val="202B33"/>
+                </a:solidFill>
+                <a:latin typeface="Arial"/>
+                <a:ea typeface="Arial"/>
+                <a:cs typeface="Arial"/>
+              </a:rPr>
+              <a:t xml:space="preserve">regex, or a dictionary lookup would have</a:t>
+            </a:r>
+            <a:endParaRPr lang="en-US" sz="1500"/>
+          </a:p>
+          <a:p>
+            <a:pPr marL="0" indent="0">
+              <a:lnSpc>
+                <a:spcPts val="1950"/>
+              </a:lnSpc>
+              <a:spcAft>
+                <a:spcPts val="0"/>
+              </a:spcAft>
+              <a:buNone/>
+            </a:pPr>
+            <a:r>
+              <a:rPr lang="en-US" sz="1500" b="0">
+                <a:solidFill>
+                  <a:srgbClr val="202B33"/>
+                </a:solidFill>
+                <a:latin typeface="Arial"/>
+                <a:ea typeface="Arial"/>
+                <a:cs typeface="Arial"/>
+              </a:rPr>
+              <a:t xml:space="preserve">done, because the call looked free. Longer</a:t>
+            </a:r>
+            <a:endParaRPr lang="en-US" sz="1500"/>
+          </a:p>
+          <a:p>
+            <a:pPr marL="0" indent="0">
+              <a:lnSpc>
+                <a:spcPts val="1950"/>
+              </a:lnSpc>
+              <a:spcAft>
+                <a:spcPts val="0"/>
+              </a:spcAft>
+              <a:buNone/>
+            </a:pPr>
+            <a:r>
+              <a:rPr lang="en-US" sz="1500" b="0">
+                <a:solidFill>
+                  <a:srgbClr val="202B33"/>
+                </a:solidFill>
+                <a:latin typeface="Arial"/>
+                <a:ea typeface="Arial"/>
+                <a:cs typeface="Arial"/>
+              </a:rPr>
+              <a:t xml:space="preserve">context, more retries, more competing</a:t>
+            </a:r>
+            <a:endParaRPr lang="en-US" sz="1500"/>
+          </a:p>
+          <a:p>
+            <a:pPr marL="0" indent="0">
+              <a:lnSpc>
+                <a:spcPts val="1950"/>
+              </a:lnSpc>
+              <a:spcAft>
+                <a:spcPts val="0"/>
+              </a:spcAft>
+              <a:buNone/>
+            </a:pPr>
+            <a:r>
+              <a:rPr lang="en-US" sz="1500" b="0">
+                <a:solidFill>
+                  <a:srgbClr val="202B33"/>
+                </a:solidFill>
+                <a:latin typeface="Arial"/>
+                <a:ea typeface="Arial"/>
+                <a:cs typeface="Arial"/>
+              </a:rPr>
+              <a:t xml:space="preserve">branches, frontier by default. Business</a:t>
             </a:r>
             <a:endParaRPr lang="en-US" sz="1500"/>
           </a:p>
@@ -9594,122 +8003,191 @@
                 <a:ea typeface="Arial"/>
                 <a:cs typeface="Arial"/>
               </a:rPr>
-              <a:t xml:space="preserve">and Turner measured it across US cities in</a:t>
-            </a:r>
-            <a:endParaRPr lang="en-US" sz="1500"/>
-          </a:p>
-          <a:p>
-            <a:pPr marL="0" indent="0">
-              <a:lnSpc>
-                <a:spcPts val="1950"/>
-              </a:lnSpc>
-              <a:spcAft>
-                <a:spcPts val="0"/>
-              </a:spcAft>
-              <a:buNone/>
-            </a:pPr>
-            <a:r>
-              <a:rPr lang="en-US" sz="1500" b="0">
-                <a:solidFill>
-                  <a:srgbClr val="202B33"/>
-                </a:solidFill>
-                <a:latin typeface="Arial"/>
-                <a:ea typeface="Arial"/>
-                <a:cs typeface="Arial"/>
-              </a:rPr>
-              <a:t xml:space="preserve">2011 and found the elasticity of driving</a:t>
-            </a:r>
-            <a:endParaRPr lang="en-US" sz="1500"/>
-          </a:p>
-          <a:p>
-            <a:pPr marL="0" indent="0">
-              <a:lnSpc>
-                <a:spcPts val="1950"/>
-              </a:lnSpc>
-              <a:spcAft>
-                <a:spcPts val="0"/>
-              </a:spcAft>
-              <a:buNone/>
-            </a:pPr>
-            <a:r>
-              <a:rPr lang="en-US" sz="1500" b="0">
-                <a:solidFill>
-                  <a:srgbClr val="202B33"/>
-                </a:solidFill>
-                <a:latin typeface="Arial"/>
-                <a:ea typeface="Arial"/>
-                <a:cs typeface="Arial"/>
-              </a:rPr>
-              <a:t xml:space="preserve">with respect to lane-kilometres is roughly</a:t>
-            </a:r>
-            <a:endParaRPr lang="en-US" sz="1500"/>
-          </a:p>
-          <a:p>
-            <a:pPr marL="0" indent="0">
-              <a:lnSpc>
-                <a:spcPts val="1950"/>
-              </a:lnSpc>
-              <a:spcAft>
-                <a:spcPts val="0"/>
-              </a:spcAft>
-              <a:buNone/>
-            </a:pPr>
-            <a:r>
-              <a:rPr lang="en-US" sz="1500" b="0">
-                <a:solidFill>
-                  <a:srgbClr val="202B33"/>
-                </a:solidFill>
-                <a:latin typeface="Arial"/>
-                <a:ea typeface="Arial"/>
-                <a:cs typeface="Arial"/>
-              </a:rPr>
-              <a:t xml:space="preserve">one. Build ten percent more road, get ten</a:t>
-            </a:r>
-            <a:endParaRPr lang="en-US" sz="1500"/>
-          </a:p>
-          <a:p>
-            <a:pPr marL="0" indent="0">
-              <a:lnSpc>
-                <a:spcPts val="1950"/>
-              </a:lnSpc>
-              <a:spcAft>
-                <a:spcPts val="0"/>
-              </a:spcAft>
-              <a:buNone/>
-            </a:pPr>
-            <a:r>
-              <a:rPr lang="en-US" sz="1500" b="0">
-                <a:solidFill>
-                  <a:srgbClr val="202B33"/>
-                </a:solidFill>
-                <a:latin typeface="Arial"/>
-                <a:ea typeface="Arial"/>
-                <a:cs typeface="Arial"/>
-              </a:rPr>
-              <a:t xml:space="preserve">percent more driving. The congestion comes</a:t>
-            </a:r>
-            <a:endParaRPr lang="en-US" sz="1500"/>
-          </a:p>
-          <a:p>
-            <a:pPr marL="0" indent="0">
-              <a:lnSpc>
-                <a:spcPts val="1950"/>
-              </a:lnSpc>
-              <a:spcAft>
-                <a:spcPts val="0"/>
-              </a:spcAft>
-              <a:buNone/>
-            </a:pPr>
-            <a:r>
-              <a:rPr lang="en-US" sz="1500" b="0">
-                <a:solidFill>
-                  <a:srgbClr val="202B33"/>
-                </a:solidFill>
-                <a:latin typeface="Arial"/>
-                <a:ea typeface="Arial"/>
-                <a:cs typeface="Arial"/>
-              </a:rPr>
-              <a:t xml:space="preserve">back.</a:t>
+              <a:t xml:space="preserve">mix: products whose unit economics only</a:t>
+            </a:r>
+            <a:endParaRPr lang="en-US" sz="1500"/>
+          </a:p>
+          <a:p>
+            <a:pPr marL="0" indent="0">
+              <a:lnSpc>
+                <a:spcPts val="1950"/>
+              </a:lnSpc>
+              <a:spcAft>
+                <a:spcPts val="0"/>
+              </a:spcAft>
+              <a:buNone/>
+            </a:pPr>
+            <a:r>
+              <a:rPr lang="en-US" sz="1500" b="0">
+                <a:solidFill>
+                  <a:srgbClr val="202B33"/>
+                </a:solidFill>
+                <a:latin typeface="Arial"/>
+                <a:ea typeface="Arial"/>
+                <a:cs typeface="Arial"/>
+              </a:rPr>
+              <a:t xml:space="preserve">work at promotional rates, crowding out</a:t>
+            </a:r>
+            <a:endParaRPr lang="en-US" sz="1500"/>
+          </a:p>
+          <a:p>
+            <a:pPr marL="0" indent="0">
+              <a:lnSpc>
+                <a:spcPts val="1950"/>
+              </a:lnSpc>
+              <a:spcAft>
+                <a:spcPts val="0"/>
+              </a:spcAft>
+              <a:buNone/>
+            </a:pPr>
+            <a:r>
+              <a:rPr lang="en-US" sz="1500" b="0">
+                <a:solidFill>
+                  <a:srgbClr val="202B33"/>
+                </a:solidFill>
+                <a:latin typeface="Arial"/>
+                <a:ea typeface="Arial"/>
+                <a:cs typeface="Arial"/>
+              </a:rPr>
+              <a:t xml:space="preserve">products that would have worked at any</a:t>
+            </a:r>
+            <a:endParaRPr lang="en-US" sz="1500"/>
+          </a:p>
+          <a:p>
+            <a:pPr marL="0" indent="0">
+              <a:lnSpc>
+                <a:spcPts val="1950"/>
+              </a:lnSpc>
+              <a:spcAft>
+                <a:spcPts val="0"/>
+              </a:spcAft>
+              <a:buNone/>
+            </a:pPr>
+            <a:r>
+              <a:rPr lang="en-US" sz="1500" b="0">
+                <a:solidFill>
+                  <a:srgbClr val="202B33"/>
+                </a:solidFill>
+                <a:latin typeface="Arial"/>
+                <a:ea typeface="Arial"/>
+                <a:cs typeface="Arial"/>
+              </a:rPr>
+              <a:t xml:space="preserve">price. Bundled rent: unlimited-usage</a:t>
+            </a:r>
+            <a:endParaRPr lang="en-US" sz="1500"/>
+          </a:p>
+          <a:p>
+            <a:pPr marL="0" indent="0">
+              <a:lnSpc>
+                <a:spcPts val="1950"/>
+              </a:lnSpc>
+              <a:spcAft>
+                <a:spcPts val="0"/>
+              </a:spcAft>
+              <a:buNone/>
+            </a:pPr>
+            <a:r>
+              <a:rPr lang="en-US" sz="1500" b="0">
+                <a:solidFill>
+                  <a:srgbClr val="202B33"/>
+                </a:solidFill>
+                <a:latin typeface="Arial"/>
+                <a:ea typeface="Arial"/>
+                <a:cs typeface="Arial"/>
+              </a:rPr>
+              <a:t xml:space="preserve">promises to customers, baked into a</a:t>
+            </a:r>
+            <a:endParaRPr lang="en-US" sz="1500"/>
+          </a:p>
+          <a:p>
+            <a:pPr marL="0" indent="0">
+              <a:lnSpc>
+                <a:spcPts val="1950"/>
+              </a:lnSpc>
+              <a:spcAft>
+                <a:spcPts val="0"/>
+              </a:spcAft>
+              <a:buNone/>
+            </a:pPr>
+            <a:r>
+              <a:rPr lang="en-US" sz="1500" b="0">
+                <a:solidFill>
+                  <a:srgbClr val="202B33"/>
+                </a:solidFill>
+                <a:latin typeface="Arial"/>
+                <a:ea typeface="Arial"/>
+                <a:cs typeface="Arial"/>
+              </a:rPr>
+              <a:t xml:space="preserve">contract, priced against an input you do</a:t>
+            </a:r>
+            <a:endParaRPr lang="en-US" sz="1500"/>
+          </a:p>
+          <a:p>
+            <a:pPr marL="0" indent="0">
+              <a:lnSpc>
+                <a:spcPts val="1950"/>
+              </a:lnSpc>
+              <a:spcAft>
+                <a:spcPts val="0"/>
+              </a:spcAft>
+              <a:buNone/>
+            </a:pPr>
+            <a:r>
+              <a:rPr lang="en-US" sz="1500" b="0">
+                <a:solidFill>
+                  <a:srgbClr val="202B33"/>
+                </a:solidFill>
+                <a:latin typeface="Arial"/>
+                <a:ea typeface="Arial"/>
+                <a:cs typeface="Arial"/>
+              </a:rPr>
+              <a:t xml:space="preserve">not control. And the small format: boring</a:t>
+            </a:r>
+            <a:endParaRPr lang="en-US" sz="1500"/>
+          </a:p>
+          <a:p>
+            <a:pPr marL="0" indent="0">
+              <a:lnSpc>
+                <a:spcPts val="1950"/>
+              </a:lnSpc>
+              <a:spcAft>
+                <a:spcPts val="0"/>
+              </a:spcAft>
+              <a:buNone/>
+            </a:pPr>
+            <a:r>
+              <a:rPr lang="en-US" sz="1500" b="0">
+                <a:solidFill>
+                  <a:srgbClr val="202B33"/>
+                </a:solidFill>
+                <a:latin typeface="Arial"/>
+                <a:ea typeface="Arial"/>
+                <a:cs typeface="Arial"/>
+              </a:rPr>
+              <a:t xml:space="preserve">deterministic code losing the design review</a:t>
+            </a:r>
+            <a:endParaRPr lang="en-US" sz="1500"/>
+          </a:p>
+          <a:p>
+            <a:pPr marL="0" indent="0">
+              <a:lnSpc>
+                <a:spcPts val="1950"/>
+              </a:lnSpc>
+              <a:spcAft>
+                <a:spcPts val="0"/>
+              </a:spcAft>
+              <a:buNone/>
+            </a:pPr>
+            <a:r>
+              <a:rPr lang="en-US" sz="1500" b="0">
+                <a:solidFill>
+                  <a:srgbClr val="202B33"/>
+                </a:solidFill>
+                <a:latin typeface="Arial"/>
+                <a:ea typeface="Arial"/>
+                <a:cs typeface="Arial"/>
+              </a:rPr>
+              <a:t xml:space="preserve">to "just ask the model."</a:t>
             </a:r>
             <a:endParaRPr lang="en-US" sz="1500"/>
           </a:p>
@@ -9755,306 +8233,168 @@
                 <a:ea typeface="Arial"/>
                 <a:cs typeface="Arial"/>
               </a:rPr>
-              <a:t xml:space="preserve">So: your per-token price has fallen off a</a:t>
-            </a:r>
-            <a:endParaRPr lang="en-US" sz="1500"/>
-          </a:p>
-          <a:p>
-            <a:pPr marL="0" indent="0">
-              <a:lnSpc>
-                <a:spcPts val="1950"/>
-              </a:lnSpc>
-              <a:spcAft>
-                <a:spcPts val="0"/>
-              </a:spcAft>
-              <a:buNone/>
-            </a:pPr>
-            <a:r>
-              <a:rPr lang="en-US" sz="1500" b="0">
-                <a:solidFill>
-                  <a:srgbClr val="202B33"/>
-                </a:solidFill>
-                <a:latin typeface="Arial"/>
-                <a:ea typeface="Arial"/>
-                <a:cs typeface="Arial"/>
-              </a:rPr>
-              <a:t xml:space="preserve">cliff over the last few years, and your</a:t>
-            </a:r>
-            <a:endParaRPr lang="en-US" sz="1500"/>
-          </a:p>
-          <a:p>
-            <a:pPr marL="0" indent="0">
-              <a:lnSpc>
-                <a:spcPts val="1950"/>
-              </a:lnSpc>
-              <a:spcAft>
-                <a:spcPts val="0"/>
-              </a:spcAft>
-              <a:buNone/>
-            </a:pPr>
-            <a:r>
-              <a:rPr lang="en-US" sz="1500" b="0">
-                <a:solidFill>
-                  <a:srgbClr val="202B33"/>
-                </a:solidFill>
-                <a:latin typeface="Arial"/>
-                <a:ea typeface="Arial"/>
-                <a:cs typeface="Arial"/>
-              </a:rPr>
-              <a:t xml:space="preserve">bill went up. Everyone in this room has had</a:t>
-            </a:r>
-            <a:endParaRPr lang="en-US" sz="1500"/>
-          </a:p>
-          <a:p>
-            <a:pPr marL="0" indent="0">
-              <a:lnSpc>
-                <a:spcPts val="1950"/>
-              </a:lnSpc>
-              <a:spcAft>
-                <a:spcPts val="0"/>
-              </a:spcAft>
-              <a:buNone/>
-            </a:pPr>
-            <a:r>
-              <a:rPr lang="en-US" sz="1500" b="0">
-                <a:solidFill>
-                  <a:srgbClr val="202B33"/>
-                </a:solidFill>
-                <a:latin typeface="Arial"/>
-                <a:ea typeface="Arial"/>
-                <a:cs typeface="Arial"/>
-              </a:rPr>
-              <a:t xml:space="preserve">that conversation with a CFO and lost it.</a:t>
-            </a:r>
-            <a:endParaRPr lang="en-US" sz="1500"/>
-          </a:p>
-          <a:p>
-            <a:pPr marL="0" indent="0">
-              <a:lnSpc>
-                <a:spcPts val="1950"/>
-              </a:lnSpc>
-              <a:spcAft>
-                <a:spcPts val="0"/>
-              </a:spcAft>
-              <a:buNone/>
-            </a:pPr>
-            <a:r>
-              <a:rPr lang="en-US" sz="1500" b="0">
-                <a:solidFill>
-                  <a:srgbClr val="202B33"/>
-                </a:solidFill>
-                <a:latin typeface="Arial"/>
-                <a:ea typeface="Arial"/>
-                <a:cs typeface="Arial"/>
-              </a:rPr>
-              <a:t xml:space="preserve">You are not being gouged and you did not do</a:t>
-            </a:r>
-            <a:endParaRPr lang="en-US" sz="1500"/>
-          </a:p>
-          <a:p>
-            <a:pPr marL="0" indent="0">
-              <a:lnSpc>
-                <a:spcPts val="1950"/>
-              </a:lnSpc>
-              <a:spcAft>
-                <a:spcPts val="0"/>
-              </a:spcAft>
-              <a:buNone/>
-            </a:pPr>
-            <a:r>
-              <a:rPr lang="en-US" sz="1500" b="0">
-                <a:solidFill>
-                  <a:srgbClr val="202B33"/>
-                </a:solidFill>
-                <a:latin typeface="Arial"/>
-                <a:ea typeface="Arial"/>
-                <a:cs typeface="Arial"/>
-              </a:rPr>
-              <a:t xml:space="preserve">anything wrong. Spend is price times</a:t>
-            </a:r>
-            <a:endParaRPr lang="en-US" sz="1500"/>
-          </a:p>
-          <a:p>
-            <a:pPr marL="0" indent="0">
-              <a:lnSpc>
-                <a:spcPts val="1950"/>
-              </a:lnSpc>
-              <a:spcAft>
-                <a:spcPts val="0"/>
-              </a:spcAft>
-              <a:buNone/>
-            </a:pPr>
-            <a:r>
-              <a:rPr lang="en-US" sz="1500" b="0">
-                <a:solidFill>
-                  <a:srgbClr val="202B33"/>
-                </a:solidFill>
-                <a:latin typeface="Arial"/>
-                <a:ea typeface="Arial"/>
-                <a:cs typeface="Arial"/>
-              </a:rPr>
-              <a:t xml:space="preserve">consumption, and consumption is jobs times</a:t>
-            </a:r>
-            <a:endParaRPr lang="en-US" sz="1500"/>
-          </a:p>
-          <a:p>
-            <a:pPr marL="0" indent="0">
-              <a:lnSpc>
-                <a:spcPts val="1950"/>
-              </a:lnSpc>
-              <a:spcAft>
-                <a:spcPts val="0"/>
-              </a:spcAft>
-              <a:buNone/>
-            </a:pPr>
-            <a:r>
-              <a:rPr lang="en-US" sz="1500" b="0">
-                <a:solidFill>
-                  <a:srgbClr val="202B33"/>
-                </a:solidFill>
-                <a:latin typeface="Arial"/>
-                <a:ea typeface="Arial"/>
-                <a:cs typeface="Arial"/>
-              </a:rPr>
-              <a:t xml:space="preserve">calls per job times tokens per call.</a:t>
-            </a:r>
-            <a:endParaRPr lang="en-US" sz="1500"/>
-          </a:p>
-          <a:p>
-            <a:pPr marL="0" indent="0">
-              <a:lnSpc>
-                <a:spcPts val="1950"/>
-              </a:lnSpc>
-              <a:spcAft>
-                <a:spcPts val="0"/>
-              </a:spcAft>
-              <a:buNone/>
-            </a:pPr>
-            <a:r>
-              <a:rPr lang="en-US" sz="1500" b="0">
-                <a:solidFill>
-                  <a:srgbClr val="202B33"/>
-                </a:solidFill>
-                <a:latin typeface="Arial"/>
-                <a:ea typeface="Arial"/>
-                <a:cs typeface="Arial"/>
-              </a:rPr>
-              <a:t xml:space="preserve">Cheapness moved every term on the right.</a:t>
-            </a:r>
-            <a:endParaRPr lang="en-US" sz="1500"/>
-          </a:p>
-          <a:p>
-            <a:pPr marL="0" indent="0">
-              <a:lnSpc>
-                <a:spcPts val="1950"/>
-              </a:lnSpc>
-              <a:spcAft>
-                <a:spcPts val="0"/>
-              </a:spcAft>
-              <a:buNone/>
-            </a:pPr>
-            <a:r>
-              <a:rPr lang="en-US" sz="1500" b="0">
-                <a:solidFill>
-                  <a:srgbClr val="202B33"/>
-                </a:solidFill>
-                <a:latin typeface="Arial"/>
-                <a:ea typeface="Arial"/>
-                <a:cs typeface="Arial"/>
-              </a:rPr>
-              <a:t xml:space="preserve">Epoch's data through 2025 shows the price</a:t>
-            </a:r>
-            <a:endParaRPr lang="en-US" sz="1500"/>
-          </a:p>
-          <a:p>
-            <a:pPr marL="0" indent="0">
-              <a:lnSpc>
-                <a:spcPts val="1950"/>
-              </a:lnSpc>
-              <a:spcAft>
-                <a:spcPts val="0"/>
-              </a:spcAft>
-              <a:buNone/>
-            </a:pPr>
-            <a:r>
-              <a:rPr lang="en-US" sz="1500" b="0">
-                <a:solidFill>
-                  <a:srgbClr val="202B33"/>
-                </a:solidFill>
-                <a:latin typeface="Arial"/>
-                <a:ea typeface="Arial"/>
-                <a:cs typeface="Arial"/>
-              </a:rPr>
-              <a:t xml:space="preserve">of a fixed capability falling fast and very</a:t>
-            </a:r>
-            <a:endParaRPr lang="en-US" sz="1500"/>
-          </a:p>
-          <a:p>
-            <a:pPr marL="0" indent="0">
-              <a:lnSpc>
-                <a:spcPts val="1950"/>
-              </a:lnSpc>
-              <a:spcAft>
-                <a:spcPts val="0"/>
-              </a:spcAft>
-              <a:buNone/>
-            </a:pPr>
-            <a:r>
-              <a:rPr lang="en-US" sz="1500" b="0">
-                <a:solidFill>
-                  <a:srgbClr val="202B33"/>
-                </a:solidFill>
-                <a:latin typeface="Arial"/>
-                <a:ea typeface="Arial"/>
-                <a:cs typeface="Arial"/>
-              </a:rPr>
-              <a:t xml:space="preserve">unevenly by task, which is real and worth</a:t>
-            </a:r>
-            <a:endParaRPr lang="en-US" sz="1500"/>
-          </a:p>
-          <a:p>
-            <a:pPr marL="0" indent="0">
-              <a:lnSpc>
-                <a:spcPts val="1950"/>
-              </a:lnSpc>
-              <a:spcAft>
-                <a:spcPts val="0"/>
-              </a:spcAft>
-              <a:buNone/>
-            </a:pPr>
-            <a:r>
-              <a:rPr lang="en-US" sz="1500" b="0">
-                <a:solidFill>
-                  <a:srgbClr val="202B33"/>
-                </a:solidFill>
-                <a:latin typeface="Arial"/>
-                <a:ea typeface="Arial"/>
-                <a:cs typeface="Arial"/>
-              </a:rPr>
-              <a:t xml:space="preserve">knowing, and is also exactly the condition</a:t>
-            </a:r>
-            <a:endParaRPr lang="en-US" sz="1500"/>
-          </a:p>
-          <a:p>
-            <a:pPr marL="0" indent="0">
-              <a:lnSpc>
-                <a:spcPts val="1950"/>
-              </a:lnSpc>
-              <a:spcAft>
-                <a:spcPts val="0"/>
-              </a:spcAft>
-              <a:buNone/>
-            </a:pPr>
-            <a:r>
-              <a:rPr lang="en-US" sz="1500" b="0">
-                <a:solidFill>
-                  <a:srgbClr val="202B33"/>
-                </a:solidFill>
-                <a:latin typeface="Arial"/>
-                <a:ea typeface="Arial"/>
-                <a:cs typeface="Arial"/>
-              </a:rPr>
-              <a:t xml:space="preserve">under which total spend rises.</a:t>
+              <a:t xml:space="preserve">I call it architectural obesity. It is not</a:t>
+            </a:r>
+            <a:endParaRPr lang="en-US" sz="1500"/>
+          </a:p>
+          <a:p>
+            <a:pPr marL="0" indent="0">
+              <a:lnSpc>
+                <a:spcPts val="1950"/>
+              </a:lnSpc>
+              <a:spcAft>
+                <a:spcPts val="0"/>
+              </a:spcAft>
+              <a:buNone/>
+            </a:pPr>
+            <a:r>
+              <a:rPr lang="en-US" sz="1500" b="0">
+                <a:solidFill>
+                  <a:srgbClr val="202B33"/>
+                </a:solidFill>
+                <a:latin typeface="Arial"/>
+                <a:ea typeface="Arial"/>
+                <a:cs typeface="Arial"/>
+              </a:rPr>
+              <a:t xml:space="preserve">that any one of those calls is wrong.</a:t>
+            </a:r>
+            <a:endParaRPr lang="en-US" sz="1500"/>
+          </a:p>
+          <a:p>
+            <a:pPr marL="0" indent="0">
+              <a:lnSpc>
+                <a:spcPts val="1950"/>
+              </a:lnSpc>
+              <a:spcAft>
+                <a:spcPts val="0"/>
+              </a:spcAft>
+              <a:buNone/>
+            </a:pPr>
+            <a:r>
+              <a:rPr lang="en-US" sz="1500" b="0">
+                <a:solidFill>
+                  <a:srgbClr val="202B33"/>
+                </a:solidFill>
+                <a:latin typeface="Arial"/>
+                <a:ea typeface="Arial"/>
+                <a:cs typeface="Arial"/>
+              </a:rPr>
+              <a:t xml:space="preserve">Redundancy is worth paying for, big context</a:t>
+            </a:r>
+            <a:endParaRPr lang="en-US" sz="1500"/>
+          </a:p>
+          <a:p>
+            <a:pPr marL="0" indent="0">
+              <a:lnSpc>
+                <a:spcPts val="1950"/>
+              </a:lnSpc>
+              <a:spcAft>
+                <a:spcPts val="0"/>
+              </a:spcAft>
+              <a:buNone/>
+            </a:pPr>
+            <a:r>
+              <a:rPr lang="en-US" sz="1500" b="0">
+                <a:solidFill>
+                  <a:srgbClr val="202B33"/>
+                </a:solidFill>
+                <a:latin typeface="Arial"/>
+                <a:ea typeface="Arial"/>
+                <a:cs typeface="Arial"/>
+              </a:rPr>
+              <a:t xml:space="preserve">is worth paying for, three parallel</a:t>
+            </a:r>
+            <a:endParaRPr lang="en-US" sz="1500"/>
+          </a:p>
+          <a:p>
+            <a:pPr marL="0" indent="0">
+              <a:lnSpc>
+                <a:spcPts val="1950"/>
+              </a:lnSpc>
+              <a:spcAft>
+                <a:spcPts val="0"/>
+              </a:spcAft>
+              <a:buNone/>
+            </a:pPr>
+            <a:r>
+              <a:rPr lang="en-US" sz="1500" b="0">
+                <a:solidFill>
+                  <a:srgbClr val="202B33"/>
+                </a:solidFill>
+                <a:latin typeface="Arial"/>
+                <a:ea typeface="Arial"/>
+                <a:cs typeface="Arial"/>
+              </a:rPr>
+              <a:t xml:space="preserve">attempts are sometimes exactly right. The</a:t>
+            </a:r>
+            <a:endParaRPr lang="en-US" sz="1500"/>
+          </a:p>
+          <a:p>
+            <a:pPr marL="0" indent="0">
+              <a:lnSpc>
+                <a:spcPts val="1950"/>
+              </a:lnSpc>
+              <a:spcAft>
+                <a:spcPts val="0"/>
+              </a:spcAft>
+              <a:buNone/>
+            </a:pPr>
+            <a:r>
+              <a:rPr lang="en-US" sz="1500" b="0">
+                <a:solidFill>
+                  <a:srgbClr val="202B33"/>
+                </a:solidFill>
+                <a:latin typeface="Arial"/>
+                <a:ea typeface="Arial"/>
+                <a:cs typeface="Arial"/>
+              </a:rPr>
+              <a:t xml:space="preserve">failure is that nobody measured what the</a:t>
+            </a:r>
+            <a:endParaRPr lang="en-US" sz="1500"/>
+          </a:p>
+          <a:p>
+            <a:pPr marL="0" indent="0">
+              <a:lnSpc>
+                <a:spcPts val="1950"/>
+              </a:lnSpc>
+              <a:spcAft>
+                <a:spcPts val="0"/>
+              </a:spcAft>
+              <a:buNone/>
+            </a:pPr>
+            <a:r>
+              <a:rPr lang="en-US" sz="1500" b="0">
+                <a:solidFill>
+                  <a:srgbClr val="202B33"/>
+                </a:solidFill>
+                <a:latin typeface="Arial"/>
+                <a:ea typeface="Arial"/>
+                <a:cs typeface="Arial"/>
+              </a:rPr>
+              <a:t xml:space="preserve">extra call bought, because at these prices</a:t>
+            </a:r>
+            <a:endParaRPr lang="en-US" sz="1500"/>
+          </a:p>
+          <a:p>
+            <a:pPr marL="0" indent="0">
+              <a:lnSpc>
+                <a:spcPts val="1950"/>
+              </a:lnSpc>
+              <a:spcAft>
+                <a:spcPts val="0"/>
+              </a:spcAft>
+              <a:buNone/>
+            </a:pPr>
+            <a:r>
+              <a:rPr lang="en-US" sz="1500" b="0">
+                <a:solidFill>
+                  <a:srgbClr val="202B33"/>
+                </a:solidFill>
+                <a:latin typeface="Arial"/>
+                <a:ea typeface="Arial"/>
+                <a:cs typeface="Arial"/>
+              </a:rPr>
+              <a:t xml:space="preserve">nobody had to.</a:t>
             </a:r>
             <a:endParaRPr lang="en-US" sz="1500"/>
           </a:p>
@@ -10234,7 +8574,7 @@
                 <a:ea typeface="Arial"/>
                 <a:cs typeface="Arial"/>
               </a:rPr>
-              <a:t xml:space="preserve">05 / 08    SOURCE SLIDE 7</a:t>
+              <a:t xml:space="preserve">05 / 07    SOURCE SLIDE 10</a:t>
             </a:r>
             <a:endParaRPr lang="en-US" sz="1050"/>
           </a:p>
@@ -10283,7 +8623,7 @@
                 <a:ea typeface="Arial"/>
                 <a:cs typeface="Arial"/>
               </a:rPr>
-              <a:t xml:space="preserve">Now do it to software</a:t>
+              <a:t xml:space="preserve">Doubling on a Tuesday</a:t>
             </a:r>
             <a:endParaRPr lang="en-US" sz="2550"/>
           </a:p>
@@ -10332,30 +8672,30 @@
                 <a:ea typeface="Arial"/>
                 <a:cs typeface="Arial"/>
               </a:rPr>
-              <a:t xml:space="preserve">Density: a frontier call where a lookup</a:t>
-            </a:r>
-            <a:endParaRPr lang="en-US" sz="1500"/>
-          </a:p>
-          <a:p>
-            <a:pPr marL="0" indent="0">
-              <a:lnSpc>
-                <a:spcPts val="1950"/>
-              </a:lnSpc>
-              <a:spcAft>
-                <a:spcPts val="0"/>
-              </a:spcAft>
-              <a:buNone/>
-            </a:pPr>
-            <a:r>
-              <a:rPr lang="en-US" sz="1500" b="0">
-                <a:solidFill>
-                  <a:srgbClr val="202B33"/>
-                </a:solidFill>
-                <a:latin typeface="Arial"/>
-                <a:ea typeface="Arial"/>
-                <a:cs typeface="Arial"/>
-              </a:rPr>
-              <a:t xml:space="preserve">would do</a:t>
+              <a:t xml:space="preserve">Cost per accepted outcome = total spend ÷</a:t>
+            </a:r>
+            <a:endParaRPr lang="en-US" sz="1500"/>
+          </a:p>
+          <a:p>
+            <a:pPr marL="0" indent="0">
+              <a:lnSpc>
+                <a:spcPts val="1950"/>
+              </a:lnSpc>
+              <a:spcAft>
+                <a:spcPts val="0"/>
+              </a:spcAft>
+              <a:buNone/>
+            </a:pPr>
+            <a:r>
+              <a:rPr lang="en-US" sz="1500" b="0">
+                <a:solidFill>
+                  <a:srgbClr val="202B33"/>
+                </a:solidFill>
+                <a:latin typeface="Arial"/>
+                <a:ea typeface="Arial"/>
+                <a:cs typeface="Arial"/>
+              </a:rPr>
+              <a:t xml:space="preserve">accepted jobs</a:t>
             </a:r>
             <a:endParaRPr lang="en-US" sz="1500"/>
           </a:p>
@@ -10401,30 +8741,30 @@
                 <a:ea typeface="Arial"/>
                 <a:cs typeface="Arial"/>
               </a:rPr>
-              <a:t xml:space="preserve">Business mix: products viable only at</a:t>
-            </a:r>
-            <a:endParaRPr lang="en-US" sz="1500"/>
-          </a:p>
-          <a:p>
-            <a:pPr marL="0" indent="0">
-              <a:lnSpc>
-                <a:spcPts val="1950"/>
-              </a:lnSpc>
-              <a:spcAft>
-                <a:spcPts val="0"/>
-              </a:spcAft>
-              <a:buNone/>
-            </a:pPr>
-            <a:r>
-              <a:rPr lang="en-US" sz="1500" b="0">
-                <a:solidFill>
-                  <a:srgbClr val="202B33"/>
-                </a:solidFill>
-                <a:latin typeface="Arial"/>
-                <a:ea typeface="Arial"/>
-                <a:cs typeface="Arial"/>
-              </a:rPr>
-              <a:t xml:space="preserve">today's rate</a:t>
+              <a:t xml:space="preserve">75% accepted means you pay 1.33× sticker.</a:t>
+            </a:r>
+            <a:endParaRPr lang="en-US" sz="1500"/>
+          </a:p>
+          <a:p>
+            <a:pPr marL="0" indent="0">
+              <a:lnSpc>
+                <a:spcPts val="1950"/>
+              </a:lnSpc>
+              <a:spcAft>
+                <a:spcPts val="0"/>
+              </a:spcAft>
+              <a:buNone/>
+            </a:pPr>
+            <a:r>
+              <a:rPr lang="en-US" sz="1500" b="0">
+                <a:solidFill>
+                  <a:srgbClr val="202B33"/>
+                </a:solidFill>
+                <a:latin typeface="Arial"/>
+                <a:ea typeface="Arial"/>
+                <a:cs typeface="Arial"/>
+              </a:rPr>
+              <a:t xml:space="preserve">45% means 2.22×.</a:t>
             </a:r>
             <a:endParaRPr lang="en-US" sz="1500"/>
           </a:p>
@@ -10470,30 +8810,30 @@
                 <a:ea typeface="Arial"/>
                 <a:cs typeface="Arial"/>
               </a:rPr>
-              <a:t xml:space="preserve">Bundled rent: unlimited usage promised in a</a:t>
-            </a:r>
-            <a:endParaRPr lang="en-US" sz="1500"/>
-          </a:p>
-          <a:p>
-            <a:pPr marL="0" indent="0">
-              <a:lnSpc>
-                <a:spcPts val="1950"/>
-              </a:lnSpc>
-              <a:spcAft>
-                <a:spcPts val="0"/>
-              </a:spcAft>
-              <a:buNone/>
-            </a:pPr>
-            <a:r>
-              <a:rPr lang="en-US" sz="1500" b="0">
-                <a:solidFill>
-                  <a:srgbClr val="202B33"/>
-                </a:solidFill>
-                <a:latin typeface="Arial"/>
-                <a:ea typeface="Arial"/>
-                <a:cs typeface="Arial"/>
-              </a:rPr>
-              <a:t xml:space="preserve">contract</a:t>
+              <a:t xml:space="preserve">A 30-point acceptance drop costs exactly</a:t>
+            </a:r>
+            <a:endParaRPr lang="en-US" sz="1500"/>
+          </a:p>
+          <a:p>
+            <a:pPr marL="0" indent="0">
+              <a:lnSpc>
+                <a:spcPts val="1950"/>
+              </a:lnSpc>
+              <a:spcAft>
+                <a:spcPts val="0"/>
+              </a:spcAft>
+              <a:buNone/>
+            </a:pPr>
+            <a:r>
+              <a:rPr lang="en-US" sz="1500" b="0">
+                <a:solidFill>
+                  <a:srgbClr val="202B33"/>
+                </a:solidFill>
+                <a:latin typeface="Arial"/>
+                <a:ea typeface="Arial"/>
+                <a:cs typeface="Arial"/>
+              </a:rPr>
+              <a:t xml:space="preserve">what doubling every token price costs.</a:t>
             </a:r>
             <a:endParaRPr lang="en-US" sz="1500"/>
           </a:p>
@@ -10539,191 +8879,145 @@
                 <a:ea typeface="Arial"/>
                 <a:cs typeface="Arial"/>
               </a:rPr>
-              <a:t xml:space="preserve">Small format: deterministic code loses the</a:t>
-            </a:r>
-            <a:endParaRPr lang="en-US" sz="1500"/>
-          </a:p>
-          <a:p>
-            <a:pPr marL="0" indent="0">
-              <a:lnSpc>
-                <a:spcPts val="1950"/>
-              </a:lnSpc>
-              <a:spcAft>
-                <a:spcPts val="0"/>
-              </a:spcAft>
-              <a:buNone/>
-            </a:pPr>
-            <a:r>
-              <a:rPr lang="en-US" sz="1500" b="0">
-                <a:solidFill>
-                  <a:srgbClr val="202B33"/>
-                </a:solidFill>
-                <a:latin typeface="Arial"/>
-                <a:ea typeface="Arial"/>
-                <a:cs typeface="Arial"/>
-              </a:rPr>
-              <a:t xml:space="preserve">design review</a:t>
-            </a:r>
-            <a:endParaRPr lang="en-US" sz="1500"/>
-          </a:p>
-          <a:p>
-            <a:pPr marL="0" indent="0">
-              <a:lnSpc>
-                <a:spcPts val="1950"/>
-              </a:lnSpc>
-              <a:spcAft>
-                <a:spcPts val="0"/>
-              </a:spcAft>
-              <a:buNone/>
-            </a:pPr>
-            <a:r>
-              <a:rPr lang="en-US" sz="1500" b="0">
-                <a:solidFill>
-                  <a:srgbClr val="202B33"/>
-                </a:solidFill>
-                <a:latin typeface="Arial"/>
-                <a:ea typeface="Arial"/>
-                <a:cs typeface="Arial"/>
-              </a:rPr>
-              <a:t xml:space="preserve"/>
-            </a:r>
-            <a:endParaRPr lang="en-US" sz="1500"/>
-          </a:p>
-          <a:p>
-            <a:pPr marL="0" indent="0">
-              <a:lnSpc>
-                <a:spcPts val="1950"/>
-              </a:lnSpc>
-              <a:spcAft>
-                <a:spcPts val="0"/>
-              </a:spcAft>
-              <a:buNone/>
-            </a:pPr>
-            <a:r>
-              <a:rPr lang="en-US" sz="1500" b="0">
-                <a:solidFill>
-                  <a:srgbClr val="202B33"/>
-                </a:solidFill>
-                <a:latin typeface="Arial"/>
-                <a:ea typeface="Arial"/>
-                <a:cs typeface="Arial"/>
-              </a:rPr>
-              <a:t xml:space="preserve">Walk the same chain through your stack.</a:t>
-            </a:r>
-            <a:endParaRPr lang="en-US" sz="1500"/>
-          </a:p>
-          <a:p>
-            <a:pPr marL="0" indent="0">
-              <a:lnSpc>
-                <a:spcPts val="1950"/>
-              </a:lnSpc>
-              <a:spcAft>
-                <a:spcPts val="0"/>
-              </a:spcAft>
-              <a:buNone/>
-            </a:pPr>
-            <a:r>
-              <a:rPr lang="en-US" sz="1500" b="0">
-                <a:solidFill>
-                  <a:srgbClr val="202B33"/>
-                </a:solidFill>
-                <a:latin typeface="Arial"/>
-                <a:ea typeface="Arial"/>
-                <a:cs typeface="Arial"/>
-              </a:rPr>
-              <a:t xml:space="preserve">Density: a frontier call where a cache, a</a:t>
-            </a:r>
-            <a:endParaRPr lang="en-US" sz="1500"/>
-          </a:p>
-          <a:p>
-            <a:pPr marL="0" indent="0">
-              <a:lnSpc>
-                <a:spcPts val="1950"/>
-              </a:lnSpc>
-              <a:spcAft>
-                <a:spcPts val="0"/>
-              </a:spcAft>
-              <a:buNone/>
-            </a:pPr>
-            <a:r>
-              <a:rPr lang="en-US" sz="1500" b="0">
-                <a:solidFill>
-                  <a:srgbClr val="202B33"/>
-                </a:solidFill>
-                <a:latin typeface="Arial"/>
-                <a:ea typeface="Arial"/>
-                <a:cs typeface="Arial"/>
-              </a:rPr>
-              <a:t xml:space="preserve">regex, or a dictionary lookup would have</a:t>
-            </a:r>
-            <a:endParaRPr lang="en-US" sz="1500"/>
-          </a:p>
-          <a:p>
-            <a:pPr marL="0" indent="0">
-              <a:lnSpc>
-                <a:spcPts val="1950"/>
-              </a:lnSpc>
-              <a:spcAft>
-                <a:spcPts val="0"/>
-              </a:spcAft>
-              <a:buNone/>
-            </a:pPr>
-            <a:r>
-              <a:rPr lang="en-US" sz="1500" b="0">
-                <a:solidFill>
-                  <a:srgbClr val="202B33"/>
-                </a:solidFill>
-                <a:latin typeface="Arial"/>
-                <a:ea typeface="Arial"/>
-                <a:cs typeface="Arial"/>
-              </a:rPr>
-              <a:t xml:space="preserve">done, because the call looked free. Longer</a:t>
-            </a:r>
-            <a:endParaRPr lang="en-US" sz="1500"/>
-          </a:p>
-          <a:p>
-            <a:pPr marL="0" indent="0">
-              <a:lnSpc>
-                <a:spcPts val="1950"/>
-              </a:lnSpc>
-              <a:spcAft>
-                <a:spcPts val="0"/>
-              </a:spcAft>
-              <a:buNone/>
-            </a:pPr>
-            <a:r>
-              <a:rPr lang="en-US" sz="1500" b="0">
-                <a:solidFill>
-                  <a:srgbClr val="202B33"/>
-                </a:solidFill>
-                <a:latin typeface="Arial"/>
-                <a:ea typeface="Arial"/>
-                <a:cs typeface="Arial"/>
-              </a:rPr>
-              <a:t xml:space="preserve">context, more retries, more competing</a:t>
-            </a:r>
-            <a:endParaRPr lang="en-US" sz="1500"/>
-          </a:p>
-          <a:p>
-            <a:pPr marL="0" indent="0">
-              <a:lnSpc>
-                <a:spcPts val="1950"/>
-              </a:lnSpc>
-              <a:spcAft>
-                <a:spcPts val="0"/>
-              </a:spcAft>
-              <a:buNone/>
-            </a:pPr>
-            <a:r>
-              <a:rPr lang="en-US" sz="1500" b="0">
-                <a:solidFill>
-                  <a:srgbClr val="202B33"/>
-                </a:solidFill>
-                <a:latin typeface="Arial"/>
-                <a:ea typeface="Arial"/>
-                <a:cs typeface="Arial"/>
-              </a:rPr>
-              <a:t xml:space="preserve">branches, frontier by default. Business</a:t>
+              <a:t xml:space="preserve">Before any dollar figure, define the</a:t>
+            </a:r>
+            <a:endParaRPr lang="en-US" sz="1500"/>
+          </a:p>
+          <a:p>
+            <a:pPr marL="0" indent="0">
+              <a:lnSpc>
+                <a:spcPts val="1950"/>
+              </a:lnSpc>
+              <a:spcAft>
+                <a:spcPts val="0"/>
+              </a:spcAft>
+              <a:buNone/>
+            </a:pPr>
+            <a:r>
+              <a:rPr lang="en-US" sz="1500" b="0">
+                <a:solidFill>
+                  <a:srgbClr val="202B33"/>
+                </a:solidFill>
+                <a:latin typeface="Arial"/>
+                <a:ea typeface="Arial"/>
+                <a:cs typeface="Arial"/>
+              </a:rPr>
+              <a:t xml:space="preserve">denominator. An accepted outcome meets a</a:t>
+            </a:r>
+            <a:endParaRPr lang="en-US" sz="1500"/>
+          </a:p>
+          <a:p>
+            <a:pPr marL="0" indent="0">
+              <a:lnSpc>
+                <a:spcPts val="1950"/>
+              </a:lnSpc>
+              <a:spcAft>
+                <a:spcPts val="0"/>
+              </a:spcAft>
+              <a:buNone/>
+            </a:pPr>
+            <a:r>
+              <a:rPr lang="en-US" sz="1500" b="0">
+                <a:solidFill>
+                  <a:srgbClr val="202B33"/>
+                </a:solidFill>
+                <a:latin typeface="Arial"/>
+                <a:ea typeface="Arial"/>
+                <a:cs typeface="Arial"/>
+              </a:rPr>
+              <a:t xml:space="preserve">rule you wrote down. An impressive answer</a:t>
+            </a:r>
+            <a:endParaRPr lang="en-US" sz="1500"/>
+          </a:p>
+          <a:p>
+            <a:pPr marL="0" indent="0">
+              <a:lnSpc>
+                <a:spcPts val="1950"/>
+              </a:lnSpc>
+              <a:spcAft>
+                <a:spcPts val="0"/>
+              </a:spcAft>
+              <a:buNone/>
+            </a:pPr>
+            <a:r>
+              <a:rPr lang="en-US" sz="1500" b="0">
+                <a:solidFill>
+                  <a:srgbClr val="202B33"/>
+                </a:solidFill>
+                <a:latin typeface="Arial"/>
+                <a:ea typeface="Arial"/>
+                <a:cs typeface="Arial"/>
+              </a:rPr>
+              <a:t xml:space="preserve">that a human quietly repairs afterwards is</a:t>
+            </a:r>
+            <a:endParaRPr lang="en-US" sz="1500"/>
+          </a:p>
+          <a:p>
+            <a:pPr marL="0" indent="0">
+              <a:lnSpc>
+                <a:spcPts val="1950"/>
+              </a:lnSpc>
+              <a:spcAft>
+                <a:spcPts val="0"/>
+              </a:spcAft>
+              <a:buNone/>
+            </a:pPr>
+            <a:r>
+              <a:rPr lang="en-US" sz="1500" b="0">
+                <a:solidFill>
+                  <a:srgbClr val="202B33"/>
+                </a:solidFill>
+                <a:latin typeface="Arial"/>
+                <a:ea typeface="Arial"/>
+                <a:cs typeface="Arial"/>
+              </a:rPr>
+              <a:t xml:space="preserve">not a success, it is a success plus a</a:t>
+            </a:r>
+            <a:endParaRPr lang="en-US" sz="1500"/>
+          </a:p>
+          <a:p>
+            <a:pPr marL="0" indent="0">
+              <a:lnSpc>
+                <a:spcPts val="1950"/>
+              </a:lnSpc>
+              <a:spcAft>
+                <a:spcPts val="0"/>
+              </a:spcAft>
+              <a:buNone/>
+            </a:pPr>
+            <a:r>
+              <a:rPr lang="en-US" sz="1500" b="0">
+                <a:solidFill>
+                  <a:srgbClr val="202B33"/>
+                </a:solidFill>
+                <a:latin typeface="Arial"/>
+                <a:ea typeface="Arial"/>
+                <a:cs typeface="Arial"/>
+              </a:rPr>
+              <a:t xml:space="preserve">hidden salary. Count inference, tools,</a:t>
+            </a:r>
+            <a:endParaRPr lang="en-US" sz="1500"/>
+          </a:p>
+          <a:p>
+            <a:pPr marL="0" indent="0">
+              <a:lnSpc>
+                <a:spcPts val="1950"/>
+              </a:lnSpc>
+              <a:spcAft>
+                <a:spcPts val="0"/>
+              </a:spcAft>
+              <a:buNone/>
+            </a:pPr>
+            <a:r>
+              <a:rPr lang="en-US" sz="1500" b="0">
+                <a:solidFill>
+                  <a:srgbClr val="202B33"/>
+                </a:solidFill>
+                <a:latin typeface="Arial"/>
+                <a:ea typeface="Arial"/>
+                <a:cs typeface="Arial"/>
+              </a:rPr>
+              <a:t xml:space="preserve">infrastructure and recovery. A blended</a:t>
             </a:r>
             <a:endParaRPr lang="en-US" sz="1500"/>
           </a:p>
@@ -10772,191 +9066,7 @@
                 <a:ea typeface="Arial"/>
                 <a:cs typeface="Arial"/>
               </a:rPr>
-              <a:t xml:space="preserve">mix: products whose unit economics only</a:t>
-            </a:r>
-            <a:endParaRPr lang="en-US" sz="1500"/>
-          </a:p>
-          <a:p>
-            <a:pPr marL="0" indent="0">
-              <a:lnSpc>
-                <a:spcPts val="1950"/>
-              </a:lnSpc>
-              <a:spcAft>
-                <a:spcPts val="0"/>
-              </a:spcAft>
-              <a:buNone/>
-            </a:pPr>
-            <a:r>
-              <a:rPr lang="en-US" sz="1500" b="0">
-                <a:solidFill>
-                  <a:srgbClr val="202B33"/>
-                </a:solidFill>
-                <a:latin typeface="Arial"/>
-                <a:ea typeface="Arial"/>
-                <a:cs typeface="Arial"/>
-              </a:rPr>
-              <a:t xml:space="preserve">work at promotional rates, crowding out</a:t>
-            </a:r>
-            <a:endParaRPr lang="en-US" sz="1500"/>
-          </a:p>
-          <a:p>
-            <a:pPr marL="0" indent="0">
-              <a:lnSpc>
-                <a:spcPts val="1950"/>
-              </a:lnSpc>
-              <a:spcAft>
-                <a:spcPts val="0"/>
-              </a:spcAft>
-              <a:buNone/>
-            </a:pPr>
-            <a:r>
-              <a:rPr lang="en-US" sz="1500" b="0">
-                <a:solidFill>
-                  <a:srgbClr val="202B33"/>
-                </a:solidFill>
-                <a:latin typeface="Arial"/>
-                <a:ea typeface="Arial"/>
-                <a:cs typeface="Arial"/>
-              </a:rPr>
-              <a:t xml:space="preserve">products that would have worked at any</a:t>
-            </a:r>
-            <a:endParaRPr lang="en-US" sz="1500"/>
-          </a:p>
-          <a:p>
-            <a:pPr marL="0" indent="0">
-              <a:lnSpc>
-                <a:spcPts val="1950"/>
-              </a:lnSpc>
-              <a:spcAft>
-                <a:spcPts val="0"/>
-              </a:spcAft>
-              <a:buNone/>
-            </a:pPr>
-            <a:r>
-              <a:rPr lang="en-US" sz="1500" b="0">
-                <a:solidFill>
-                  <a:srgbClr val="202B33"/>
-                </a:solidFill>
-                <a:latin typeface="Arial"/>
-                <a:ea typeface="Arial"/>
-                <a:cs typeface="Arial"/>
-              </a:rPr>
-              <a:t xml:space="preserve">price. Bundled rent: unlimited-usage</a:t>
-            </a:r>
-            <a:endParaRPr lang="en-US" sz="1500"/>
-          </a:p>
-          <a:p>
-            <a:pPr marL="0" indent="0">
-              <a:lnSpc>
-                <a:spcPts val="1950"/>
-              </a:lnSpc>
-              <a:spcAft>
-                <a:spcPts val="0"/>
-              </a:spcAft>
-              <a:buNone/>
-            </a:pPr>
-            <a:r>
-              <a:rPr lang="en-US" sz="1500" b="0">
-                <a:solidFill>
-                  <a:srgbClr val="202B33"/>
-                </a:solidFill>
-                <a:latin typeface="Arial"/>
-                <a:ea typeface="Arial"/>
-                <a:cs typeface="Arial"/>
-              </a:rPr>
-              <a:t xml:space="preserve">promises to customers, baked into a</a:t>
-            </a:r>
-            <a:endParaRPr lang="en-US" sz="1500"/>
-          </a:p>
-          <a:p>
-            <a:pPr marL="0" indent="0">
-              <a:lnSpc>
-                <a:spcPts val="1950"/>
-              </a:lnSpc>
-              <a:spcAft>
-                <a:spcPts val="0"/>
-              </a:spcAft>
-              <a:buNone/>
-            </a:pPr>
-            <a:r>
-              <a:rPr lang="en-US" sz="1500" b="0">
-                <a:solidFill>
-                  <a:srgbClr val="202B33"/>
-                </a:solidFill>
-                <a:latin typeface="Arial"/>
-                <a:ea typeface="Arial"/>
-                <a:cs typeface="Arial"/>
-              </a:rPr>
-              <a:t xml:space="preserve">contract, priced against an input you do</a:t>
-            </a:r>
-            <a:endParaRPr lang="en-US" sz="1500"/>
-          </a:p>
-          <a:p>
-            <a:pPr marL="0" indent="0">
-              <a:lnSpc>
-                <a:spcPts val="1950"/>
-              </a:lnSpc>
-              <a:spcAft>
-                <a:spcPts val="0"/>
-              </a:spcAft>
-              <a:buNone/>
-            </a:pPr>
-            <a:r>
-              <a:rPr lang="en-US" sz="1500" b="0">
-                <a:solidFill>
-                  <a:srgbClr val="202B33"/>
-                </a:solidFill>
-                <a:latin typeface="Arial"/>
-                <a:ea typeface="Arial"/>
-                <a:cs typeface="Arial"/>
-              </a:rPr>
-              <a:t xml:space="preserve">not control. And the small format: boring</a:t>
-            </a:r>
-            <a:endParaRPr lang="en-US" sz="1500"/>
-          </a:p>
-          <a:p>
-            <a:pPr marL="0" indent="0">
-              <a:lnSpc>
-                <a:spcPts val="1950"/>
-              </a:lnSpc>
-              <a:spcAft>
-                <a:spcPts val="0"/>
-              </a:spcAft>
-              <a:buNone/>
-            </a:pPr>
-            <a:r>
-              <a:rPr lang="en-US" sz="1500" b="0">
-                <a:solidFill>
-                  <a:srgbClr val="202B33"/>
-                </a:solidFill>
-                <a:latin typeface="Arial"/>
-                <a:ea typeface="Arial"/>
-                <a:cs typeface="Arial"/>
-              </a:rPr>
-              <a:t xml:space="preserve">deterministic code losing the design review</a:t>
-            </a:r>
-            <a:endParaRPr lang="en-US" sz="1500"/>
-          </a:p>
-          <a:p>
-            <a:pPr marL="0" indent="0">
-              <a:lnSpc>
-                <a:spcPts val="1950"/>
-              </a:lnSpc>
-              <a:spcAft>
-                <a:spcPts val="0"/>
-              </a:spcAft>
-              <a:buNone/>
-            </a:pPr>
-            <a:r>
-              <a:rPr lang="en-US" sz="1500" b="0">
-                <a:solidFill>
-                  <a:srgbClr val="202B33"/>
-                </a:solidFill>
-                <a:latin typeface="Arial"/>
-                <a:ea typeface="Arial"/>
-                <a:cs typeface="Arial"/>
-              </a:rPr>
-              <a:t xml:space="preserve">to "just ask the model."</a:t>
+              <a:t xml:space="preserve">token rate is not a unit economics model.</a:t>
             </a:r>
             <a:endParaRPr lang="en-US" sz="1500"/>
           </a:p>
@@ -11002,168 +9112,283 @@
                 <a:ea typeface="Arial"/>
                 <a:cs typeface="Arial"/>
               </a:rPr>
-              <a:t xml:space="preserve">I call it architectural obesity. It is not</a:t>
-            </a:r>
-            <a:endParaRPr lang="en-US" sz="1500"/>
-          </a:p>
-          <a:p>
-            <a:pPr marL="0" indent="0">
-              <a:lnSpc>
-                <a:spcPts val="1950"/>
-              </a:lnSpc>
-              <a:spcAft>
-                <a:spcPts val="0"/>
-              </a:spcAft>
-              <a:buNone/>
-            </a:pPr>
-            <a:r>
-              <a:rPr lang="en-US" sz="1500" b="0">
-                <a:solidFill>
-                  <a:srgbClr val="202B33"/>
-                </a:solidFill>
-                <a:latin typeface="Arial"/>
-                <a:ea typeface="Arial"/>
-                <a:cs typeface="Arial"/>
-              </a:rPr>
-              <a:t xml:space="preserve">that any one of those calls is wrong.</a:t>
-            </a:r>
-            <a:endParaRPr lang="en-US" sz="1500"/>
-          </a:p>
-          <a:p>
-            <a:pPr marL="0" indent="0">
-              <a:lnSpc>
-                <a:spcPts val="1950"/>
-              </a:lnSpc>
-              <a:spcAft>
-                <a:spcPts val="0"/>
-              </a:spcAft>
-              <a:buNone/>
-            </a:pPr>
-            <a:r>
-              <a:rPr lang="en-US" sz="1500" b="0">
-                <a:solidFill>
-                  <a:srgbClr val="202B33"/>
-                </a:solidFill>
-                <a:latin typeface="Arial"/>
-                <a:ea typeface="Arial"/>
-                <a:cs typeface="Arial"/>
-              </a:rPr>
-              <a:t xml:space="preserve">Redundancy is worth paying for, big context</a:t>
-            </a:r>
-            <a:endParaRPr lang="en-US" sz="1500"/>
-          </a:p>
-          <a:p>
-            <a:pPr marL="0" indent="0">
-              <a:lnSpc>
-                <a:spcPts val="1950"/>
-              </a:lnSpc>
-              <a:spcAft>
-                <a:spcPts val="0"/>
-              </a:spcAft>
-              <a:buNone/>
-            </a:pPr>
-            <a:r>
-              <a:rPr lang="en-US" sz="1500" b="0">
-                <a:solidFill>
-                  <a:srgbClr val="202B33"/>
-                </a:solidFill>
-                <a:latin typeface="Arial"/>
-                <a:ea typeface="Arial"/>
-                <a:cs typeface="Arial"/>
-              </a:rPr>
-              <a:t xml:space="preserve">is worth paying for, three parallel</a:t>
-            </a:r>
-            <a:endParaRPr lang="en-US" sz="1500"/>
-          </a:p>
-          <a:p>
-            <a:pPr marL="0" indent="0">
-              <a:lnSpc>
-                <a:spcPts val="1950"/>
-              </a:lnSpc>
-              <a:spcAft>
-                <a:spcPts val="0"/>
-              </a:spcAft>
-              <a:buNone/>
-            </a:pPr>
-            <a:r>
-              <a:rPr lang="en-US" sz="1500" b="0">
-                <a:solidFill>
-                  <a:srgbClr val="202B33"/>
-                </a:solidFill>
-                <a:latin typeface="Arial"/>
-                <a:ea typeface="Arial"/>
-                <a:cs typeface="Arial"/>
-              </a:rPr>
-              <a:t xml:space="preserve">attempts are sometimes exactly right. The</a:t>
-            </a:r>
-            <a:endParaRPr lang="en-US" sz="1500"/>
-          </a:p>
-          <a:p>
-            <a:pPr marL="0" indent="0">
-              <a:lnSpc>
-                <a:spcPts val="1950"/>
-              </a:lnSpc>
-              <a:spcAft>
-                <a:spcPts val="0"/>
-              </a:spcAft>
-              <a:buNone/>
-            </a:pPr>
-            <a:r>
-              <a:rPr lang="en-US" sz="1500" b="0">
-                <a:solidFill>
-                  <a:srgbClr val="202B33"/>
-                </a:solidFill>
-                <a:latin typeface="Arial"/>
-                <a:ea typeface="Arial"/>
-                <a:cs typeface="Arial"/>
-              </a:rPr>
-              <a:t xml:space="preserve">failure is that nobody measured what the</a:t>
-            </a:r>
-            <a:endParaRPr lang="en-US" sz="1500"/>
-          </a:p>
-          <a:p>
-            <a:pPr marL="0" indent="0">
-              <a:lnSpc>
-                <a:spcPts val="1950"/>
-              </a:lnSpc>
-              <a:spcAft>
-                <a:spcPts val="0"/>
-              </a:spcAft>
-              <a:buNone/>
-            </a:pPr>
-            <a:r>
-              <a:rPr lang="en-US" sz="1500" b="0">
-                <a:solidFill>
-                  <a:srgbClr val="202B33"/>
-                </a:solidFill>
-                <a:latin typeface="Arial"/>
-                <a:ea typeface="Arial"/>
-                <a:cs typeface="Arial"/>
-              </a:rPr>
-              <a:t xml:space="preserve">extra call bought, because at these prices</a:t>
-            </a:r>
-            <a:endParaRPr lang="en-US" sz="1500"/>
-          </a:p>
-          <a:p>
-            <a:pPr marL="0" indent="0">
-              <a:lnSpc>
-                <a:spcPts val="1950"/>
-              </a:lnSpc>
-              <a:spcAft>
-                <a:spcPts val="0"/>
-              </a:spcAft>
-              <a:buNone/>
-            </a:pPr>
-            <a:r>
-              <a:rPr lang="en-US" sz="1500" b="0">
-                <a:solidFill>
-                  <a:srgbClr val="202B33"/>
-                </a:solidFill>
-                <a:latin typeface="Arial"/>
-                <a:ea typeface="Arial"/>
-                <a:cs typeface="Arial"/>
-              </a:rPr>
-              <a:t xml:space="preserve">nobody had to.</a:t>
+              <a:t xml:space="preserve">Now the part worth remembering. Divide by</a:t>
+            </a:r>
+            <a:endParaRPr lang="en-US" sz="1500"/>
+          </a:p>
+          <a:p>
+            <a:pPr marL="0" indent="0">
+              <a:lnSpc>
+                <a:spcPts val="1950"/>
+              </a:lnSpc>
+              <a:spcAft>
+                <a:spcPts val="0"/>
+              </a:spcAft>
+              <a:buNone/>
+            </a:pPr>
+            <a:r>
+              <a:rPr lang="en-US" sz="1500" b="0">
+                <a:solidFill>
+                  <a:srgbClr val="202B33"/>
+                </a:solidFill>
+                <a:latin typeface="Arial"/>
+                <a:ea typeface="Arial"/>
+                <a:cs typeface="Arial"/>
+              </a:rPr>
+              <a:t xml:space="preserve">the acceptance rate and you get a</a:t>
+            </a:r>
+            <a:endParaRPr lang="en-US" sz="1500"/>
+          </a:p>
+          <a:p>
+            <a:pPr marL="0" indent="0">
+              <a:lnSpc>
+                <a:spcPts val="1950"/>
+              </a:lnSpc>
+              <a:spcAft>
+                <a:spcPts val="0"/>
+              </a:spcAft>
+              <a:buNone/>
+            </a:pPr>
+            <a:r>
+              <a:rPr lang="en-US" sz="1500" b="0">
+                <a:solidFill>
+                  <a:srgbClr val="202B33"/>
+                </a:solidFill>
+                <a:latin typeface="Arial"/>
+                <a:ea typeface="Arial"/>
+                <a:cs typeface="Arial"/>
+              </a:rPr>
+              <a:t xml:space="preserve">multiplier on your sticker price.</a:t>
+            </a:r>
+            <a:endParaRPr lang="en-US" sz="1500"/>
+          </a:p>
+          <a:p>
+            <a:pPr marL="0" indent="0">
+              <a:lnSpc>
+                <a:spcPts val="1950"/>
+              </a:lnSpc>
+              <a:spcAft>
+                <a:spcPts val="0"/>
+              </a:spcAft>
+              <a:buNone/>
+            </a:pPr>
+            <a:r>
+              <a:rPr lang="en-US" sz="1500" b="0">
+                <a:solidFill>
+                  <a:srgbClr val="202B33"/>
+                </a:solidFill>
+                <a:latin typeface="Arial"/>
+                <a:ea typeface="Arial"/>
+                <a:cs typeface="Arial"/>
+              </a:rPr>
+              <a:t xml:space="preserve">Seventy-five percent acceptance means you</a:t>
+            </a:r>
+            <a:endParaRPr lang="en-US" sz="1500"/>
+          </a:p>
+          <a:p>
+            <a:pPr marL="0" indent="0">
+              <a:lnSpc>
+                <a:spcPts val="1950"/>
+              </a:lnSpc>
+              <a:spcAft>
+                <a:spcPts val="0"/>
+              </a:spcAft>
+              <a:buNone/>
+            </a:pPr>
+            <a:r>
+              <a:rPr lang="en-US" sz="1500" b="0">
+                <a:solidFill>
+                  <a:srgbClr val="202B33"/>
+                </a:solidFill>
+                <a:latin typeface="Arial"/>
+                <a:ea typeface="Arial"/>
+                <a:cs typeface="Arial"/>
+              </a:rPr>
+              <a:t xml:space="preserve">are paying one and a third times the list</a:t>
+            </a:r>
+            <a:endParaRPr lang="en-US" sz="1500"/>
+          </a:p>
+          <a:p>
+            <a:pPr marL="0" indent="0">
+              <a:lnSpc>
+                <a:spcPts val="1950"/>
+              </a:lnSpc>
+              <a:spcAft>
+                <a:spcPts val="0"/>
+              </a:spcAft>
+              <a:buNone/>
+            </a:pPr>
+            <a:r>
+              <a:rPr lang="en-US" sz="1500" b="0">
+                <a:solidFill>
+                  <a:srgbClr val="202B33"/>
+                </a:solidFill>
+                <a:latin typeface="Arial"/>
+                <a:ea typeface="Arial"/>
+                <a:cs typeface="Arial"/>
+              </a:rPr>
+              <a:t xml:space="preserve">price for every result you keep. Forty-five</a:t>
+            </a:r>
+            <a:endParaRPr lang="en-US" sz="1500"/>
+          </a:p>
+          <a:p>
+            <a:pPr marL="0" indent="0">
+              <a:lnSpc>
+                <a:spcPts val="1950"/>
+              </a:lnSpc>
+              <a:spcAft>
+                <a:spcPts val="0"/>
+              </a:spcAft>
+              <a:buNone/>
+            </a:pPr>
+            <a:r>
+              <a:rPr lang="en-US" sz="1500" b="0">
+                <a:solidFill>
+                  <a:srgbClr val="202B33"/>
+                </a:solidFill>
+                <a:latin typeface="Arial"/>
+                <a:ea typeface="Arial"/>
+                <a:cs typeface="Arial"/>
+              </a:rPr>
+              <a:t xml:space="preserve">percent means two point two. Run those two</a:t>
+            </a:r>
+            <a:endParaRPr lang="en-US" sz="1500"/>
+          </a:p>
+          <a:p>
+            <a:pPr marL="0" indent="0">
+              <a:lnSpc>
+                <a:spcPts val="1950"/>
+              </a:lnSpc>
+              <a:spcAft>
+                <a:spcPts val="0"/>
+              </a:spcAft>
+              <a:buNone/>
+            </a:pPr>
+            <a:r>
+              <a:rPr lang="en-US" sz="1500" b="0">
+                <a:solidFill>
+                  <a:srgbClr val="202B33"/>
+                </a:solidFill>
+                <a:latin typeface="Arial"/>
+                <a:ea typeface="Arial"/>
+                <a:cs typeface="Arial"/>
+              </a:rPr>
+              <a:t xml:space="preserve">numbers together: dropping from</a:t>
+            </a:r>
+            <a:endParaRPr lang="en-US" sz="1500"/>
+          </a:p>
+          <a:p>
+            <a:pPr marL="0" indent="0">
+              <a:lnSpc>
+                <a:spcPts val="1950"/>
+              </a:lnSpc>
+              <a:spcAft>
+                <a:spcPts val="0"/>
+              </a:spcAft>
+              <a:buNone/>
+            </a:pPr>
+            <a:r>
+              <a:rPr lang="en-US" sz="1500" b="0">
+                <a:solidFill>
+                  <a:srgbClr val="202B33"/>
+                </a:solidFill>
+                <a:latin typeface="Arial"/>
+                <a:ea typeface="Arial"/>
+                <a:cs typeface="Arial"/>
+              </a:rPr>
+              <a:t xml:space="preserve">seventy-five to forty-five percent</a:t>
+            </a:r>
+            <a:endParaRPr lang="en-US" sz="1500"/>
+          </a:p>
+          <a:p>
+            <a:pPr marL="0" indent="0">
+              <a:lnSpc>
+                <a:spcPts val="1950"/>
+              </a:lnSpc>
+              <a:spcAft>
+                <a:spcPts val="0"/>
+              </a:spcAft>
+              <a:buNone/>
+            </a:pPr>
+            <a:r>
+              <a:rPr lang="en-US" sz="1500" b="0">
+                <a:solidFill>
+                  <a:srgbClr val="202B33"/>
+                </a:solidFill>
+                <a:latin typeface="Arial"/>
+                <a:ea typeface="Arial"/>
+                <a:cs typeface="Arial"/>
+              </a:rPr>
+              <a:t xml:space="preserve">acceptance costs you exactly the same as</a:t>
+            </a:r>
+            <a:endParaRPr lang="en-US" sz="1500"/>
+          </a:p>
+          <a:p>
+            <a:pPr marL="0" indent="0">
+              <a:lnSpc>
+                <a:spcPts val="1950"/>
+              </a:lnSpc>
+              <a:spcAft>
+                <a:spcPts val="0"/>
+              </a:spcAft>
+              <a:buNone/>
+            </a:pPr>
+            <a:r>
+              <a:rPr lang="en-US" sz="1500" b="0">
+                <a:solidFill>
+                  <a:srgbClr val="202B33"/>
+                </a:solidFill>
+                <a:latin typeface="Arial"/>
+                <a:ea typeface="Arial"/>
+                <a:cs typeface="Arial"/>
+              </a:rPr>
+              <a:t xml:space="preserve">every token in your stack doubling in price</a:t>
+            </a:r>
+            <a:endParaRPr lang="en-US" sz="1500"/>
+          </a:p>
+          <a:p>
+            <a:pPr marL="0" indent="0">
+              <a:lnSpc>
+                <a:spcPts val="1950"/>
+              </a:lnSpc>
+              <a:spcAft>
+                <a:spcPts val="0"/>
+              </a:spcAft>
+              <a:buNone/>
+            </a:pPr>
+            <a:r>
+              <a:rPr lang="en-US" sz="1500" b="0">
+                <a:solidFill>
+                  <a:srgbClr val="202B33"/>
+                </a:solidFill>
+                <a:latin typeface="Arial"/>
+                <a:ea typeface="Arial"/>
+                <a:cs typeface="Arial"/>
+              </a:rPr>
+              <a:t xml:space="preserve">overnight. One of those is on the front</a:t>
+            </a:r>
+            <a:endParaRPr lang="en-US" sz="1500"/>
+          </a:p>
+          <a:p>
+            <a:pPr marL="0" indent="0">
+              <a:lnSpc>
+                <a:spcPts val="1950"/>
+              </a:lnSpc>
+              <a:spcAft>
+                <a:spcPts val="0"/>
+              </a:spcAft>
+              <a:buNone/>
+            </a:pPr>
+            <a:r>
+              <a:rPr lang="en-US" sz="1500" b="0">
+                <a:solidFill>
+                  <a:srgbClr val="202B33"/>
+                </a:solidFill>
+                <a:latin typeface="Arial"/>
+                <a:ea typeface="Arial"/>
+                <a:cs typeface="Arial"/>
+              </a:rPr>
+              <a:t xml:space="preserve">page. The other one is a Tuesday.</a:t>
             </a:r>
             <a:endParaRPr lang="en-US" sz="1500"/>
           </a:p>
@@ -11343,7 +9568,7 @@
                 <a:ea typeface="Arial"/>
                 <a:cs typeface="Arial"/>
               </a:rPr>
-              <a:t xml:space="preserve">06 / 08    SOURCE SLIDE 10</a:t>
+              <a:t xml:space="preserve">06 / 07    SOURCE SLIDE 12</a:t>
             </a:r>
             <a:endParaRPr lang="en-US" sz="1050"/>
           </a:p>
@@ -11392,7 +9617,7 @@
                 <a:ea typeface="Arial"/>
                 <a:cs typeface="Arial"/>
               </a:rPr>
-              <a:t xml:space="preserve">Doubling on a Tuesday</a:t>
+              <a:t xml:space="preserve">You are not shopping, you are contracting</a:t>
             </a:r>
             <a:endParaRPr lang="en-US" sz="2550"/>
           </a:p>
@@ -11441,30 +9666,30 @@
                 <a:ea typeface="Arial"/>
                 <a:cs typeface="Arial"/>
               </a:rPr>
-              <a:t xml:space="preserve">Cost per accepted outcome = total spend ÷</a:t>
-            </a:r>
-            <a:endParaRPr lang="en-US" sz="1500"/>
-          </a:p>
-          <a:p>
-            <a:pPr marL="0" indent="0">
-              <a:lnSpc>
-                <a:spcPts val="1950"/>
-              </a:lnSpc>
-              <a:spcAft>
-                <a:spcPts val="0"/>
-              </a:spcAft>
-              <a:buNone/>
-            </a:pPr>
-            <a:r>
-              <a:rPr lang="en-US" sz="1500" b="0">
-                <a:solidFill>
-                  <a:srgbClr val="202B33"/>
-                </a:solidFill>
-                <a:latin typeface="Arial"/>
-                <a:ea typeface="Arial"/>
-                <a:cs typeface="Arial"/>
-              </a:rPr>
-              <a:t xml:space="preserve">accepted jobs</a:t>
+              <a:t xml:space="preserve">Word six: asset specificity. Word seven:</a:t>
+            </a:r>
+            <a:endParaRPr lang="en-US" sz="1500"/>
+          </a:p>
+          <a:p>
+            <a:pPr marL="0" indent="0">
+              <a:lnSpc>
+                <a:spcPts val="1950"/>
+              </a:lnSpc>
+              <a:spcAft>
+                <a:spcPts val="0"/>
+              </a:spcAft>
+              <a:buNone/>
+            </a:pPr>
+            <a:r>
+              <a:rPr lang="en-US" sz="1500" b="0">
+                <a:solidFill>
+                  <a:srgbClr val="202B33"/>
+                </a:solidFill>
+                <a:latin typeface="Arial"/>
+                <a:ea typeface="Arial"/>
+                <a:cs typeface="Arial"/>
+              </a:rPr>
+              <a:t xml:space="preserve">hold-up.</a:t>
             </a:r>
             <a:endParaRPr lang="en-US" sz="1500"/>
           </a:p>
@@ -11510,30 +9735,30 @@
                 <a:ea typeface="Arial"/>
                 <a:cs typeface="Arial"/>
               </a:rPr>
-              <a:t xml:space="preserve">75% accepted means you pay 1.33× sticker.</a:t>
-            </a:r>
-            <a:endParaRPr lang="en-US" sz="1500"/>
-          </a:p>
-          <a:p>
-            <a:pPr marL="0" indent="0">
-              <a:lnSpc>
-                <a:spcPts val="1950"/>
-              </a:lnSpc>
-              <a:spcAft>
-                <a:spcPts val="0"/>
-              </a:spcAft>
-              <a:buNone/>
-            </a:pPr>
-            <a:r>
-              <a:rPr lang="en-US" sz="1500" b="0">
-                <a:solidFill>
-                  <a:srgbClr val="202B33"/>
-                </a:solidFill>
-                <a:latin typeface="Arial"/>
-                <a:ea typeface="Arial"/>
-                <a:cs typeface="Arial"/>
-              </a:rPr>
-              <a:t xml:space="preserve">45% means 2.22×.</a:t>
+              <a:t xml:space="preserve">An investment worth a lot inside this</a:t>
+            </a:r>
+            <a:endParaRPr lang="en-US" sz="1500"/>
+          </a:p>
+          <a:p>
+            <a:pPr marL="0" indent="0">
+              <a:lnSpc>
+                <a:spcPts val="1950"/>
+              </a:lnSpc>
+              <a:spcAft>
+                <a:spcPts val="0"/>
+              </a:spcAft>
+              <a:buNone/>
+            </a:pPr>
+            <a:r>
+              <a:rPr lang="en-US" sz="1500" b="0">
+                <a:solidFill>
+                  <a:srgbClr val="202B33"/>
+                </a:solidFill>
+                <a:latin typeface="Arial"/>
+                <a:ea typeface="Arial"/>
+                <a:cs typeface="Arial"/>
+              </a:rPr>
+              <a:t xml:space="preserve">relationship and little outside it</a:t>
             </a:r>
             <a:endParaRPr lang="en-US" sz="1500"/>
           </a:p>
@@ -11579,30 +9804,30 @@
                 <a:ea typeface="Arial"/>
                 <a:cs typeface="Arial"/>
               </a:rPr>
-              <a:t xml:space="preserve">A 30-point acceptance drop costs exactly</a:t>
-            </a:r>
-            <a:endParaRPr lang="en-US" sz="1500"/>
-          </a:p>
-          <a:p>
-            <a:pPr marL="0" indent="0">
-              <a:lnSpc>
-                <a:spcPts val="1950"/>
-              </a:lnSpc>
-              <a:spcAft>
-                <a:spcPts val="0"/>
-              </a:spcAft>
-              <a:buNone/>
-            </a:pPr>
-            <a:r>
-              <a:rPr lang="en-US" sz="1500" b="0">
-                <a:solidFill>
-                  <a:srgbClr val="202B33"/>
-                </a:solidFill>
-                <a:latin typeface="Arial"/>
-                <a:ea typeface="Arial"/>
-                <a:cs typeface="Arial"/>
-              </a:rPr>
-              <a:t xml:space="preserve">what doubling every token price costs.</a:t>
+              <a:t xml:space="preserve">Your prompts, evals, fine-tunes, and that</a:t>
+            </a:r>
+            <a:endParaRPr lang="en-US" sz="1500"/>
+          </a:p>
+          <a:p>
+            <a:pPr marL="0" indent="0">
+              <a:lnSpc>
+                <a:spcPts val="1950"/>
+              </a:lnSpc>
+              <a:spcAft>
+                <a:spcPts val="0"/>
+              </a:spcAft>
+              <a:buNone/>
+            </a:pPr>
+            <a:r>
+              <a:rPr lang="en-US" sz="1500" b="0">
+                <a:solidFill>
+                  <a:srgbClr val="202B33"/>
+                </a:solidFill>
+                <a:latin typeface="Arial"/>
+                <a:ea typeface="Arial"/>
+                <a:cs typeface="Arial"/>
+              </a:rPr>
+              <a:t xml:space="preserve">unlimited-usage clause</a:t>
             </a:r>
             <a:endParaRPr lang="en-US" sz="1500"/>
           </a:p>
@@ -11648,145 +9873,76 @@
                 <a:ea typeface="Arial"/>
                 <a:cs typeface="Arial"/>
               </a:rPr>
-              <a:t xml:space="preserve">Before any dollar figure, define the</a:t>
-            </a:r>
-            <a:endParaRPr lang="en-US" sz="1500"/>
-          </a:p>
-          <a:p>
-            <a:pPr marL="0" indent="0">
-              <a:lnSpc>
-                <a:spcPts val="1950"/>
-              </a:lnSpc>
-              <a:spcAft>
-                <a:spcPts val="0"/>
-              </a:spcAft>
-              <a:buNone/>
-            </a:pPr>
-            <a:r>
-              <a:rPr lang="en-US" sz="1500" b="0">
-                <a:solidFill>
-                  <a:srgbClr val="202B33"/>
-                </a:solidFill>
-                <a:latin typeface="Arial"/>
-                <a:ea typeface="Arial"/>
-                <a:cs typeface="Arial"/>
-              </a:rPr>
-              <a:t xml:space="preserve">denominator. An accepted outcome meets a</a:t>
-            </a:r>
-            <a:endParaRPr lang="en-US" sz="1500"/>
-          </a:p>
-          <a:p>
-            <a:pPr marL="0" indent="0">
-              <a:lnSpc>
-                <a:spcPts val="1950"/>
-              </a:lnSpc>
-              <a:spcAft>
-                <a:spcPts val="0"/>
-              </a:spcAft>
-              <a:buNone/>
-            </a:pPr>
-            <a:r>
-              <a:rPr lang="en-US" sz="1500" b="0">
-                <a:solidFill>
-                  <a:srgbClr val="202B33"/>
-                </a:solidFill>
-                <a:latin typeface="Arial"/>
-                <a:ea typeface="Arial"/>
-                <a:cs typeface="Arial"/>
-              </a:rPr>
-              <a:t xml:space="preserve">rule you wrote down. An impressive answer</a:t>
-            </a:r>
-            <a:endParaRPr lang="en-US" sz="1500"/>
-          </a:p>
-          <a:p>
-            <a:pPr marL="0" indent="0">
-              <a:lnSpc>
-                <a:spcPts val="1950"/>
-              </a:lnSpc>
-              <a:spcAft>
-                <a:spcPts val="0"/>
-              </a:spcAft>
-              <a:buNone/>
-            </a:pPr>
-            <a:r>
-              <a:rPr lang="en-US" sz="1500" b="0">
-                <a:solidFill>
-                  <a:srgbClr val="202B33"/>
-                </a:solidFill>
-                <a:latin typeface="Arial"/>
-                <a:ea typeface="Arial"/>
-                <a:cs typeface="Arial"/>
-              </a:rPr>
-              <a:t xml:space="preserve">that a human quietly repairs afterwards is</a:t>
-            </a:r>
-            <a:endParaRPr lang="en-US" sz="1500"/>
-          </a:p>
-          <a:p>
-            <a:pPr marL="0" indent="0">
-              <a:lnSpc>
-                <a:spcPts val="1950"/>
-              </a:lnSpc>
-              <a:spcAft>
-                <a:spcPts val="0"/>
-              </a:spcAft>
-              <a:buNone/>
-            </a:pPr>
-            <a:r>
-              <a:rPr lang="en-US" sz="1500" b="0">
-                <a:solidFill>
-                  <a:srgbClr val="202B33"/>
-                </a:solidFill>
-                <a:latin typeface="Arial"/>
-                <a:ea typeface="Arial"/>
-                <a:cs typeface="Arial"/>
-              </a:rPr>
-              <a:t xml:space="preserve">not a success, it is a success plus a</a:t>
-            </a:r>
-            <a:endParaRPr lang="en-US" sz="1500"/>
-          </a:p>
-          <a:p>
-            <a:pPr marL="0" indent="0">
-              <a:lnSpc>
-                <a:spcPts val="1950"/>
-              </a:lnSpc>
-              <a:spcAft>
-                <a:spcPts val="0"/>
-              </a:spcAft>
-              <a:buNone/>
-            </a:pPr>
-            <a:r>
-              <a:rPr lang="en-US" sz="1500" b="0">
-                <a:solidFill>
-                  <a:srgbClr val="202B33"/>
-                </a:solidFill>
-                <a:latin typeface="Arial"/>
-                <a:ea typeface="Arial"/>
-                <a:cs typeface="Arial"/>
-              </a:rPr>
-              <a:t xml:space="preserve">hidden salary. Count inference, tools,</a:t>
-            </a:r>
-            <a:endParaRPr lang="en-US" sz="1500"/>
-          </a:p>
-          <a:p>
-            <a:pPr marL="0" indent="0">
-              <a:lnSpc>
-                <a:spcPts val="1950"/>
-              </a:lnSpc>
-              <a:spcAft>
-                <a:spcPts val="0"/>
-              </a:spcAft>
-              <a:buNone/>
-            </a:pPr>
-            <a:r>
-              <a:rPr lang="en-US" sz="1500" b="0">
-                <a:solidFill>
-                  <a:srgbClr val="202B33"/>
-                </a:solidFill>
-                <a:latin typeface="Arial"/>
-                <a:ea typeface="Arial"/>
-                <a:cs typeface="Arial"/>
-              </a:rPr>
-              <a:t xml:space="preserve">infrastructure and recovery. A blended</a:t>
+              <a:t xml:space="preserve">This is the slide I would keep if you cut</a:t>
+            </a:r>
+            <a:endParaRPr lang="en-US" sz="1500"/>
+          </a:p>
+          <a:p>
+            <a:pPr marL="0" indent="0">
+              <a:lnSpc>
+                <a:spcPts val="1950"/>
+              </a:lnSpc>
+              <a:spcAft>
+                <a:spcPts val="0"/>
+              </a:spcAft>
+              <a:buNone/>
+            </a:pPr>
+            <a:r>
+              <a:rPr lang="en-US" sz="1500" b="0">
+                <a:solidFill>
+                  <a:srgbClr val="202B33"/>
+                </a:solidFill>
+                <a:latin typeface="Arial"/>
+                <a:ea typeface="Arial"/>
+                <a:cs typeface="Arial"/>
+              </a:rPr>
+              <a:t xml:space="preserve">every other one. Oliver Williamson won a</a:t>
+            </a:r>
+            <a:endParaRPr lang="en-US" sz="1500"/>
+          </a:p>
+          <a:p>
+            <a:pPr marL="0" indent="0">
+              <a:lnSpc>
+                <a:spcPts val="1950"/>
+              </a:lnSpc>
+              <a:spcAft>
+                <a:spcPts val="0"/>
+              </a:spcAft>
+              <a:buNone/>
+            </a:pPr>
+            <a:r>
+              <a:rPr lang="en-US" sz="1500" b="0">
+                <a:solidFill>
+                  <a:srgbClr val="202B33"/>
+                </a:solidFill>
+                <a:latin typeface="Arial"/>
+                <a:ea typeface="Arial"/>
+                <a:cs typeface="Arial"/>
+              </a:rPr>
+              <a:t xml:space="preserve">Nobel in 2009 for working out what happens</a:t>
+            </a:r>
+            <a:endParaRPr lang="en-US" sz="1500"/>
+          </a:p>
+          <a:p>
+            <a:pPr marL="0" indent="0">
+              <a:lnSpc>
+                <a:spcPts val="1950"/>
+              </a:lnSpc>
+              <a:spcAft>
+                <a:spcPts val="0"/>
+              </a:spcAft>
+              <a:buNone/>
+            </a:pPr>
+            <a:r>
+              <a:rPr lang="en-US" sz="1500" b="0">
+                <a:solidFill>
+                  <a:srgbClr val="202B33"/>
+                </a:solidFill>
+                <a:latin typeface="Arial"/>
+                <a:ea typeface="Arial"/>
+                <a:cs typeface="Arial"/>
+              </a:rPr>
+              <a:t xml:space="preserve">when two parties make investments that only</a:t>
             </a:r>
             <a:endParaRPr lang="en-US" sz="1500"/>
           </a:p>
@@ -11835,7 +9991,53 @@
                 <a:ea typeface="Arial"/>
                 <a:cs typeface="Arial"/>
               </a:rPr>
-              <a:t xml:space="preserve">token rate is not a unit economics model.</a:t>
+              <a:t xml:space="preserve">pay off inside their relationship. He</a:t>
+            </a:r>
+            <a:endParaRPr lang="en-US" sz="1500"/>
+          </a:p>
+          <a:p>
+            <a:pPr marL="0" indent="0">
+              <a:lnSpc>
+                <a:spcPts val="1950"/>
+              </a:lnSpc>
+              <a:spcAft>
+                <a:spcPts val="0"/>
+              </a:spcAft>
+              <a:buNone/>
+            </a:pPr>
+            <a:r>
+              <a:rPr lang="en-US" sz="1500" b="0">
+                <a:solidFill>
+                  <a:srgbClr val="202B33"/>
+                </a:solidFill>
+                <a:latin typeface="Arial"/>
+                <a:ea typeface="Arial"/>
+                <a:cs typeface="Arial"/>
+              </a:rPr>
+              <a:t xml:space="preserve">called it asset specificity, and the</a:t>
+            </a:r>
+            <a:endParaRPr lang="en-US" sz="1500"/>
+          </a:p>
+          <a:p>
+            <a:pPr marL="0" indent="0">
+              <a:lnSpc>
+                <a:spcPts val="1950"/>
+              </a:lnSpc>
+              <a:spcAft>
+                <a:spcPts val="0"/>
+              </a:spcAft>
+              <a:buNone/>
+            </a:pPr>
+            <a:r>
+              <a:rPr lang="en-US" sz="1500" b="0">
+                <a:solidFill>
+                  <a:srgbClr val="202B33"/>
+                </a:solidFill>
+                <a:latin typeface="Arial"/>
+                <a:ea typeface="Arial"/>
+                <a:cs typeface="Arial"/>
+              </a:rPr>
+              <a:t xml:space="preserve">trouble it produces is called hold-up.</a:t>
             </a:r>
             <a:endParaRPr lang="en-US" sz="1500"/>
           </a:p>
@@ -11881,283 +10083,168 @@
                 <a:ea typeface="Arial"/>
                 <a:cs typeface="Arial"/>
               </a:rPr>
-              <a:t xml:space="preserve">Now the part worth remembering. Divide by</a:t>
-            </a:r>
-            <a:endParaRPr lang="en-US" sz="1500"/>
-          </a:p>
-          <a:p>
-            <a:pPr marL="0" indent="0">
-              <a:lnSpc>
-                <a:spcPts val="1950"/>
-              </a:lnSpc>
-              <a:spcAft>
-                <a:spcPts val="0"/>
-              </a:spcAft>
-              <a:buNone/>
-            </a:pPr>
-            <a:r>
-              <a:rPr lang="en-US" sz="1500" b="0">
-                <a:solidFill>
-                  <a:srgbClr val="202B33"/>
-                </a:solidFill>
-                <a:latin typeface="Arial"/>
-                <a:ea typeface="Arial"/>
-                <a:cs typeface="Arial"/>
-              </a:rPr>
-              <a:t xml:space="preserve">the acceptance rate and you get a</a:t>
-            </a:r>
-            <a:endParaRPr lang="en-US" sz="1500"/>
-          </a:p>
-          <a:p>
-            <a:pPr marL="0" indent="0">
-              <a:lnSpc>
-                <a:spcPts val="1950"/>
-              </a:lnSpc>
-              <a:spcAft>
-                <a:spcPts val="0"/>
-              </a:spcAft>
-              <a:buNone/>
-            </a:pPr>
-            <a:r>
-              <a:rPr lang="en-US" sz="1500" b="0">
-                <a:solidFill>
-                  <a:srgbClr val="202B33"/>
-                </a:solidFill>
-                <a:latin typeface="Arial"/>
-                <a:ea typeface="Arial"/>
-                <a:cs typeface="Arial"/>
-              </a:rPr>
-              <a:t xml:space="preserve">multiplier on your sticker price.</a:t>
-            </a:r>
-            <a:endParaRPr lang="en-US" sz="1500"/>
-          </a:p>
-          <a:p>
-            <a:pPr marL="0" indent="0">
-              <a:lnSpc>
-                <a:spcPts val="1950"/>
-              </a:lnSpc>
-              <a:spcAft>
-                <a:spcPts val="0"/>
-              </a:spcAft>
-              <a:buNone/>
-            </a:pPr>
-            <a:r>
-              <a:rPr lang="en-US" sz="1500" b="0">
-                <a:solidFill>
-                  <a:srgbClr val="202B33"/>
-                </a:solidFill>
-                <a:latin typeface="Arial"/>
-                <a:ea typeface="Arial"/>
-                <a:cs typeface="Arial"/>
-              </a:rPr>
-              <a:t xml:space="preserve">Seventy-five percent acceptance means you</a:t>
-            </a:r>
-            <a:endParaRPr lang="en-US" sz="1500"/>
-          </a:p>
-          <a:p>
-            <a:pPr marL="0" indent="0">
-              <a:lnSpc>
-                <a:spcPts val="1950"/>
-              </a:lnSpc>
-              <a:spcAft>
-                <a:spcPts val="0"/>
-              </a:spcAft>
-              <a:buNone/>
-            </a:pPr>
-            <a:r>
-              <a:rPr lang="en-US" sz="1500" b="0">
-                <a:solidFill>
-                  <a:srgbClr val="202B33"/>
-                </a:solidFill>
-                <a:latin typeface="Arial"/>
-                <a:ea typeface="Arial"/>
-                <a:cs typeface="Arial"/>
-              </a:rPr>
-              <a:t xml:space="preserve">are paying one and a third times the list</a:t>
-            </a:r>
-            <a:endParaRPr lang="en-US" sz="1500"/>
-          </a:p>
-          <a:p>
-            <a:pPr marL="0" indent="0">
-              <a:lnSpc>
-                <a:spcPts val="1950"/>
-              </a:lnSpc>
-              <a:spcAft>
-                <a:spcPts val="0"/>
-              </a:spcAft>
-              <a:buNone/>
-            </a:pPr>
-            <a:r>
-              <a:rPr lang="en-US" sz="1500" b="0">
-                <a:solidFill>
-                  <a:srgbClr val="202B33"/>
-                </a:solidFill>
-                <a:latin typeface="Arial"/>
-                <a:ea typeface="Arial"/>
-                <a:cs typeface="Arial"/>
-              </a:rPr>
-              <a:t xml:space="preserve">price for every result you keep. Forty-five</a:t>
-            </a:r>
-            <a:endParaRPr lang="en-US" sz="1500"/>
-          </a:p>
-          <a:p>
-            <a:pPr marL="0" indent="0">
-              <a:lnSpc>
-                <a:spcPts val="1950"/>
-              </a:lnSpc>
-              <a:spcAft>
-                <a:spcPts val="0"/>
-              </a:spcAft>
-              <a:buNone/>
-            </a:pPr>
-            <a:r>
-              <a:rPr lang="en-US" sz="1500" b="0">
-                <a:solidFill>
-                  <a:srgbClr val="202B33"/>
-                </a:solidFill>
-                <a:latin typeface="Arial"/>
-                <a:ea typeface="Arial"/>
-                <a:cs typeface="Arial"/>
-              </a:rPr>
-              <a:t xml:space="preserve">percent means two point two. Run those two</a:t>
-            </a:r>
-            <a:endParaRPr lang="en-US" sz="1500"/>
-          </a:p>
-          <a:p>
-            <a:pPr marL="0" indent="0">
-              <a:lnSpc>
-                <a:spcPts val="1950"/>
-              </a:lnSpc>
-              <a:spcAft>
-                <a:spcPts val="0"/>
-              </a:spcAft>
-              <a:buNone/>
-            </a:pPr>
-            <a:r>
-              <a:rPr lang="en-US" sz="1500" b="0">
-                <a:solidFill>
-                  <a:srgbClr val="202B33"/>
-                </a:solidFill>
-                <a:latin typeface="Arial"/>
-                <a:ea typeface="Arial"/>
-                <a:cs typeface="Arial"/>
-              </a:rPr>
-              <a:t xml:space="preserve">numbers together: dropping from</a:t>
-            </a:r>
-            <a:endParaRPr lang="en-US" sz="1500"/>
-          </a:p>
-          <a:p>
-            <a:pPr marL="0" indent="0">
-              <a:lnSpc>
-                <a:spcPts val="1950"/>
-              </a:lnSpc>
-              <a:spcAft>
-                <a:spcPts val="0"/>
-              </a:spcAft>
-              <a:buNone/>
-            </a:pPr>
-            <a:r>
-              <a:rPr lang="en-US" sz="1500" b="0">
-                <a:solidFill>
-                  <a:srgbClr val="202B33"/>
-                </a:solidFill>
-                <a:latin typeface="Arial"/>
-                <a:ea typeface="Arial"/>
-                <a:cs typeface="Arial"/>
-              </a:rPr>
-              <a:t xml:space="preserve">seventy-five to forty-five percent</a:t>
-            </a:r>
-            <a:endParaRPr lang="en-US" sz="1500"/>
-          </a:p>
-          <a:p>
-            <a:pPr marL="0" indent="0">
-              <a:lnSpc>
-                <a:spcPts val="1950"/>
-              </a:lnSpc>
-              <a:spcAft>
-                <a:spcPts val="0"/>
-              </a:spcAft>
-              <a:buNone/>
-            </a:pPr>
-            <a:r>
-              <a:rPr lang="en-US" sz="1500" b="0">
-                <a:solidFill>
-                  <a:srgbClr val="202B33"/>
-                </a:solidFill>
-                <a:latin typeface="Arial"/>
-                <a:ea typeface="Arial"/>
-                <a:cs typeface="Arial"/>
-              </a:rPr>
-              <a:t xml:space="preserve">acceptance costs you exactly the same as</a:t>
-            </a:r>
-            <a:endParaRPr lang="en-US" sz="1500"/>
-          </a:p>
-          <a:p>
-            <a:pPr marL="0" indent="0">
-              <a:lnSpc>
-                <a:spcPts val="1950"/>
-              </a:lnSpc>
-              <a:spcAft>
-                <a:spcPts val="0"/>
-              </a:spcAft>
-              <a:buNone/>
-            </a:pPr>
-            <a:r>
-              <a:rPr lang="en-US" sz="1500" b="0">
-                <a:solidFill>
-                  <a:srgbClr val="202B33"/>
-                </a:solidFill>
-                <a:latin typeface="Arial"/>
-                <a:ea typeface="Arial"/>
-                <a:cs typeface="Arial"/>
-              </a:rPr>
-              <a:t xml:space="preserve">every token in your stack doubling in price</a:t>
-            </a:r>
-            <a:endParaRPr lang="en-US" sz="1500"/>
-          </a:p>
-          <a:p>
-            <a:pPr marL="0" indent="0">
-              <a:lnSpc>
-                <a:spcPts val="1950"/>
-              </a:lnSpc>
-              <a:spcAft>
-                <a:spcPts val="0"/>
-              </a:spcAft>
-              <a:buNone/>
-            </a:pPr>
-            <a:r>
-              <a:rPr lang="en-US" sz="1500" b="0">
-                <a:solidFill>
-                  <a:srgbClr val="202B33"/>
-                </a:solidFill>
-                <a:latin typeface="Arial"/>
-                <a:ea typeface="Arial"/>
-                <a:cs typeface="Arial"/>
-              </a:rPr>
-              <a:t xml:space="preserve">overnight. One of those is on the front</a:t>
-            </a:r>
-            <a:endParaRPr lang="en-US" sz="1500"/>
-          </a:p>
-          <a:p>
-            <a:pPr marL="0" indent="0">
-              <a:lnSpc>
-                <a:spcPts val="1950"/>
-              </a:lnSpc>
-              <a:spcAft>
-                <a:spcPts val="0"/>
-              </a:spcAft>
-              <a:buNone/>
-            </a:pPr>
-            <a:r>
-              <a:rPr lang="en-US" sz="1500" b="0">
-                <a:solidFill>
-                  <a:srgbClr val="202B33"/>
-                </a:solidFill>
-                <a:latin typeface="Arial"/>
-                <a:ea typeface="Arial"/>
-                <a:cs typeface="Arial"/>
-              </a:rPr>
-              <a:t xml:space="preserve">page. The other one is a Tuesday.</a:t>
+              <a:t xml:space="preserve">So stop thinking of this as shopping, where</a:t>
+            </a:r>
+            <a:endParaRPr lang="en-US" sz="1500"/>
+          </a:p>
+          <a:p>
+            <a:pPr marL="0" indent="0">
+              <a:lnSpc>
+                <a:spcPts val="1950"/>
+              </a:lnSpc>
+              <a:spcAft>
+                <a:spcPts val="0"/>
+              </a:spcAft>
+              <a:buNone/>
+            </a:pPr>
+            <a:r>
+              <a:rPr lang="en-US" sz="1500" b="0">
+                <a:solidFill>
+                  <a:srgbClr val="202B33"/>
+                </a:solidFill>
+                <a:latin typeface="Arial"/>
+                <a:ea typeface="Arial"/>
+                <a:cs typeface="Arial"/>
+              </a:rPr>
+              <a:t xml:space="preserve">the customer holds the power because they</a:t>
+            </a:r>
+            <a:endParaRPr lang="en-US" sz="1500"/>
+          </a:p>
+          <a:p>
+            <a:pPr marL="0" indent="0">
+              <a:lnSpc>
+                <a:spcPts val="1950"/>
+              </a:lnSpc>
+              <a:spcAft>
+                <a:spcPts val="0"/>
+              </a:spcAft>
+              <a:buNone/>
+            </a:pPr>
+            <a:r>
+              <a:rPr lang="en-US" sz="1500" b="0">
+                <a:solidFill>
+                  <a:srgbClr val="202B33"/>
+                </a:solidFill>
+                <a:latin typeface="Arial"/>
+                <a:ea typeface="Arial"/>
+                <a:cs typeface="Arial"/>
+              </a:rPr>
+              <a:t xml:space="preserve">can leave. You are contracting, with a much</a:t>
+            </a:r>
+            <a:endParaRPr lang="en-US" sz="1500"/>
+          </a:p>
+          <a:p>
+            <a:pPr marL="0" indent="0">
+              <a:lnSpc>
+                <a:spcPts val="1950"/>
+              </a:lnSpc>
+              <a:spcAft>
+                <a:spcPts val="0"/>
+              </a:spcAft>
+              <a:buNone/>
+            </a:pPr>
+            <a:r>
+              <a:rPr lang="en-US" sz="1500" b="0">
+                <a:solidFill>
+                  <a:srgbClr val="202B33"/>
+                </a:solidFill>
+                <a:latin typeface="Arial"/>
+                <a:ea typeface="Arial"/>
+                <a:cs typeface="Arial"/>
+              </a:rPr>
+              <a:t xml:space="preserve">better capitalized counterparty, and your</a:t>
+            </a:r>
+            <a:endParaRPr lang="en-US" sz="1500"/>
+          </a:p>
+          <a:p>
+            <a:pPr marL="0" indent="0">
+              <a:lnSpc>
+                <a:spcPts val="1950"/>
+              </a:lnSpc>
+              <a:spcAft>
+                <a:spcPts val="0"/>
+              </a:spcAft>
+              <a:buNone/>
+            </a:pPr>
+            <a:r>
+              <a:rPr lang="en-US" sz="1500" b="0">
+                <a:solidFill>
+                  <a:srgbClr val="202B33"/>
+                </a:solidFill>
+                <a:latin typeface="Arial"/>
+                <a:ea typeface="Arial"/>
+                <a:cs typeface="Arial"/>
+              </a:rPr>
+              <a:t xml:space="preserve">architecture is the collateral. That</a:t>
+            </a:r>
+            <a:endParaRPr lang="en-US" sz="1500"/>
+          </a:p>
+          <a:p>
+            <a:pPr marL="0" indent="0">
+              <a:lnSpc>
+                <a:spcPts val="1950"/>
+              </a:lnSpc>
+              <a:spcAft>
+                <a:spcPts val="0"/>
+              </a:spcAft>
+              <a:buNone/>
+            </a:pPr>
+            <a:r>
+              <a:rPr lang="en-US" sz="1500" b="0">
+                <a:solidFill>
+                  <a:srgbClr val="202B33"/>
+                </a:solidFill>
+                <a:latin typeface="Arial"/>
+                <a:ea typeface="Arial"/>
+                <a:cs typeface="Arial"/>
+              </a:rPr>
+              <a:t xml:space="preserve">reframe is the whole talk, and everything</a:t>
+            </a:r>
+            <a:endParaRPr lang="en-US" sz="1500"/>
+          </a:p>
+          <a:p>
+            <a:pPr marL="0" indent="0">
+              <a:lnSpc>
+                <a:spcPts val="1950"/>
+              </a:lnSpc>
+              <a:spcAft>
+                <a:spcPts val="0"/>
+              </a:spcAft>
+              <a:buNone/>
+            </a:pPr>
+            <a:r>
+              <a:rPr lang="en-US" sz="1500" b="0">
+                <a:solidFill>
+                  <a:srgbClr val="202B33"/>
+                </a:solidFill>
+                <a:latin typeface="Arial"/>
+                <a:ea typeface="Arial"/>
+                <a:cs typeface="Arial"/>
+              </a:rPr>
+              <a:t xml:space="preserve">after this is just a way of reducing</a:t>
+            </a:r>
+            <a:endParaRPr lang="en-US" sz="1500"/>
+          </a:p>
+          <a:p>
+            <a:pPr marL="0" indent="0">
+              <a:lnSpc>
+                <a:spcPts val="1950"/>
+              </a:lnSpc>
+              <a:spcAft>
+                <a:spcPts val="0"/>
+              </a:spcAft>
+              <a:buNone/>
+            </a:pPr>
+            <a:r>
+              <a:rPr lang="en-US" sz="1500" b="0">
+                <a:solidFill>
+                  <a:srgbClr val="202B33"/>
+                </a:solidFill>
+                <a:latin typeface="Arial"/>
+                <a:ea typeface="Arial"/>
+                <a:cs typeface="Arial"/>
+              </a:rPr>
+              <a:t xml:space="preserve">specificity or pricing the exposure.</a:t>
             </a:r>
             <a:endParaRPr lang="en-US" sz="1500"/>
           </a:p>
@@ -12337,7 +10424,7 @@
                 <a:ea typeface="Arial"/>
                 <a:cs typeface="Arial"/>
               </a:rPr>
-              <a:t xml:space="preserve">07 / 08    SOURCE SLIDE 12</a:t>
+              <a:t xml:space="preserve">07 / 07    SOURCE SLIDE 15</a:t>
             </a:r>
             <a:endParaRPr lang="en-US" sz="1050"/>
           </a:p>
@@ -12386,7 +10473,7 @@
                 <a:ea typeface="Arial"/>
                 <a:cs typeface="Arial"/>
               </a:rPr>
-              <a:t xml:space="preserve">You are not shopping, you are contracting</a:t>
+              <a:t xml:space="preserve">Cheap intelligence changes incentives first</a:t>
             </a:r>
             <a:endParaRPr lang="en-US" sz="2550"/>
           </a:p>
@@ -12435,30 +10522,30 @@
                 <a:ea typeface="Arial"/>
                 <a:cs typeface="Arial"/>
               </a:rPr>
-              <a:t xml:space="preserve">Word six: asset specificity. Word seven:</a:t>
-            </a:r>
-            <a:endParaRPr lang="en-US" sz="1500"/>
-          </a:p>
-          <a:p>
-            <a:pPr marL="0" indent="0">
-              <a:lnSpc>
-                <a:spcPts val="1950"/>
-              </a:lnSpc>
-              <a:spcAft>
-                <a:spcPts val="0"/>
-              </a:spcAft>
-              <a:buNone/>
-            </a:pPr>
-            <a:r>
-              <a:rPr lang="en-US" sz="1500" b="0">
-                <a:solidFill>
-                  <a:srgbClr val="202B33"/>
-                </a:solidFill>
-                <a:latin typeface="Arial"/>
-                <a:ea typeface="Arial"/>
-                <a:cs typeface="Arial"/>
-              </a:rPr>
-              <a:t xml:space="preserve">hold-up.</a:t>
+              <a:t xml:space="preserve">Externality · Induced demand · Jevons</a:t>
+            </a:r>
+            <a:endParaRPr lang="en-US" sz="1500"/>
+          </a:p>
+          <a:p>
+            <a:pPr marL="0" indent="0">
+              <a:lnSpc>
+                <a:spcPts val="1950"/>
+              </a:lnSpc>
+              <a:spcAft>
+                <a:spcPts val="0"/>
+              </a:spcAft>
+              <a:buNone/>
+            </a:pPr>
+            <a:r>
+              <a:rPr lang="en-US" sz="1500" b="0">
+                <a:solidFill>
+                  <a:srgbClr val="202B33"/>
+                </a:solidFill>
+                <a:latin typeface="Arial"/>
+                <a:ea typeface="Arial"/>
+                <a:cs typeface="Arial"/>
+              </a:rPr>
+              <a:t xml:space="preserve">paradox · Path dependence</a:t>
             </a:r>
             <a:endParaRPr lang="en-US" sz="1500"/>
           </a:p>
@@ -12504,30 +10591,30 @@
                 <a:ea typeface="Arial"/>
                 <a:cs typeface="Arial"/>
               </a:rPr>
-              <a:t xml:space="preserve">An investment worth a lot inside this</a:t>
-            </a:r>
-            <a:endParaRPr lang="en-US" sz="1500"/>
-          </a:p>
-          <a:p>
-            <a:pPr marL="0" indent="0">
-              <a:lnSpc>
-                <a:spcPts val="1950"/>
-              </a:lnSpc>
-              <a:spcAft>
-                <a:spcPts val="0"/>
-              </a:spcAft>
-              <a:buNone/>
-            </a:pPr>
-            <a:r>
-              <a:rPr lang="en-US" sz="1500" b="0">
-                <a:solidFill>
-                  <a:srgbClr val="202B33"/>
-                </a:solidFill>
-                <a:latin typeface="Arial"/>
-                <a:ea typeface="Arial"/>
-                <a:cs typeface="Arial"/>
-              </a:rPr>
-              <a:t xml:space="preserve">relationship and little outside it</a:t>
+              <a:t xml:space="preserve">Moral hazard · Credible commitment · Asset</a:t>
+            </a:r>
+            <a:endParaRPr lang="en-US" sz="1500"/>
+          </a:p>
+          <a:p>
+            <a:pPr marL="0" indent="0">
+              <a:lnSpc>
+                <a:spcPts val="1950"/>
+              </a:lnSpc>
+              <a:spcAft>
+                <a:spcPts val="0"/>
+              </a:spcAft>
+              <a:buNone/>
+            </a:pPr>
+            <a:r>
+              <a:rPr lang="en-US" sz="1500" b="0">
+                <a:solidFill>
+                  <a:srgbClr val="202B33"/>
+                </a:solidFill>
+                <a:latin typeface="Arial"/>
+                <a:ea typeface="Arial"/>
+                <a:cs typeface="Arial"/>
+              </a:rPr>
+              <a:t xml:space="preserve">specificity · Real option</a:t>
             </a:r>
             <a:endParaRPr lang="en-US" sz="1500"/>
           </a:p>
@@ -12573,30 +10660,7 @@
                 <a:ea typeface="Arial"/>
                 <a:cs typeface="Arial"/>
               </a:rPr>
-              <a:t xml:space="preserve">Your prompts, evals, fine-tunes, and that</a:t>
-            </a:r>
-            <a:endParaRPr lang="en-US" sz="1500"/>
-          </a:p>
-          <a:p>
-            <a:pPr marL="0" indent="0">
-              <a:lnSpc>
-                <a:spcPts val="1950"/>
-              </a:lnSpc>
-              <a:spcAft>
-                <a:spcPts val="0"/>
-              </a:spcAft>
-              <a:buNone/>
-            </a:pPr>
-            <a:r>
-              <a:rPr lang="en-US" sz="1500" b="0">
-                <a:solidFill>
-                  <a:srgbClr val="202B33"/>
-                </a:solidFill>
-                <a:latin typeface="Arial"/>
-                <a:ea typeface="Arial"/>
-                <a:cs typeface="Arial"/>
-              </a:rPr>
-              <a:t xml:space="preserve">unlimited-usage clause</a:t>
+              <a:t xml:space="preserve">Build for more than one price.</a:t>
             </a:r>
             <a:endParaRPr lang="en-US" sz="1500"/>
           </a:p>
@@ -12642,145 +10706,122 @@
                 <a:ea typeface="Arial"/>
                 <a:cs typeface="Arial"/>
               </a:rPr>
-              <a:t xml:space="preserve">This is the slide I would keep if you cut</a:t>
-            </a:r>
-            <a:endParaRPr lang="en-US" sz="1500"/>
-          </a:p>
-          <a:p>
-            <a:pPr marL="0" indent="0">
-              <a:lnSpc>
-                <a:spcPts val="1950"/>
-              </a:lnSpc>
-              <a:spcAft>
-                <a:spcPts val="0"/>
-              </a:spcAft>
-              <a:buNone/>
-            </a:pPr>
-            <a:r>
-              <a:rPr lang="en-US" sz="1500" b="0">
-                <a:solidFill>
-                  <a:srgbClr val="202B33"/>
-                </a:solidFill>
-                <a:latin typeface="Arial"/>
-                <a:ea typeface="Arial"/>
-                <a:cs typeface="Arial"/>
-              </a:rPr>
-              <a:t xml:space="preserve">every other one. Oliver Williamson won a</a:t>
-            </a:r>
-            <a:endParaRPr lang="en-US" sz="1500"/>
-          </a:p>
-          <a:p>
-            <a:pPr marL="0" indent="0">
-              <a:lnSpc>
-                <a:spcPts val="1950"/>
-              </a:lnSpc>
-              <a:spcAft>
-                <a:spcPts val="0"/>
-              </a:spcAft>
-              <a:buNone/>
-            </a:pPr>
-            <a:r>
-              <a:rPr lang="en-US" sz="1500" b="0">
-                <a:solidFill>
-                  <a:srgbClr val="202B33"/>
-                </a:solidFill>
-                <a:latin typeface="Arial"/>
-                <a:ea typeface="Arial"/>
-                <a:cs typeface="Arial"/>
-              </a:rPr>
-              <a:t xml:space="preserve">Nobel in 2009 for working out what happens</a:t>
-            </a:r>
-            <a:endParaRPr lang="en-US" sz="1500"/>
-          </a:p>
-          <a:p>
-            <a:pPr marL="0" indent="0">
-              <a:lnSpc>
-                <a:spcPts val="1950"/>
-              </a:lnSpc>
-              <a:spcAft>
-                <a:spcPts val="0"/>
-              </a:spcAft>
-              <a:buNone/>
-            </a:pPr>
-            <a:r>
-              <a:rPr lang="en-US" sz="1500" b="0">
-                <a:solidFill>
-                  <a:srgbClr val="202B33"/>
-                </a:solidFill>
-                <a:latin typeface="Arial"/>
-                <a:ea typeface="Arial"/>
-                <a:cs typeface="Arial"/>
-              </a:rPr>
-              <a:t xml:space="preserve">when two parties make investments that only</a:t>
-            </a:r>
-            <a:endParaRPr lang="en-US" sz="1500"/>
-          </a:p>
-          <a:p>
-            <a:pPr marL="0" indent="0">
-              <a:lnSpc>
-                <a:spcPts val="1950"/>
-              </a:lnSpc>
-              <a:spcAft>
-                <a:spcPts val="0"/>
-              </a:spcAft>
-              <a:buNone/>
-            </a:pPr>
-            <a:r>
-              <a:rPr lang="en-US" sz="1500" b="0">
-                <a:solidFill>
-                  <a:srgbClr val="202B33"/>
-                </a:solidFill>
-                <a:latin typeface="Arial"/>
-                <a:ea typeface="Arial"/>
-                <a:cs typeface="Arial"/>
-              </a:rPr>
-              <a:t xml:space="preserve">pay off inside their relationship. He</a:t>
-            </a:r>
-            <a:endParaRPr lang="en-US" sz="1500"/>
-          </a:p>
-          <a:p>
-            <a:pPr marL="0" indent="0">
-              <a:lnSpc>
-                <a:spcPts val="1950"/>
-              </a:lnSpc>
-              <a:spcAft>
-                <a:spcPts val="0"/>
-              </a:spcAft>
-              <a:buNone/>
-            </a:pPr>
-            <a:r>
-              <a:rPr lang="en-US" sz="1500" b="0">
-                <a:solidFill>
-                  <a:srgbClr val="202B33"/>
-                </a:solidFill>
-                <a:latin typeface="Arial"/>
-                <a:ea typeface="Arial"/>
-                <a:cs typeface="Arial"/>
-              </a:rPr>
-              <a:t xml:space="preserve">called it asset specificity, and the</a:t>
-            </a:r>
-            <a:endParaRPr lang="en-US" sz="1500"/>
-          </a:p>
-          <a:p>
-            <a:pPr marL="0" indent="0">
-              <a:lnSpc>
-                <a:spcPts val="1950"/>
-              </a:lnSpc>
-              <a:spcAft>
-                <a:spcPts val="0"/>
-              </a:spcAft>
-              <a:buNone/>
-            </a:pPr>
-            <a:r>
-              <a:rPr lang="en-US" sz="1500" b="0">
-                <a:solidFill>
-                  <a:srgbClr val="202B33"/>
-                </a:solidFill>
-                <a:latin typeface="Arial"/>
-                <a:ea typeface="Arial"/>
-                <a:cs typeface="Arial"/>
-              </a:rPr>
-              <a:t xml:space="preserve">trouble it produces is called hold-up.</a:t>
+              <a:t xml:space="preserve">Back to the electricity. Use the cheap</a:t>
+            </a:r>
+            <a:endParaRPr lang="en-US" sz="1500"/>
+          </a:p>
+          <a:p>
+            <a:pPr marL="0" indent="0">
+              <a:lnSpc>
+                <a:spcPts val="1950"/>
+              </a:lnSpc>
+              <a:spcAft>
+                <a:spcPts val="0"/>
+              </a:spcAft>
+              <a:buNone/>
+            </a:pPr>
+            <a:r>
+              <a:rPr lang="en-US" sz="1500" b="0">
+                <a:solidFill>
+                  <a:srgbClr val="202B33"/>
+                </a:solidFill>
+                <a:latin typeface="Arial"/>
+                <a:ea typeface="Arial"/>
+                <a:cs typeface="Arial"/>
+              </a:rPr>
+              <a:t xml:space="preserve">input. It is genuinely great and I am not</a:t>
+            </a:r>
+            <a:endParaRPr lang="en-US" sz="1500"/>
+          </a:p>
+          <a:p>
+            <a:pPr marL="0" indent="0">
+              <a:lnSpc>
+                <a:spcPts val="1950"/>
+              </a:lnSpc>
+              <a:spcAft>
+                <a:spcPts val="0"/>
+              </a:spcAft>
+              <a:buNone/>
+            </a:pPr>
+            <a:r>
+              <a:rPr lang="en-US" sz="1500" b="0">
+                <a:solidFill>
+                  <a:srgbClr val="202B33"/>
+                </a:solidFill>
+                <a:latin typeface="Arial"/>
+                <a:ea typeface="Arial"/>
+                <a:cs typeface="Arial"/>
+              </a:rPr>
+              <a:t xml:space="preserve">asking anyone to be miserable about it.</a:t>
+            </a:r>
+            <a:endParaRPr lang="en-US" sz="1500"/>
+          </a:p>
+          <a:p>
+            <a:pPr marL="0" indent="0">
+              <a:lnSpc>
+                <a:spcPts val="1950"/>
+              </a:lnSpc>
+              <a:spcAft>
+                <a:spcPts val="0"/>
+              </a:spcAft>
+              <a:buNone/>
+            </a:pPr>
+            <a:r>
+              <a:rPr lang="en-US" sz="1500" b="0">
+                <a:solidFill>
+                  <a:srgbClr val="202B33"/>
+                </a:solidFill>
+                <a:latin typeface="Arial"/>
+                <a:ea typeface="Arial"/>
+                <a:cs typeface="Arial"/>
+              </a:rPr>
+              <a:t xml:space="preserve">Just understand what it encouraged you to</a:t>
+            </a:r>
+            <a:endParaRPr lang="en-US" sz="1500"/>
+          </a:p>
+          <a:p>
+            <a:pPr marL="0" indent="0">
+              <a:lnSpc>
+                <a:spcPts val="1950"/>
+              </a:lnSpc>
+              <a:spcAft>
+                <a:spcPts val="0"/>
+              </a:spcAft>
+              <a:buNone/>
+            </a:pPr>
+            <a:r>
+              <a:rPr lang="en-US" sz="1500" b="0">
+                <a:solidFill>
+                  <a:srgbClr val="202B33"/>
+                </a:solidFill>
+                <a:latin typeface="Arial"/>
+                <a:ea typeface="Arial"/>
+                <a:cs typeface="Arial"/>
+              </a:rPr>
+              <a:t xml:space="preserve">build, and keep the expensive decisions</a:t>
+            </a:r>
+            <a:endParaRPr lang="en-US" sz="1500"/>
+          </a:p>
+          <a:p>
+            <a:pPr marL="0" indent="0">
+              <a:lnSpc>
+                <a:spcPts val="1950"/>
+              </a:lnSpc>
+              <a:spcAft>
+                <a:spcPts val="0"/>
+              </a:spcAft>
+              <a:buNone/>
+            </a:pPr>
+            <a:r>
+              <a:rPr lang="en-US" sz="1500" b="0">
+                <a:solidFill>
+                  <a:srgbClr val="202B33"/>
+                </a:solidFill>
+                <a:latin typeface="Arial"/>
+                <a:ea typeface="Arial"/>
+                <a:cs typeface="Arial"/>
+              </a:rPr>
+              <a:t xml:space="preserve">reversible while you find out.</a:t>
             </a:r>
             <a:endParaRPr lang="en-US" sz="1500"/>
           </a:p>
@@ -12826,7 +10867,7 @@
                 <a:ea typeface="Arial"/>
                 <a:cs typeface="Arial"/>
               </a:rPr>
-              <a:t xml:space="preserve">The shape is always the same. You make an</a:t>
+              <a:t xml:space="preserve">There are your eight words. Externality,</a:t>
             </a:r>
             <a:endParaRPr lang="en-US" sz="1500"/>
           </a:p>
@@ -12875,168 +10916,283 @@
                 <a:ea typeface="Arial"/>
                 <a:cs typeface="Arial"/>
               </a:rPr>
-              <a:t xml:space="preserve">investment that is worth a great deal here</a:t>
-            </a:r>
-            <a:endParaRPr lang="en-US" sz="1500"/>
-          </a:p>
-          <a:p>
-            <a:pPr marL="0" indent="0">
-              <a:lnSpc>
-                <a:spcPts val="1950"/>
-              </a:lnSpc>
-              <a:spcAft>
-                <a:spcPts val="0"/>
-              </a:spcAft>
-              <a:buNone/>
-            </a:pPr>
-            <a:r>
-              <a:rPr lang="en-US" sz="1500" b="0">
-                <a:solidFill>
-                  <a:srgbClr val="202B33"/>
-                </a:solidFill>
-                <a:latin typeface="Arial"/>
-                <a:ea typeface="Arial"/>
-                <a:cs typeface="Arial"/>
-              </a:rPr>
-              <a:t xml:space="preserve">and very little anywhere else. That</a:t>
-            </a:r>
-            <a:endParaRPr lang="en-US" sz="1500"/>
-          </a:p>
-          <a:p>
-            <a:pPr marL="0" indent="0">
-              <a:lnSpc>
-                <a:spcPts val="1950"/>
-              </a:lnSpc>
-              <a:spcAft>
-                <a:spcPts val="0"/>
-              </a:spcAft>
-              <a:buNone/>
-            </a:pPr>
-            <a:r>
-              <a:rPr lang="en-US" sz="1500" b="0">
-                <a:solidFill>
-                  <a:srgbClr val="202B33"/>
-                </a:solidFill>
-                <a:latin typeface="Arial"/>
-                <a:ea typeface="Arial"/>
-                <a:cs typeface="Arial"/>
-              </a:rPr>
-              <a:t xml:space="preserve">surplus, the part that exists only because</a:t>
-            </a:r>
-            <a:endParaRPr lang="en-US" sz="1500"/>
-          </a:p>
-          <a:p>
-            <a:pPr marL="0" indent="0">
-              <a:lnSpc>
-                <a:spcPts val="1950"/>
-              </a:lnSpc>
-              <a:spcAft>
-                <a:spcPts val="0"/>
-              </a:spcAft>
-              <a:buNone/>
-            </a:pPr>
-            <a:r>
-              <a:rPr lang="en-US" sz="1500" b="0">
-                <a:solidFill>
-                  <a:srgbClr val="202B33"/>
-                </a:solidFill>
-                <a:latin typeface="Arial"/>
-                <a:ea typeface="Arial"/>
-                <a:cs typeface="Arial"/>
-              </a:rPr>
-              <a:t xml:space="preserve">you are locked in, is a prize, and at</a:t>
-            </a:r>
-            <a:endParaRPr lang="en-US" sz="1500"/>
-          </a:p>
-          <a:p>
-            <a:pPr marL="0" indent="0">
-              <a:lnSpc>
-                <a:spcPts val="1950"/>
-              </a:lnSpc>
-              <a:spcAft>
-                <a:spcPts val="0"/>
-              </a:spcAft>
-              <a:buNone/>
-            </a:pPr>
-            <a:r>
-              <a:rPr lang="en-US" sz="1500" b="0">
-                <a:solidFill>
-                  <a:srgbClr val="202B33"/>
-                </a:solidFill>
-                <a:latin typeface="Arial"/>
-                <a:ea typeface="Arial"/>
-                <a:cs typeface="Arial"/>
-              </a:rPr>
-              <a:t xml:space="preserve">renewal your counterparty can reach for it.</a:t>
-            </a:r>
-            <a:endParaRPr lang="en-US" sz="1500"/>
-          </a:p>
-          <a:p>
-            <a:pPr marL="0" indent="0">
-              <a:lnSpc>
-                <a:spcPts val="1950"/>
-              </a:lnSpc>
-              <a:spcAft>
-                <a:spcPts val="0"/>
-              </a:spcAft>
-              <a:buNone/>
-            </a:pPr>
-            <a:r>
-              <a:rPr lang="en-US" sz="1500" b="0">
-                <a:solidFill>
-                  <a:srgbClr val="202B33"/>
-                </a:solidFill>
-                <a:latin typeface="Arial"/>
-                <a:ea typeface="Arial"/>
-                <a:cs typeface="Arial"/>
-              </a:rPr>
-              <a:t xml:space="preserve">Nobody has to be a villain. It is simply</a:t>
-            </a:r>
-            <a:endParaRPr lang="en-US" sz="1500"/>
-          </a:p>
-          <a:p>
-            <a:pPr marL="0" indent="0">
-              <a:lnSpc>
-                <a:spcPts val="1950"/>
-              </a:lnSpc>
-              <a:spcAft>
-                <a:spcPts val="0"/>
-              </a:spcAft>
-              <a:buNone/>
-            </a:pPr>
-            <a:r>
-              <a:rPr lang="en-US" sz="1500" b="0">
-                <a:solidFill>
-                  <a:srgbClr val="202B33"/>
-                </a:solidFill>
-                <a:latin typeface="Arial"/>
-                <a:ea typeface="Arial"/>
-                <a:cs typeface="Arial"/>
-              </a:rPr>
-              <a:t xml:space="preserve">what the structure permits, and rational</a:t>
-            </a:r>
-            <a:endParaRPr lang="en-US" sz="1500"/>
-          </a:p>
-          <a:p>
-            <a:pPr marL="0" indent="0">
-              <a:lnSpc>
-                <a:spcPts val="1950"/>
-              </a:lnSpc>
-              <a:spcAft>
-                <a:spcPts val="0"/>
-              </a:spcAft>
-              <a:buNone/>
-            </a:pPr>
-            <a:r>
-              <a:rPr lang="en-US" sz="1500" b="0">
-                <a:solidFill>
-                  <a:srgbClr val="202B33"/>
-                </a:solidFill>
-                <a:latin typeface="Arial"/>
-                <a:ea typeface="Arial"/>
-                <a:cs typeface="Arial"/>
-              </a:rPr>
-              <a:t xml:space="preserve">parties do it.</a:t>
+              <a:t xml:space="preserve">because the cost moved rather than</a:t>
+            </a:r>
+            <a:endParaRPr lang="en-US" sz="1500"/>
+          </a:p>
+          <a:p>
+            <a:pPr marL="0" indent="0">
+              <a:lnSpc>
+                <a:spcPts val="1950"/>
+              </a:lnSpc>
+              <a:spcAft>
+                <a:spcPts val="0"/>
+              </a:spcAft>
+              <a:buNone/>
+            </a:pPr>
+            <a:r>
+              <a:rPr lang="en-US" sz="1500" b="0">
+                <a:solidFill>
+                  <a:srgbClr val="202B33"/>
+                </a:solidFill>
+                <a:latin typeface="Arial"/>
+                <a:ea typeface="Arial"/>
+                <a:cs typeface="Arial"/>
+              </a:rPr>
+              <a:t xml:space="preserve">vanished. Induced demand and Jevons,</a:t>
+            </a:r>
+            <a:endParaRPr lang="en-US" sz="1500"/>
+          </a:p>
+          <a:p>
+            <a:pPr marL="0" indent="0">
+              <a:lnSpc>
+                <a:spcPts val="1950"/>
+              </a:lnSpc>
+              <a:spcAft>
+                <a:spcPts val="0"/>
+              </a:spcAft>
+              <a:buNone/>
+            </a:pPr>
+            <a:r>
+              <a:rPr lang="en-US" sz="1500" b="0">
+                <a:solidFill>
+                  <a:srgbClr val="202B33"/>
+                </a:solidFill>
+                <a:latin typeface="Arial"/>
+                <a:ea typeface="Arial"/>
+                <a:cs typeface="Arial"/>
+              </a:rPr>
+              <a:t xml:space="preserve">because cheaper made you use more, not</a:t>
+            </a:r>
+            <a:endParaRPr lang="en-US" sz="1500"/>
+          </a:p>
+          <a:p>
+            <a:pPr marL="0" indent="0">
+              <a:lnSpc>
+                <a:spcPts val="1950"/>
+              </a:lnSpc>
+              <a:spcAft>
+                <a:spcPts val="0"/>
+              </a:spcAft>
+              <a:buNone/>
+            </a:pPr>
+            <a:r>
+              <a:rPr lang="en-US" sz="1500" b="0">
+                <a:solidFill>
+                  <a:srgbClr val="202B33"/>
+                </a:solidFill>
+                <a:latin typeface="Arial"/>
+                <a:ea typeface="Arial"/>
+                <a:cs typeface="Arial"/>
+              </a:rPr>
+              <a:t xml:space="preserve">less. Path dependence, because the lots</a:t>
+            </a:r>
+            <a:endParaRPr lang="en-US" sz="1500"/>
+          </a:p>
+          <a:p>
+            <a:pPr marL="0" indent="0">
+              <a:lnSpc>
+                <a:spcPts val="1950"/>
+              </a:lnSpc>
+              <a:spcAft>
+                <a:spcPts val="0"/>
+              </a:spcAft>
+              <a:buNone/>
+            </a:pPr>
+            <a:r>
+              <a:rPr lang="en-US" sz="1500" b="0">
+                <a:solidFill>
+                  <a:srgbClr val="202B33"/>
+                </a:solidFill>
+                <a:latin typeface="Arial"/>
+                <a:ea typeface="Arial"/>
+                <a:cs typeface="Arial"/>
+              </a:rPr>
+              <a:t xml:space="preserve">stay built. Moral hazard, because whoever</a:t>
+            </a:r>
+            <a:endParaRPr lang="en-US" sz="1500"/>
+          </a:p>
+          <a:p>
+            <a:pPr marL="0" indent="0">
+              <a:lnSpc>
+                <a:spcPts val="1950"/>
+              </a:lnSpc>
+              <a:spcAft>
+                <a:spcPts val="0"/>
+              </a:spcAft>
+              <a:buNone/>
+            </a:pPr>
+            <a:r>
+              <a:rPr lang="en-US" sz="1500" b="0">
+                <a:solidFill>
+                  <a:srgbClr val="202B33"/>
+                </a:solidFill>
+                <a:latin typeface="Arial"/>
+                <a:ea typeface="Arial"/>
+                <a:cs typeface="Arial"/>
+              </a:rPr>
+              <a:t xml:space="preserve">chooses is not whoever pays. Credible</a:t>
+            </a:r>
+            <a:endParaRPr lang="en-US" sz="1500"/>
+          </a:p>
+          <a:p>
+            <a:pPr marL="0" indent="0">
+              <a:lnSpc>
+                <a:spcPts val="1950"/>
+              </a:lnSpc>
+              <a:spcAft>
+                <a:spcPts val="0"/>
+              </a:spcAft>
+              <a:buNone/>
+            </a:pPr>
+            <a:r>
+              <a:rPr lang="en-US" sz="1500" b="0">
+                <a:solidFill>
+                  <a:srgbClr val="202B33"/>
+                </a:solidFill>
+                <a:latin typeface="Arial"/>
+                <a:ea typeface="Arial"/>
+                <a:cs typeface="Arial"/>
+              </a:rPr>
+              <a:t xml:space="preserve">commitment, because those contracts are</a:t>
+            </a:r>
+            <a:endParaRPr lang="en-US" sz="1500"/>
+          </a:p>
+          <a:p>
+            <a:pPr marL="0" indent="0">
+              <a:lnSpc>
+                <a:spcPts val="1950"/>
+              </a:lnSpc>
+              <a:spcAft>
+                <a:spcPts val="0"/>
+              </a:spcAft>
+              <a:buNone/>
+            </a:pPr>
+            <a:r>
+              <a:rPr lang="en-US" sz="1500" b="0">
+                <a:solidFill>
+                  <a:srgbClr val="202B33"/>
+                </a:solidFill>
+                <a:latin typeface="Arial"/>
+                <a:ea typeface="Arial"/>
+                <a:cs typeface="Arial"/>
+              </a:rPr>
+              <a:t xml:space="preserve">moves in a game and not disclosures about</a:t>
+            </a:r>
+            <a:endParaRPr lang="en-US" sz="1500"/>
+          </a:p>
+          <a:p>
+            <a:pPr marL="0" indent="0">
+              <a:lnSpc>
+                <a:spcPts val="1950"/>
+              </a:lnSpc>
+              <a:spcAft>
+                <a:spcPts val="0"/>
+              </a:spcAft>
+              <a:buNone/>
+            </a:pPr>
+            <a:r>
+              <a:rPr lang="en-US" sz="1500" b="0">
+                <a:solidFill>
+                  <a:srgbClr val="202B33"/>
+                </a:solidFill>
+                <a:latin typeface="Arial"/>
+                <a:ea typeface="Arial"/>
+                <a:cs typeface="Arial"/>
+              </a:rPr>
+              <a:t xml:space="preserve">it. Asset specificity, because your</a:t>
+            </a:r>
+            <a:endParaRPr lang="en-US" sz="1500"/>
+          </a:p>
+          <a:p>
+            <a:pPr marL="0" indent="0">
+              <a:lnSpc>
+                <a:spcPts val="1950"/>
+              </a:lnSpc>
+              <a:spcAft>
+                <a:spcPts val="0"/>
+              </a:spcAft>
+              <a:buNone/>
+            </a:pPr>
+            <a:r>
+              <a:rPr lang="en-US" sz="1500" b="0">
+                <a:solidFill>
+                  <a:srgbClr val="202B33"/>
+                </a:solidFill>
+                <a:latin typeface="Arial"/>
+                <a:ea typeface="Arial"/>
+                <a:cs typeface="Arial"/>
+              </a:rPr>
+              <a:t xml:space="preserve">architecture is worth more here than</a:t>
+            </a:r>
+            <a:endParaRPr lang="en-US" sz="1500"/>
+          </a:p>
+          <a:p>
+            <a:pPr marL="0" indent="0">
+              <a:lnSpc>
+                <a:spcPts val="1950"/>
+              </a:lnSpc>
+              <a:spcAft>
+                <a:spcPts val="0"/>
+              </a:spcAft>
+              <a:buNone/>
+            </a:pPr>
+            <a:r>
+              <a:rPr lang="en-US" sz="1500" b="0">
+                <a:solidFill>
+                  <a:srgbClr val="202B33"/>
+                </a:solidFill>
+                <a:latin typeface="Arial"/>
+                <a:ea typeface="Arial"/>
+                <a:cs typeface="Arial"/>
+              </a:rPr>
+              <a:t xml:space="preserve">anywhere else. And real option, because</a:t>
+            </a:r>
+            <a:endParaRPr lang="en-US" sz="1500"/>
+          </a:p>
+          <a:p>
+            <a:pPr marL="0" indent="0">
+              <a:lnSpc>
+                <a:spcPts val="1950"/>
+              </a:lnSpc>
+              <a:spcAft>
+                <a:spcPts val="0"/>
+              </a:spcAft>
+              <a:buNone/>
+            </a:pPr>
+            <a:r>
+              <a:rPr lang="en-US" sz="1500" b="0">
+                <a:solidFill>
+                  <a:srgbClr val="202B33"/>
+                </a:solidFill>
+                <a:latin typeface="Arial"/>
+                <a:ea typeface="Arial"/>
+                <a:cs typeface="Arial"/>
+              </a:rPr>
+              <a:t xml:space="preserve">reversibility is something you buy, not</a:t>
+            </a:r>
+            <a:endParaRPr lang="en-US" sz="1500"/>
+          </a:p>
+          <a:p>
+            <a:pPr marL="0" indent="0">
+              <a:lnSpc>
+                <a:spcPts val="1950"/>
+              </a:lnSpc>
+              <a:spcAft>
+                <a:spcPts val="0"/>
+              </a:spcAft>
+              <a:buNone/>
+            </a:pPr>
+            <a:r>
+              <a:rPr lang="en-US" sz="1500" b="0">
+                <a:solidFill>
+                  <a:srgbClr val="202B33"/>
+                </a:solidFill>
+                <a:latin typeface="Arial"/>
+                <a:ea typeface="Arial"/>
+                <a:cs typeface="Arial"/>
+              </a:rPr>
+              <a:t xml:space="preserve">something you feel.</a:t>
             </a:r>
             <a:endParaRPr lang="en-US" sz="1500"/>
           </a:p>
@@ -13082,168 +11238,30 @@
                 <a:ea typeface="Arial"/>
                 <a:cs typeface="Arial"/>
               </a:rPr>
-              <a:t xml:space="preserve">So stop thinking of this as shopping, where</a:t>
-            </a:r>
-            <a:endParaRPr lang="en-US" sz="1500"/>
-          </a:p>
-          <a:p>
-            <a:pPr marL="0" indent="0">
-              <a:lnSpc>
-                <a:spcPts val="1950"/>
-              </a:lnSpc>
-              <a:spcAft>
-                <a:spcPts val="0"/>
-              </a:spcAft>
-              <a:buNone/>
-            </a:pPr>
-            <a:r>
-              <a:rPr lang="en-US" sz="1500" b="0">
-                <a:solidFill>
-                  <a:srgbClr val="202B33"/>
-                </a:solidFill>
-                <a:latin typeface="Arial"/>
-                <a:ea typeface="Arial"/>
-                <a:cs typeface="Arial"/>
-              </a:rPr>
-              <a:t xml:space="preserve">the customer holds the power because they</a:t>
-            </a:r>
-            <a:endParaRPr lang="en-US" sz="1500"/>
-          </a:p>
-          <a:p>
-            <a:pPr marL="0" indent="0">
-              <a:lnSpc>
-                <a:spcPts val="1950"/>
-              </a:lnSpc>
-              <a:spcAft>
-                <a:spcPts val="0"/>
-              </a:spcAft>
-              <a:buNone/>
-            </a:pPr>
-            <a:r>
-              <a:rPr lang="en-US" sz="1500" b="0">
-                <a:solidFill>
-                  <a:srgbClr val="202B33"/>
-                </a:solidFill>
-                <a:latin typeface="Arial"/>
-                <a:ea typeface="Arial"/>
-                <a:cs typeface="Arial"/>
-              </a:rPr>
-              <a:t xml:space="preserve">can leave. You are contracting, with a much</a:t>
-            </a:r>
-            <a:endParaRPr lang="en-US" sz="1500"/>
-          </a:p>
-          <a:p>
-            <a:pPr marL="0" indent="0">
-              <a:lnSpc>
-                <a:spcPts val="1950"/>
-              </a:lnSpc>
-              <a:spcAft>
-                <a:spcPts val="0"/>
-              </a:spcAft>
-              <a:buNone/>
-            </a:pPr>
-            <a:r>
-              <a:rPr lang="en-US" sz="1500" b="0">
-                <a:solidFill>
-                  <a:srgbClr val="202B33"/>
-                </a:solidFill>
-                <a:latin typeface="Arial"/>
-                <a:ea typeface="Arial"/>
-                <a:cs typeface="Arial"/>
-              </a:rPr>
-              <a:t xml:space="preserve">better capitalized counterparty, and your</a:t>
-            </a:r>
-            <a:endParaRPr lang="en-US" sz="1500"/>
-          </a:p>
-          <a:p>
-            <a:pPr marL="0" indent="0">
-              <a:lnSpc>
-                <a:spcPts val="1950"/>
-              </a:lnSpc>
-              <a:spcAft>
-                <a:spcPts val="0"/>
-              </a:spcAft>
-              <a:buNone/>
-            </a:pPr>
-            <a:r>
-              <a:rPr lang="en-US" sz="1500" b="0">
-                <a:solidFill>
-                  <a:srgbClr val="202B33"/>
-                </a:solidFill>
-                <a:latin typeface="Arial"/>
-                <a:ea typeface="Arial"/>
-                <a:cs typeface="Arial"/>
-              </a:rPr>
-              <a:t xml:space="preserve">architecture is the collateral. That</a:t>
-            </a:r>
-            <a:endParaRPr lang="en-US" sz="1500"/>
-          </a:p>
-          <a:p>
-            <a:pPr marL="0" indent="0">
-              <a:lnSpc>
-                <a:spcPts val="1950"/>
-              </a:lnSpc>
-              <a:spcAft>
-                <a:spcPts val="0"/>
-              </a:spcAft>
-              <a:buNone/>
-            </a:pPr>
-            <a:r>
-              <a:rPr lang="en-US" sz="1500" b="0">
-                <a:solidFill>
-                  <a:srgbClr val="202B33"/>
-                </a:solidFill>
-                <a:latin typeface="Arial"/>
-                <a:ea typeface="Arial"/>
-                <a:cs typeface="Arial"/>
-              </a:rPr>
-              <a:t xml:space="preserve">reframe is the whole talk, and everything</a:t>
-            </a:r>
-            <a:endParaRPr lang="en-US" sz="1500"/>
-          </a:p>
-          <a:p>
-            <a:pPr marL="0" indent="0">
-              <a:lnSpc>
-                <a:spcPts val="1950"/>
-              </a:lnSpc>
-              <a:spcAft>
-                <a:spcPts val="0"/>
-              </a:spcAft>
-              <a:buNone/>
-            </a:pPr>
-            <a:r>
-              <a:rPr lang="en-US" sz="1500" b="0">
-                <a:solidFill>
-                  <a:srgbClr val="202B33"/>
-                </a:solidFill>
-                <a:latin typeface="Arial"/>
-                <a:ea typeface="Arial"/>
-                <a:cs typeface="Arial"/>
-              </a:rPr>
-              <a:t xml:space="preserve">after this is just a way of reducing</a:t>
-            </a:r>
-            <a:endParaRPr lang="en-US" sz="1500"/>
-          </a:p>
-          <a:p>
-            <a:pPr marL="0" indent="0">
-              <a:lnSpc>
-                <a:spcPts val="1950"/>
-              </a:lnSpc>
-              <a:spcAft>
-                <a:spcPts val="0"/>
-              </a:spcAft>
-              <a:buNone/>
-            </a:pPr>
-            <a:r>
-              <a:rPr lang="en-US" sz="1500" b="0">
-                <a:solidFill>
-                  <a:srgbClr val="202B33"/>
-                </a:solidFill>
-                <a:latin typeface="Arial"/>
-                <a:ea typeface="Arial"/>
-                <a:cs typeface="Arial"/>
-              </a:rPr>
-              <a:t xml:space="preserve">specificity or pricing the exposure.</a:t>
+              <a:t xml:space="preserve">Cheap intelligence changes incentives</a:t>
+            </a:r>
+            <a:endParaRPr lang="en-US" sz="1500"/>
+          </a:p>
+          <a:p>
+            <a:pPr marL="0" indent="0">
+              <a:lnSpc>
+                <a:spcPts val="1950"/>
+              </a:lnSpc>
+              <a:spcAft>
+                <a:spcPts val="0"/>
+              </a:spcAft>
+              <a:buNone/>
+            </a:pPr>
+            <a:r>
+              <a:rPr lang="en-US" sz="1500" b="0">
+                <a:solidFill>
+                  <a:srgbClr val="202B33"/>
+                </a:solidFill>
+                <a:latin typeface="Arial"/>
+                <a:ea typeface="Arial"/>
+                <a:cs typeface="Arial"/>
+              </a:rPr>
+              <a:t xml:space="preserve">before it changes organizations.</a:t>
             </a:r>
             <a:endParaRPr lang="en-US" sz="1500"/>
           </a:p>
@@ -13423,7 +11441,7 @@
                 <a:ea typeface="Arial"/>
                 <a:cs typeface="Arial"/>
               </a:rPr>
-              <a:t xml:space="preserve">08 / 08    SOURCE SLIDE 15</a:t>
+              <a:t xml:space="preserve">SOURCE REFERENCES</a:t>
             </a:r>
             <a:endParaRPr lang="en-US" sz="1050"/>
           </a:p>
@@ -13472,7 +11490,7 @@
                 <a:ea typeface="Arial"/>
                 <a:cs typeface="Arial"/>
               </a:rPr>
-              <a:t xml:space="preserve">Cheap intelligence changes incentives first</a:t>
+              <a:t xml:space="preserve">References</a:t>
             </a:r>
             <a:endParaRPr lang="en-US" sz="2550"/>
           </a:p>
@@ -13521,30 +11539,76 @@
                 <a:ea typeface="Arial"/>
                 <a:cs typeface="Arial"/>
               </a:rPr>
-              <a:t xml:space="preserve">Externality · Induced demand · Jevons</a:t>
-            </a:r>
-            <a:endParaRPr lang="en-US" sz="1500"/>
-          </a:p>
-          <a:p>
-            <a:pPr marL="0" indent="0">
-              <a:lnSpc>
-                <a:spcPts val="1950"/>
-              </a:lnSpc>
-              <a:spcAft>
-                <a:spcPts val="0"/>
-              </a:spcAft>
-              <a:buNone/>
-            </a:pPr>
-            <a:r>
-              <a:rPr lang="en-US" sz="1500" b="0">
-                <a:solidFill>
-                  <a:srgbClr val="202B33"/>
-                </a:solidFill>
-                <a:latin typeface="Arial"/>
-                <a:ea typeface="Arial"/>
-                <a:cs typeface="Arial"/>
-              </a:rPr>
-              <a:t xml:space="preserve">paradox · Path dependence</a:t>
+              <a:t xml:space="preserve">Brooke Group Ltd. v. Brown &amp; Williamson</a:t>
+            </a:r>
+            <a:endParaRPr lang="en-US" sz="1500"/>
+          </a:p>
+          <a:p>
+            <a:pPr marL="0" indent="0">
+              <a:lnSpc>
+                <a:spcPts val="1950"/>
+              </a:lnSpc>
+              <a:spcAft>
+                <a:spcPts val="0"/>
+              </a:spcAft>
+              <a:buNone/>
+            </a:pPr>
+            <a:r>
+              <a:rPr lang="en-US" sz="1500" b="0">
+                <a:solidFill>
+                  <a:srgbClr val="202B33"/>
+                </a:solidFill>
+                <a:latin typeface="Arial"/>
+                <a:ea typeface="Arial"/>
+                <a:cs typeface="Arial"/>
+              </a:rPr>
+              <a:t xml:space="preserve">Tobacco Corp., 509 U.S. 209 (1993), on the</a:t>
+            </a:r>
+            <a:endParaRPr lang="en-US" sz="1500"/>
+          </a:p>
+          <a:p>
+            <a:pPr marL="0" indent="0">
+              <a:lnSpc>
+                <a:spcPts val="1950"/>
+              </a:lnSpc>
+              <a:spcAft>
+                <a:spcPts val="0"/>
+              </a:spcAft>
+              <a:buNone/>
+            </a:pPr>
+            <a:r>
+              <a:rPr lang="en-US" sz="1500" b="0">
+                <a:solidFill>
+                  <a:srgbClr val="202B33"/>
+                </a:solidFill>
+                <a:latin typeface="Arial"/>
+                <a:ea typeface="Arial"/>
+                <a:cs typeface="Arial"/>
+              </a:rPr>
+              <a:t xml:space="preserve">recoupment requirement in predatory-pricing</a:t>
+            </a:r>
+            <a:endParaRPr lang="en-US" sz="1500"/>
+          </a:p>
+          <a:p>
+            <a:pPr marL="0" indent="0">
+              <a:lnSpc>
+                <a:spcPts val="1950"/>
+              </a:lnSpc>
+              <a:spcAft>
+                <a:spcPts val="0"/>
+              </a:spcAft>
+              <a:buNone/>
+            </a:pPr>
+            <a:r>
+              <a:rPr lang="en-US" sz="1500" b="0">
+                <a:solidFill>
+                  <a:srgbClr val="202B33"/>
+                </a:solidFill>
+                <a:latin typeface="Arial"/>
+                <a:ea typeface="Arial"/>
+                <a:cs typeface="Arial"/>
+              </a:rPr>
+              <a:t xml:space="preserve">claims.</a:t>
             </a:r>
             <a:endParaRPr lang="en-US" sz="1500"/>
           </a:p>
@@ -13590,30 +11654,76 @@
                 <a:ea typeface="Arial"/>
                 <a:cs typeface="Arial"/>
               </a:rPr>
-              <a:t xml:space="preserve">Moral hazard · Credible commitment · Asset</a:t>
-            </a:r>
-            <a:endParaRPr lang="en-US" sz="1500"/>
-          </a:p>
-          <a:p>
-            <a:pPr marL="0" indent="0">
-              <a:lnSpc>
-                <a:spcPts val="1950"/>
-              </a:lnSpc>
-              <a:spcAft>
-                <a:spcPts val="0"/>
-              </a:spcAft>
-              <a:buNone/>
-            </a:pPr>
-            <a:r>
-              <a:rPr lang="en-US" sz="1500" b="0">
-                <a:solidFill>
-                  <a:srgbClr val="202B33"/>
-                </a:solidFill>
-                <a:latin typeface="Arial"/>
-                <a:ea typeface="Arial"/>
-                <a:cs typeface="Arial"/>
-              </a:rPr>
-              <a:t xml:space="preserve">specificity · Real option</a:t>
+              <a:t xml:space="preserve">Rochet and Tirole (2003), Platform</a:t>
+            </a:r>
+            <a:endParaRPr lang="en-US" sz="1500"/>
+          </a:p>
+          <a:p>
+            <a:pPr marL="0" indent="0">
+              <a:lnSpc>
+                <a:spcPts val="1950"/>
+              </a:lnSpc>
+              <a:spcAft>
+                <a:spcPts val="0"/>
+              </a:spcAft>
+              <a:buNone/>
+            </a:pPr>
+            <a:r>
+              <a:rPr lang="en-US" sz="1500" b="0">
+                <a:solidFill>
+                  <a:srgbClr val="202B33"/>
+                </a:solidFill>
+                <a:latin typeface="Arial"/>
+                <a:ea typeface="Arial"/>
+                <a:cs typeface="Arial"/>
+              </a:rPr>
+              <a:t xml:space="preserve">Competition in Two-Sided Markets, Journal</a:t>
+            </a:r>
+            <a:endParaRPr lang="en-US" sz="1500"/>
+          </a:p>
+          <a:p>
+            <a:pPr marL="0" indent="0">
+              <a:lnSpc>
+                <a:spcPts val="1950"/>
+              </a:lnSpc>
+              <a:spcAft>
+                <a:spcPts val="0"/>
+              </a:spcAft>
+              <a:buNone/>
+            </a:pPr>
+            <a:r>
+              <a:rPr lang="en-US" sz="1500" b="0">
+                <a:solidFill>
+                  <a:srgbClr val="202B33"/>
+                </a:solidFill>
+                <a:latin typeface="Arial"/>
+                <a:ea typeface="Arial"/>
+                <a:cs typeface="Arial"/>
+              </a:rPr>
+              <a:t xml:space="preserve">of the European Economic Association, on</a:t>
+            </a:r>
+            <a:endParaRPr lang="en-US" sz="1500"/>
+          </a:p>
+          <a:p>
+            <a:pPr marL="0" indent="0">
+              <a:lnSpc>
+                <a:spcPts val="1950"/>
+              </a:lnSpc>
+              <a:spcAft>
+                <a:spcPts val="0"/>
+              </a:spcAft>
+              <a:buNone/>
+            </a:pPr>
+            <a:r>
+              <a:rPr lang="en-US" sz="1500" b="0">
+                <a:solidFill>
+                  <a:srgbClr val="202B33"/>
+                </a:solidFill>
+                <a:latin typeface="Arial"/>
+                <a:ea typeface="Arial"/>
+                <a:cs typeface="Arial"/>
+              </a:rPr>
+              <a:t xml:space="preserve">cross-subsidy between sides of a market.</a:t>
             </a:r>
             <a:endParaRPr lang="en-US" sz="1500"/>
           </a:p>
@@ -13659,283 +11769,7 @@
                 <a:ea typeface="Arial"/>
                 <a:cs typeface="Arial"/>
               </a:rPr>
-              <a:t xml:space="preserve">Build for more than one price.</a:t>
-            </a:r>
-            <a:endParaRPr lang="en-US" sz="1500"/>
-          </a:p>
-          <a:p>
-            <a:pPr marL="0" indent="0">
-              <a:lnSpc>
-                <a:spcPts val="1950"/>
-              </a:lnSpc>
-              <a:spcAft>
-                <a:spcPts val="0"/>
-              </a:spcAft>
-              <a:buNone/>
-            </a:pPr>
-            <a:r>
-              <a:rPr lang="en-US" sz="1500" b="0">
-                <a:solidFill>
-                  <a:srgbClr val="202B33"/>
-                </a:solidFill>
-                <a:latin typeface="Arial"/>
-                <a:ea typeface="Arial"/>
-                <a:cs typeface="Arial"/>
-              </a:rPr>
-              <a:t xml:space="preserve"/>
-            </a:r>
-            <a:endParaRPr lang="en-US" sz="1500"/>
-          </a:p>
-          <a:p>
-            <a:pPr marL="0" indent="0">
-              <a:lnSpc>
-                <a:spcPts val="1950"/>
-              </a:lnSpc>
-              <a:spcAft>
-                <a:spcPts val="0"/>
-              </a:spcAft>
-              <a:buNone/>
-            </a:pPr>
-            <a:r>
-              <a:rPr lang="en-US" sz="1500" b="0">
-                <a:solidFill>
-                  <a:srgbClr val="202B33"/>
-                </a:solidFill>
-                <a:latin typeface="Arial"/>
-                <a:ea typeface="Arial"/>
-                <a:cs typeface="Arial"/>
-              </a:rPr>
-              <a:t xml:space="preserve">Back to the electricity. Use the cheap</a:t>
-            </a:r>
-            <a:endParaRPr lang="en-US" sz="1500"/>
-          </a:p>
-          <a:p>
-            <a:pPr marL="0" indent="0">
-              <a:lnSpc>
-                <a:spcPts val="1950"/>
-              </a:lnSpc>
-              <a:spcAft>
-                <a:spcPts val="0"/>
-              </a:spcAft>
-              <a:buNone/>
-            </a:pPr>
-            <a:r>
-              <a:rPr lang="en-US" sz="1500" b="0">
-                <a:solidFill>
-                  <a:srgbClr val="202B33"/>
-                </a:solidFill>
-                <a:latin typeface="Arial"/>
-                <a:ea typeface="Arial"/>
-                <a:cs typeface="Arial"/>
-              </a:rPr>
-              <a:t xml:space="preserve">input. It is genuinely great and I am not</a:t>
-            </a:r>
-            <a:endParaRPr lang="en-US" sz="1500"/>
-          </a:p>
-          <a:p>
-            <a:pPr marL="0" indent="0">
-              <a:lnSpc>
-                <a:spcPts val="1950"/>
-              </a:lnSpc>
-              <a:spcAft>
-                <a:spcPts val="0"/>
-              </a:spcAft>
-              <a:buNone/>
-            </a:pPr>
-            <a:r>
-              <a:rPr lang="en-US" sz="1500" b="0">
-                <a:solidFill>
-                  <a:srgbClr val="202B33"/>
-                </a:solidFill>
-                <a:latin typeface="Arial"/>
-                <a:ea typeface="Arial"/>
-                <a:cs typeface="Arial"/>
-              </a:rPr>
-              <a:t xml:space="preserve">asking anyone to be miserable about it.</a:t>
-            </a:r>
-            <a:endParaRPr lang="en-US" sz="1500"/>
-          </a:p>
-          <a:p>
-            <a:pPr marL="0" indent="0">
-              <a:lnSpc>
-                <a:spcPts val="1950"/>
-              </a:lnSpc>
-              <a:spcAft>
-                <a:spcPts val="0"/>
-              </a:spcAft>
-              <a:buNone/>
-            </a:pPr>
-            <a:r>
-              <a:rPr lang="en-US" sz="1500" b="0">
-                <a:solidFill>
-                  <a:srgbClr val="202B33"/>
-                </a:solidFill>
-                <a:latin typeface="Arial"/>
-                <a:ea typeface="Arial"/>
-                <a:cs typeface="Arial"/>
-              </a:rPr>
-              <a:t xml:space="preserve">Just understand what it encouraged you to</a:t>
-            </a:r>
-            <a:endParaRPr lang="en-US" sz="1500"/>
-          </a:p>
-          <a:p>
-            <a:pPr marL="0" indent="0">
-              <a:lnSpc>
-                <a:spcPts val="1950"/>
-              </a:lnSpc>
-              <a:spcAft>
-                <a:spcPts val="0"/>
-              </a:spcAft>
-              <a:buNone/>
-            </a:pPr>
-            <a:r>
-              <a:rPr lang="en-US" sz="1500" b="0">
-                <a:solidFill>
-                  <a:srgbClr val="202B33"/>
-                </a:solidFill>
-                <a:latin typeface="Arial"/>
-                <a:ea typeface="Arial"/>
-                <a:cs typeface="Arial"/>
-              </a:rPr>
-              <a:t xml:space="preserve">build, and keep the expensive decisions</a:t>
-            </a:r>
-            <a:endParaRPr lang="en-US" sz="1500"/>
-          </a:p>
-          <a:p>
-            <a:pPr marL="0" indent="0">
-              <a:lnSpc>
-                <a:spcPts val="1950"/>
-              </a:lnSpc>
-              <a:spcAft>
-                <a:spcPts val="0"/>
-              </a:spcAft>
-              <a:buNone/>
-            </a:pPr>
-            <a:r>
-              <a:rPr lang="en-US" sz="1500" b="0">
-                <a:solidFill>
-                  <a:srgbClr val="202B33"/>
-                </a:solidFill>
-                <a:latin typeface="Arial"/>
-                <a:ea typeface="Arial"/>
-                <a:cs typeface="Arial"/>
-              </a:rPr>
-              <a:t xml:space="preserve">reversible while you find out.</a:t>
-            </a:r>
-            <a:endParaRPr lang="en-US" sz="1500"/>
-          </a:p>
-          <a:p>
-            <a:pPr marL="0" indent="0">
-              <a:lnSpc>
-                <a:spcPts val="1950"/>
-              </a:lnSpc>
-              <a:spcAft>
-                <a:spcPts val="0"/>
-              </a:spcAft>
-              <a:buNone/>
-            </a:pPr>
-            <a:r>
-              <a:rPr lang="en-US" sz="1500" b="0">
-                <a:solidFill>
-                  <a:srgbClr val="202B33"/>
-                </a:solidFill>
-                <a:latin typeface="Arial"/>
-                <a:ea typeface="Arial"/>
-                <a:cs typeface="Arial"/>
-              </a:rPr>
-              <a:t xml:space="preserve"/>
-            </a:r>
-            <a:endParaRPr lang="en-US" sz="1500"/>
-          </a:p>
-          <a:p>
-            <a:pPr marL="0" indent="0">
-              <a:lnSpc>
-                <a:spcPts val="1950"/>
-              </a:lnSpc>
-              <a:spcAft>
-                <a:spcPts val="0"/>
-              </a:spcAft>
-              <a:buNone/>
-            </a:pPr>
-            <a:r>
-              <a:rPr lang="en-US" sz="1500" b="0">
-                <a:solidFill>
-                  <a:srgbClr val="202B33"/>
-                </a:solidFill>
-                <a:latin typeface="Arial"/>
-                <a:ea typeface="Arial"/>
-                <a:cs typeface="Arial"/>
-              </a:rPr>
-              <a:t xml:space="preserve">There are your eight words. Externality,</a:t>
-            </a:r>
-            <a:endParaRPr lang="en-US" sz="1500"/>
-          </a:p>
-          <a:p>
-            <a:pPr marL="0" indent="0">
-              <a:lnSpc>
-                <a:spcPts val="1950"/>
-              </a:lnSpc>
-              <a:spcAft>
-                <a:spcPts val="0"/>
-              </a:spcAft>
-              <a:buNone/>
-            </a:pPr>
-            <a:r>
-              <a:rPr lang="en-US" sz="1500" b="0">
-                <a:solidFill>
-                  <a:srgbClr val="202B33"/>
-                </a:solidFill>
-                <a:latin typeface="Arial"/>
-                <a:ea typeface="Arial"/>
-                <a:cs typeface="Arial"/>
-              </a:rPr>
-              <a:t xml:space="preserve">because the cost moved rather than</a:t>
-            </a:r>
-            <a:endParaRPr lang="en-US" sz="1500"/>
-          </a:p>
-          <a:p>
-            <a:pPr marL="0" indent="0">
-              <a:lnSpc>
-                <a:spcPts val="1950"/>
-              </a:lnSpc>
-              <a:spcAft>
-                <a:spcPts val="0"/>
-              </a:spcAft>
-              <a:buNone/>
-            </a:pPr>
-            <a:r>
-              <a:rPr lang="en-US" sz="1500" b="0">
-                <a:solidFill>
-                  <a:srgbClr val="202B33"/>
-                </a:solidFill>
-                <a:latin typeface="Arial"/>
-                <a:ea typeface="Arial"/>
-                <a:cs typeface="Arial"/>
-              </a:rPr>
-              <a:t xml:space="preserve">vanished. Induced demand and Jevons,</a:t>
-            </a:r>
-            <a:endParaRPr lang="en-US" sz="1500"/>
-          </a:p>
-          <a:p>
-            <a:pPr marL="0" indent="0">
-              <a:lnSpc>
-                <a:spcPts val="1950"/>
-              </a:lnSpc>
-              <a:spcAft>
-                <a:spcPts val="0"/>
-              </a:spcAft>
-              <a:buNone/>
-            </a:pPr>
-            <a:r>
-              <a:rPr lang="en-US" sz="1500" b="0">
-                <a:solidFill>
-                  <a:srgbClr val="202B33"/>
-                </a:solidFill>
-                <a:latin typeface="Arial"/>
-                <a:ea typeface="Arial"/>
-                <a:cs typeface="Arial"/>
-              </a:rPr>
-              <a:t xml:space="preserve">because cheaper made you use more, not</a:t>
+              <a:t xml:space="preserve">Jevons (1865), The Coal Question, chapter</a:t>
             </a:r>
             <a:endParaRPr lang="en-US" sz="1500"/>
           </a:p>
@@ -13984,214 +11818,53 @@
                 <a:ea typeface="Arial"/>
                 <a:cs typeface="Arial"/>
               </a:rPr>
-              <a:t xml:space="preserve">less. Path dependence, because the lots</a:t>
-            </a:r>
-            <a:endParaRPr lang="en-US" sz="1500"/>
-          </a:p>
-          <a:p>
-            <a:pPr marL="0" indent="0">
-              <a:lnSpc>
-                <a:spcPts val="1950"/>
-              </a:lnSpc>
-              <a:spcAft>
-                <a:spcPts val="0"/>
-              </a:spcAft>
-              <a:buNone/>
-            </a:pPr>
-            <a:r>
-              <a:rPr lang="en-US" sz="1500" b="0">
-                <a:solidFill>
-                  <a:srgbClr val="202B33"/>
-                </a:solidFill>
-                <a:latin typeface="Arial"/>
-                <a:ea typeface="Arial"/>
-                <a:cs typeface="Arial"/>
-              </a:rPr>
-              <a:t xml:space="preserve">stay built. Moral hazard, because whoever</a:t>
-            </a:r>
-            <a:endParaRPr lang="en-US" sz="1500"/>
-          </a:p>
-          <a:p>
-            <a:pPr marL="0" indent="0">
-              <a:lnSpc>
-                <a:spcPts val="1950"/>
-              </a:lnSpc>
-              <a:spcAft>
-                <a:spcPts val="0"/>
-              </a:spcAft>
-              <a:buNone/>
-            </a:pPr>
-            <a:r>
-              <a:rPr lang="en-US" sz="1500" b="0">
-                <a:solidFill>
-                  <a:srgbClr val="202B33"/>
-                </a:solidFill>
-                <a:latin typeface="Arial"/>
-                <a:ea typeface="Arial"/>
-                <a:cs typeface="Arial"/>
-              </a:rPr>
-              <a:t xml:space="preserve">chooses is not whoever pays. Credible</a:t>
-            </a:r>
-            <a:endParaRPr lang="en-US" sz="1500"/>
-          </a:p>
-          <a:p>
-            <a:pPr marL="0" indent="0">
-              <a:lnSpc>
-                <a:spcPts val="1950"/>
-              </a:lnSpc>
-              <a:spcAft>
-                <a:spcPts val="0"/>
-              </a:spcAft>
-              <a:buNone/>
-            </a:pPr>
-            <a:r>
-              <a:rPr lang="en-US" sz="1500" b="0">
-                <a:solidFill>
-                  <a:srgbClr val="202B33"/>
-                </a:solidFill>
-                <a:latin typeface="Arial"/>
-                <a:ea typeface="Arial"/>
-                <a:cs typeface="Arial"/>
-              </a:rPr>
-              <a:t xml:space="preserve">commitment, because those contracts are</a:t>
-            </a:r>
-            <a:endParaRPr lang="en-US" sz="1500"/>
-          </a:p>
-          <a:p>
-            <a:pPr marL="0" indent="0">
-              <a:lnSpc>
-                <a:spcPts val="1950"/>
-              </a:lnSpc>
-              <a:spcAft>
-                <a:spcPts val="0"/>
-              </a:spcAft>
-              <a:buNone/>
-            </a:pPr>
-            <a:r>
-              <a:rPr lang="en-US" sz="1500" b="0">
-                <a:solidFill>
-                  <a:srgbClr val="202B33"/>
-                </a:solidFill>
-                <a:latin typeface="Arial"/>
-                <a:ea typeface="Arial"/>
-                <a:cs typeface="Arial"/>
-              </a:rPr>
-              <a:t xml:space="preserve">moves in a game and not disclosures about</a:t>
-            </a:r>
-            <a:endParaRPr lang="en-US" sz="1500"/>
-          </a:p>
-          <a:p>
-            <a:pPr marL="0" indent="0">
-              <a:lnSpc>
-                <a:spcPts val="1950"/>
-              </a:lnSpc>
-              <a:spcAft>
-                <a:spcPts val="0"/>
-              </a:spcAft>
-              <a:buNone/>
-            </a:pPr>
-            <a:r>
-              <a:rPr lang="en-US" sz="1500" b="0">
-                <a:solidFill>
-                  <a:srgbClr val="202B33"/>
-                </a:solidFill>
-                <a:latin typeface="Arial"/>
-                <a:ea typeface="Arial"/>
-                <a:cs typeface="Arial"/>
-              </a:rPr>
-              <a:t xml:space="preserve">it. Asset specificity, because your</a:t>
-            </a:r>
-            <a:endParaRPr lang="en-US" sz="1500"/>
-          </a:p>
-          <a:p>
-            <a:pPr marL="0" indent="0">
-              <a:lnSpc>
-                <a:spcPts val="1950"/>
-              </a:lnSpc>
-              <a:spcAft>
-                <a:spcPts val="0"/>
-              </a:spcAft>
-              <a:buNone/>
-            </a:pPr>
-            <a:r>
-              <a:rPr lang="en-US" sz="1500" b="0">
-                <a:solidFill>
-                  <a:srgbClr val="202B33"/>
-                </a:solidFill>
-                <a:latin typeface="Arial"/>
-                <a:ea typeface="Arial"/>
-                <a:cs typeface="Arial"/>
-              </a:rPr>
-              <a:t xml:space="preserve">architecture is worth more here than</a:t>
-            </a:r>
-            <a:endParaRPr lang="en-US" sz="1500"/>
-          </a:p>
-          <a:p>
-            <a:pPr marL="0" indent="0">
-              <a:lnSpc>
-                <a:spcPts val="1950"/>
-              </a:lnSpc>
-              <a:spcAft>
-                <a:spcPts val="0"/>
-              </a:spcAft>
-              <a:buNone/>
-            </a:pPr>
-            <a:r>
-              <a:rPr lang="en-US" sz="1500" b="0">
-                <a:solidFill>
-                  <a:srgbClr val="202B33"/>
-                </a:solidFill>
-                <a:latin typeface="Arial"/>
-                <a:ea typeface="Arial"/>
-                <a:cs typeface="Arial"/>
-              </a:rPr>
-              <a:t xml:space="preserve">anywhere else. And real option, because</a:t>
-            </a:r>
-            <a:endParaRPr lang="en-US" sz="1500"/>
-          </a:p>
-          <a:p>
-            <a:pPr marL="0" indent="0">
-              <a:lnSpc>
-                <a:spcPts val="1950"/>
-              </a:lnSpc>
-              <a:spcAft>
-                <a:spcPts val="0"/>
-              </a:spcAft>
-              <a:buNone/>
-            </a:pPr>
-            <a:r>
-              <a:rPr lang="en-US" sz="1500" b="0">
-                <a:solidFill>
-                  <a:srgbClr val="202B33"/>
-                </a:solidFill>
-                <a:latin typeface="Arial"/>
-                <a:ea typeface="Arial"/>
-                <a:cs typeface="Arial"/>
-              </a:rPr>
-              <a:t xml:space="preserve">reversibility is something you buy, not</a:t>
-            </a:r>
-            <a:endParaRPr lang="en-US" sz="1500"/>
-          </a:p>
-          <a:p>
-            <a:pPr marL="0" indent="0">
-              <a:lnSpc>
-                <a:spcPts val="1950"/>
-              </a:lnSpc>
-              <a:spcAft>
-                <a:spcPts val="0"/>
-              </a:spcAft>
-              <a:buNone/>
-            </a:pPr>
-            <a:r>
-              <a:rPr lang="en-US" sz="1500" b="0">
-                <a:solidFill>
-                  <a:srgbClr val="202B33"/>
-                </a:solidFill>
-                <a:latin typeface="Arial"/>
-                <a:ea typeface="Arial"/>
-                <a:cs typeface="Arial"/>
-              </a:rPr>
-              <a:t xml:space="preserve">something you feel.</a:t>
+              <a:t xml:space="preserve">VII. Duranton and Turner (2011), The</a:t>
+            </a:r>
+            <a:endParaRPr lang="en-US" sz="1500"/>
+          </a:p>
+          <a:p>
+            <a:pPr marL="0" indent="0">
+              <a:lnSpc>
+                <a:spcPts val="1950"/>
+              </a:lnSpc>
+              <a:spcAft>
+                <a:spcPts val="0"/>
+              </a:spcAft>
+              <a:buNone/>
+            </a:pPr>
+            <a:r>
+              <a:rPr lang="en-US" sz="1500" b="0">
+                <a:solidFill>
+                  <a:srgbClr val="202B33"/>
+                </a:solidFill>
+                <a:latin typeface="Arial"/>
+                <a:ea typeface="Arial"/>
+                <a:cs typeface="Arial"/>
+              </a:rPr>
+              <a:t xml:space="preserve">Fundamental Law of Road Congestion,</a:t>
+            </a:r>
+            <a:endParaRPr lang="en-US" sz="1500"/>
+          </a:p>
+          <a:p>
+            <a:pPr marL="0" indent="0">
+              <a:lnSpc>
+                <a:spcPts val="1950"/>
+              </a:lnSpc>
+              <a:spcAft>
+                <a:spcPts val="0"/>
+              </a:spcAft>
+              <a:buNone/>
+            </a:pPr>
+            <a:r>
+              <a:rPr lang="en-US" sz="1500" b="0">
+                <a:solidFill>
+                  <a:srgbClr val="202B33"/>
+                </a:solidFill>
+                <a:latin typeface="Arial"/>
+                <a:ea typeface="Arial"/>
+                <a:cs typeface="Arial"/>
+              </a:rPr>
+              <a:t xml:space="preserve">American Economic Review 101(6).</a:t>
             </a:r>
             <a:endParaRPr lang="en-US" sz="1500"/>
           </a:p>
@@ -14237,168 +11910,122 @@
                 <a:ea typeface="Arial"/>
                 <a:cs typeface="Arial"/>
               </a:rPr>
-              <a:t xml:space="preserve">Some low prices are temporary. Some are a</a:t>
-            </a:r>
-            <a:endParaRPr lang="en-US" sz="1500"/>
-          </a:p>
-          <a:p>
-            <a:pPr marL="0" indent="0">
-              <a:lnSpc>
-                <a:spcPts val="1950"/>
-              </a:lnSpc>
-              <a:spcAft>
-                <a:spcPts val="0"/>
-              </a:spcAft>
-              <a:buNone/>
-            </a:pPr>
-            <a:r>
-              <a:rPr lang="en-US" sz="1500" b="0">
-                <a:solidFill>
-                  <a:srgbClr val="202B33"/>
-                </a:solidFill>
-                <a:latin typeface="Arial"/>
-                <a:ea typeface="Arial"/>
-                <a:cs typeface="Arial"/>
-              </a:rPr>
-              <a:t xml:space="preserve">preview of genuinely cheaper production.</a:t>
-            </a:r>
-            <a:endParaRPr lang="en-US" sz="1500"/>
-          </a:p>
-          <a:p>
-            <a:pPr marL="0" indent="0">
-              <a:lnSpc>
-                <a:spcPts val="1950"/>
-              </a:lnSpc>
-              <a:spcAft>
-                <a:spcPts val="0"/>
-              </a:spcAft>
-              <a:buNone/>
-            </a:pPr>
-            <a:r>
-              <a:rPr lang="en-US" sz="1500" b="0">
-                <a:solidFill>
-                  <a:srgbClr val="202B33"/>
-                </a:solidFill>
-                <a:latin typeface="Arial"/>
-                <a:ea typeface="Arial"/>
-                <a:cs typeface="Arial"/>
-              </a:rPr>
-              <a:t xml:space="preserve">You do not have to know which. You have to</a:t>
-            </a:r>
-            <a:endParaRPr lang="en-US" sz="1500"/>
-          </a:p>
-          <a:p>
-            <a:pPr marL="0" indent="0">
-              <a:lnSpc>
-                <a:spcPts val="1950"/>
-              </a:lnSpc>
-              <a:spcAft>
-                <a:spcPts val="0"/>
-              </a:spcAft>
-              <a:buNone/>
-            </a:pPr>
-            <a:r>
-              <a:rPr lang="en-US" sz="1500" b="0">
-                <a:solidFill>
-                  <a:srgbClr val="202B33"/>
-                </a:solidFill>
-                <a:latin typeface="Arial"/>
-                <a:ea typeface="Arial"/>
-                <a:cs typeface="Arial"/>
-              </a:rPr>
-              <a:t xml:space="preserve">measure outcomes and keep the big choices</a:t>
-            </a:r>
-            <a:endParaRPr lang="en-US" sz="1500"/>
-          </a:p>
-          <a:p>
-            <a:pPr marL="0" indent="0">
-              <a:lnSpc>
-                <a:spcPts val="1950"/>
-              </a:lnSpc>
-              <a:spcAft>
-                <a:spcPts val="0"/>
-              </a:spcAft>
-              <a:buNone/>
-            </a:pPr>
-            <a:r>
-              <a:rPr lang="en-US" sz="1500" b="0">
-                <a:solidFill>
-                  <a:srgbClr val="202B33"/>
-                </a:solidFill>
-                <a:latin typeface="Arial"/>
-                <a:ea typeface="Arial"/>
-                <a:cs typeface="Arial"/>
-              </a:rPr>
-              <a:t xml:space="preserve">reversible either way.</a:t>
-            </a:r>
-            <a:endParaRPr lang="en-US" sz="1500"/>
-          </a:p>
-          <a:p>
-            <a:pPr marL="0" indent="0">
-              <a:lnSpc>
-                <a:spcPts val="1950"/>
-              </a:lnSpc>
-              <a:spcAft>
-                <a:spcPts val="0"/>
-              </a:spcAft>
-              <a:buNone/>
-            </a:pPr>
-            <a:r>
-              <a:rPr lang="en-US" sz="1500" b="0">
-                <a:solidFill>
-                  <a:srgbClr val="202B33"/>
-                </a:solidFill>
-                <a:latin typeface="Arial"/>
-                <a:ea typeface="Arial"/>
-                <a:cs typeface="Arial"/>
-              </a:rPr>
-              <a:t xml:space="preserve"/>
-            </a:r>
-            <a:endParaRPr lang="en-US" sz="1500"/>
-          </a:p>
-          <a:p>
-            <a:pPr marL="0" indent="0">
-              <a:lnSpc>
-                <a:spcPts val="1950"/>
-              </a:lnSpc>
-              <a:spcAft>
-                <a:spcPts val="0"/>
-              </a:spcAft>
-              <a:buNone/>
-            </a:pPr>
-            <a:r>
-              <a:rPr lang="en-US" sz="1500" b="0">
-                <a:solidFill>
-                  <a:srgbClr val="202B33"/>
-                </a:solidFill>
-                <a:latin typeface="Arial"/>
-                <a:ea typeface="Arial"/>
-                <a:cs typeface="Arial"/>
-              </a:rPr>
-              <a:t xml:space="preserve">Cheap intelligence changes incentives</a:t>
-            </a:r>
-            <a:endParaRPr lang="en-US" sz="1500"/>
-          </a:p>
-          <a:p>
-            <a:pPr marL="0" indent="0">
-              <a:lnSpc>
-                <a:spcPts val="1950"/>
-              </a:lnSpc>
-              <a:spcAft>
-                <a:spcPts val="0"/>
-              </a:spcAft>
-              <a:buNone/>
-            </a:pPr>
-            <a:r>
-              <a:rPr lang="en-US" sz="1500" b="0">
-                <a:solidFill>
-                  <a:srgbClr val="202B33"/>
-                </a:solidFill>
-                <a:latin typeface="Arial"/>
-                <a:ea typeface="Arial"/>
-                <a:cs typeface="Arial"/>
-              </a:rPr>
-              <a:t xml:space="preserve">before it changes organizations.</a:t>
+              <a:t xml:space="preserve">Cottier, Snodin, Owen, Adamczewski (Epoch</a:t>
+            </a:r>
+            <a:endParaRPr lang="en-US" sz="1500"/>
+          </a:p>
+          <a:p>
+            <a:pPr marL="0" indent="0">
+              <a:lnSpc>
+                <a:spcPts val="1950"/>
+              </a:lnSpc>
+              <a:spcAft>
+                <a:spcPts val="0"/>
+              </a:spcAft>
+              <a:buNone/>
+            </a:pPr>
+            <a:r>
+              <a:rPr lang="en-US" sz="1500" b="0">
+                <a:solidFill>
+                  <a:srgbClr val="202B33"/>
+                </a:solidFill>
+                <a:latin typeface="Arial"/>
+                <a:ea typeface="Arial"/>
+                <a:cs typeface="Arial"/>
+              </a:rPr>
+              <a:t xml:space="preserve">AI, March 2025), LLM inference prices have</a:t>
+            </a:r>
+            <a:endParaRPr lang="en-US" sz="1500"/>
+          </a:p>
+          <a:p>
+            <a:pPr marL="0" indent="0">
+              <a:lnSpc>
+                <a:spcPts val="1950"/>
+              </a:lnSpc>
+              <a:spcAft>
+                <a:spcPts val="0"/>
+              </a:spcAft>
+              <a:buNone/>
+            </a:pPr>
+            <a:r>
+              <a:rPr lang="en-US" sz="1500" b="0">
+                <a:solidFill>
+                  <a:srgbClr val="202B33"/>
+                </a:solidFill>
+                <a:latin typeface="Arial"/>
+                <a:ea typeface="Arial"/>
+                <a:cs typeface="Arial"/>
+              </a:rPr>
+              <a:t xml:space="preserve">fallen rapidly but unequally across tasks —</a:t>
+            </a:r>
+            <a:endParaRPr lang="en-US" sz="1500"/>
+          </a:p>
+          <a:p>
+            <a:pPr marL="0" indent="0">
+              <a:lnSpc>
+                <a:spcPts val="1950"/>
+              </a:lnSpc>
+              <a:spcAft>
+                <a:spcPts val="0"/>
+              </a:spcAft>
+              <a:buNone/>
+            </a:pPr>
+            <a:r>
+              <a:rPr lang="en-US" sz="1500" b="0">
+                <a:solidFill>
+                  <a:srgbClr val="202B33"/>
+                </a:solidFill>
+                <a:latin typeface="Arial"/>
+                <a:ea typeface="Arial"/>
+                <a:cs typeface="Arial"/>
+              </a:rPr>
+              <a:t xml:space="preserve">https://epoch.ai/data-insights/llm-inference-price-trends.</a:t>
+            </a:r>
+            <a:endParaRPr lang="en-US" sz="1500"/>
+          </a:p>
+          <a:p>
+            <a:pPr marL="0" indent="0">
+              <a:lnSpc>
+                <a:spcPts val="1950"/>
+              </a:lnSpc>
+              <a:spcAft>
+                <a:spcPts val="0"/>
+              </a:spcAft>
+              <a:buNone/>
+            </a:pPr>
+            <a:r>
+              <a:rPr lang="en-US" sz="1500" b="0">
+                <a:solidFill>
+                  <a:srgbClr val="202B33"/>
+                </a:solidFill>
+                <a:latin typeface="Arial"/>
+                <a:ea typeface="Arial"/>
+                <a:cs typeface="Arial"/>
+              </a:rPr>
+              <a:t xml:space="preserve">Check for a newer edition before each</a:t>
+            </a:r>
+            <a:endParaRPr lang="en-US" sz="1500"/>
+          </a:p>
+          <a:p>
+            <a:pPr marL="0" indent="0">
+              <a:lnSpc>
+                <a:spcPts val="1950"/>
+              </a:lnSpc>
+              <a:spcAft>
+                <a:spcPts val="0"/>
+              </a:spcAft>
+              <a:buNone/>
+            </a:pPr>
+            <a:r>
+              <a:rPr lang="en-US" sz="1500" b="0">
+                <a:solidFill>
+                  <a:srgbClr val="202B33"/>
+                </a:solidFill>
+                <a:latin typeface="Arial"/>
+                <a:ea typeface="Arial"/>
+                <a:cs typeface="Arial"/>
+              </a:rPr>
+              <a:t xml:space="preserve">delivery.</a:t>
             </a:r>
             <a:endParaRPr lang="en-US" sz="1500"/>
           </a:p>
